--- a/docs/pptx/auc3/jx-auc3-linsubhr-ratio-aki2.pptx
+++ b/docs/pptx/auc3/jx-auc3-linsubhr-ratio-aki2.pptx
@@ -2271,7 +2271,7 @@
           </p:nvSpPr>
           <p:spPr>
             <a:xfrm>
-              <a:off x="817517" y="5114368"/>
+              <a:off x="817517" y="5142518"/>
               <a:ext cx="7799693" cy="0"/>
             </a:xfrm>
             <a:custGeom>
@@ -2314,7 +2314,7 @@
           </p:nvSpPr>
           <p:spPr>
             <a:xfrm>
-              <a:off x="817517" y="4244691"/>
+              <a:off x="817517" y="4313054"/>
               <a:ext cx="7799693" cy="0"/>
             </a:xfrm>
             <a:custGeom>
@@ -2357,7 +2357,7 @@
           </p:nvSpPr>
           <p:spPr>
             <a:xfrm>
-              <a:off x="817517" y="3375014"/>
+              <a:off x="817517" y="3483591"/>
               <a:ext cx="7799693" cy="0"/>
             </a:xfrm>
             <a:custGeom>
@@ -2400,7 +2400,7 @@
           </p:nvSpPr>
           <p:spPr>
             <a:xfrm>
-              <a:off x="817517" y="2505337"/>
+              <a:off x="817517" y="2654127"/>
               <a:ext cx="7799693" cy="0"/>
             </a:xfrm>
             <a:custGeom>
@@ -2443,15 +2443,15 @@
           </p:nvSpPr>
           <p:spPr>
             <a:xfrm>
-              <a:off x="1615213" y="1896563"/>
-              <a:ext cx="0" cy="3826579"/>
+              <a:off x="1615213" y="2073503"/>
+              <a:ext cx="0" cy="3649639"/>
             </a:xfrm>
             <a:custGeom>
               <a:avLst/>
               <a:pathLst>
-                <a:path w="0" h="3826579">
+                <a:path w="0" h="3649639">
                   <a:moveTo>
-                    <a:pt x="0" y="3826579"/>
+                    <a:pt x="0" y="3649639"/>
                   </a:moveTo>
                   <a:lnTo>
                     <a:pt x="0" y="0"/>
@@ -2486,15 +2486,15 @@
           </p:nvSpPr>
           <p:spPr>
             <a:xfrm>
-              <a:off x="3387871" y="1896563"/>
-              <a:ext cx="0" cy="3826579"/>
+              <a:off x="3387871" y="2073503"/>
+              <a:ext cx="0" cy="3649639"/>
             </a:xfrm>
             <a:custGeom>
               <a:avLst/>
               <a:pathLst>
-                <a:path w="0" h="3826579">
+                <a:path w="0" h="3649639">
                   <a:moveTo>
-                    <a:pt x="0" y="3826579"/>
+                    <a:pt x="0" y="3649639"/>
                   </a:moveTo>
                   <a:lnTo>
                     <a:pt x="0" y="0"/>
@@ -2529,15 +2529,15 @@
           </p:nvSpPr>
           <p:spPr>
             <a:xfrm>
-              <a:off x="5160528" y="1896563"/>
-              <a:ext cx="0" cy="3826579"/>
+              <a:off x="5160528" y="2073503"/>
+              <a:ext cx="0" cy="3649639"/>
             </a:xfrm>
             <a:custGeom>
               <a:avLst/>
               <a:pathLst>
-                <a:path w="0" h="3826579">
+                <a:path w="0" h="3649639">
                   <a:moveTo>
-                    <a:pt x="0" y="3826579"/>
+                    <a:pt x="0" y="3649639"/>
                   </a:moveTo>
                   <a:lnTo>
                     <a:pt x="0" y="0"/>
@@ -2572,15 +2572,15 @@
           </p:nvSpPr>
           <p:spPr>
             <a:xfrm>
-              <a:off x="6933186" y="1896563"/>
-              <a:ext cx="0" cy="3826579"/>
+              <a:off x="6933186" y="2073503"/>
+              <a:ext cx="0" cy="3649639"/>
             </a:xfrm>
             <a:custGeom>
               <a:avLst/>
               <a:pathLst>
-                <a:path w="0" h="3826579">
+                <a:path w="0" h="3649639">
                   <a:moveTo>
-                    <a:pt x="0" y="3826579"/>
+                    <a:pt x="0" y="3649639"/>
                   </a:moveTo>
                   <a:lnTo>
                     <a:pt x="0" y="0"/>
@@ -2615,7 +2615,7 @@
           </p:nvSpPr>
           <p:spPr>
             <a:xfrm>
-              <a:off x="817517" y="5549207"/>
+              <a:off x="817517" y="5557249"/>
               <a:ext cx="7799693" cy="0"/>
             </a:xfrm>
             <a:custGeom>
@@ -2658,7 +2658,7 @@
           </p:nvSpPr>
           <p:spPr>
             <a:xfrm>
-              <a:off x="817517" y="4679530"/>
+              <a:off x="817517" y="4727786"/>
               <a:ext cx="7799693" cy="0"/>
             </a:xfrm>
             <a:custGeom>
@@ -2701,7 +2701,7 @@
           </p:nvSpPr>
           <p:spPr>
             <a:xfrm>
-              <a:off x="817517" y="3809853"/>
+              <a:off x="817517" y="3898322"/>
               <a:ext cx="7799693" cy="0"/>
             </a:xfrm>
             <a:custGeom>
@@ -2744,7 +2744,7 @@
           </p:nvSpPr>
           <p:spPr>
             <a:xfrm>
-              <a:off x="817517" y="2940175"/>
+              <a:off x="817517" y="3068859"/>
               <a:ext cx="7799693" cy="0"/>
             </a:xfrm>
             <a:custGeom>
@@ -2787,7 +2787,7 @@
           </p:nvSpPr>
           <p:spPr>
             <a:xfrm>
-              <a:off x="817517" y="2070498"/>
+              <a:off x="817517" y="2239395"/>
               <a:ext cx="7799693" cy="0"/>
             </a:xfrm>
             <a:custGeom>
@@ -2830,15 +2830,15 @@
           </p:nvSpPr>
           <p:spPr>
             <a:xfrm>
-              <a:off x="2501542" y="1896563"/>
-              <a:ext cx="0" cy="3826579"/>
+              <a:off x="2501542" y="2073503"/>
+              <a:ext cx="0" cy="3649639"/>
             </a:xfrm>
             <a:custGeom>
               <a:avLst/>
               <a:pathLst>
-                <a:path w="0" h="3826579">
+                <a:path w="0" h="3649639">
                   <a:moveTo>
-                    <a:pt x="0" y="3826579"/>
+                    <a:pt x="0" y="3649639"/>
                   </a:moveTo>
                   <a:lnTo>
                     <a:pt x="0" y="0"/>
@@ -2873,15 +2873,15 @@
           </p:nvSpPr>
           <p:spPr>
             <a:xfrm>
-              <a:off x="4274200" y="1896563"/>
-              <a:ext cx="0" cy="3826579"/>
+              <a:off x="4274200" y="2073503"/>
+              <a:ext cx="0" cy="3649639"/>
             </a:xfrm>
             <a:custGeom>
               <a:avLst/>
               <a:pathLst>
-                <a:path w="0" h="3826579">
+                <a:path w="0" h="3649639">
                   <a:moveTo>
-                    <a:pt x="0" y="3826579"/>
+                    <a:pt x="0" y="3649639"/>
                   </a:moveTo>
                   <a:lnTo>
                     <a:pt x="0" y="0"/>
@@ -2916,15 +2916,15 @@
           </p:nvSpPr>
           <p:spPr>
             <a:xfrm>
-              <a:off x="6046857" y="1896563"/>
-              <a:ext cx="0" cy="3826579"/>
+              <a:off x="6046857" y="2073503"/>
+              <a:ext cx="0" cy="3649639"/>
             </a:xfrm>
             <a:custGeom>
               <a:avLst/>
               <a:pathLst>
-                <a:path w="0" h="3826579">
+                <a:path w="0" h="3649639">
                   <a:moveTo>
-                    <a:pt x="0" y="3826579"/>
+                    <a:pt x="0" y="3649639"/>
                   </a:moveTo>
                   <a:lnTo>
                     <a:pt x="0" y="0"/>
@@ -2959,15 +2959,15 @@
           </p:nvSpPr>
           <p:spPr>
             <a:xfrm>
-              <a:off x="7819515" y="1896563"/>
-              <a:ext cx="0" cy="3826579"/>
+              <a:off x="7819515" y="2073503"/>
+              <a:ext cx="0" cy="3649639"/>
             </a:xfrm>
             <a:custGeom>
               <a:avLst/>
               <a:pathLst>
-                <a:path w="0" h="3826579">
+                <a:path w="0" h="3649639">
                   <a:moveTo>
-                    <a:pt x="0" y="3826579"/>
+                    <a:pt x="0" y="3649639"/>
                   </a:moveTo>
                   <a:lnTo>
                     <a:pt x="0" y="0"/>
@@ -3002,588 +3002,588 @@
           </p:nvSpPr>
           <p:spPr>
             <a:xfrm>
-              <a:off x="817517" y="1896563"/>
-              <a:ext cx="7392041" cy="3518619"/>
+              <a:off x="817517" y="2073503"/>
+              <a:ext cx="7392041" cy="3355920"/>
             </a:xfrm>
             <a:custGeom>
               <a:avLst/>
               <a:pathLst>
-                <a:path w="7392041" h="3518619">
+                <a:path w="7392041" h="3355920">
                   <a:moveTo>
                     <a:pt x="160100" y="0"/>
                   </a:moveTo>
                   <a:lnTo>
-                    <a:pt x="208389" y="80244"/>
-                  </a:lnTo>
-                  <a:lnTo>
-                    <a:pt x="285632" y="204153"/>
-                  </a:lnTo>
-                  <a:lnTo>
-                    <a:pt x="362876" y="323764"/>
-                  </a:lnTo>
-                  <a:lnTo>
-                    <a:pt x="440119" y="439226"/>
-                  </a:lnTo>
-                  <a:lnTo>
-                    <a:pt x="517363" y="550683"/>
-                  </a:lnTo>
-                  <a:lnTo>
-                    <a:pt x="594606" y="658275"/>
-                  </a:lnTo>
-                  <a:lnTo>
-                    <a:pt x="671850" y="762134"/>
-                  </a:lnTo>
-                  <a:lnTo>
-                    <a:pt x="749094" y="862392"/>
-                  </a:lnTo>
-                  <a:lnTo>
-                    <a:pt x="826337" y="959172"/>
-                  </a:lnTo>
-                  <a:lnTo>
-                    <a:pt x="903581" y="1052595"/>
-                  </a:lnTo>
-                  <a:lnTo>
-                    <a:pt x="980824" y="1142777"/>
-                  </a:lnTo>
-                  <a:lnTo>
-                    <a:pt x="1058068" y="1229832"/>
-                  </a:lnTo>
-                  <a:lnTo>
-                    <a:pt x="1135311" y="1313867"/>
-                  </a:lnTo>
-                  <a:lnTo>
-                    <a:pt x="1212555" y="1394988"/>
-                  </a:lnTo>
-                  <a:lnTo>
-                    <a:pt x="1289799" y="1473294"/>
-                  </a:lnTo>
-                  <a:lnTo>
-                    <a:pt x="1367042" y="1548885"/>
-                  </a:lnTo>
-                  <a:lnTo>
-                    <a:pt x="1444286" y="1621854"/>
-                  </a:lnTo>
-                  <a:lnTo>
-                    <a:pt x="1521529" y="1692292"/>
-                  </a:lnTo>
-                  <a:lnTo>
-                    <a:pt x="1598773" y="1760287"/>
-                  </a:lnTo>
-                  <a:lnTo>
-                    <a:pt x="1676016" y="1825923"/>
-                  </a:lnTo>
-                  <a:lnTo>
-                    <a:pt x="1753260" y="1889283"/>
-                  </a:lnTo>
-                  <a:lnTo>
-                    <a:pt x="1830504" y="1950445"/>
-                  </a:lnTo>
-                  <a:lnTo>
-                    <a:pt x="1907747" y="2009486"/>
-                  </a:lnTo>
-                  <a:lnTo>
-                    <a:pt x="1984991" y="2066479"/>
-                  </a:lnTo>
-                  <a:lnTo>
-                    <a:pt x="2062234" y="2121495"/>
-                  </a:lnTo>
-                  <a:lnTo>
-                    <a:pt x="2139478" y="2174603"/>
-                  </a:lnTo>
-                  <a:lnTo>
-                    <a:pt x="2216721" y="2225869"/>
-                  </a:lnTo>
-                  <a:lnTo>
-                    <a:pt x="2293965" y="2275356"/>
-                  </a:lnTo>
-                  <a:lnTo>
-                    <a:pt x="2371209" y="2323127"/>
-                  </a:lnTo>
-                  <a:lnTo>
-                    <a:pt x="2448452" y="2369242"/>
-                  </a:lnTo>
-                  <a:lnTo>
-                    <a:pt x="2525696" y="2413756"/>
-                  </a:lnTo>
-                  <a:lnTo>
-                    <a:pt x="2602939" y="2456727"/>
-                  </a:lnTo>
-                  <a:lnTo>
-                    <a:pt x="2680183" y="2498208"/>
-                  </a:lnTo>
-                  <a:lnTo>
-                    <a:pt x="2757426" y="2538249"/>
-                  </a:lnTo>
-                  <a:lnTo>
-                    <a:pt x="2834670" y="2576902"/>
-                  </a:lnTo>
-                  <a:lnTo>
-                    <a:pt x="2911914" y="2614214"/>
-                  </a:lnTo>
-                  <a:lnTo>
-                    <a:pt x="2989157" y="2650232"/>
-                  </a:lnTo>
-                  <a:lnTo>
-                    <a:pt x="3066401" y="2685001"/>
-                  </a:lnTo>
-                  <a:lnTo>
-                    <a:pt x="3143644" y="2718563"/>
-                  </a:lnTo>
-                  <a:lnTo>
-                    <a:pt x="3220888" y="2750962"/>
-                  </a:lnTo>
-                  <a:lnTo>
-                    <a:pt x="3298131" y="2782237"/>
-                  </a:lnTo>
-                  <a:lnTo>
-                    <a:pt x="3375375" y="2777366"/>
-                  </a:lnTo>
-                  <a:lnTo>
-                    <a:pt x="3452619" y="2771591"/>
-                  </a:lnTo>
-                  <a:lnTo>
-                    <a:pt x="3529862" y="2765779"/>
-                  </a:lnTo>
-                  <a:lnTo>
-                    <a:pt x="3607106" y="2759928"/>
-                  </a:lnTo>
-                  <a:lnTo>
-                    <a:pt x="3684349" y="2754039"/>
-                  </a:lnTo>
-                  <a:lnTo>
-                    <a:pt x="3761593" y="2748111"/>
-                  </a:lnTo>
-                  <a:lnTo>
-                    <a:pt x="3838836" y="2742143"/>
-                  </a:lnTo>
-                  <a:lnTo>
-                    <a:pt x="3916080" y="2736137"/>
-                  </a:lnTo>
-                  <a:lnTo>
-                    <a:pt x="3993324" y="2730091"/>
-                  </a:lnTo>
-                  <a:lnTo>
-                    <a:pt x="4070567" y="2724004"/>
-                  </a:lnTo>
-                  <a:lnTo>
-                    <a:pt x="4147811" y="2717878"/>
-                  </a:lnTo>
-                  <a:lnTo>
-                    <a:pt x="4225054" y="2711711"/>
-                  </a:lnTo>
-                  <a:lnTo>
-                    <a:pt x="4302298" y="2705504"/>
-                  </a:lnTo>
-                  <a:lnTo>
-                    <a:pt x="4379541" y="2699256"/>
-                  </a:lnTo>
-                  <a:lnTo>
-                    <a:pt x="4456785" y="2692966"/>
-                  </a:lnTo>
-                  <a:lnTo>
-                    <a:pt x="4534029" y="2686635"/>
-                  </a:lnTo>
-                  <a:lnTo>
-                    <a:pt x="4611272" y="2680262"/>
-                  </a:lnTo>
-                  <a:lnTo>
-                    <a:pt x="4688516" y="2673847"/>
-                  </a:lnTo>
-                  <a:lnTo>
-                    <a:pt x="4765759" y="2667390"/>
-                  </a:lnTo>
-                  <a:lnTo>
-                    <a:pt x="4843003" y="2660890"/>
-                  </a:lnTo>
-                  <a:lnTo>
-                    <a:pt x="4920246" y="2654348"/>
-                  </a:lnTo>
-                  <a:lnTo>
-                    <a:pt x="4997490" y="2647762"/>
-                  </a:lnTo>
-                  <a:lnTo>
-                    <a:pt x="5074734" y="2641133"/>
-                  </a:lnTo>
-                  <a:lnTo>
-                    <a:pt x="5151977" y="2634459"/>
-                  </a:lnTo>
-                  <a:lnTo>
-                    <a:pt x="5229221" y="2627742"/>
-                  </a:lnTo>
-                  <a:lnTo>
-                    <a:pt x="5306464" y="2620981"/>
-                  </a:lnTo>
-                  <a:lnTo>
-                    <a:pt x="5383708" y="2614175"/>
-                  </a:lnTo>
-                  <a:lnTo>
-                    <a:pt x="5460951" y="2607324"/>
-                  </a:lnTo>
-                  <a:lnTo>
-                    <a:pt x="5538195" y="2600428"/>
-                  </a:lnTo>
-                  <a:lnTo>
-                    <a:pt x="5615439" y="2593487"/>
-                  </a:lnTo>
-                  <a:lnTo>
-                    <a:pt x="5692682" y="2586499"/>
-                  </a:lnTo>
-                  <a:lnTo>
-                    <a:pt x="5769926" y="2579466"/>
-                  </a:lnTo>
-                  <a:lnTo>
-                    <a:pt x="5847169" y="2572386"/>
-                  </a:lnTo>
-                  <a:lnTo>
-                    <a:pt x="5924413" y="2565260"/>
-                  </a:lnTo>
-                  <a:lnTo>
-                    <a:pt x="6001656" y="2558086"/>
-                  </a:lnTo>
-                  <a:lnTo>
-                    <a:pt x="6078900" y="2550865"/>
-                  </a:lnTo>
-                  <a:lnTo>
-                    <a:pt x="6156144" y="2543597"/>
-                  </a:lnTo>
-                  <a:lnTo>
-                    <a:pt x="6233387" y="2536280"/>
-                  </a:lnTo>
-                  <a:lnTo>
-                    <a:pt x="6310631" y="2528915"/>
-                  </a:lnTo>
-                  <a:lnTo>
-                    <a:pt x="6387874" y="2521502"/>
-                  </a:lnTo>
-                  <a:lnTo>
-                    <a:pt x="6465118" y="2514040"/>
-                  </a:lnTo>
-                  <a:lnTo>
-                    <a:pt x="6542361" y="2506528"/>
-                  </a:lnTo>
-                  <a:lnTo>
-                    <a:pt x="6619605" y="2498967"/>
-                  </a:lnTo>
-                  <a:lnTo>
-                    <a:pt x="6696849" y="2491356"/>
-                  </a:lnTo>
-                  <a:lnTo>
-                    <a:pt x="6774092" y="2483695"/>
-                  </a:lnTo>
-                  <a:lnTo>
-                    <a:pt x="6851336" y="2475984"/>
-                  </a:lnTo>
-                  <a:lnTo>
-                    <a:pt x="6928579" y="2468221"/>
-                  </a:lnTo>
-                  <a:lnTo>
-                    <a:pt x="7005823" y="2460407"/>
-                  </a:lnTo>
-                  <a:lnTo>
-                    <a:pt x="7083066" y="2452542"/>
-                  </a:lnTo>
-                  <a:lnTo>
-                    <a:pt x="7160310" y="2444625"/>
-                  </a:lnTo>
-                  <a:lnTo>
-                    <a:pt x="7237554" y="2436656"/>
-                  </a:lnTo>
-                  <a:lnTo>
-                    <a:pt x="7314797" y="2428634"/>
-                  </a:lnTo>
-                  <a:lnTo>
-                    <a:pt x="7392041" y="2420559"/>
-                  </a:lnTo>
-                  <a:lnTo>
-                    <a:pt x="7392041" y="3518619"/>
-                  </a:lnTo>
-                  <a:lnTo>
-                    <a:pt x="7314797" y="3513804"/>
-                  </a:lnTo>
-                  <a:lnTo>
-                    <a:pt x="7237554" y="3508815"/>
-                  </a:lnTo>
-                  <a:lnTo>
-                    <a:pt x="7160310" y="3503647"/>
-                  </a:lnTo>
-                  <a:lnTo>
-                    <a:pt x="7083066" y="3498294"/>
-                  </a:lnTo>
-                  <a:lnTo>
-                    <a:pt x="7005823" y="3492748"/>
-                  </a:lnTo>
-                  <a:lnTo>
-                    <a:pt x="6928579" y="3487002"/>
-                  </a:lnTo>
-                  <a:lnTo>
-                    <a:pt x="6851336" y="3481051"/>
-                  </a:lnTo>
-                  <a:lnTo>
-                    <a:pt x="6774092" y="3474885"/>
-                  </a:lnTo>
-                  <a:lnTo>
-                    <a:pt x="6696849" y="3468498"/>
-                  </a:lnTo>
-                  <a:lnTo>
-                    <a:pt x="6619605" y="3461881"/>
-                  </a:lnTo>
-                  <a:lnTo>
-                    <a:pt x="6542361" y="3455027"/>
-                  </a:lnTo>
-                  <a:lnTo>
-                    <a:pt x="6465118" y="3447927"/>
-                  </a:lnTo>
-                  <a:lnTo>
-                    <a:pt x="6387874" y="3440571"/>
-                  </a:lnTo>
-                  <a:lnTo>
-                    <a:pt x="6310631" y="3432951"/>
-                  </a:lnTo>
-                  <a:lnTo>
-                    <a:pt x="6233387" y="3425057"/>
-                  </a:lnTo>
-                  <a:lnTo>
-                    <a:pt x="6156144" y="3416879"/>
-                  </a:lnTo>
-                  <a:lnTo>
-                    <a:pt x="6078900" y="3408408"/>
-                  </a:lnTo>
-                  <a:lnTo>
-                    <a:pt x="6001656" y="3399632"/>
-                  </a:lnTo>
-                  <a:lnTo>
-                    <a:pt x="5924413" y="3390541"/>
-                  </a:lnTo>
-                  <a:lnTo>
-                    <a:pt x="5847169" y="3381124"/>
-                  </a:lnTo>
-                  <a:lnTo>
-                    <a:pt x="5769926" y="3371368"/>
-                  </a:lnTo>
-                  <a:lnTo>
-                    <a:pt x="5692682" y="3361261"/>
-                  </a:lnTo>
-                  <a:lnTo>
-                    <a:pt x="5615439" y="3350791"/>
-                  </a:lnTo>
-                  <a:lnTo>
-                    <a:pt x="5538195" y="3339946"/>
-                  </a:lnTo>
-                  <a:lnTo>
-                    <a:pt x="5460951" y="3328710"/>
-                  </a:lnTo>
-                  <a:lnTo>
-                    <a:pt x="5383708" y="3317071"/>
-                  </a:lnTo>
-                  <a:lnTo>
-                    <a:pt x="5306464" y="3305013"/>
-                  </a:lnTo>
-                  <a:lnTo>
-                    <a:pt x="5229221" y="3292522"/>
-                  </a:lnTo>
-                  <a:lnTo>
-                    <a:pt x="5151977" y="3279583"/>
-                  </a:lnTo>
-                  <a:lnTo>
-                    <a:pt x="5074734" y="3266178"/>
-                  </a:lnTo>
-                  <a:lnTo>
-                    <a:pt x="4997490" y="3252292"/>
-                  </a:lnTo>
-                  <a:lnTo>
-                    <a:pt x="4920246" y="3237907"/>
-                  </a:lnTo>
-                  <a:lnTo>
-                    <a:pt x="4843003" y="3223005"/>
-                  </a:lnTo>
-                  <a:lnTo>
-                    <a:pt x="4765759" y="3207567"/>
-                  </a:lnTo>
-                  <a:lnTo>
-                    <a:pt x="4688516" y="3191575"/>
-                  </a:lnTo>
-                  <a:lnTo>
-                    <a:pt x="4611272" y="3175008"/>
-                  </a:lnTo>
-                  <a:lnTo>
-                    <a:pt x="4534029" y="3157846"/>
-                  </a:lnTo>
-                  <a:lnTo>
-                    <a:pt x="4456785" y="3140068"/>
-                  </a:lnTo>
-                  <a:lnTo>
-                    <a:pt x="4379541" y="3121650"/>
-                  </a:lnTo>
-                  <a:lnTo>
-                    <a:pt x="4302298" y="3102571"/>
-                  </a:lnTo>
-                  <a:lnTo>
-                    <a:pt x="4225054" y="3082806"/>
-                  </a:lnTo>
-                  <a:lnTo>
-                    <a:pt x="4147811" y="3062331"/>
-                  </a:lnTo>
-                  <a:lnTo>
-                    <a:pt x="4070567" y="3041120"/>
-                  </a:lnTo>
-                  <a:lnTo>
-                    <a:pt x="3993324" y="3019148"/>
-                  </a:lnTo>
-                  <a:lnTo>
-                    <a:pt x="3916080" y="2996385"/>
-                  </a:lnTo>
-                  <a:lnTo>
-                    <a:pt x="3838836" y="2972805"/>
-                  </a:lnTo>
-                  <a:lnTo>
-                    <a:pt x="3761593" y="2948378"/>
-                  </a:lnTo>
-                  <a:lnTo>
-                    <a:pt x="3684349" y="2923072"/>
-                  </a:lnTo>
-                  <a:lnTo>
-                    <a:pt x="3607106" y="2896858"/>
-                  </a:lnTo>
-                  <a:lnTo>
-                    <a:pt x="3529862" y="2869702"/>
-                  </a:lnTo>
-                  <a:lnTo>
-                    <a:pt x="3452619" y="2841570"/>
-                  </a:lnTo>
-                  <a:lnTo>
-                    <a:pt x="3375375" y="2812427"/>
-                  </a:lnTo>
-                  <a:lnTo>
-                    <a:pt x="3298131" y="2783102"/>
-                  </a:lnTo>
-                  <a:lnTo>
-                    <a:pt x="3220888" y="2788801"/>
-                  </a:lnTo>
-                  <a:lnTo>
-                    <a:pt x="3143644" y="2794462"/>
-                  </a:lnTo>
-                  <a:lnTo>
-                    <a:pt x="3066401" y="2800087"/>
-                  </a:lnTo>
-                  <a:lnTo>
-                    <a:pt x="2989157" y="2805674"/>
-                  </a:lnTo>
-                  <a:lnTo>
-                    <a:pt x="2911914" y="2811225"/>
-                  </a:lnTo>
-                  <a:lnTo>
-                    <a:pt x="2834670" y="2816740"/>
-                  </a:lnTo>
-                  <a:lnTo>
-                    <a:pt x="2757426" y="2822218"/>
-                  </a:lnTo>
-                  <a:lnTo>
-                    <a:pt x="2680183" y="2827661"/>
-                  </a:lnTo>
-                  <a:lnTo>
-                    <a:pt x="2602939" y="2833067"/>
-                  </a:lnTo>
-                  <a:lnTo>
-                    <a:pt x="2525696" y="2838439"/>
-                  </a:lnTo>
-                  <a:lnTo>
-                    <a:pt x="2448452" y="2843775"/>
-                  </a:lnTo>
-                  <a:lnTo>
-                    <a:pt x="2371209" y="2849076"/>
-                  </a:lnTo>
-                  <a:lnTo>
-                    <a:pt x="2293965" y="2854343"/>
-                  </a:lnTo>
-                  <a:lnTo>
-                    <a:pt x="2216721" y="2859574"/>
-                  </a:lnTo>
-                  <a:lnTo>
-                    <a:pt x="2139478" y="2864772"/>
-                  </a:lnTo>
-                  <a:lnTo>
-                    <a:pt x="2062234" y="2869936"/>
-                  </a:lnTo>
-                  <a:lnTo>
-                    <a:pt x="1984991" y="2875065"/>
-                  </a:lnTo>
-                  <a:lnTo>
-                    <a:pt x="1907747" y="2880162"/>
-                  </a:lnTo>
-                  <a:lnTo>
-                    <a:pt x="1830504" y="2885224"/>
-                  </a:lnTo>
-                  <a:lnTo>
-                    <a:pt x="1753260" y="2890254"/>
-                  </a:lnTo>
-                  <a:lnTo>
-                    <a:pt x="1676016" y="2895250"/>
-                  </a:lnTo>
-                  <a:lnTo>
-                    <a:pt x="1598773" y="2900214"/>
-                  </a:lnTo>
-                  <a:lnTo>
-                    <a:pt x="1521529" y="2905146"/>
-                  </a:lnTo>
-                  <a:lnTo>
-                    <a:pt x="1444286" y="2910045"/>
-                  </a:lnTo>
-                  <a:lnTo>
-                    <a:pt x="1367042" y="2914911"/>
-                  </a:lnTo>
-                  <a:lnTo>
-                    <a:pt x="1289799" y="2919746"/>
-                  </a:lnTo>
-                  <a:lnTo>
-                    <a:pt x="1212555" y="2924550"/>
-                  </a:lnTo>
-                  <a:lnTo>
-                    <a:pt x="1135311" y="2929321"/>
-                  </a:lnTo>
-                  <a:lnTo>
-                    <a:pt x="1058068" y="2934062"/>
-                  </a:lnTo>
-                  <a:lnTo>
-                    <a:pt x="980824" y="2938772"/>
-                  </a:lnTo>
-                  <a:lnTo>
-                    <a:pt x="903581" y="2943450"/>
-                  </a:lnTo>
-                  <a:lnTo>
-                    <a:pt x="826337" y="2948098"/>
-                  </a:lnTo>
-                  <a:lnTo>
-                    <a:pt x="749094" y="2952716"/>
-                  </a:lnTo>
-                  <a:lnTo>
-                    <a:pt x="671850" y="2957303"/>
-                  </a:lnTo>
-                  <a:lnTo>
-                    <a:pt x="594606" y="2961860"/>
-                  </a:lnTo>
-                  <a:lnTo>
-                    <a:pt x="517363" y="2966387"/>
-                  </a:lnTo>
-                  <a:lnTo>
-                    <a:pt x="440119" y="2970885"/>
-                  </a:lnTo>
-                  <a:lnTo>
-                    <a:pt x="362876" y="2975353"/>
-                  </a:lnTo>
-                  <a:lnTo>
-                    <a:pt x="285632" y="2979792"/>
-                  </a:lnTo>
-                  <a:lnTo>
-                    <a:pt x="208389" y="2984202"/>
-                  </a:lnTo>
-                  <a:lnTo>
-                    <a:pt x="131145" y="2988582"/>
-                  </a:lnTo>
-                  <a:lnTo>
-                    <a:pt x="53901" y="2992935"/>
-                  </a:lnTo>
-                  <a:lnTo>
-                    <a:pt x="0" y="2995952"/>
+                    <a:pt x="208389" y="76534"/>
+                  </a:lnTo>
+                  <a:lnTo>
+                    <a:pt x="285632" y="194713"/>
+                  </a:lnTo>
+                  <a:lnTo>
+                    <a:pt x="362876" y="308793"/>
+                  </a:lnTo>
+                  <a:lnTo>
+                    <a:pt x="440119" y="418916"/>
+                  </a:lnTo>
+                  <a:lnTo>
+                    <a:pt x="517363" y="525220"/>
+                  </a:lnTo>
+                  <a:lnTo>
+                    <a:pt x="594606" y="627836"/>
+                  </a:lnTo>
+                  <a:lnTo>
+                    <a:pt x="671850" y="726894"/>
+                  </a:lnTo>
+                  <a:lnTo>
+                    <a:pt x="749094" y="822515"/>
+                  </a:lnTo>
+                  <a:lnTo>
+                    <a:pt x="826337" y="914820"/>
+                  </a:lnTo>
+                  <a:lnTo>
+                    <a:pt x="903581" y="1003923"/>
+                  </a:lnTo>
+                  <a:lnTo>
+                    <a:pt x="980824" y="1089936"/>
+                  </a:lnTo>
+                  <a:lnTo>
+                    <a:pt x="1058068" y="1172965"/>
+                  </a:lnTo>
+                  <a:lnTo>
+                    <a:pt x="1135311" y="1253114"/>
+                  </a:lnTo>
+                  <a:lnTo>
+                    <a:pt x="1212555" y="1330484"/>
+                  </a:lnTo>
+                  <a:lnTo>
+                    <a:pt x="1289799" y="1405170"/>
+                  </a:lnTo>
+                  <a:lnTo>
+                    <a:pt x="1367042" y="1477265"/>
+                  </a:lnTo>
+                  <a:lnTo>
+                    <a:pt x="1444286" y="1546860"/>
+                  </a:lnTo>
+                  <a:lnTo>
+                    <a:pt x="1521529" y="1614041"/>
+                  </a:lnTo>
+                  <a:lnTo>
+                    <a:pt x="1598773" y="1678892"/>
+                  </a:lnTo>
+                  <a:lnTo>
+                    <a:pt x="1676016" y="1741493"/>
+                  </a:lnTo>
+                  <a:lnTo>
+                    <a:pt x="1753260" y="1801923"/>
+                  </a:lnTo>
+                  <a:lnTo>
+                    <a:pt x="1830504" y="1860257"/>
+                  </a:lnTo>
+                  <a:lnTo>
+                    <a:pt x="1907747" y="1916568"/>
+                  </a:lnTo>
+                  <a:lnTo>
+                    <a:pt x="1984991" y="1970926"/>
+                  </a:lnTo>
+                  <a:lnTo>
+                    <a:pt x="2062234" y="2023398"/>
+                  </a:lnTo>
+                  <a:lnTo>
+                    <a:pt x="2139478" y="2074050"/>
+                  </a:lnTo>
+                  <a:lnTo>
+                    <a:pt x="2216721" y="2122945"/>
+                  </a:lnTo>
+                  <a:lnTo>
+                    <a:pt x="2293965" y="2170145"/>
+                  </a:lnTo>
+                  <a:lnTo>
+                    <a:pt x="2371209" y="2215707"/>
+                  </a:lnTo>
+                  <a:lnTo>
+                    <a:pt x="2448452" y="2259689"/>
+                  </a:lnTo>
+                  <a:lnTo>
+                    <a:pt x="2525696" y="2302145"/>
+                  </a:lnTo>
+                  <a:lnTo>
+                    <a:pt x="2602939" y="2343129"/>
+                  </a:lnTo>
+                  <a:lnTo>
+                    <a:pt x="2680183" y="2382691"/>
+                  </a:lnTo>
+                  <a:lnTo>
+                    <a:pt x="2757426" y="2420882"/>
+                  </a:lnTo>
+                  <a:lnTo>
+                    <a:pt x="2834670" y="2457747"/>
+                  </a:lnTo>
+                  <a:lnTo>
+                    <a:pt x="2911914" y="2493334"/>
+                  </a:lnTo>
+                  <a:lnTo>
+                    <a:pt x="2989157" y="2527686"/>
+                  </a:lnTo>
+                  <a:lnTo>
+                    <a:pt x="3066401" y="2560847"/>
+                  </a:lnTo>
+                  <a:lnTo>
+                    <a:pt x="3143644" y="2592858"/>
+                  </a:lnTo>
+                  <a:lnTo>
+                    <a:pt x="3220888" y="2623758"/>
+                  </a:lnTo>
+                  <a:lnTo>
+                    <a:pt x="3298131" y="2653587"/>
+                  </a:lnTo>
+                  <a:lnTo>
+                    <a:pt x="3375375" y="2648941"/>
+                  </a:lnTo>
+                  <a:lnTo>
+                    <a:pt x="3452619" y="2643434"/>
+                  </a:lnTo>
+                  <a:lnTo>
+                    <a:pt x="3529862" y="2637890"/>
+                  </a:lnTo>
+                  <a:lnTo>
+                    <a:pt x="3607106" y="2632310"/>
+                  </a:lnTo>
+                  <a:lnTo>
+                    <a:pt x="3684349" y="2626693"/>
+                  </a:lnTo>
+                  <a:lnTo>
+                    <a:pt x="3761593" y="2621039"/>
+                  </a:lnTo>
+                  <a:lnTo>
+                    <a:pt x="3838836" y="2615348"/>
+                  </a:lnTo>
+                  <a:lnTo>
+                    <a:pt x="3916080" y="2609619"/>
+                  </a:lnTo>
+                  <a:lnTo>
+                    <a:pt x="3993324" y="2603852"/>
+                  </a:lnTo>
+                  <a:lnTo>
+                    <a:pt x="4070567" y="2598047"/>
+                  </a:lnTo>
+                  <a:lnTo>
+                    <a:pt x="4147811" y="2592204"/>
+                  </a:lnTo>
+                  <a:lnTo>
+                    <a:pt x="4225054" y="2586323"/>
+                  </a:lnTo>
+                  <a:lnTo>
+                    <a:pt x="4302298" y="2580402"/>
+                  </a:lnTo>
+                  <a:lnTo>
+                    <a:pt x="4379541" y="2574443"/>
+                  </a:lnTo>
+                  <a:lnTo>
+                    <a:pt x="4456785" y="2568444"/>
+                  </a:lnTo>
+                  <a:lnTo>
+                    <a:pt x="4534029" y="2562406"/>
+                  </a:lnTo>
+                  <a:lnTo>
+                    <a:pt x="4611272" y="2556328"/>
+                  </a:lnTo>
+                  <a:lnTo>
+                    <a:pt x="4688516" y="2550210"/>
+                  </a:lnTo>
+                  <a:lnTo>
+                    <a:pt x="4765759" y="2544051"/>
+                  </a:lnTo>
+                  <a:lnTo>
+                    <a:pt x="4843003" y="2537852"/>
+                  </a:lnTo>
+                  <a:lnTo>
+                    <a:pt x="4920246" y="2531612"/>
+                  </a:lnTo>
+                  <a:lnTo>
+                    <a:pt x="4997490" y="2525330"/>
+                  </a:lnTo>
+                  <a:lnTo>
+                    <a:pt x="5074734" y="2519008"/>
+                  </a:lnTo>
+                  <a:lnTo>
+                    <a:pt x="5151977" y="2512643"/>
+                  </a:lnTo>
+                  <a:lnTo>
+                    <a:pt x="5229221" y="2506237"/>
+                  </a:lnTo>
+                  <a:lnTo>
+                    <a:pt x="5306464" y="2499788"/>
+                  </a:lnTo>
+                  <a:lnTo>
+                    <a:pt x="5383708" y="2493297"/>
+                  </a:lnTo>
+                  <a:lnTo>
+                    <a:pt x="5460951" y="2486763"/>
+                  </a:lnTo>
+                  <a:lnTo>
+                    <a:pt x="5538195" y="2480185"/>
+                  </a:lnTo>
+                  <a:lnTo>
+                    <a:pt x="5615439" y="2473565"/>
+                  </a:lnTo>
+                  <a:lnTo>
+                    <a:pt x="5692682" y="2466901"/>
+                  </a:lnTo>
+                  <a:lnTo>
+                    <a:pt x="5769926" y="2460192"/>
+                  </a:lnTo>
+                  <a:lnTo>
+                    <a:pt x="5847169" y="2453440"/>
+                  </a:lnTo>
+                  <a:lnTo>
+                    <a:pt x="5924413" y="2446643"/>
+                  </a:lnTo>
+                  <a:lnTo>
+                    <a:pt x="6001656" y="2439801"/>
+                  </a:lnTo>
+                  <a:lnTo>
+                    <a:pt x="6078900" y="2432914"/>
+                  </a:lnTo>
+                  <a:lnTo>
+                    <a:pt x="6156144" y="2425982"/>
+                  </a:lnTo>
+                  <a:lnTo>
+                    <a:pt x="6233387" y="2419003"/>
+                  </a:lnTo>
+                  <a:lnTo>
+                    <a:pt x="6310631" y="2411979"/>
+                  </a:lnTo>
+                  <a:lnTo>
+                    <a:pt x="6387874" y="2404909"/>
+                  </a:lnTo>
+                  <a:lnTo>
+                    <a:pt x="6465118" y="2397792"/>
+                  </a:lnTo>
+                  <a:lnTo>
+                    <a:pt x="6542361" y="2390627"/>
+                  </a:lnTo>
+                  <a:lnTo>
+                    <a:pt x="6619605" y="2383416"/>
+                  </a:lnTo>
+                  <a:lnTo>
+                    <a:pt x="6696849" y="2376157"/>
+                  </a:lnTo>
+                  <a:lnTo>
+                    <a:pt x="6774092" y="2368850"/>
+                  </a:lnTo>
+                  <a:lnTo>
+                    <a:pt x="6851336" y="2361495"/>
+                  </a:lnTo>
+                  <a:lnTo>
+                    <a:pt x="6928579" y="2354092"/>
+                  </a:lnTo>
+                  <a:lnTo>
+                    <a:pt x="7005823" y="2346639"/>
+                  </a:lnTo>
+                  <a:lnTo>
+                    <a:pt x="7083066" y="2339138"/>
+                  </a:lnTo>
+                  <a:lnTo>
+                    <a:pt x="7160310" y="2331586"/>
+                  </a:lnTo>
+                  <a:lnTo>
+                    <a:pt x="7237554" y="2323986"/>
+                  </a:lnTo>
+                  <a:lnTo>
+                    <a:pt x="7314797" y="2316335"/>
+                  </a:lnTo>
+                  <a:lnTo>
+                    <a:pt x="7392041" y="2308633"/>
+                  </a:lnTo>
+                  <a:lnTo>
+                    <a:pt x="7392041" y="3355920"/>
+                  </a:lnTo>
+                  <a:lnTo>
+                    <a:pt x="7314797" y="3351327"/>
+                  </a:lnTo>
+                  <a:lnTo>
+                    <a:pt x="7237554" y="3346569"/>
+                  </a:lnTo>
+                  <a:lnTo>
+                    <a:pt x="7160310" y="3341640"/>
+                  </a:lnTo>
+                  <a:lnTo>
+                    <a:pt x="7083066" y="3336534"/>
+                  </a:lnTo>
+                  <a:lnTo>
+                    <a:pt x="7005823" y="3331244"/>
+                  </a:lnTo>
+                  <a:lnTo>
+                    <a:pt x="6928579" y="3325765"/>
+                  </a:lnTo>
+                  <a:lnTo>
+                    <a:pt x="6851336" y="3320088"/>
+                  </a:lnTo>
+                  <a:lnTo>
+                    <a:pt x="6774092" y="3314208"/>
+                  </a:lnTo>
+                  <a:lnTo>
+                    <a:pt x="6696849" y="3308116"/>
+                  </a:lnTo>
+                  <a:lnTo>
+                    <a:pt x="6619605" y="3301805"/>
+                  </a:lnTo>
+                  <a:lnTo>
+                    <a:pt x="6542361" y="3295268"/>
+                  </a:lnTo>
+                  <a:lnTo>
+                    <a:pt x="6465118" y="3288496"/>
+                  </a:lnTo>
+                  <a:lnTo>
+                    <a:pt x="6387874" y="3281480"/>
+                  </a:lnTo>
+                  <a:lnTo>
+                    <a:pt x="6310631" y="3274212"/>
+                  </a:lnTo>
+                  <a:lnTo>
+                    <a:pt x="6233387" y="3266684"/>
+                  </a:lnTo>
+                  <a:lnTo>
+                    <a:pt x="6156144" y="3258884"/>
+                  </a:lnTo>
+                  <a:lnTo>
+                    <a:pt x="6078900" y="3250805"/>
+                  </a:lnTo>
+                  <a:lnTo>
+                    <a:pt x="6001656" y="3242435"/>
+                  </a:lnTo>
+                  <a:lnTo>
+                    <a:pt x="5924413" y="3233764"/>
+                  </a:lnTo>
+                  <a:lnTo>
+                    <a:pt x="5847169" y="3224782"/>
+                  </a:lnTo>
+                  <a:lnTo>
+                    <a:pt x="5769926" y="3215477"/>
+                  </a:lnTo>
+                  <a:lnTo>
+                    <a:pt x="5692682" y="3205838"/>
+                  </a:lnTo>
+                  <a:lnTo>
+                    <a:pt x="5615439" y="3195852"/>
+                  </a:lnTo>
+                  <a:lnTo>
+                    <a:pt x="5538195" y="3185508"/>
+                  </a:lnTo>
+                  <a:lnTo>
+                    <a:pt x="5460951" y="3174792"/>
+                  </a:lnTo>
+                  <a:lnTo>
+                    <a:pt x="5383708" y="3163690"/>
+                  </a:lnTo>
+                  <a:lnTo>
+                    <a:pt x="5306464" y="3152190"/>
+                  </a:lnTo>
+                  <a:lnTo>
+                    <a:pt x="5229221" y="3140277"/>
+                  </a:lnTo>
+                  <a:lnTo>
+                    <a:pt x="5151977" y="3127936"/>
+                  </a:lnTo>
+                  <a:lnTo>
+                    <a:pt x="5074734" y="3115151"/>
+                  </a:lnTo>
+                  <a:lnTo>
+                    <a:pt x="4997490" y="3101907"/>
+                  </a:lnTo>
+                  <a:lnTo>
+                    <a:pt x="4920246" y="3088187"/>
+                  </a:lnTo>
+                  <a:lnTo>
+                    <a:pt x="4843003" y="3073974"/>
+                  </a:lnTo>
+                  <a:lnTo>
+                    <a:pt x="4765759" y="3059251"/>
+                  </a:lnTo>
+                  <a:lnTo>
+                    <a:pt x="4688516" y="3043998"/>
+                  </a:lnTo>
+                  <a:lnTo>
+                    <a:pt x="4611272" y="3028197"/>
+                  </a:lnTo>
+                  <a:lnTo>
+                    <a:pt x="4534029" y="3011829"/>
+                  </a:lnTo>
+                  <a:lnTo>
+                    <a:pt x="4456785" y="2994872"/>
+                  </a:lnTo>
+                  <a:lnTo>
+                    <a:pt x="4379541" y="2977306"/>
+                  </a:lnTo>
+                  <a:lnTo>
+                    <a:pt x="4302298" y="2959109"/>
+                  </a:lnTo>
+                  <a:lnTo>
+                    <a:pt x="4225054" y="2940258"/>
+                  </a:lnTo>
+                  <a:lnTo>
+                    <a:pt x="4147811" y="2920730"/>
+                  </a:lnTo>
+                  <a:lnTo>
+                    <a:pt x="4070567" y="2900500"/>
+                  </a:lnTo>
+                  <a:lnTo>
+                    <a:pt x="3993324" y="2879543"/>
+                  </a:lnTo>
+                  <a:lnTo>
+                    <a:pt x="3916080" y="2857834"/>
+                  </a:lnTo>
+                  <a:lnTo>
+                    <a:pt x="3838836" y="2835344"/>
+                  </a:lnTo>
+                  <a:lnTo>
+                    <a:pt x="3761593" y="2812046"/>
+                  </a:lnTo>
+                  <a:lnTo>
+                    <a:pt x="3684349" y="2787911"/>
+                  </a:lnTo>
+                  <a:lnTo>
+                    <a:pt x="3607106" y="2762908"/>
+                  </a:lnTo>
+                  <a:lnTo>
+                    <a:pt x="3529862" y="2737008"/>
+                  </a:lnTo>
+                  <a:lnTo>
+                    <a:pt x="3452619" y="2710177"/>
+                  </a:lnTo>
+                  <a:lnTo>
+                    <a:pt x="3375375" y="2682381"/>
+                  </a:lnTo>
+                  <a:lnTo>
+                    <a:pt x="3298131" y="2654412"/>
+                  </a:lnTo>
+                  <a:lnTo>
+                    <a:pt x="3220888" y="2659848"/>
+                  </a:lnTo>
+                  <a:lnTo>
+                    <a:pt x="3143644" y="2665247"/>
+                  </a:lnTo>
+                  <a:lnTo>
+                    <a:pt x="3066401" y="2670612"/>
+                  </a:lnTo>
+                  <a:lnTo>
+                    <a:pt x="2989157" y="2675941"/>
+                  </a:lnTo>
+                  <a:lnTo>
+                    <a:pt x="2911914" y="2681235"/>
+                  </a:lnTo>
+                  <a:lnTo>
+                    <a:pt x="2834670" y="2686495"/>
+                  </a:lnTo>
+                  <a:lnTo>
+                    <a:pt x="2757426" y="2691720"/>
+                  </a:lnTo>
+                  <a:lnTo>
+                    <a:pt x="2680183" y="2696911"/>
+                  </a:lnTo>
+                  <a:lnTo>
+                    <a:pt x="2602939" y="2702067"/>
+                  </a:lnTo>
+                  <a:lnTo>
+                    <a:pt x="2525696" y="2707190"/>
+                  </a:lnTo>
+                  <a:lnTo>
+                    <a:pt x="2448452" y="2712280"/>
+                  </a:lnTo>
+                  <a:lnTo>
+                    <a:pt x="2371209" y="2717336"/>
+                  </a:lnTo>
+                  <a:lnTo>
+                    <a:pt x="2293965" y="2722359"/>
+                  </a:lnTo>
+                  <a:lnTo>
+                    <a:pt x="2216721" y="2727349"/>
+                  </a:lnTo>
+                  <a:lnTo>
+                    <a:pt x="2139478" y="2732306"/>
+                  </a:lnTo>
+                  <a:lnTo>
+                    <a:pt x="2062234" y="2737231"/>
+                  </a:lnTo>
+                  <a:lnTo>
+                    <a:pt x="1984991" y="2742123"/>
+                  </a:lnTo>
+                  <a:lnTo>
+                    <a:pt x="1907747" y="2746984"/>
+                  </a:lnTo>
+                  <a:lnTo>
+                    <a:pt x="1830504" y="2751813"/>
+                  </a:lnTo>
+                  <a:lnTo>
+                    <a:pt x="1753260" y="2756610"/>
+                  </a:lnTo>
+                  <a:lnTo>
+                    <a:pt x="1676016" y="2761375"/>
+                  </a:lnTo>
+                  <a:lnTo>
+                    <a:pt x="1598773" y="2766109"/>
+                  </a:lnTo>
+                  <a:lnTo>
+                    <a:pt x="1521529" y="2770813"/>
+                  </a:lnTo>
+                  <a:lnTo>
+                    <a:pt x="1444286" y="2775485"/>
+                  </a:lnTo>
+                  <a:lnTo>
+                    <a:pt x="1367042" y="2780127"/>
+                  </a:lnTo>
+                  <a:lnTo>
+                    <a:pt x="1289799" y="2784738"/>
+                  </a:lnTo>
+                  <a:lnTo>
+                    <a:pt x="1212555" y="2789320"/>
+                  </a:lnTo>
+                  <a:lnTo>
+                    <a:pt x="1135311" y="2793871"/>
+                  </a:lnTo>
+                  <a:lnTo>
+                    <a:pt x="1058068" y="2798392"/>
+                  </a:lnTo>
+                  <a:lnTo>
+                    <a:pt x="980824" y="2802884"/>
+                  </a:lnTo>
+                  <a:lnTo>
+                    <a:pt x="903581" y="2807346"/>
+                  </a:lnTo>
+                  <a:lnTo>
+                    <a:pt x="826337" y="2811779"/>
+                  </a:lnTo>
+                  <a:lnTo>
+                    <a:pt x="749094" y="2816183"/>
+                  </a:lnTo>
+                  <a:lnTo>
+                    <a:pt x="671850" y="2820558"/>
+                  </a:lnTo>
+                  <a:lnTo>
+                    <a:pt x="594606" y="2824905"/>
+                  </a:lnTo>
+                  <a:lnTo>
+                    <a:pt x="517363" y="2829223"/>
+                  </a:lnTo>
+                  <a:lnTo>
+                    <a:pt x="440119" y="2833512"/>
+                  </a:lnTo>
+                  <a:lnTo>
+                    <a:pt x="362876" y="2837774"/>
+                  </a:lnTo>
+                  <a:lnTo>
+                    <a:pt x="285632" y="2842007"/>
+                  </a:lnTo>
+                  <a:lnTo>
+                    <a:pt x="208389" y="2846213"/>
+                  </a:lnTo>
+                  <a:lnTo>
+                    <a:pt x="131145" y="2850391"/>
+                  </a:lnTo>
+                  <a:lnTo>
+                    <a:pt x="53901" y="2854542"/>
+                  </a:lnTo>
+                  <a:lnTo>
+                    <a:pt x="0" y="2857420"/>
                   </a:lnTo>
                   <a:close/>
                 </a:path>
@@ -3609,297 +3609,297 @@
           </p:nvSpPr>
           <p:spPr>
             <a:xfrm>
-              <a:off x="977618" y="1896563"/>
-              <a:ext cx="7231940" cy="2782237"/>
+              <a:off x="977618" y="2073503"/>
+              <a:ext cx="7231940" cy="2653587"/>
             </a:xfrm>
             <a:custGeom>
               <a:avLst/>
               <a:pathLst>
-                <a:path w="7231940" h="2782237">
+                <a:path w="7231940" h="2653587">
                   <a:moveTo>
                     <a:pt x="0" y="0"/>
                   </a:moveTo>
                   <a:lnTo>
-                    <a:pt x="48288" y="80244"/>
-                  </a:lnTo>
-                  <a:lnTo>
-                    <a:pt x="125532" y="204153"/>
-                  </a:lnTo>
-                  <a:lnTo>
-                    <a:pt x="202775" y="323764"/>
-                  </a:lnTo>
-                  <a:lnTo>
-                    <a:pt x="280019" y="439226"/>
-                  </a:lnTo>
-                  <a:lnTo>
-                    <a:pt x="357263" y="550683"/>
-                  </a:lnTo>
-                  <a:lnTo>
-                    <a:pt x="434506" y="658275"/>
-                  </a:lnTo>
-                  <a:lnTo>
-                    <a:pt x="511750" y="762134"/>
-                  </a:lnTo>
-                  <a:lnTo>
-                    <a:pt x="588993" y="862392"/>
-                  </a:lnTo>
-                  <a:lnTo>
-                    <a:pt x="666237" y="959172"/>
-                  </a:lnTo>
-                  <a:lnTo>
-                    <a:pt x="743480" y="1052595"/>
-                  </a:lnTo>
-                  <a:lnTo>
-                    <a:pt x="820724" y="1142777"/>
-                  </a:lnTo>
-                  <a:lnTo>
-                    <a:pt x="897968" y="1229832"/>
-                  </a:lnTo>
-                  <a:lnTo>
-                    <a:pt x="975211" y="1313867"/>
-                  </a:lnTo>
-                  <a:lnTo>
-                    <a:pt x="1052455" y="1394988"/>
-                  </a:lnTo>
-                  <a:lnTo>
-                    <a:pt x="1129698" y="1473294"/>
-                  </a:lnTo>
-                  <a:lnTo>
-                    <a:pt x="1206942" y="1548885"/>
-                  </a:lnTo>
-                  <a:lnTo>
-                    <a:pt x="1284185" y="1621854"/>
-                  </a:lnTo>
-                  <a:lnTo>
-                    <a:pt x="1361429" y="1692292"/>
-                  </a:lnTo>
-                  <a:lnTo>
-                    <a:pt x="1438673" y="1760287"/>
-                  </a:lnTo>
-                  <a:lnTo>
-                    <a:pt x="1515916" y="1825923"/>
-                  </a:lnTo>
-                  <a:lnTo>
-                    <a:pt x="1593160" y="1889283"/>
-                  </a:lnTo>
-                  <a:lnTo>
-                    <a:pt x="1670403" y="1950445"/>
-                  </a:lnTo>
-                  <a:lnTo>
-                    <a:pt x="1747647" y="2009486"/>
-                  </a:lnTo>
-                  <a:lnTo>
-                    <a:pt x="1824890" y="2066479"/>
-                  </a:lnTo>
-                  <a:lnTo>
-                    <a:pt x="1902134" y="2121495"/>
-                  </a:lnTo>
-                  <a:lnTo>
-                    <a:pt x="1979378" y="2174603"/>
-                  </a:lnTo>
-                  <a:lnTo>
-                    <a:pt x="2056621" y="2225869"/>
-                  </a:lnTo>
-                  <a:lnTo>
-                    <a:pt x="2133865" y="2275356"/>
-                  </a:lnTo>
-                  <a:lnTo>
-                    <a:pt x="2211108" y="2323127"/>
-                  </a:lnTo>
-                  <a:lnTo>
-                    <a:pt x="2288352" y="2369242"/>
-                  </a:lnTo>
-                  <a:lnTo>
-                    <a:pt x="2365595" y="2413756"/>
-                  </a:lnTo>
-                  <a:lnTo>
-                    <a:pt x="2442839" y="2456727"/>
-                  </a:lnTo>
-                  <a:lnTo>
-                    <a:pt x="2520083" y="2498208"/>
-                  </a:lnTo>
-                  <a:lnTo>
-                    <a:pt x="2597326" y="2538249"/>
-                  </a:lnTo>
-                  <a:lnTo>
-                    <a:pt x="2674570" y="2576902"/>
-                  </a:lnTo>
-                  <a:lnTo>
-                    <a:pt x="2751813" y="2614214"/>
-                  </a:lnTo>
-                  <a:lnTo>
-                    <a:pt x="2829057" y="2650232"/>
-                  </a:lnTo>
-                  <a:lnTo>
-                    <a:pt x="2906300" y="2685001"/>
-                  </a:lnTo>
-                  <a:lnTo>
-                    <a:pt x="2983544" y="2718563"/>
-                  </a:lnTo>
-                  <a:lnTo>
-                    <a:pt x="3060788" y="2750962"/>
-                  </a:lnTo>
-                  <a:lnTo>
-                    <a:pt x="3138031" y="2782237"/>
-                  </a:lnTo>
-                  <a:lnTo>
-                    <a:pt x="3215275" y="2777366"/>
-                  </a:lnTo>
-                  <a:lnTo>
-                    <a:pt x="3292518" y="2771591"/>
-                  </a:lnTo>
-                  <a:lnTo>
-                    <a:pt x="3369762" y="2765779"/>
-                  </a:lnTo>
-                  <a:lnTo>
-                    <a:pt x="3447005" y="2759928"/>
-                  </a:lnTo>
-                  <a:lnTo>
-                    <a:pt x="3524249" y="2754039"/>
-                  </a:lnTo>
-                  <a:lnTo>
-                    <a:pt x="3601493" y="2748111"/>
-                  </a:lnTo>
-                  <a:lnTo>
-                    <a:pt x="3678736" y="2742143"/>
-                  </a:lnTo>
-                  <a:lnTo>
-                    <a:pt x="3755980" y="2736137"/>
-                  </a:lnTo>
-                  <a:lnTo>
-                    <a:pt x="3833223" y="2730091"/>
-                  </a:lnTo>
-                  <a:lnTo>
-                    <a:pt x="3910467" y="2724004"/>
-                  </a:lnTo>
-                  <a:lnTo>
-                    <a:pt x="3987710" y="2717878"/>
-                  </a:lnTo>
-                  <a:lnTo>
-                    <a:pt x="4064954" y="2711711"/>
-                  </a:lnTo>
-                  <a:lnTo>
-                    <a:pt x="4142198" y="2705504"/>
-                  </a:lnTo>
-                  <a:lnTo>
-                    <a:pt x="4219441" y="2699256"/>
-                  </a:lnTo>
-                  <a:lnTo>
-                    <a:pt x="4296685" y="2692966"/>
-                  </a:lnTo>
-                  <a:lnTo>
-                    <a:pt x="4373928" y="2686635"/>
-                  </a:lnTo>
-                  <a:lnTo>
-                    <a:pt x="4451172" y="2680262"/>
-                  </a:lnTo>
-                  <a:lnTo>
-                    <a:pt x="4528415" y="2673847"/>
-                  </a:lnTo>
-                  <a:lnTo>
-                    <a:pt x="4605659" y="2667390"/>
-                  </a:lnTo>
-                  <a:lnTo>
-                    <a:pt x="4682903" y="2660890"/>
-                  </a:lnTo>
-                  <a:lnTo>
-                    <a:pt x="4760146" y="2654348"/>
-                  </a:lnTo>
-                  <a:lnTo>
-                    <a:pt x="4837390" y="2647762"/>
-                  </a:lnTo>
-                  <a:lnTo>
-                    <a:pt x="4914633" y="2641133"/>
-                  </a:lnTo>
-                  <a:lnTo>
-                    <a:pt x="4991877" y="2634459"/>
-                  </a:lnTo>
-                  <a:lnTo>
-                    <a:pt x="5069120" y="2627742"/>
-                  </a:lnTo>
-                  <a:lnTo>
-                    <a:pt x="5146364" y="2620981"/>
-                  </a:lnTo>
-                  <a:lnTo>
-                    <a:pt x="5223608" y="2614175"/>
-                  </a:lnTo>
-                  <a:lnTo>
-                    <a:pt x="5300851" y="2607324"/>
-                  </a:lnTo>
-                  <a:lnTo>
-                    <a:pt x="5378095" y="2600428"/>
-                  </a:lnTo>
-                  <a:lnTo>
-                    <a:pt x="5455338" y="2593487"/>
-                  </a:lnTo>
-                  <a:lnTo>
-                    <a:pt x="5532582" y="2586499"/>
-                  </a:lnTo>
-                  <a:lnTo>
-                    <a:pt x="5609825" y="2579466"/>
-                  </a:lnTo>
-                  <a:lnTo>
-                    <a:pt x="5687069" y="2572386"/>
-                  </a:lnTo>
-                  <a:lnTo>
-                    <a:pt x="5764313" y="2565260"/>
-                  </a:lnTo>
-                  <a:lnTo>
-                    <a:pt x="5841556" y="2558086"/>
-                  </a:lnTo>
-                  <a:lnTo>
-                    <a:pt x="5918800" y="2550865"/>
-                  </a:lnTo>
-                  <a:lnTo>
-                    <a:pt x="5996043" y="2543597"/>
-                  </a:lnTo>
-                  <a:lnTo>
-                    <a:pt x="6073287" y="2536280"/>
-                  </a:lnTo>
-                  <a:lnTo>
-                    <a:pt x="6150530" y="2528915"/>
-                  </a:lnTo>
-                  <a:lnTo>
-                    <a:pt x="6227774" y="2521502"/>
-                  </a:lnTo>
-                  <a:lnTo>
-                    <a:pt x="6305018" y="2514040"/>
-                  </a:lnTo>
-                  <a:lnTo>
-                    <a:pt x="6382261" y="2506528"/>
-                  </a:lnTo>
-                  <a:lnTo>
-                    <a:pt x="6459505" y="2498967"/>
-                  </a:lnTo>
-                  <a:lnTo>
-                    <a:pt x="6536748" y="2491356"/>
-                  </a:lnTo>
-                  <a:lnTo>
-                    <a:pt x="6613992" y="2483695"/>
-                  </a:lnTo>
-                  <a:lnTo>
-                    <a:pt x="6691235" y="2475984"/>
-                  </a:lnTo>
-                  <a:lnTo>
-                    <a:pt x="6768479" y="2468221"/>
-                  </a:lnTo>
-                  <a:lnTo>
-                    <a:pt x="6845723" y="2460407"/>
-                  </a:lnTo>
-                  <a:lnTo>
-                    <a:pt x="6922966" y="2452542"/>
-                  </a:lnTo>
-                  <a:lnTo>
-                    <a:pt x="7000210" y="2444625"/>
-                  </a:lnTo>
-                  <a:lnTo>
-                    <a:pt x="7077453" y="2436656"/>
-                  </a:lnTo>
-                  <a:lnTo>
-                    <a:pt x="7154697" y="2428634"/>
-                  </a:lnTo>
-                  <a:lnTo>
-                    <a:pt x="7231940" y="2420559"/>
+                    <a:pt x="48288" y="76534"/>
+                  </a:lnTo>
+                  <a:lnTo>
+                    <a:pt x="125532" y="194713"/>
+                  </a:lnTo>
+                  <a:lnTo>
+                    <a:pt x="202775" y="308793"/>
+                  </a:lnTo>
+                  <a:lnTo>
+                    <a:pt x="280019" y="418916"/>
+                  </a:lnTo>
+                  <a:lnTo>
+                    <a:pt x="357263" y="525220"/>
+                  </a:lnTo>
+                  <a:lnTo>
+                    <a:pt x="434506" y="627836"/>
+                  </a:lnTo>
+                  <a:lnTo>
+                    <a:pt x="511750" y="726894"/>
+                  </a:lnTo>
+                  <a:lnTo>
+                    <a:pt x="588993" y="822515"/>
+                  </a:lnTo>
+                  <a:lnTo>
+                    <a:pt x="666237" y="914820"/>
+                  </a:lnTo>
+                  <a:lnTo>
+                    <a:pt x="743480" y="1003923"/>
+                  </a:lnTo>
+                  <a:lnTo>
+                    <a:pt x="820724" y="1089936"/>
+                  </a:lnTo>
+                  <a:lnTo>
+                    <a:pt x="897968" y="1172965"/>
+                  </a:lnTo>
+                  <a:lnTo>
+                    <a:pt x="975211" y="1253114"/>
+                  </a:lnTo>
+                  <a:lnTo>
+                    <a:pt x="1052455" y="1330484"/>
+                  </a:lnTo>
+                  <a:lnTo>
+                    <a:pt x="1129698" y="1405170"/>
+                  </a:lnTo>
+                  <a:lnTo>
+                    <a:pt x="1206942" y="1477265"/>
+                  </a:lnTo>
+                  <a:lnTo>
+                    <a:pt x="1284185" y="1546860"/>
+                  </a:lnTo>
+                  <a:lnTo>
+                    <a:pt x="1361429" y="1614041"/>
+                  </a:lnTo>
+                  <a:lnTo>
+                    <a:pt x="1438673" y="1678892"/>
+                  </a:lnTo>
+                  <a:lnTo>
+                    <a:pt x="1515916" y="1741493"/>
+                  </a:lnTo>
+                  <a:lnTo>
+                    <a:pt x="1593160" y="1801923"/>
+                  </a:lnTo>
+                  <a:lnTo>
+                    <a:pt x="1670403" y="1860257"/>
+                  </a:lnTo>
+                  <a:lnTo>
+                    <a:pt x="1747647" y="1916568"/>
+                  </a:lnTo>
+                  <a:lnTo>
+                    <a:pt x="1824890" y="1970926"/>
+                  </a:lnTo>
+                  <a:lnTo>
+                    <a:pt x="1902134" y="2023398"/>
+                  </a:lnTo>
+                  <a:lnTo>
+                    <a:pt x="1979378" y="2074050"/>
+                  </a:lnTo>
+                  <a:lnTo>
+                    <a:pt x="2056621" y="2122945"/>
+                  </a:lnTo>
+                  <a:lnTo>
+                    <a:pt x="2133865" y="2170145"/>
+                  </a:lnTo>
+                  <a:lnTo>
+                    <a:pt x="2211108" y="2215707"/>
+                  </a:lnTo>
+                  <a:lnTo>
+                    <a:pt x="2288352" y="2259689"/>
+                  </a:lnTo>
+                  <a:lnTo>
+                    <a:pt x="2365595" y="2302145"/>
+                  </a:lnTo>
+                  <a:lnTo>
+                    <a:pt x="2442839" y="2343129"/>
+                  </a:lnTo>
+                  <a:lnTo>
+                    <a:pt x="2520083" y="2382691"/>
+                  </a:lnTo>
+                  <a:lnTo>
+                    <a:pt x="2597326" y="2420882"/>
+                  </a:lnTo>
+                  <a:lnTo>
+                    <a:pt x="2674570" y="2457747"/>
+                  </a:lnTo>
+                  <a:lnTo>
+                    <a:pt x="2751813" y="2493334"/>
+                  </a:lnTo>
+                  <a:lnTo>
+                    <a:pt x="2829057" y="2527686"/>
+                  </a:lnTo>
+                  <a:lnTo>
+                    <a:pt x="2906300" y="2560847"/>
+                  </a:lnTo>
+                  <a:lnTo>
+                    <a:pt x="2983544" y="2592858"/>
+                  </a:lnTo>
+                  <a:lnTo>
+                    <a:pt x="3060788" y="2623758"/>
+                  </a:lnTo>
+                  <a:lnTo>
+                    <a:pt x="3138031" y="2653587"/>
+                  </a:lnTo>
+                  <a:lnTo>
+                    <a:pt x="3215275" y="2648941"/>
+                  </a:lnTo>
+                  <a:lnTo>
+                    <a:pt x="3292518" y="2643434"/>
+                  </a:lnTo>
+                  <a:lnTo>
+                    <a:pt x="3369762" y="2637890"/>
+                  </a:lnTo>
+                  <a:lnTo>
+                    <a:pt x="3447005" y="2632310"/>
+                  </a:lnTo>
+                  <a:lnTo>
+                    <a:pt x="3524249" y="2626693"/>
+                  </a:lnTo>
+                  <a:lnTo>
+                    <a:pt x="3601493" y="2621039"/>
+                  </a:lnTo>
+                  <a:lnTo>
+                    <a:pt x="3678736" y="2615348"/>
+                  </a:lnTo>
+                  <a:lnTo>
+                    <a:pt x="3755980" y="2609619"/>
+                  </a:lnTo>
+                  <a:lnTo>
+                    <a:pt x="3833223" y="2603852"/>
+                  </a:lnTo>
+                  <a:lnTo>
+                    <a:pt x="3910467" y="2598047"/>
+                  </a:lnTo>
+                  <a:lnTo>
+                    <a:pt x="3987710" y="2592204"/>
+                  </a:lnTo>
+                  <a:lnTo>
+                    <a:pt x="4064954" y="2586323"/>
+                  </a:lnTo>
+                  <a:lnTo>
+                    <a:pt x="4142198" y="2580402"/>
+                  </a:lnTo>
+                  <a:lnTo>
+                    <a:pt x="4219441" y="2574443"/>
+                  </a:lnTo>
+                  <a:lnTo>
+                    <a:pt x="4296685" y="2568444"/>
+                  </a:lnTo>
+                  <a:lnTo>
+                    <a:pt x="4373928" y="2562406"/>
+                  </a:lnTo>
+                  <a:lnTo>
+                    <a:pt x="4451172" y="2556328"/>
+                  </a:lnTo>
+                  <a:lnTo>
+                    <a:pt x="4528415" y="2550210"/>
+                  </a:lnTo>
+                  <a:lnTo>
+                    <a:pt x="4605659" y="2544051"/>
+                  </a:lnTo>
+                  <a:lnTo>
+                    <a:pt x="4682903" y="2537852"/>
+                  </a:lnTo>
+                  <a:lnTo>
+                    <a:pt x="4760146" y="2531612"/>
+                  </a:lnTo>
+                  <a:lnTo>
+                    <a:pt x="4837390" y="2525330"/>
+                  </a:lnTo>
+                  <a:lnTo>
+                    <a:pt x="4914633" y="2519008"/>
+                  </a:lnTo>
+                  <a:lnTo>
+                    <a:pt x="4991877" y="2512643"/>
+                  </a:lnTo>
+                  <a:lnTo>
+                    <a:pt x="5069120" y="2506237"/>
+                  </a:lnTo>
+                  <a:lnTo>
+                    <a:pt x="5146364" y="2499788"/>
+                  </a:lnTo>
+                  <a:lnTo>
+                    <a:pt x="5223608" y="2493297"/>
+                  </a:lnTo>
+                  <a:lnTo>
+                    <a:pt x="5300851" y="2486763"/>
+                  </a:lnTo>
+                  <a:lnTo>
+                    <a:pt x="5378095" y="2480185"/>
+                  </a:lnTo>
+                  <a:lnTo>
+                    <a:pt x="5455338" y="2473565"/>
+                  </a:lnTo>
+                  <a:lnTo>
+                    <a:pt x="5532582" y="2466901"/>
+                  </a:lnTo>
+                  <a:lnTo>
+                    <a:pt x="5609825" y="2460192"/>
+                  </a:lnTo>
+                  <a:lnTo>
+                    <a:pt x="5687069" y="2453440"/>
+                  </a:lnTo>
+                  <a:lnTo>
+                    <a:pt x="5764313" y="2446643"/>
+                  </a:lnTo>
+                  <a:lnTo>
+                    <a:pt x="5841556" y="2439801"/>
+                  </a:lnTo>
+                  <a:lnTo>
+                    <a:pt x="5918800" y="2432914"/>
+                  </a:lnTo>
+                  <a:lnTo>
+                    <a:pt x="5996043" y="2425982"/>
+                  </a:lnTo>
+                  <a:lnTo>
+                    <a:pt x="6073287" y="2419003"/>
+                  </a:lnTo>
+                  <a:lnTo>
+                    <a:pt x="6150530" y="2411979"/>
+                  </a:lnTo>
+                  <a:lnTo>
+                    <a:pt x="6227774" y="2404909"/>
+                  </a:lnTo>
+                  <a:lnTo>
+                    <a:pt x="6305018" y="2397792"/>
+                  </a:lnTo>
+                  <a:lnTo>
+                    <a:pt x="6382261" y="2390627"/>
+                  </a:lnTo>
+                  <a:lnTo>
+                    <a:pt x="6459505" y="2383416"/>
+                  </a:lnTo>
+                  <a:lnTo>
+                    <a:pt x="6536748" y="2376157"/>
+                  </a:lnTo>
+                  <a:lnTo>
+                    <a:pt x="6613992" y="2368850"/>
+                  </a:lnTo>
+                  <a:lnTo>
+                    <a:pt x="6691235" y="2361495"/>
+                  </a:lnTo>
+                  <a:lnTo>
+                    <a:pt x="6768479" y="2354092"/>
+                  </a:lnTo>
+                  <a:lnTo>
+                    <a:pt x="6845723" y="2346639"/>
+                  </a:lnTo>
+                  <a:lnTo>
+                    <a:pt x="6922966" y="2339138"/>
+                  </a:lnTo>
+                  <a:lnTo>
+                    <a:pt x="7000210" y="2331586"/>
+                  </a:lnTo>
+                  <a:lnTo>
+                    <a:pt x="7077453" y="2323986"/>
+                  </a:lnTo>
+                  <a:lnTo>
+                    <a:pt x="7154697" y="2316335"/>
+                  </a:lnTo>
+                  <a:lnTo>
+                    <a:pt x="7231940" y="2308633"/>
                   </a:lnTo>
                 </a:path>
               </a:pathLst>
@@ -3919,303 +3919,303 @@
           </p:nvSpPr>
           <p:spPr>
             <a:xfrm>
-              <a:off x="817517" y="4679665"/>
-              <a:ext cx="7392041" cy="735517"/>
+              <a:off x="817517" y="4727915"/>
+              <a:ext cx="7392041" cy="701507"/>
             </a:xfrm>
             <a:custGeom>
               <a:avLst/>
               <a:pathLst>
-                <a:path w="7392041" h="735517">
+                <a:path w="7392041" h="701507">
                   <a:moveTo>
-                    <a:pt x="7392041" y="735517"/>
+                    <a:pt x="7392041" y="701507"/>
                   </a:moveTo>
                   <a:lnTo>
-                    <a:pt x="7314797" y="730701"/>
-                  </a:lnTo>
-                  <a:lnTo>
-                    <a:pt x="7237554" y="725713"/>
-                  </a:lnTo>
-                  <a:lnTo>
-                    <a:pt x="7160310" y="720545"/>
-                  </a:lnTo>
-                  <a:lnTo>
-                    <a:pt x="7083066" y="715191"/>
-                  </a:lnTo>
-                  <a:lnTo>
-                    <a:pt x="7005823" y="709645"/>
-                  </a:lnTo>
-                  <a:lnTo>
-                    <a:pt x="6928579" y="703900"/>
-                  </a:lnTo>
-                  <a:lnTo>
-                    <a:pt x="6851336" y="697948"/>
-                  </a:lnTo>
-                  <a:lnTo>
-                    <a:pt x="6774092" y="691783"/>
-                  </a:lnTo>
-                  <a:lnTo>
-                    <a:pt x="6696849" y="685396"/>
-                  </a:lnTo>
-                  <a:lnTo>
-                    <a:pt x="6619605" y="678779"/>
-                  </a:lnTo>
-                  <a:lnTo>
-                    <a:pt x="6542361" y="671925"/>
-                  </a:lnTo>
-                  <a:lnTo>
-                    <a:pt x="6465118" y="664824"/>
-                  </a:lnTo>
-                  <a:lnTo>
-                    <a:pt x="6387874" y="657468"/>
-                  </a:lnTo>
-                  <a:lnTo>
-                    <a:pt x="6310631" y="649848"/>
-                  </a:lnTo>
-                  <a:lnTo>
-                    <a:pt x="6233387" y="641954"/>
-                  </a:lnTo>
-                  <a:lnTo>
-                    <a:pt x="6156144" y="633777"/>
-                  </a:lnTo>
-                  <a:lnTo>
-                    <a:pt x="6078900" y="625306"/>
-                  </a:lnTo>
-                  <a:lnTo>
-                    <a:pt x="6001656" y="616530"/>
-                  </a:lnTo>
-                  <a:lnTo>
-                    <a:pt x="5924413" y="607439"/>
-                  </a:lnTo>
-                  <a:lnTo>
-                    <a:pt x="5847169" y="598021"/>
-                  </a:lnTo>
-                  <a:lnTo>
-                    <a:pt x="5769926" y="588265"/>
-                  </a:lnTo>
-                  <a:lnTo>
-                    <a:pt x="5692682" y="578159"/>
-                  </a:lnTo>
-                  <a:lnTo>
-                    <a:pt x="5615439" y="567689"/>
-                  </a:lnTo>
-                  <a:lnTo>
-                    <a:pt x="5538195" y="556843"/>
-                  </a:lnTo>
-                  <a:lnTo>
-                    <a:pt x="5460951" y="545607"/>
-                  </a:lnTo>
-                  <a:lnTo>
-                    <a:pt x="5383708" y="533968"/>
-                  </a:lnTo>
-                  <a:lnTo>
-                    <a:pt x="5306464" y="521910"/>
-                  </a:lnTo>
-                  <a:lnTo>
-                    <a:pt x="5229221" y="509420"/>
-                  </a:lnTo>
-                  <a:lnTo>
-                    <a:pt x="5151977" y="496480"/>
-                  </a:lnTo>
-                  <a:lnTo>
-                    <a:pt x="5074734" y="483076"/>
-                  </a:lnTo>
-                  <a:lnTo>
-                    <a:pt x="4997490" y="469189"/>
-                  </a:lnTo>
-                  <a:lnTo>
-                    <a:pt x="4920246" y="454804"/>
-                  </a:lnTo>
-                  <a:lnTo>
-                    <a:pt x="4843003" y="439902"/>
-                  </a:lnTo>
-                  <a:lnTo>
-                    <a:pt x="4765759" y="424465"/>
-                  </a:lnTo>
-                  <a:lnTo>
-                    <a:pt x="4688516" y="408473"/>
-                  </a:lnTo>
-                  <a:lnTo>
-                    <a:pt x="4611272" y="391906"/>
-                  </a:lnTo>
-                  <a:lnTo>
-                    <a:pt x="4534029" y="374744"/>
-                  </a:lnTo>
-                  <a:lnTo>
-                    <a:pt x="4456785" y="356965"/>
-                  </a:lnTo>
-                  <a:lnTo>
-                    <a:pt x="4379541" y="338548"/>
-                  </a:lnTo>
-                  <a:lnTo>
-                    <a:pt x="4302298" y="319468"/>
-                  </a:lnTo>
-                  <a:lnTo>
-                    <a:pt x="4225054" y="299704"/>
-                  </a:lnTo>
-                  <a:lnTo>
-                    <a:pt x="4147811" y="279229"/>
-                  </a:lnTo>
-                  <a:lnTo>
-                    <a:pt x="4070567" y="258018"/>
-                  </a:lnTo>
-                  <a:lnTo>
-                    <a:pt x="3993324" y="236045"/>
-                  </a:lnTo>
-                  <a:lnTo>
-                    <a:pt x="3916080" y="213283"/>
-                  </a:lnTo>
-                  <a:lnTo>
-                    <a:pt x="3838836" y="189703"/>
-                  </a:lnTo>
-                  <a:lnTo>
-                    <a:pt x="3761593" y="165275"/>
-                  </a:lnTo>
-                  <a:lnTo>
-                    <a:pt x="3684349" y="139970"/>
-                  </a:lnTo>
-                  <a:lnTo>
-                    <a:pt x="3607106" y="113756"/>
-                  </a:lnTo>
-                  <a:lnTo>
-                    <a:pt x="3529862" y="86599"/>
-                  </a:lnTo>
-                  <a:lnTo>
-                    <a:pt x="3452619" y="58467"/>
-                  </a:lnTo>
-                  <a:lnTo>
-                    <a:pt x="3375375" y="29324"/>
+                    <a:pt x="7314797" y="696914"/>
+                  </a:lnTo>
+                  <a:lnTo>
+                    <a:pt x="7237554" y="692156"/>
+                  </a:lnTo>
+                  <a:lnTo>
+                    <a:pt x="7160310" y="687227"/>
+                  </a:lnTo>
+                  <a:lnTo>
+                    <a:pt x="7083066" y="682121"/>
+                  </a:lnTo>
+                  <a:lnTo>
+                    <a:pt x="7005823" y="676831"/>
+                  </a:lnTo>
+                  <a:lnTo>
+                    <a:pt x="6928579" y="671352"/>
+                  </a:lnTo>
+                  <a:lnTo>
+                    <a:pt x="6851336" y="665675"/>
+                  </a:lnTo>
+                  <a:lnTo>
+                    <a:pt x="6774092" y="659795"/>
+                  </a:lnTo>
+                  <a:lnTo>
+                    <a:pt x="6696849" y="653703"/>
+                  </a:lnTo>
+                  <a:lnTo>
+                    <a:pt x="6619605" y="647392"/>
+                  </a:lnTo>
+                  <a:lnTo>
+                    <a:pt x="6542361" y="640855"/>
+                  </a:lnTo>
+                  <a:lnTo>
+                    <a:pt x="6465118" y="634083"/>
+                  </a:lnTo>
+                  <a:lnTo>
+                    <a:pt x="6387874" y="627067"/>
+                  </a:lnTo>
+                  <a:lnTo>
+                    <a:pt x="6310631" y="619799"/>
+                  </a:lnTo>
+                  <a:lnTo>
+                    <a:pt x="6233387" y="612271"/>
+                  </a:lnTo>
+                  <a:lnTo>
+                    <a:pt x="6156144" y="604471"/>
+                  </a:lnTo>
+                  <a:lnTo>
+                    <a:pt x="6078900" y="596392"/>
+                  </a:lnTo>
+                  <a:lnTo>
+                    <a:pt x="6001656" y="588022"/>
+                  </a:lnTo>
+                  <a:lnTo>
+                    <a:pt x="5924413" y="579351"/>
+                  </a:lnTo>
+                  <a:lnTo>
+                    <a:pt x="5847169" y="570369"/>
+                  </a:lnTo>
+                  <a:lnTo>
+                    <a:pt x="5769926" y="561064"/>
+                  </a:lnTo>
+                  <a:lnTo>
+                    <a:pt x="5692682" y="551425"/>
+                  </a:lnTo>
+                  <a:lnTo>
+                    <a:pt x="5615439" y="541439"/>
+                  </a:lnTo>
+                  <a:lnTo>
+                    <a:pt x="5538195" y="531095"/>
+                  </a:lnTo>
+                  <a:lnTo>
+                    <a:pt x="5460951" y="520379"/>
+                  </a:lnTo>
+                  <a:lnTo>
+                    <a:pt x="5383708" y="509278"/>
+                  </a:lnTo>
+                  <a:lnTo>
+                    <a:pt x="5306464" y="497778"/>
+                  </a:lnTo>
+                  <a:lnTo>
+                    <a:pt x="5229221" y="485864"/>
+                  </a:lnTo>
+                  <a:lnTo>
+                    <a:pt x="5151977" y="473523"/>
+                  </a:lnTo>
+                  <a:lnTo>
+                    <a:pt x="5074734" y="460738"/>
+                  </a:lnTo>
+                  <a:lnTo>
+                    <a:pt x="4997490" y="447494"/>
+                  </a:lnTo>
+                  <a:lnTo>
+                    <a:pt x="4920246" y="433774"/>
+                  </a:lnTo>
+                  <a:lnTo>
+                    <a:pt x="4843003" y="419561"/>
+                  </a:lnTo>
+                  <a:lnTo>
+                    <a:pt x="4765759" y="404838"/>
+                  </a:lnTo>
+                  <a:lnTo>
+                    <a:pt x="4688516" y="389585"/>
+                  </a:lnTo>
+                  <a:lnTo>
+                    <a:pt x="4611272" y="373784"/>
+                  </a:lnTo>
+                  <a:lnTo>
+                    <a:pt x="4534029" y="357416"/>
+                  </a:lnTo>
+                  <a:lnTo>
+                    <a:pt x="4456785" y="340459"/>
+                  </a:lnTo>
+                  <a:lnTo>
+                    <a:pt x="4379541" y="322893"/>
+                  </a:lnTo>
+                  <a:lnTo>
+                    <a:pt x="4302298" y="304696"/>
+                  </a:lnTo>
+                  <a:lnTo>
+                    <a:pt x="4225054" y="285845"/>
+                  </a:lnTo>
+                  <a:lnTo>
+                    <a:pt x="4147811" y="266317"/>
+                  </a:lnTo>
+                  <a:lnTo>
+                    <a:pt x="4070567" y="246087"/>
+                  </a:lnTo>
+                  <a:lnTo>
+                    <a:pt x="3993324" y="225130"/>
+                  </a:lnTo>
+                  <a:lnTo>
+                    <a:pt x="3916080" y="203421"/>
+                  </a:lnTo>
+                  <a:lnTo>
+                    <a:pt x="3838836" y="180931"/>
+                  </a:lnTo>
+                  <a:lnTo>
+                    <a:pt x="3761593" y="157633"/>
+                  </a:lnTo>
+                  <a:lnTo>
+                    <a:pt x="3684349" y="133498"/>
+                  </a:lnTo>
+                  <a:lnTo>
+                    <a:pt x="3607106" y="108496"/>
+                  </a:lnTo>
+                  <a:lnTo>
+                    <a:pt x="3529862" y="82595"/>
+                  </a:lnTo>
+                  <a:lnTo>
+                    <a:pt x="3452619" y="55764"/>
+                  </a:lnTo>
+                  <a:lnTo>
+                    <a:pt x="3375375" y="27968"/>
                   </a:lnTo>
                   <a:lnTo>
                     <a:pt x="3298131" y="0"/>
                   </a:lnTo>
                   <a:lnTo>
-                    <a:pt x="3220888" y="5698"/>
-                  </a:lnTo>
-                  <a:lnTo>
-                    <a:pt x="3143644" y="11360"/>
-                  </a:lnTo>
-                  <a:lnTo>
-                    <a:pt x="3066401" y="16984"/>
-                  </a:lnTo>
-                  <a:lnTo>
-                    <a:pt x="2989157" y="22572"/>
-                  </a:lnTo>
-                  <a:lnTo>
-                    <a:pt x="2911914" y="28123"/>
-                  </a:lnTo>
-                  <a:lnTo>
-                    <a:pt x="2834670" y="33637"/>
-                  </a:lnTo>
-                  <a:lnTo>
-                    <a:pt x="2757426" y="39116"/>
-                  </a:lnTo>
-                  <a:lnTo>
-                    <a:pt x="2680183" y="44558"/>
-                  </a:lnTo>
-                  <a:lnTo>
-                    <a:pt x="2602939" y="49965"/>
-                  </a:lnTo>
-                  <a:lnTo>
-                    <a:pt x="2525696" y="55336"/>
-                  </a:lnTo>
-                  <a:lnTo>
-                    <a:pt x="2448452" y="60672"/>
-                  </a:lnTo>
-                  <a:lnTo>
-                    <a:pt x="2371209" y="65974"/>
-                  </a:lnTo>
-                  <a:lnTo>
-                    <a:pt x="2293965" y="71240"/>
-                  </a:lnTo>
-                  <a:lnTo>
-                    <a:pt x="2216721" y="76472"/>
-                  </a:lnTo>
-                  <a:lnTo>
-                    <a:pt x="2139478" y="81670"/>
-                  </a:lnTo>
-                  <a:lnTo>
-                    <a:pt x="2062234" y="86833"/>
-                  </a:lnTo>
-                  <a:lnTo>
-                    <a:pt x="1984991" y="91963"/>
-                  </a:lnTo>
-                  <a:lnTo>
-                    <a:pt x="1907747" y="97059"/>
-                  </a:lnTo>
-                  <a:lnTo>
-                    <a:pt x="1830504" y="102122"/>
-                  </a:lnTo>
-                  <a:lnTo>
-                    <a:pt x="1753260" y="107151"/>
-                  </a:lnTo>
-                  <a:lnTo>
-                    <a:pt x="1676016" y="112148"/>
-                  </a:lnTo>
-                  <a:lnTo>
-                    <a:pt x="1598773" y="117112"/>
-                  </a:lnTo>
-                  <a:lnTo>
-                    <a:pt x="1521529" y="122043"/>
-                  </a:lnTo>
-                  <a:lnTo>
-                    <a:pt x="1444286" y="126942"/>
-                  </a:lnTo>
-                  <a:lnTo>
-                    <a:pt x="1367042" y="131809"/>
-                  </a:lnTo>
-                  <a:lnTo>
-                    <a:pt x="1289799" y="136644"/>
-                  </a:lnTo>
-                  <a:lnTo>
-                    <a:pt x="1212555" y="141447"/>
-                  </a:lnTo>
-                  <a:lnTo>
-                    <a:pt x="1135311" y="146219"/>
-                  </a:lnTo>
-                  <a:lnTo>
-                    <a:pt x="1058068" y="150960"/>
-                  </a:lnTo>
-                  <a:lnTo>
-                    <a:pt x="980824" y="155669"/>
-                  </a:lnTo>
-                  <a:lnTo>
-                    <a:pt x="903581" y="160348"/>
-                  </a:lnTo>
-                  <a:lnTo>
-                    <a:pt x="826337" y="164996"/>
-                  </a:lnTo>
-                  <a:lnTo>
-                    <a:pt x="749094" y="169613"/>
-                  </a:lnTo>
-                  <a:lnTo>
-                    <a:pt x="671850" y="174200"/>
-                  </a:lnTo>
-                  <a:lnTo>
-                    <a:pt x="594606" y="178757"/>
-                  </a:lnTo>
-                  <a:lnTo>
-                    <a:pt x="517363" y="183285"/>
-                  </a:lnTo>
-                  <a:lnTo>
-                    <a:pt x="440119" y="187782"/>
-                  </a:lnTo>
-                  <a:lnTo>
-                    <a:pt x="362876" y="192250"/>
-                  </a:lnTo>
-                  <a:lnTo>
-                    <a:pt x="285632" y="196689"/>
-                  </a:lnTo>
-                  <a:lnTo>
-                    <a:pt x="208389" y="201099"/>
-                  </a:lnTo>
-                  <a:lnTo>
-                    <a:pt x="131145" y="205480"/>
-                  </a:lnTo>
-                  <a:lnTo>
-                    <a:pt x="53901" y="209832"/>
-                  </a:lnTo>
-                  <a:lnTo>
-                    <a:pt x="0" y="212849"/>
+                    <a:pt x="3220888" y="5435"/>
+                  </a:lnTo>
+                  <a:lnTo>
+                    <a:pt x="3143644" y="10835"/>
+                  </a:lnTo>
+                  <a:lnTo>
+                    <a:pt x="3066401" y="16199"/>
+                  </a:lnTo>
+                  <a:lnTo>
+                    <a:pt x="2989157" y="21528"/>
+                  </a:lnTo>
+                  <a:lnTo>
+                    <a:pt x="2911914" y="26822"/>
+                  </a:lnTo>
+                  <a:lnTo>
+                    <a:pt x="2834670" y="32082"/>
+                  </a:lnTo>
+                  <a:lnTo>
+                    <a:pt x="2757426" y="37307"/>
+                  </a:lnTo>
+                  <a:lnTo>
+                    <a:pt x="2680183" y="42498"/>
+                  </a:lnTo>
+                  <a:lnTo>
+                    <a:pt x="2602939" y="47654"/>
+                  </a:lnTo>
+                  <a:lnTo>
+                    <a:pt x="2525696" y="52777"/>
+                  </a:lnTo>
+                  <a:lnTo>
+                    <a:pt x="2448452" y="57867"/>
+                  </a:lnTo>
+                  <a:lnTo>
+                    <a:pt x="2371209" y="62923"/>
+                  </a:lnTo>
+                  <a:lnTo>
+                    <a:pt x="2293965" y="67946"/>
+                  </a:lnTo>
+                  <a:lnTo>
+                    <a:pt x="2216721" y="72936"/>
+                  </a:lnTo>
+                  <a:lnTo>
+                    <a:pt x="2139478" y="77893"/>
+                  </a:lnTo>
+                  <a:lnTo>
+                    <a:pt x="2062234" y="82818"/>
+                  </a:lnTo>
+                  <a:lnTo>
+                    <a:pt x="1984991" y="87711"/>
+                  </a:lnTo>
+                  <a:lnTo>
+                    <a:pt x="1907747" y="92571"/>
+                  </a:lnTo>
+                  <a:lnTo>
+                    <a:pt x="1830504" y="97400"/>
+                  </a:lnTo>
+                  <a:lnTo>
+                    <a:pt x="1753260" y="102197"/>
+                  </a:lnTo>
+                  <a:lnTo>
+                    <a:pt x="1676016" y="106962"/>
+                  </a:lnTo>
+                  <a:lnTo>
+                    <a:pt x="1598773" y="111697"/>
+                  </a:lnTo>
+                  <a:lnTo>
+                    <a:pt x="1521529" y="116400"/>
+                  </a:lnTo>
+                  <a:lnTo>
+                    <a:pt x="1444286" y="121072"/>
+                  </a:lnTo>
+                  <a:lnTo>
+                    <a:pt x="1367042" y="125714"/>
+                  </a:lnTo>
+                  <a:lnTo>
+                    <a:pt x="1289799" y="130325"/>
+                  </a:lnTo>
+                  <a:lnTo>
+                    <a:pt x="1212555" y="134907"/>
+                  </a:lnTo>
+                  <a:lnTo>
+                    <a:pt x="1135311" y="139458"/>
+                  </a:lnTo>
+                  <a:lnTo>
+                    <a:pt x="1058068" y="143979"/>
+                  </a:lnTo>
+                  <a:lnTo>
+                    <a:pt x="980824" y="148471"/>
+                  </a:lnTo>
+                  <a:lnTo>
+                    <a:pt x="903581" y="152933"/>
+                  </a:lnTo>
+                  <a:lnTo>
+                    <a:pt x="826337" y="157366"/>
+                  </a:lnTo>
+                  <a:lnTo>
+                    <a:pt x="749094" y="161770"/>
+                  </a:lnTo>
+                  <a:lnTo>
+                    <a:pt x="671850" y="166145"/>
+                  </a:lnTo>
+                  <a:lnTo>
+                    <a:pt x="594606" y="170492"/>
+                  </a:lnTo>
+                  <a:lnTo>
+                    <a:pt x="517363" y="174810"/>
+                  </a:lnTo>
+                  <a:lnTo>
+                    <a:pt x="440119" y="179099"/>
+                  </a:lnTo>
+                  <a:lnTo>
+                    <a:pt x="362876" y="183361"/>
+                  </a:lnTo>
+                  <a:lnTo>
+                    <a:pt x="285632" y="187594"/>
+                  </a:lnTo>
+                  <a:lnTo>
+                    <a:pt x="208389" y="191800"/>
+                  </a:lnTo>
+                  <a:lnTo>
+                    <a:pt x="131145" y="195979"/>
+                  </a:lnTo>
+                  <a:lnTo>
+                    <a:pt x="53901" y="200129"/>
+                  </a:lnTo>
+                  <a:lnTo>
+                    <a:pt x="0" y="203007"/>
                   </a:lnTo>
                 </a:path>
               </a:pathLst>
@@ -4235,303 +4235,303 @@
           </p:nvSpPr>
           <p:spPr>
             <a:xfrm>
-              <a:off x="817517" y="3942823"/>
-              <a:ext cx="7392041" cy="1200023"/>
+              <a:off x="817517" y="4025145"/>
+              <a:ext cx="7392041" cy="1144534"/>
             </a:xfrm>
             <a:custGeom>
               <a:avLst/>
               <a:pathLst>
-                <a:path w="7392041" h="1200023">
+                <a:path w="7392041" h="1144534">
                   <a:moveTo>
                     <a:pt x="0" y="0"/>
                   </a:moveTo>
                   <a:lnTo>
-                    <a:pt x="53901" y="16054"/>
-                  </a:lnTo>
-                  <a:lnTo>
-                    <a:pt x="131145" y="38732"/>
-                  </a:lnTo>
-                  <a:lnTo>
-                    <a:pt x="208389" y="61087"/>
-                  </a:lnTo>
-                  <a:lnTo>
-                    <a:pt x="285632" y="83123"/>
-                  </a:lnTo>
-                  <a:lnTo>
-                    <a:pt x="362876" y="104844"/>
-                  </a:lnTo>
-                  <a:lnTo>
-                    <a:pt x="440119" y="126256"/>
-                  </a:lnTo>
-                  <a:lnTo>
-                    <a:pt x="517363" y="147363"/>
-                  </a:lnTo>
-                  <a:lnTo>
-                    <a:pt x="594606" y="168169"/>
-                  </a:lnTo>
-                  <a:lnTo>
-                    <a:pt x="671850" y="188678"/>
-                  </a:lnTo>
-                  <a:lnTo>
-                    <a:pt x="749094" y="208894"/>
-                  </a:lnTo>
-                  <a:lnTo>
-                    <a:pt x="826337" y="228823"/>
-                  </a:lnTo>
-                  <a:lnTo>
-                    <a:pt x="903581" y="248467"/>
-                  </a:lnTo>
-                  <a:lnTo>
-                    <a:pt x="980824" y="267831"/>
-                  </a:lnTo>
-                  <a:lnTo>
-                    <a:pt x="1058068" y="286918"/>
-                  </a:lnTo>
-                  <a:lnTo>
-                    <a:pt x="1135311" y="305734"/>
-                  </a:lnTo>
-                  <a:lnTo>
-                    <a:pt x="1212555" y="324281"/>
-                  </a:lnTo>
-                  <a:lnTo>
-                    <a:pt x="1289799" y="342564"/>
-                  </a:lnTo>
-                  <a:lnTo>
-                    <a:pt x="1367042" y="360586"/>
-                  </a:lnTo>
-                  <a:lnTo>
-                    <a:pt x="1444286" y="378351"/>
-                  </a:lnTo>
-                  <a:lnTo>
-                    <a:pt x="1521529" y="395863"/>
-                  </a:lnTo>
-                  <a:lnTo>
-                    <a:pt x="1598773" y="413125"/>
-                  </a:lnTo>
-                  <a:lnTo>
-                    <a:pt x="1676016" y="430141"/>
-                  </a:lnTo>
-                  <a:lnTo>
-                    <a:pt x="1753260" y="446914"/>
-                  </a:lnTo>
-                  <a:lnTo>
-                    <a:pt x="1830504" y="463448"/>
-                  </a:lnTo>
-                  <a:lnTo>
-                    <a:pt x="1907747" y="479747"/>
-                  </a:lnTo>
-                  <a:lnTo>
-                    <a:pt x="1984991" y="495813"/>
-                  </a:lnTo>
-                  <a:lnTo>
-                    <a:pt x="2062234" y="511649"/>
-                  </a:lnTo>
-                  <a:lnTo>
-                    <a:pt x="2139478" y="527260"/>
-                  </a:lnTo>
-                  <a:lnTo>
-                    <a:pt x="2216721" y="542649"/>
-                  </a:lnTo>
-                  <a:lnTo>
-                    <a:pt x="2293965" y="557818"/>
-                  </a:lnTo>
-                  <a:lnTo>
-                    <a:pt x="2371209" y="572770"/>
-                  </a:lnTo>
-                  <a:lnTo>
-                    <a:pt x="2448452" y="587510"/>
-                  </a:lnTo>
-                  <a:lnTo>
-                    <a:pt x="2525696" y="602039"/>
-                  </a:lnTo>
-                  <a:lnTo>
-                    <a:pt x="2602939" y="616361"/>
-                  </a:lnTo>
-                  <a:lnTo>
-                    <a:pt x="2680183" y="630478"/>
-                  </a:lnTo>
-                  <a:lnTo>
-                    <a:pt x="2757426" y="644395"/>
-                  </a:lnTo>
-                  <a:lnTo>
-                    <a:pt x="2834670" y="658113"/>
-                  </a:lnTo>
-                  <a:lnTo>
-                    <a:pt x="2911914" y="671635"/>
-                  </a:lnTo>
-                  <a:lnTo>
-                    <a:pt x="2989157" y="684965"/>
-                  </a:lnTo>
-                  <a:lnTo>
-                    <a:pt x="3066401" y="698104"/>
-                  </a:lnTo>
-                  <a:lnTo>
-                    <a:pt x="3143644" y="711056"/>
-                  </a:lnTo>
-                  <a:lnTo>
-                    <a:pt x="3220888" y="723824"/>
-                  </a:lnTo>
-                  <a:lnTo>
-                    <a:pt x="3298131" y="736409"/>
-                  </a:lnTo>
-                  <a:lnTo>
-                    <a:pt x="3375375" y="748815"/>
-                  </a:lnTo>
-                  <a:lnTo>
-                    <a:pt x="3452619" y="761044"/>
-                  </a:lnTo>
-                  <a:lnTo>
-                    <a:pt x="3529862" y="773098"/>
-                  </a:lnTo>
-                  <a:lnTo>
-                    <a:pt x="3607106" y="784981"/>
-                  </a:lnTo>
-                  <a:lnTo>
-                    <a:pt x="3684349" y="796694"/>
-                  </a:lnTo>
-                  <a:lnTo>
-                    <a:pt x="3761593" y="808241"/>
-                  </a:lnTo>
-                  <a:lnTo>
-                    <a:pt x="3838836" y="819622"/>
-                  </a:lnTo>
-                  <a:lnTo>
-                    <a:pt x="3916080" y="830841"/>
-                  </a:lnTo>
-                  <a:lnTo>
-                    <a:pt x="3993324" y="841901"/>
-                  </a:lnTo>
-                  <a:lnTo>
-                    <a:pt x="4070567" y="852802"/>
-                  </a:lnTo>
-                  <a:lnTo>
-                    <a:pt x="4147811" y="863548"/>
-                  </a:lnTo>
-                  <a:lnTo>
-                    <a:pt x="4225054" y="874141"/>
-                  </a:lnTo>
-                  <a:lnTo>
-                    <a:pt x="4302298" y="884583"/>
-                  </a:lnTo>
-                  <a:lnTo>
-                    <a:pt x="4379541" y="894876"/>
-                  </a:lnTo>
-                  <a:lnTo>
-                    <a:pt x="4456785" y="905022"/>
-                  </a:lnTo>
-                  <a:lnTo>
-                    <a:pt x="4534029" y="915023"/>
-                  </a:lnTo>
-                  <a:lnTo>
-                    <a:pt x="4611272" y="924882"/>
-                  </a:lnTo>
-                  <a:lnTo>
-                    <a:pt x="4688516" y="934600"/>
-                  </a:lnTo>
-                  <a:lnTo>
-                    <a:pt x="4765759" y="944180"/>
-                  </a:lnTo>
-                  <a:lnTo>
-                    <a:pt x="4843003" y="953623"/>
-                  </a:lnTo>
-                  <a:lnTo>
-                    <a:pt x="4920246" y="962932"/>
-                  </a:lnTo>
-                  <a:lnTo>
-                    <a:pt x="4997490" y="972107"/>
-                  </a:lnTo>
-                  <a:lnTo>
-                    <a:pt x="5074734" y="981152"/>
-                  </a:lnTo>
-                  <a:lnTo>
-                    <a:pt x="5151977" y="990068"/>
-                  </a:lnTo>
-                  <a:lnTo>
-                    <a:pt x="5229221" y="998856"/>
-                  </a:lnTo>
-                  <a:lnTo>
-                    <a:pt x="5306464" y="1007520"/>
-                  </a:lnTo>
-                  <a:lnTo>
-                    <a:pt x="5383708" y="1016060"/>
-                  </a:lnTo>
-                  <a:lnTo>
-                    <a:pt x="5460951" y="1024478"/>
-                  </a:lnTo>
-                  <a:lnTo>
-                    <a:pt x="5538195" y="1032776"/>
-                  </a:lnTo>
-                  <a:lnTo>
-                    <a:pt x="5615439" y="1040955"/>
-                  </a:lnTo>
-                  <a:lnTo>
-                    <a:pt x="5692682" y="1049018"/>
-                  </a:lnTo>
-                  <a:lnTo>
-                    <a:pt x="5769926" y="1056966"/>
-                  </a:lnTo>
-                  <a:lnTo>
-                    <a:pt x="5847169" y="1064801"/>
-                  </a:lnTo>
-                  <a:lnTo>
-                    <a:pt x="5924413" y="1072524"/>
-                  </a:lnTo>
-                  <a:lnTo>
-                    <a:pt x="6001656" y="1080137"/>
-                  </a:lnTo>
-                  <a:lnTo>
-                    <a:pt x="6078900" y="1087641"/>
-                  </a:lnTo>
-                  <a:lnTo>
-                    <a:pt x="6156144" y="1095039"/>
-                  </a:lnTo>
-                  <a:lnTo>
-                    <a:pt x="6233387" y="1102330"/>
-                  </a:lnTo>
-                  <a:lnTo>
-                    <a:pt x="6310631" y="1109518"/>
-                  </a:lnTo>
-                  <a:lnTo>
-                    <a:pt x="6387874" y="1116603"/>
-                  </a:lnTo>
-                  <a:lnTo>
-                    <a:pt x="6465118" y="1123588"/>
-                  </a:lnTo>
-                  <a:lnTo>
-                    <a:pt x="6542361" y="1130472"/>
-                  </a:lnTo>
-                  <a:lnTo>
-                    <a:pt x="6619605" y="1137259"/>
-                  </a:lnTo>
-                  <a:lnTo>
-                    <a:pt x="6696849" y="1143949"/>
-                  </a:lnTo>
-                  <a:lnTo>
-                    <a:pt x="6774092" y="1150543"/>
-                  </a:lnTo>
-                  <a:lnTo>
-                    <a:pt x="6851336" y="1157043"/>
-                  </a:lnTo>
-                  <a:lnTo>
-                    <a:pt x="6928579" y="1163451"/>
-                  </a:lnTo>
-                  <a:lnTo>
-                    <a:pt x="7005823" y="1169767"/>
-                  </a:lnTo>
-                  <a:lnTo>
-                    <a:pt x="7083066" y="1175993"/>
-                  </a:lnTo>
-                  <a:lnTo>
-                    <a:pt x="7160310" y="1182131"/>
-                  </a:lnTo>
-                  <a:lnTo>
-                    <a:pt x="7237554" y="1188180"/>
-                  </a:lnTo>
-                  <a:lnTo>
-                    <a:pt x="7314797" y="1194144"/>
-                  </a:lnTo>
-                  <a:lnTo>
-                    <a:pt x="7392041" y="1200023"/>
+                    <a:pt x="53901" y="15311"/>
+                  </a:lnTo>
+                  <a:lnTo>
+                    <a:pt x="131145" y="36941"/>
+                  </a:lnTo>
+                  <a:lnTo>
+                    <a:pt x="208389" y="58262"/>
+                  </a:lnTo>
+                  <a:lnTo>
+                    <a:pt x="285632" y="79279"/>
+                  </a:lnTo>
+                  <a:lnTo>
+                    <a:pt x="362876" y="99996"/>
+                  </a:lnTo>
+                  <a:lnTo>
+                    <a:pt x="440119" y="120418"/>
+                  </a:lnTo>
+                  <a:lnTo>
+                    <a:pt x="517363" y="140549"/>
+                  </a:lnTo>
+                  <a:lnTo>
+                    <a:pt x="594606" y="160393"/>
+                  </a:lnTo>
+                  <a:lnTo>
+                    <a:pt x="671850" y="179953"/>
+                  </a:lnTo>
+                  <a:lnTo>
+                    <a:pt x="749094" y="199235"/>
+                  </a:lnTo>
+                  <a:lnTo>
+                    <a:pt x="826337" y="218242"/>
+                  </a:lnTo>
+                  <a:lnTo>
+                    <a:pt x="903581" y="236978"/>
+                  </a:lnTo>
+                  <a:lnTo>
+                    <a:pt x="980824" y="255446"/>
+                  </a:lnTo>
+                  <a:lnTo>
+                    <a:pt x="1058068" y="273651"/>
+                  </a:lnTo>
+                  <a:lnTo>
+                    <a:pt x="1135311" y="291597"/>
+                  </a:lnTo>
+                  <a:lnTo>
+                    <a:pt x="1212555" y="309287"/>
+                  </a:lnTo>
+                  <a:lnTo>
+                    <a:pt x="1289799" y="326724"/>
+                  </a:lnTo>
+                  <a:lnTo>
+                    <a:pt x="1367042" y="343913"/>
+                  </a:lnTo>
+                  <a:lnTo>
+                    <a:pt x="1444286" y="360856"/>
+                  </a:lnTo>
+                  <a:lnTo>
+                    <a:pt x="1521529" y="377559"/>
+                  </a:lnTo>
+                  <a:lnTo>
+                    <a:pt x="1598773" y="394022"/>
+                  </a:lnTo>
+                  <a:lnTo>
+                    <a:pt x="1676016" y="410252"/>
+                  </a:lnTo>
+                  <a:lnTo>
+                    <a:pt x="1753260" y="426249"/>
+                  </a:lnTo>
+                  <a:lnTo>
+                    <a:pt x="1830504" y="442019"/>
+                  </a:lnTo>
+                  <a:lnTo>
+                    <a:pt x="1907747" y="457563"/>
+                  </a:lnTo>
+                  <a:lnTo>
+                    <a:pt x="1984991" y="472886"/>
+                  </a:lnTo>
+                  <a:lnTo>
+                    <a:pt x="2062234" y="487991"/>
+                  </a:lnTo>
+                  <a:lnTo>
+                    <a:pt x="2139478" y="502880"/>
+                  </a:lnTo>
+                  <a:lnTo>
+                    <a:pt x="2216721" y="517557"/>
+                  </a:lnTo>
+                  <a:lnTo>
+                    <a:pt x="2293965" y="532024"/>
+                  </a:lnTo>
+                  <a:lnTo>
+                    <a:pt x="2371209" y="546285"/>
+                  </a:lnTo>
+                  <a:lnTo>
+                    <a:pt x="2448452" y="560343"/>
+                  </a:lnTo>
+                  <a:lnTo>
+                    <a:pt x="2525696" y="574201"/>
+                  </a:lnTo>
+                  <a:lnTo>
+                    <a:pt x="2602939" y="587860"/>
+                  </a:lnTo>
+                  <a:lnTo>
+                    <a:pt x="2680183" y="601325"/>
+                  </a:lnTo>
+                  <a:lnTo>
+                    <a:pt x="2757426" y="614598"/>
+                  </a:lnTo>
+                  <a:lnTo>
+                    <a:pt x="2834670" y="627682"/>
+                  </a:lnTo>
+                  <a:lnTo>
+                    <a:pt x="2911914" y="640579"/>
+                  </a:lnTo>
+                  <a:lnTo>
+                    <a:pt x="2989157" y="653292"/>
+                  </a:lnTo>
+                  <a:lnTo>
+                    <a:pt x="3066401" y="665824"/>
+                  </a:lnTo>
+                  <a:lnTo>
+                    <a:pt x="3143644" y="678177"/>
+                  </a:lnTo>
+                  <a:lnTo>
+                    <a:pt x="3220888" y="690354"/>
+                  </a:lnTo>
+                  <a:lnTo>
+                    <a:pt x="3298131" y="702358"/>
+                  </a:lnTo>
+                  <a:lnTo>
+                    <a:pt x="3375375" y="714190"/>
+                  </a:lnTo>
+                  <a:lnTo>
+                    <a:pt x="3452619" y="725854"/>
+                  </a:lnTo>
+                  <a:lnTo>
+                    <a:pt x="3529862" y="737351"/>
+                  </a:lnTo>
+                  <a:lnTo>
+                    <a:pt x="3607106" y="748684"/>
+                  </a:lnTo>
+                  <a:lnTo>
+                    <a:pt x="3684349" y="759856"/>
+                  </a:lnTo>
+                  <a:lnTo>
+                    <a:pt x="3761593" y="770868"/>
+                  </a:lnTo>
+                  <a:lnTo>
+                    <a:pt x="3838836" y="781723"/>
+                  </a:lnTo>
+                  <a:lnTo>
+                    <a:pt x="3916080" y="792424"/>
+                  </a:lnTo>
+                  <a:lnTo>
+                    <a:pt x="3993324" y="802971"/>
+                  </a:lnTo>
+                  <a:lnTo>
+                    <a:pt x="4070567" y="813369"/>
+                  </a:lnTo>
+                  <a:lnTo>
+                    <a:pt x="4147811" y="823618"/>
+                  </a:lnTo>
+                  <a:lnTo>
+                    <a:pt x="4225054" y="833721"/>
+                  </a:lnTo>
+                  <a:lnTo>
+                    <a:pt x="4302298" y="843680"/>
+                  </a:lnTo>
+                  <a:lnTo>
+                    <a:pt x="4379541" y="853497"/>
+                  </a:lnTo>
+                  <a:lnTo>
+                    <a:pt x="4456785" y="863174"/>
+                  </a:lnTo>
+                  <a:lnTo>
+                    <a:pt x="4534029" y="872713"/>
+                  </a:lnTo>
+                  <a:lnTo>
+                    <a:pt x="4611272" y="882116"/>
+                  </a:lnTo>
+                  <a:lnTo>
+                    <a:pt x="4688516" y="891385"/>
+                  </a:lnTo>
+                  <a:lnTo>
+                    <a:pt x="4765759" y="900522"/>
+                  </a:lnTo>
+                  <a:lnTo>
+                    <a:pt x="4843003" y="909528"/>
+                  </a:lnTo>
+                  <a:lnTo>
+                    <a:pt x="4920246" y="918406"/>
+                  </a:lnTo>
+                  <a:lnTo>
+                    <a:pt x="4997490" y="927157"/>
+                  </a:lnTo>
+                  <a:lnTo>
+                    <a:pt x="5074734" y="935784"/>
+                  </a:lnTo>
+                  <a:lnTo>
+                    <a:pt x="5151977" y="944287"/>
+                  </a:lnTo>
+                  <a:lnTo>
+                    <a:pt x="5229221" y="952670"/>
+                  </a:lnTo>
+                  <a:lnTo>
+                    <a:pt x="5306464" y="960932"/>
+                  </a:lnTo>
+                  <a:lnTo>
+                    <a:pt x="5383708" y="969077"/>
+                  </a:lnTo>
+                  <a:lnTo>
+                    <a:pt x="5460951" y="977106"/>
+                  </a:lnTo>
+                  <a:lnTo>
+                    <a:pt x="5538195" y="985020"/>
+                  </a:lnTo>
+                  <a:lnTo>
+                    <a:pt x="5615439" y="992822"/>
+                  </a:lnTo>
+                  <a:lnTo>
+                    <a:pt x="5692682" y="1000512"/>
+                  </a:lnTo>
+                  <a:lnTo>
+                    <a:pt x="5769926" y="1008093"/>
+                  </a:lnTo>
+                  <a:lnTo>
+                    <a:pt x="5847169" y="1015565"/>
+                  </a:lnTo>
+                  <a:lnTo>
+                    <a:pt x="5924413" y="1022931"/>
+                  </a:lnTo>
+                  <a:lnTo>
+                    <a:pt x="6001656" y="1030192"/>
+                  </a:lnTo>
+                  <a:lnTo>
+                    <a:pt x="6078900" y="1037349"/>
+                  </a:lnTo>
+                  <a:lnTo>
+                    <a:pt x="6156144" y="1044404"/>
+                  </a:lnTo>
+                  <a:lnTo>
+                    <a:pt x="6233387" y="1051359"/>
+                  </a:lnTo>
+                  <a:lnTo>
+                    <a:pt x="6310631" y="1058214"/>
+                  </a:lnTo>
+                  <a:lnTo>
+                    <a:pt x="6387874" y="1064972"/>
+                  </a:lnTo>
+                  <a:lnTo>
+                    <a:pt x="6465118" y="1071633"/>
+                  </a:lnTo>
+                  <a:lnTo>
+                    <a:pt x="6542361" y="1078200"/>
+                  </a:lnTo>
+                  <a:lnTo>
+                    <a:pt x="6619605" y="1084672"/>
+                  </a:lnTo>
+                  <a:lnTo>
+                    <a:pt x="6696849" y="1091053"/>
+                  </a:lnTo>
+                  <a:lnTo>
+                    <a:pt x="6774092" y="1097342"/>
+                  </a:lnTo>
+                  <a:lnTo>
+                    <a:pt x="6851336" y="1103542"/>
+                  </a:lnTo>
+                  <a:lnTo>
+                    <a:pt x="6928579" y="1109653"/>
+                  </a:lnTo>
+                  <a:lnTo>
+                    <a:pt x="7005823" y="1115677"/>
+                  </a:lnTo>
+                  <a:lnTo>
+                    <a:pt x="7083066" y="1121616"/>
+                  </a:lnTo>
+                  <a:lnTo>
+                    <a:pt x="7160310" y="1127469"/>
+                  </a:lnTo>
+                  <a:lnTo>
+                    <a:pt x="7237554" y="1133239"/>
+                  </a:lnTo>
+                  <a:lnTo>
+                    <a:pt x="7314797" y="1138927"/>
+                  </a:lnTo>
+                  <a:lnTo>
+                    <a:pt x="7392041" y="1144534"/>
                   </a:lnTo>
                 </a:path>
               </a:pathLst>
@@ -4560,7 +4560,7 @@
           </p:nvSpPr>
           <p:spPr>
             <a:xfrm>
-              <a:off x="817517" y="4679530"/>
+              <a:off x="817517" y="4727786"/>
               <a:ext cx="7799693" cy="0"/>
             </a:xfrm>
             <a:custGeom>
@@ -4603,15 +4603,15 @@
           </p:nvSpPr>
           <p:spPr>
             <a:xfrm>
-              <a:off x="4117484" y="1896563"/>
-              <a:ext cx="0" cy="3826579"/>
+              <a:off x="4117484" y="2073503"/>
+              <a:ext cx="0" cy="3649639"/>
             </a:xfrm>
             <a:custGeom>
               <a:avLst/>
               <a:pathLst>
-                <a:path w="0" h="3826579">
+                <a:path w="0" h="3649639">
                   <a:moveTo>
-                    <a:pt x="0" y="3826579"/>
+                    <a:pt x="0" y="3649639"/>
                   </a:moveTo>
                   <a:lnTo>
                     <a:pt x="0" y="0"/>
@@ -4646,7 +4646,7 @@
           </p:nvSpPr>
           <p:spPr>
             <a:xfrm>
-              <a:off x="692708" y="5509156"/>
+              <a:off x="692708" y="5517199"/>
               <a:ext cx="62179" cy="80101"/>
             </a:xfrm>
             <a:prstGeom prst="rect">
@@ -4692,7 +4692,7 @@
           </p:nvSpPr>
           <p:spPr>
             <a:xfrm>
-              <a:off x="692708" y="4639479"/>
+              <a:off x="692708" y="4687735"/>
               <a:ext cx="62179" cy="80101"/>
             </a:xfrm>
             <a:prstGeom prst="rect">
@@ -4738,7 +4738,7 @@
           </p:nvSpPr>
           <p:spPr>
             <a:xfrm>
-              <a:off x="692708" y="3769802"/>
+              <a:off x="692708" y="3858272"/>
               <a:ext cx="62179" cy="80101"/>
             </a:xfrm>
             <a:prstGeom prst="rect">
@@ -4784,7 +4784,7 @@
           </p:nvSpPr>
           <p:spPr>
             <a:xfrm>
-              <a:off x="692708" y="2900125"/>
+              <a:off x="692708" y="3028808"/>
               <a:ext cx="62179" cy="80101"/>
             </a:xfrm>
             <a:prstGeom prst="rect">
@@ -4830,7 +4830,7 @@
           </p:nvSpPr>
           <p:spPr>
             <a:xfrm>
-              <a:off x="692708" y="2030448"/>
+              <a:off x="692708" y="2199345"/>
               <a:ext cx="62179" cy="80101"/>
             </a:xfrm>
             <a:prstGeom prst="rect">
@@ -5106,7 +5106,7 @@
           </p:nvSpPr>
           <p:spPr>
             <a:xfrm rot="-5400000">
-              <a:off x="68446" y="3759743"/>
+              <a:off x="68446" y="3848213"/>
               <a:ext cx="1016904" cy="100218"/>
             </a:xfrm>
             <a:prstGeom prst="rect">
@@ -5147,6 +5147,52 @@
         <p:sp>
           <p:nvSpPr>
             <p:cNvPr id="38" name="tx38"/>
+            <p:cNvSpPr/>
+            <p:nvPr/>
+          </p:nvSpPr>
+          <p:spPr>
+            <a:xfrm>
+              <a:off x="817517" y="1896563"/>
+              <a:ext cx="5626211" cy="82021"/>
+            </a:xfrm>
+            <a:prstGeom prst="rect">
+              <a:avLst/>
+            </a:prstGeom>
+            <a:noFill/>
+          </p:spPr>
+          <p:txBody>
+            <a:bodyPr lIns="0" rIns="0" tIns="0" bIns="0" anchorCtr="1" anchor="ctr" wrap="none"/>
+            <a:lstStyle/>
+            <a:p>
+              <a:pPr algn="l" marL="0" marR="0" indent="0">
+                <a:lnSpc>
+                  <a:spcPts val="900"/>
+                </a:lnSpc>
+                <a:spcBef>
+                  <a:spcPts val="0"/>
+                </a:spcBef>
+                <a:spcAft>
+                  <a:spcPts val="0"/>
+                </a:spcAft>
+              </a:pPr>
+              <a:r>
+                <a:rPr sz="900">
+                  <a:solidFill>
+                    <a:srgbClr val="404040">
+                      <a:alpha val="100000"/>
+                    </a:srgbClr>
+                  </a:solidFill>
+                  <a:latin typeface="Helvetica"/>
+                  <a:cs typeface="Helvetica"/>
+                </a:rPr>
+                <a:t>subHR per 0.1 ratio decline: 1.18 (0.93-1.50)  |  per IQR decline (Δ = 0.30): 1.63 (0.80-3.31)  |  IQR: [0.84, 1.14]</a:t>
+              </a:r>
+            </a:p>
+          </p:txBody>
+        </p:sp>
+        <p:sp>
+          <p:nvSpPr>
+            <p:cNvPr id="39" name="tx39"/>
             <p:cNvSpPr/>
             <p:nvPr/>
           </p:nvSpPr>

--- a/docs/pptx/auc3/jx-auc3-linsubhr-ratio-aki2.pptx
+++ b/docs/pptx/auc3/jx-auc3-linsubhr-ratio-aki2.pptx
@@ -5153,7 +5153,7 @@
           <p:spPr>
             <a:xfrm>
               <a:off x="817517" y="1896563"/>
-              <a:ext cx="5626211" cy="82021"/>
+              <a:ext cx="6169365" cy="82021"/>
             </a:xfrm>
             <a:prstGeom prst="rect">
               <a:avLst/>
@@ -5185,7 +5185,7 @@
                   <a:latin typeface="Helvetica"/>
                   <a:cs typeface="Helvetica"/>
                 </a:rPr>
-                <a:t>subHR per 0.1 ratio decline: 1.18 (0.93-1.50)  |  per IQR decline (Δ = 0.30): 1.63 (0.80-3.31)  |  IQR: [0.84, 1.14]</a:t>
+                <a:t>subHR per 0.1 ratio decline: 1.18 (0.93-1.50), p = 0.179  |  per IQR decline (Δ = 0.30): 1.63 (0.80-3.31)  |  IQR: [0.84, 1.14]</a:t>
               </a:r>
             </a:p>
           </p:txBody>

--- a/docs/pptx/auc3/jx-auc3-linsubhr-ratio-aki2.pptx
+++ b/docs/pptx/auc3/jx-auc3-linsubhr-ratio-aki2.pptx
@@ -5153,7 +5153,7 @@
           <p:spPr>
             <a:xfrm>
               <a:off x="817517" y="1896563"/>
-              <a:ext cx="6169365" cy="82021"/>
+              <a:ext cx="6833128" cy="82021"/>
             </a:xfrm>
             <a:prstGeom prst="rect">
               <a:avLst/>
@@ -5185,7 +5185,7 @@
                   <a:latin typeface="Helvetica"/>
                   <a:cs typeface="Helvetica"/>
                 </a:rPr>
-                <a:t>subHR per 0.1 ratio decline: 1.18 (0.93-1.50), p = 0.179  |  per IQR decline (Δ = 0.30): 1.63 (0.80-3.31)  |  IQR: [0.84, 1.14]</a:t>
+                <a:t>subHR per 0.1 ratio decline: 1.18 (0.93-1.50), p_Bonf = 1.000 (n = 6)  |  per IQR decline (Δ = 0.30): 1.63 (0.80-3.31)  |  IQR: [0.84, 1.14]</a:t>
               </a:r>
             </a:p>
           </p:txBody>

--- a/docs/pptx/auc3/jx-auc3-linsubhr-ratio-aki2.pptx
+++ b/docs/pptx/auc3/jx-auc3-linsubhr-ratio-aki2.pptx
@@ -2443,7 +2443,7 @@
           </p:nvSpPr>
           <p:spPr>
             <a:xfrm>
-              <a:off x="1615213" y="2073503"/>
+              <a:off x="1531834" y="2073503"/>
               <a:ext cx="0" cy="3649639"/>
             </a:xfrm>
             <a:custGeom>
@@ -2486,7 +2486,7 @@
           </p:nvSpPr>
           <p:spPr>
             <a:xfrm>
-              <a:off x="3387871" y="2073503"/>
+              <a:off x="3586410" y="2073503"/>
               <a:ext cx="0" cy="3649639"/>
             </a:xfrm>
             <a:custGeom>
@@ -2529,7 +2529,7 @@
           </p:nvSpPr>
           <p:spPr>
             <a:xfrm>
-              <a:off x="5160528" y="2073503"/>
+              <a:off x="5640985" y="2073503"/>
               <a:ext cx="0" cy="3649639"/>
             </a:xfrm>
             <a:custGeom>
@@ -2572,7 +2572,7 @@
           </p:nvSpPr>
           <p:spPr>
             <a:xfrm>
-              <a:off x="6933186" y="2073503"/>
+              <a:off x="7695561" y="2073503"/>
               <a:ext cx="0" cy="3649639"/>
             </a:xfrm>
             <a:custGeom>
@@ -2830,7 +2830,7 @@
           </p:nvSpPr>
           <p:spPr>
             <a:xfrm>
-              <a:off x="2501542" y="2073503"/>
+              <a:off x="2559122" y="2073503"/>
               <a:ext cx="0" cy="3649639"/>
             </a:xfrm>
             <a:custGeom>
@@ -2873,7 +2873,7 @@
           </p:nvSpPr>
           <p:spPr>
             <a:xfrm>
-              <a:off x="4274200" y="2073503"/>
+              <a:off x="4613698" y="2073503"/>
               <a:ext cx="0" cy="3649639"/>
             </a:xfrm>
             <a:custGeom>
@@ -2916,7 +2916,7 @@
           </p:nvSpPr>
           <p:spPr>
             <a:xfrm>
-              <a:off x="6046857" y="2073503"/>
+              <a:off x="6668273" y="2073503"/>
               <a:ext cx="0" cy="3649639"/>
             </a:xfrm>
             <a:custGeom>
@@ -2953,637 +2953,603 @@
         </p:sp>
         <p:sp>
           <p:nvSpPr>
-            <p:cNvPr id="20" name="pl20"/>
+            <p:cNvPr id="20" name="pg20"/>
             <p:cNvSpPr/>
             <p:nvPr/>
           </p:nvSpPr>
           <p:spPr>
             <a:xfrm>
-              <a:off x="7819515" y="2073503"/>
-              <a:ext cx="0" cy="3649639"/>
+              <a:off x="1172049" y="2073503"/>
+              <a:ext cx="7090630" cy="3355920"/>
             </a:xfrm>
             <a:custGeom>
               <a:avLst/>
               <a:pathLst>
-                <a:path w="0" h="3649639">
+                <a:path w="7090630" h="3355920">
                   <a:moveTo>
-                    <a:pt x="0" y="3649639"/>
+                    <a:pt x="384960" y="0"/>
                   </a:moveTo>
                   <a:lnTo>
-                    <a:pt x="0" y="0"/>
-                  </a:lnTo>
-                  <a:lnTo>
-                    <a:pt x="0" y="0"/>
-                  </a:lnTo>
-                </a:path>
-              </a:pathLst>
-            </a:custGeom>
-            <a:ln w="13550" cap="flat">
-              <a:solidFill>
-                <a:srgbClr val="EBEBEB">
-                  <a:alpha val="100000"/>
-                </a:srgbClr>
-              </a:solidFill>
-              <a:prstDash val="solid"/>
-              <a:round/>
-            </a:ln>
-          </p:spPr>
-          <p:txBody>
-            <a:bodyPr/>
-            <a:lstStyle/>
-            <a:p/>
-          </p:txBody>
-        </p:sp>
-        <p:sp>
-          <p:nvSpPr>
-            <p:cNvPr id="21" name="pg21"/>
-            <p:cNvSpPr/>
-            <p:nvPr/>
-          </p:nvSpPr>
-          <p:spPr>
-            <a:xfrm>
-              <a:off x="817517" y="2073503"/>
-              <a:ext cx="7392041" cy="3355920"/>
-            </a:xfrm>
-            <a:custGeom>
-              <a:avLst/>
-              <a:pathLst>
-                <a:path w="7392041" h="3355920">
-                  <a:moveTo>
-                    <a:pt x="160100" y="0"/>
-                  </a:moveTo>
-                  <a:lnTo>
-                    <a:pt x="208389" y="76534"/>
-                  </a:lnTo>
-                  <a:lnTo>
-                    <a:pt x="285632" y="194713"/>
-                  </a:lnTo>
-                  <a:lnTo>
-                    <a:pt x="362876" y="308793"/>
-                  </a:lnTo>
-                  <a:lnTo>
-                    <a:pt x="440119" y="418916"/>
-                  </a:lnTo>
-                  <a:lnTo>
-                    <a:pt x="517363" y="525220"/>
-                  </a:lnTo>
-                  <a:lnTo>
-                    <a:pt x="594606" y="627836"/>
-                  </a:lnTo>
-                  <a:lnTo>
-                    <a:pt x="671850" y="726894"/>
-                  </a:lnTo>
-                  <a:lnTo>
-                    <a:pt x="749094" y="822515"/>
-                  </a:lnTo>
-                  <a:lnTo>
-                    <a:pt x="826337" y="914820"/>
-                  </a:lnTo>
-                  <a:lnTo>
-                    <a:pt x="903581" y="1003923"/>
-                  </a:lnTo>
-                  <a:lnTo>
-                    <a:pt x="980824" y="1089936"/>
-                  </a:lnTo>
-                  <a:lnTo>
-                    <a:pt x="1058068" y="1172965"/>
-                  </a:lnTo>
-                  <a:lnTo>
-                    <a:pt x="1135311" y="1253114"/>
-                  </a:lnTo>
-                  <a:lnTo>
-                    <a:pt x="1212555" y="1330484"/>
-                  </a:lnTo>
-                  <a:lnTo>
-                    <a:pt x="1289799" y="1405170"/>
-                  </a:lnTo>
-                  <a:lnTo>
-                    <a:pt x="1367042" y="1477265"/>
-                  </a:lnTo>
-                  <a:lnTo>
-                    <a:pt x="1444286" y="1546860"/>
-                  </a:lnTo>
-                  <a:lnTo>
-                    <a:pt x="1521529" y="1614041"/>
-                  </a:lnTo>
-                  <a:lnTo>
-                    <a:pt x="1598773" y="1678892"/>
-                  </a:lnTo>
-                  <a:lnTo>
-                    <a:pt x="1676016" y="1741493"/>
-                  </a:lnTo>
-                  <a:lnTo>
-                    <a:pt x="1753260" y="1801923"/>
-                  </a:lnTo>
-                  <a:lnTo>
-                    <a:pt x="1830504" y="1860257"/>
-                  </a:lnTo>
-                  <a:lnTo>
-                    <a:pt x="1907747" y="1916568"/>
-                  </a:lnTo>
-                  <a:lnTo>
-                    <a:pt x="1984991" y="1970926"/>
-                  </a:lnTo>
-                  <a:lnTo>
-                    <a:pt x="2062234" y="2023398"/>
-                  </a:lnTo>
-                  <a:lnTo>
-                    <a:pt x="2139478" y="2074050"/>
-                  </a:lnTo>
-                  <a:lnTo>
-                    <a:pt x="2216721" y="2122945"/>
-                  </a:lnTo>
-                  <a:lnTo>
-                    <a:pt x="2293965" y="2170145"/>
-                  </a:lnTo>
-                  <a:lnTo>
-                    <a:pt x="2371209" y="2215707"/>
-                  </a:lnTo>
-                  <a:lnTo>
-                    <a:pt x="2448452" y="2259689"/>
-                  </a:lnTo>
-                  <a:lnTo>
-                    <a:pt x="2525696" y="2302145"/>
-                  </a:lnTo>
-                  <a:lnTo>
-                    <a:pt x="2602939" y="2343129"/>
-                  </a:lnTo>
-                  <a:lnTo>
-                    <a:pt x="2680183" y="2382691"/>
-                  </a:lnTo>
-                  <a:lnTo>
-                    <a:pt x="2757426" y="2420882"/>
-                  </a:lnTo>
-                  <a:lnTo>
-                    <a:pt x="2834670" y="2457747"/>
-                  </a:lnTo>
-                  <a:lnTo>
-                    <a:pt x="2911914" y="2493334"/>
-                  </a:lnTo>
-                  <a:lnTo>
-                    <a:pt x="2989157" y="2527686"/>
-                  </a:lnTo>
-                  <a:lnTo>
-                    <a:pt x="3066401" y="2560847"/>
-                  </a:lnTo>
-                  <a:lnTo>
-                    <a:pt x="3143644" y="2592858"/>
-                  </a:lnTo>
-                  <a:lnTo>
-                    <a:pt x="3220888" y="2623758"/>
-                  </a:lnTo>
-                  <a:lnTo>
-                    <a:pt x="3298131" y="2653587"/>
-                  </a:lnTo>
-                  <a:lnTo>
-                    <a:pt x="3375375" y="2648941"/>
-                  </a:lnTo>
-                  <a:lnTo>
-                    <a:pt x="3452619" y="2643434"/>
-                  </a:lnTo>
-                  <a:lnTo>
-                    <a:pt x="3529862" y="2637890"/>
-                  </a:lnTo>
-                  <a:lnTo>
-                    <a:pt x="3607106" y="2632310"/>
-                  </a:lnTo>
-                  <a:lnTo>
-                    <a:pt x="3684349" y="2626693"/>
-                  </a:lnTo>
-                  <a:lnTo>
-                    <a:pt x="3761593" y="2621039"/>
-                  </a:lnTo>
-                  <a:lnTo>
-                    <a:pt x="3838836" y="2615348"/>
-                  </a:lnTo>
-                  <a:lnTo>
-                    <a:pt x="3916080" y="2609619"/>
-                  </a:lnTo>
-                  <a:lnTo>
-                    <a:pt x="3993324" y="2603852"/>
-                  </a:lnTo>
-                  <a:lnTo>
-                    <a:pt x="4070567" y="2598047"/>
-                  </a:lnTo>
-                  <a:lnTo>
-                    <a:pt x="4147811" y="2592204"/>
-                  </a:lnTo>
-                  <a:lnTo>
-                    <a:pt x="4225054" y="2586323"/>
-                  </a:lnTo>
-                  <a:lnTo>
-                    <a:pt x="4302298" y="2580402"/>
-                  </a:lnTo>
-                  <a:lnTo>
-                    <a:pt x="4379541" y="2574443"/>
-                  </a:lnTo>
-                  <a:lnTo>
-                    <a:pt x="4456785" y="2568444"/>
-                  </a:lnTo>
-                  <a:lnTo>
-                    <a:pt x="4534029" y="2562406"/>
-                  </a:lnTo>
-                  <a:lnTo>
-                    <a:pt x="4611272" y="2556328"/>
-                  </a:lnTo>
-                  <a:lnTo>
-                    <a:pt x="4688516" y="2550210"/>
-                  </a:lnTo>
-                  <a:lnTo>
-                    <a:pt x="4765759" y="2544051"/>
-                  </a:lnTo>
-                  <a:lnTo>
-                    <a:pt x="4843003" y="2537852"/>
-                  </a:lnTo>
-                  <a:lnTo>
-                    <a:pt x="4920246" y="2531612"/>
-                  </a:lnTo>
-                  <a:lnTo>
-                    <a:pt x="4997490" y="2525330"/>
-                  </a:lnTo>
-                  <a:lnTo>
-                    <a:pt x="5074734" y="2519008"/>
-                  </a:lnTo>
-                  <a:lnTo>
-                    <a:pt x="5151977" y="2512643"/>
-                  </a:lnTo>
-                  <a:lnTo>
-                    <a:pt x="5229221" y="2506237"/>
-                  </a:lnTo>
-                  <a:lnTo>
-                    <a:pt x="5306464" y="2499788"/>
-                  </a:lnTo>
-                  <a:lnTo>
-                    <a:pt x="5383708" y="2493297"/>
-                  </a:lnTo>
-                  <a:lnTo>
-                    <a:pt x="5460951" y="2486763"/>
-                  </a:lnTo>
-                  <a:lnTo>
-                    <a:pt x="5538195" y="2480185"/>
-                  </a:lnTo>
-                  <a:lnTo>
-                    <a:pt x="5615439" y="2473565"/>
-                  </a:lnTo>
-                  <a:lnTo>
-                    <a:pt x="5692682" y="2466901"/>
-                  </a:lnTo>
-                  <a:lnTo>
-                    <a:pt x="5769926" y="2460192"/>
-                  </a:lnTo>
-                  <a:lnTo>
-                    <a:pt x="5847169" y="2453440"/>
-                  </a:lnTo>
-                  <a:lnTo>
-                    <a:pt x="5924413" y="2446643"/>
-                  </a:lnTo>
-                  <a:lnTo>
-                    <a:pt x="6001656" y="2439801"/>
-                  </a:lnTo>
-                  <a:lnTo>
-                    <a:pt x="6078900" y="2432914"/>
-                  </a:lnTo>
-                  <a:lnTo>
-                    <a:pt x="6156144" y="2425982"/>
-                  </a:lnTo>
-                  <a:lnTo>
-                    <a:pt x="6233387" y="2419003"/>
-                  </a:lnTo>
-                  <a:lnTo>
-                    <a:pt x="6310631" y="2411979"/>
-                  </a:lnTo>
-                  <a:lnTo>
-                    <a:pt x="6387874" y="2404909"/>
-                  </a:lnTo>
-                  <a:lnTo>
-                    <a:pt x="6465118" y="2397792"/>
-                  </a:lnTo>
-                  <a:lnTo>
-                    <a:pt x="6542361" y="2390627"/>
-                  </a:lnTo>
-                  <a:lnTo>
-                    <a:pt x="6619605" y="2383416"/>
-                  </a:lnTo>
-                  <a:lnTo>
-                    <a:pt x="6696849" y="2376157"/>
-                  </a:lnTo>
-                  <a:lnTo>
-                    <a:pt x="6774092" y="2368850"/>
-                  </a:lnTo>
-                  <a:lnTo>
-                    <a:pt x="6851336" y="2361495"/>
-                  </a:lnTo>
-                  <a:lnTo>
-                    <a:pt x="6928579" y="2354092"/>
-                  </a:lnTo>
-                  <a:lnTo>
-                    <a:pt x="7005823" y="2346639"/>
-                  </a:lnTo>
-                  <a:lnTo>
-                    <a:pt x="7083066" y="2339138"/>
-                  </a:lnTo>
-                  <a:lnTo>
-                    <a:pt x="7160310" y="2331586"/>
-                  </a:lnTo>
-                  <a:lnTo>
-                    <a:pt x="7237554" y="2323986"/>
-                  </a:lnTo>
-                  <a:lnTo>
-                    <a:pt x="7314797" y="2316335"/>
-                  </a:lnTo>
-                  <a:lnTo>
-                    <a:pt x="7392041" y="2308633"/>
-                  </a:lnTo>
-                  <a:lnTo>
-                    <a:pt x="7392041" y="3355920"/>
-                  </a:lnTo>
-                  <a:lnTo>
-                    <a:pt x="7314797" y="3351327"/>
-                  </a:lnTo>
-                  <a:lnTo>
-                    <a:pt x="7237554" y="3346569"/>
-                  </a:lnTo>
-                  <a:lnTo>
-                    <a:pt x="7160310" y="3341640"/>
-                  </a:lnTo>
-                  <a:lnTo>
-                    <a:pt x="7083066" y="3336534"/>
-                  </a:lnTo>
-                  <a:lnTo>
-                    <a:pt x="7005823" y="3331244"/>
-                  </a:lnTo>
-                  <a:lnTo>
-                    <a:pt x="6928579" y="3325765"/>
-                  </a:lnTo>
-                  <a:lnTo>
-                    <a:pt x="6851336" y="3320088"/>
-                  </a:lnTo>
-                  <a:lnTo>
-                    <a:pt x="6774092" y="3314208"/>
-                  </a:lnTo>
-                  <a:lnTo>
-                    <a:pt x="6696849" y="3308116"/>
-                  </a:lnTo>
-                  <a:lnTo>
-                    <a:pt x="6619605" y="3301805"/>
-                  </a:lnTo>
-                  <a:lnTo>
-                    <a:pt x="6542361" y="3295268"/>
-                  </a:lnTo>
-                  <a:lnTo>
-                    <a:pt x="6465118" y="3288496"/>
-                  </a:lnTo>
-                  <a:lnTo>
-                    <a:pt x="6387874" y="3281480"/>
-                  </a:lnTo>
-                  <a:lnTo>
-                    <a:pt x="6310631" y="3274212"/>
-                  </a:lnTo>
-                  <a:lnTo>
-                    <a:pt x="6233387" y="3266684"/>
-                  </a:lnTo>
-                  <a:lnTo>
-                    <a:pt x="6156144" y="3258884"/>
-                  </a:lnTo>
-                  <a:lnTo>
-                    <a:pt x="6078900" y="3250805"/>
-                  </a:lnTo>
-                  <a:lnTo>
-                    <a:pt x="6001656" y="3242435"/>
-                  </a:lnTo>
-                  <a:lnTo>
-                    <a:pt x="5924413" y="3233764"/>
-                  </a:lnTo>
-                  <a:lnTo>
-                    <a:pt x="5847169" y="3224782"/>
-                  </a:lnTo>
-                  <a:lnTo>
-                    <a:pt x="5769926" y="3215477"/>
-                  </a:lnTo>
-                  <a:lnTo>
-                    <a:pt x="5692682" y="3205838"/>
-                  </a:lnTo>
-                  <a:lnTo>
-                    <a:pt x="5615439" y="3195852"/>
-                  </a:lnTo>
-                  <a:lnTo>
-                    <a:pt x="5538195" y="3185508"/>
-                  </a:lnTo>
-                  <a:lnTo>
-                    <a:pt x="5460951" y="3174792"/>
-                  </a:lnTo>
-                  <a:lnTo>
-                    <a:pt x="5383708" y="3163690"/>
-                  </a:lnTo>
-                  <a:lnTo>
-                    <a:pt x="5306464" y="3152190"/>
-                  </a:lnTo>
-                  <a:lnTo>
-                    <a:pt x="5229221" y="3140277"/>
-                  </a:lnTo>
-                  <a:lnTo>
-                    <a:pt x="5151977" y="3127936"/>
-                  </a:lnTo>
-                  <a:lnTo>
-                    <a:pt x="5074734" y="3115151"/>
-                  </a:lnTo>
-                  <a:lnTo>
-                    <a:pt x="4997490" y="3101907"/>
-                  </a:lnTo>
-                  <a:lnTo>
-                    <a:pt x="4920246" y="3088187"/>
-                  </a:lnTo>
-                  <a:lnTo>
-                    <a:pt x="4843003" y="3073974"/>
-                  </a:lnTo>
-                  <a:lnTo>
-                    <a:pt x="4765759" y="3059251"/>
-                  </a:lnTo>
-                  <a:lnTo>
-                    <a:pt x="4688516" y="3043998"/>
-                  </a:lnTo>
-                  <a:lnTo>
-                    <a:pt x="4611272" y="3028197"/>
-                  </a:lnTo>
-                  <a:lnTo>
-                    <a:pt x="4534029" y="3011829"/>
-                  </a:lnTo>
-                  <a:lnTo>
-                    <a:pt x="4456785" y="2994872"/>
-                  </a:lnTo>
-                  <a:lnTo>
-                    <a:pt x="4379541" y="2977306"/>
-                  </a:lnTo>
-                  <a:lnTo>
-                    <a:pt x="4302298" y="2959109"/>
-                  </a:lnTo>
-                  <a:lnTo>
-                    <a:pt x="4225054" y="2940258"/>
-                  </a:lnTo>
-                  <a:lnTo>
-                    <a:pt x="4147811" y="2920730"/>
-                  </a:lnTo>
-                  <a:lnTo>
-                    <a:pt x="4070567" y="2900500"/>
-                  </a:lnTo>
-                  <a:lnTo>
-                    <a:pt x="3993324" y="2879543"/>
-                  </a:lnTo>
-                  <a:lnTo>
-                    <a:pt x="3916080" y="2857834"/>
-                  </a:lnTo>
-                  <a:lnTo>
-                    <a:pt x="3838836" y="2835344"/>
-                  </a:lnTo>
-                  <a:lnTo>
-                    <a:pt x="3761593" y="2812046"/>
-                  </a:lnTo>
-                  <a:lnTo>
-                    <a:pt x="3684349" y="2787911"/>
-                  </a:lnTo>
-                  <a:lnTo>
-                    <a:pt x="3607106" y="2762908"/>
-                  </a:lnTo>
-                  <a:lnTo>
-                    <a:pt x="3529862" y="2737008"/>
-                  </a:lnTo>
-                  <a:lnTo>
-                    <a:pt x="3452619" y="2710177"/>
-                  </a:lnTo>
-                  <a:lnTo>
-                    <a:pt x="3375375" y="2682381"/>
-                  </a:lnTo>
-                  <a:lnTo>
-                    <a:pt x="3298131" y="2654412"/>
-                  </a:lnTo>
-                  <a:lnTo>
-                    <a:pt x="3220888" y="2659848"/>
-                  </a:lnTo>
-                  <a:lnTo>
-                    <a:pt x="3143644" y="2665247"/>
-                  </a:lnTo>
-                  <a:lnTo>
-                    <a:pt x="3066401" y="2670612"/>
-                  </a:lnTo>
-                  <a:lnTo>
-                    <a:pt x="2989157" y="2675941"/>
-                  </a:lnTo>
-                  <a:lnTo>
-                    <a:pt x="2911914" y="2681235"/>
-                  </a:lnTo>
-                  <a:lnTo>
-                    <a:pt x="2834670" y="2686495"/>
-                  </a:lnTo>
-                  <a:lnTo>
-                    <a:pt x="2757426" y="2691720"/>
-                  </a:lnTo>
-                  <a:lnTo>
-                    <a:pt x="2680183" y="2696911"/>
-                  </a:lnTo>
-                  <a:lnTo>
-                    <a:pt x="2602939" y="2702067"/>
-                  </a:lnTo>
-                  <a:lnTo>
-                    <a:pt x="2525696" y="2707190"/>
-                  </a:lnTo>
-                  <a:lnTo>
-                    <a:pt x="2448452" y="2712280"/>
-                  </a:lnTo>
-                  <a:lnTo>
-                    <a:pt x="2371209" y="2717336"/>
-                  </a:lnTo>
-                  <a:lnTo>
-                    <a:pt x="2293965" y="2722359"/>
-                  </a:lnTo>
-                  <a:lnTo>
-                    <a:pt x="2216721" y="2727349"/>
-                  </a:lnTo>
-                  <a:lnTo>
-                    <a:pt x="2139478" y="2732306"/>
-                  </a:lnTo>
-                  <a:lnTo>
-                    <a:pt x="2062234" y="2737231"/>
-                  </a:lnTo>
-                  <a:lnTo>
-                    <a:pt x="1984991" y="2742123"/>
-                  </a:lnTo>
-                  <a:lnTo>
-                    <a:pt x="1907747" y="2746984"/>
-                  </a:lnTo>
-                  <a:lnTo>
-                    <a:pt x="1830504" y="2751813"/>
-                  </a:lnTo>
-                  <a:lnTo>
-                    <a:pt x="1753260" y="2756610"/>
-                  </a:lnTo>
-                  <a:lnTo>
-                    <a:pt x="1676016" y="2761375"/>
-                  </a:lnTo>
-                  <a:lnTo>
-                    <a:pt x="1598773" y="2766109"/>
-                  </a:lnTo>
-                  <a:lnTo>
-                    <a:pt x="1521529" y="2770813"/>
-                  </a:lnTo>
-                  <a:lnTo>
-                    <a:pt x="1444286" y="2775485"/>
-                  </a:lnTo>
-                  <a:lnTo>
-                    <a:pt x="1367042" y="2780127"/>
-                  </a:lnTo>
-                  <a:lnTo>
-                    <a:pt x="1289799" y="2784738"/>
-                  </a:lnTo>
-                  <a:lnTo>
-                    <a:pt x="1212555" y="2789320"/>
-                  </a:lnTo>
-                  <a:lnTo>
-                    <a:pt x="1135311" y="2793871"/>
-                  </a:lnTo>
-                  <a:lnTo>
-                    <a:pt x="1058068" y="2798392"/>
-                  </a:lnTo>
-                  <a:lnTo>
-                    <a:pt x="980824" y="2802884"/>
-                  </a:lnTo>
-                  <a:lnTo>
-                    <a:pt x="903581" y="2807346"/>
-                  </a:lnTo>
-                  <a:lnTo>
-                    <a:pt x="826337" y="2811779"/>
-                  </a:lnTo>
-                  <a:lnTo>
-                    <a:pt x="749094" y="2816183"/>
-                  </a:lnTo>
-                  <a:lnTo>
-                    <a:pt x="671850" y="2820558"/>
-                  </a:lnTo>
-                  <a:lnTo>
-                    <a:pt x="594606" y="2824905"/>
-                  </a:lnTo>
-                  <a:lnTo>
-                    <a:pt x="517363" y="2829223"/>
-                  </a:lnTo>
-                  <a:lnTo>
-                    <a:pt x="440119" y="2833512"/>
-                  </a:lnTo>
-                  <a:lnTo>
-                    <a:pt x="362876" y="2837774"/>
-                  </a:lnTo>
-                  <a:lnTo>
-                    <a:pt x="285632" y="2842007"/>
-                  </a:lnTo>
-                  <a:lnTo>
-                    <a:pt x="208389" y="2846213"/>
-                  </a:lnTo>
-                  <a:lnTo>
-                    <a:pt x="131145" y="2850391"/>
-                  </a:lnTo>
-                  <a:lnTo>
-                    <a:pt x="53901" y="2854542"/>
-                  </a:lnTo>
-                  <a:lnTo>
-                    <a:pt x="0" y="2857420"/>
+                    <a:pt x="429735" y="76534"/>
+                  </a:lnTo>
+                  <a:lnTo>
+                    <a:pt x="501357" y="194713"/>
+                  </a:lnTo>
+                  <a:lnTo>
+                    <a:pt x="572980" y="308793"/>
+                  </a:lnTo>
+                  <a:lnTo>
+                    <a:pt x="644602" y="418916"/>
+                  </a:lnTo>
+                  <a:lnTo>
+                    <a:pt x="716225" y="525220"/>
+                  </a:lnTo>
+                  <a:lnTo>
+                    <a:pt x="787847" y="627836"/>
+                  </a:lnTo>
+                  <a:lnTo>
+                    <a:pt x="859470" y="726894"/>
+                  </a:lnTo>
+                  <a:lnTo>
+                    <a:pt x="931092" y="822515"/>
+                  </a:lnTo>
+                  <a:lnTo>
+                    <a:pt x="1002715" y="914820"/>
+                  </a:lnTo>
+                  <a:lnTo>
+                    <a:pt x="1074337" y="1003923"/>
+                  </a:lnTo>
+                  <a:lnTo>
+                    <a:pt x="1145960" y="1089936"/>
+                  </a:lnTo>
+                  <a:lnTo>
+                    <a:pt x="1217582" y="1172965"/>
+                  </a:lnTo>
+                  <a:lnTo>
+                    <a:pt x="1289205" y="1253114"/>
+                  </a:lnTo>
+                  <a:lnTo>
+                    <a:pt x="1360827" y="1330484"/>
+                  </a:lnTo>
+                  <a:lnTo>
+                    <a:pt x="1432450" y="1405170"/>
+                  </a:lnTo>
+                  <a:lnTo>
+                    <a:pt x="1504073" y="1477265"/>
+                  </a:lnTo>
+                  <a:lnTo>
+                    <a:pt x="1575695" y="1546860"/>
+                  </a:lnTo>
+                  <a:lnTo>
+                    <a:pt x="1647318" y="1614041"/>
+                  </a:lnTo>
+                  <a:lnTo>
+                    <a:pt x="1718940" y="1678892"/>
+                  </a:lnTo>
+                  <a:lnTo>
+                    <a:pt x="1790563" y="1741493"/>
+                  </a:lnTo>
+                  <a:lnTo>
+                    <a:pt x="1862185" y="1801923"/>
+                  </a:lnTo>
+                  <a:lnTo>
+                    <a:pt x="1933808" y="1860257"/>
+                  </a:lnTo>
+                  <a:lnTo>
+                    <a:pt x="2005430" y="1916568"/>
+                  </a:lnTo>
+                  <a:lnTo>
+                    <a:pt x="2077053" y="1970926"/>
+                  </a:lnTo>
+                  <a:lnTo>
+                    <a:pt x="2148675" y="2023398"/>
+                  </a:lnTo>
+                  <a:lnTo>
+                    <a:pt x="2220298" y="2074050"/>
+                  </a:lnTo>
+                  <a:lnTo>
+                    <a:pt x="2291920" y="2122945"/>
+                  </a:lnTo>
+                  <a:lnTo>
+                    <a:pt x="2363543" y="2170145"/>
+                  </a:lnTo>
+                  <a:lnTo>
+                    <a:pt x="2435165" y="2215707"/>
+                  </a:lnTo>
+                  <a:lnTo>
+                    <a:pt x="2506788" y="2259689"/>
+                  </a:lnTo>
+                  <a:lnTo>
+                    <a:pt x="2578410" y="2302145"/>
+                  </a:lnTo>
+                  <a:lnTo>
+                    <a:pt x="2650033" y="2343129"/>
+                  </a:lnTo>
+                  <a:lnTo>
+                    <a:pt x="2721655" y="2382691"/>
+                  </a:lnTo>
+                  <a:lnTo>
+                    <a:pt x="2793278" y="2420882"/>
+                  </a:lnTo>
+                  <a:lnTo>
+                    <a:pt x="2864901" y="2457747"/>
+                  </a:lnTo>
+                  <a:lnTo>
+                    <a:pt x="2936523" y="2493334"/>
+                  </a:lnTo>
+                  <a:lnTo>
+                    <a:pt x="3008146" y="2527686"/>
+                  </a:lnTo>
+                  <a:lnTo>
+                    <a:pt x="3079768" y="2560847"/>
+                  </a:lnTo>
+                  <a:lnTo>
+                    <a:pt x="3151391" y="2592858"/>
+                  </a:lnTo>
+                  <a:lnTo>
+                    <a:pt x="3223013" y="2623758"/>
+                  </a:lnTo>
+                  <a:lnTo>
+                    <a:pt x="3294636" y="2653587"/>
+                  </a:lnTo>
+                  <a:lnTo>
+                    <a:pt x="3366258" y="2648941"/>
+                  </a:lnTo>
+                  <a:lnTo>
+                    <a:pt x="3437881" y="2643434"/>
+                  </a:lnTo>
+                  <a:lnTo>
+                    <a:pt x="3509503" y="2637890"/>
+                  </a:lnTo>
+                  <a:lnTo>
+                    <a:pt x="3581126" y="2632310"/>
+                  </a:lnTo>
+                  <a:lnTo>
+                    <a:pt x="3652748" y="2626693"/>
+                  </a:lnTo>
+                  <a:lnTo>
+                    <a:pt x="3724371" y="2621039"/>
+                  </a:lnTo>
+                  <a:lnTo>
+                    <a:pt x="3795993" y="2615348"/>
+                  </a:lnTo>
+                  <a:lnTo>
+                    <a:pt x="3867616" y="2609619"/>
+                  </a:lnTo>
+                  <a:lnTo>
+                    <a:pt x="3939238" y="2603852"/>
+                  </a:lnTo>
+                  <a:lnTo>
+                    <a:pt x="4010861" y="2598047"/>
+                  </a:lnTo>
+                  <a:lnTo>
+                    <a:pt x="4082483" y="2592204"/>
+                  </a:lnTo>
+                  <a:lnTo>
+                    <a:pt x="4154106" y="2586323"/>
+                  </a:lnTo>
+                  <a:lnTo>
+                    <a:pt x="4225729" y="2580402"/>
+                  </a:lnTo>
+                  <a:lnTo>
+                    <a:pt x="4297351" y="2574443"/>
+                  </a:lnTo>
+                  <a:lnTo>
+                    <a:pt x="4368974" y="2568444"/>
+                  </a:lnTo>
+                  <a:lnTo>
+                    <a:pt x="4440596" y="2562406"/>
+                  </a:lnTo>
+                  <a:lnTo>
+                    <a:pt x="4512219" y="2556328"/>
+                  </a:lnTo>
+                  <a:lnTo>
+                    <a:pt x="4583841" y="2550210"/>
+                  </a:lnTo>
+                  <a:lnTo>
+                    <a:pt x="4655464" y="2544051"/>
+                  </a:lnTo>
+                  <a:lnTo>
+                    <a:pt x="4727086" y="2537852"/>
+                  </a:lnTo>
+                  <a:lnTo>
+                    <a:pt x="4798709" y="2531612"/>
+                  </a:lnTo>
+                  <a:lnTo>
+                    <a:pt x="4870331" y="2525330"/>
+                  </a:lnTo>
+                  <a:lnTo>
+                    <a:pt x="4941954" y="2519008"/>
+                  </a:lnTo>
+                  <a:lnTo>
+                    <a:pt x="5013576" y="2512643"/>
+                  </a:lnTo>
+                  <a:lnTo>
+                    <a:pt x="5085199" y="2506237"/>
+                  </a:lnTo>
+                  <a:lnTo>
+                    <a:pt x="5156821" y="2499788"/>
+                  </a:lnTo>
+                  <a:lnTo>
+                    <a:pt x="5228444" y="2493297"/>
+                  </a:lnTo>
+                  <a:lnTo>
+                    <a:pt x="5300066" y="2486763"/>
+                  </a:lnTo>
+                  <a:lnTo>
+                    <a:pt x="5371689" y="2480185"/>
+                  </a:lnTo>
+                  <a:lnTo>
+                    <a:pt x="5443311" y="2473565"/>
+                  </a:lnTo>
+                  <a:lnTo>
+                    <a:pt x="5514934" y="2466901"/>
+                  </a:lnTo>
+                  <a:lnTo>
+                    <a:pt x="5586557" y="2460192"/>
+                  </a:lnTo>
+                  <a:lnTo>
+                    <a:pt x="5658179" y="2453440"/>
+                  </a:lnTo>
+                  <a:lnTo>
+                    <a:pt x="5729802" y="2446643"/>
+                  </a:lnTo>
+                  <a:lnTo>
+                    <a:pt x="5801424" y="2439801"/>
+                  </a:lnTo>
+                  <a:lnTo>
+                    <a:pt x="5873047" y="2432914"/>
+                  </a:lnTo>
+                  <a:lnTo>
+                    <a:pt x="5944669" y="2425982"/>
+                  </a:lnTo>
+                  <a:lnTo>
+                    <a:pt x="6016292" y="2419003"/>
+                  </a:lnTo>
+                  <a:lnTo>
+                    <a:pt x="6087914" y="2411979"/>
+                  </a:lnTo>
+                  <a:lnTo>
+                    <a:pt x="6159537" y="2404909"/>
+                  </a:lnTo>
+                  <a:lnTo>
+                    <a:pt x="6231159" y="2397792"/>
+                  </a:lnTo>
+                  <a:lnTo>
+                    <a:pt x="6302782" y="2390627"/>
+                  </a:lnTo>
+                  <a:lnTo>
+                    <a:pt x="6374404" y="2383416"/>
+                  </a:lnTo>
+                  <a:lnTo>
+                    <a:pt x="6446027" y="2376157"/>
+                  </a:lnTo>
+                  <a:lnTo>
+                    <a:pt x="6517649" y="2368850"/>
+                  </a:lnTo>
+                  <a:lnTo>
+                    <a:pt x="6589272" y="2361495"/>
+                  </a:lnTo>
+                  <a:lnTo>
+                    <a:pt x="6660894" y="2354092"/>
+                  </a:lnTo>
+                  <a:lnTo>
+                    <a:pt x="6732517" y="2346639"/>
+                  </a:lnTo>
+                  <a:lnTo>
+                    <a:pt x="6804139" y="2339138"/>
+                  </a:lnTo>
+                  <a:lnTo>
+                    <a:pt x="6875762" y="2331586"/>
+                  </a:lnTo>
+                  <a:lnTo>
+                    <a:pt x="6947385" y="2323986"/>
+                  </a:lnTo>
+                  <a:lnTo>
+                    <a:pt x="7019007" y="2316335"/>
+                  </a:lnTo>
+                  <a:lnTo>
+                    <a:pt x="7090630" y="2308633"/>
+                  </a:lnTo>
+                  <a:lnTo>
+                    <a:pt x="7090630" y="3355920"/>
+                  </a:lnTo>
+                  <a:lnTo>
+                    <a:pt x="7019007" y="3351327"/>
+                  </a:lnTo>
+                  <a:lnTo>
+                    <a:pt x="6947385" y="3346569"/>
+                  </a:lnTo>
+                  <a:lnTo>
+                    <a:pt x="6875762" y="3341640"/>
+                  </a:lnTo>
+                  <a:lnTo>
+                    <a:pt x="6804139" y="3336534"/>
+                  </a:lnTo>
+                  <a:lnTo>
+                    <a:pt x="6732517" y="3331244"/>
+                  </a:lnTo>
+                  <a:lnTo>
+                    <a:pt x="6660894" y="3325765"/>
+                  </a:lnTo>
+                  <a:lnTo>
+                    <a:pt x="6589272" y="3320088"/>
+                  </a:lnTo>
+                  <a:lnTo>
+                    <a:pt x="6517649" y="3314208"/>
+                  </a:lnTo>
+                  <a:lnTo>
+                    <a:pt x="6446027" y="3308116"/>
+                  </a:lnTo>
+                  <a:lnTo>
+                    <a:pt x="6374404" y="3301805"/>
+                  </a:lnTo>
+                  <a:lnTo>
+                    <a:pt x="6302782" y="3295268"/>
+                  </a:lnTo>
+                  <a:lnTo>
+                    <a:pt x="6231159" y="3288496"/>
+                  </a:lnTo>
+                  <a:lnTo>
+                    <a:pt x="6159537" y="3281480"/>
+                  </a:lnTo>
+                  <a:lnTo>
+                    <a:pt x="6087914" y="3274212"/>
+                  </a:lnTo>
+                  <a:lnTo>
+                    <a:pt x="6016292" y="3266684"/>
+                  </a:lnTo>
+                  <a:lnTo>
+                    <a:pt x="5944669" y="3258884"/>
+                  </a:lnTo>
+                  <a:lnTo>
+                    <a:pt x="5873047" y="3250805"/>
+                  </a:lnTo>
+                  <a:lnTo>
+                    <a:pt x="5801424" y="3242435"/>
+                  </a:lnTo>
+                  <a:lnTo>
+                    <a:pt x="5729802" y="3233764"/>
+                  </a:lnTo>
+                  <a:lnTo>
+                    <a:pt x="5658179" y="3224782"/>
+                  </a:lnTo>
+                  <a:lnTo>
+                    <a:pt x="5586557" y="3215477"/>
+                  </a:lnTo>
+                  <a:lnTo>
+                    <a:pt x="5514934" y="3205838"/>
+                  </a:lnTo>
+                  <a:lnTo>
+                    <a:pt x="5443311" y="3195852"/>
+                  </a:lnTo>
+                  <a:lnTo>
+                    <a:pt x="5371689" y="3185508"/>
+                  </a:lnTo>
+                  <a:lnTo>
+                    <a:pt x="5300066" y="3174792"/>
+                  </a:lnTo>
+                  <a:lnTo>
+                    <a:pt x="5228444" y="3163690"/>
+                  </a:lnTo>
+                  <a:lnTo>
+                    <a:pt x="5156821" y="3152190"/>
+                  </a:lnTo>
+                  <a:lnTo>
+                    <a:pt x="5085199" y="3140277"/>
+                  </a:lnTo>
+                  <a:lnTo>
+                    <a:pt x="5013576" y="3127936"/>
+                  </a:lnTo>
+                  <a:lnTo>
+                    <a:pt x="4941954" y="3115151"/>
+                  </a:lnTo>
+                  <a:lnTo>
+                    <a:pt x="4870331" y="3101907"/>
+                  </a:lnTo>
+                  <a:lnTo>
+                    <a:pt x="4798709" y="3088187"/>
+                  </a:lnTo>
+                  <a:lnTo>
+                    <a:pt x="4727086" y="3073974"/>
+                  </a:lnTo>
+                  <a:lnTo>
+                    <a:pt x="4655464" y="3059251"/>
+                  </a:lnTo>
+                  <a:lnTo>
+                    <a:pt x="4583841" y="3043998"/>
+                  </a:lnTo>
+                  <a:lnTo>
+                    <a:pt x="4512219" y="3028197"/>
+                  </a:lnTo>
+                  <a:lnTo>
+                    <a:pt x="4440596" y="3011829"/>
+                  </a:lnTo>
+                  <a:lnTo>
+                    <a:pt x="4368974" y="2994872"/>
+                  </a:lnTo>
+                  <a:lnTo>
+                    <a:pt x="4297351" y="2977306"/>
+                  </a:lnTo>
+                  <a:lnTo>
+                    <a:pt x="4225729" y="2959109"/>
+                  </a:lnTo>
+                  <a:lnTo>
+                    <a:pt x="4154106" y="2940258"/>
+                  </a:lnTo>
+                  <a:lnTo>
+                    <a:pt x="4082483" y="2920730"/>
+                  </a:lnTo>
+                  <a:lnTo>
+                    <a:pt x="4010861" y="2900500"/>
+                  </a:lnTo>
+                  <a:lnTo>
+                    <a:pt x="3939238" y="2879543"/>
+                  </a:lnTo>
+                  <a:lnTo>
+                    <a:pt x="3867616" y="2857834"/>
+                  </a:lnTo>
+                  <a:lnTo>
+                    <a:pt x="3795993" y="2835344"/>
+                  </a:lnTo>
+                  <a:lnTo>
+                    <a:pt x="3724371" y="2812046"/>
+                  </a:lnTo>
+                  <a:lnTo>
+                    <a:pt x="3652748" y="2787911"/>
+                  </a:lnTo>
+                  <a:lnTo>
+                    <a:pt x="3581126" y="2762908"/>
+                  </a:lnTo>
+                  <a:lnTo>
+                    <a:pt x="3509503" y="2737008"/>
+                  </a:lnTo>
+                  <a:lnTo>
+                    <a:pt x="3437881" y="2710177"/>
+                  </a:lnTo>
+                  <a:lnTo>
+                    <a:pt x="3366258" y="2682381"/>
+                  </a:lnTo>
+                  <a:lnTo>
+                    <a:pt x="3294636" y="2654412"/>
+                  </a:lnTo>
+                  <a:lnTo>
+                    <a:pt x="3223013" y="2659848"/>
+                  </a:lnTo>
+                  <a:lnTo>
+                    <a:pt x="3151391" y="2665247"/>
+                  </a:lnTo>
+                  <a:lnTo>
+                    <a:pt x="3079768" y="2670612"/>
+                  </a:lnTo>
+                  <a:lnTo>
+                    <a:pt x="3008146" y="2675941"/>
+                  </a:lnTo>
+                  <a:lnTo>
+                    <a:pt x="2936523" y="2681235"/>
+                  </a:lnTo>
+                  <a:lnTo>
+                    <a:pt x="2864901" y="2686495"/>
+                  </a:lnTo>
+                  <a:lnTo>
+                    <a:pt x="2793278" y="2691720"/>
+                  </a:lnTo>
+                  <a:lnTo>
+                    <a:pt x="2721655" y="2696911"/>
+                  </a:lnTo>
+                  <a:lnTo>
+                    <a:pt x="2650033" y="2702067"/>
+                  </a:lnTo>
+                  <a:lnTo>
+                    <a:pt x="2578410" y="2707190"/>
+                  </a:lnTo>
+                  <a:lnTo>
+                    <a:pt x="2506788" y="2712280"/>
+                  </a:lnTo>
+                  <a:lnTo>
+                    <a:pt x="2435165" y="2717336"/>
+                  </a:lnTo>
+                  <a:lnTo>
+                    <a:pt x="2363543" y="2722359"/>
+                  </a:lnTo>
+                  <a:lnTo>
+                    <a:pt x="2291920" y="2727349"/>
+                  </a:lnTo>
+                  <a:lnTo>
+                    <a:pt x="2220298" y="2732306"/>
+                  </a:lnTo>
+                  <a:lnTo>
+                    <a:pt x="2148675" y="2737231"/>
+                  </a:lnTo>
+                  <a:lnTo>
+                    <a:pt x="2077053" y="2742123"/>
+                  </a:lnTo>
+                  <a:lnTo>
+                    <a:pt x="2005430" y="2746984"/>
+                  </a:lnTo>
+                  <a:lnTo>
+                    <a:pt x="1933808" y="2751813"/>
+                  </a:lnTo>
+                  <a:lnTo>
+                    <a:pt x="1862185" y="2756610"/>
+                  </a:lnTo>
+                  <a:lnTo>
+                    <a:pt x="1790563" y="2761375"/>
+                  </a:lnTo>
+                  <a:lnTo>
+                    <a:pt x="1718940" y="2766109"/>
+                  </a:lnTo>
+                  <a:lnTo>
+                    <a:pt x="1647318" y="2770813"/>
+                  </a:lnTo>
+                  <a:lnTo>
+                    <a:pt x="1575695" y="2775485"/>
+                  </a:lnTo>
+                  <a:lnTo>
+                    <a:pt x="1504073" y="2780127"/>
+                  </a:lnTo>
+                  <a:lnTo>
+                    <a:pt x="1432450" y="2784738"/>
+                  </a:lnTo>
+                  <a:lnTo>
+                    <a:pt x="1360827" y="2789320"/>
+                  </a:lnTo>
+                  <a:lnTo>
+                    <a:pt x="1289205" y="2793871"/>
+                  </a:lnTo>
+                  <a:lnTo>
+                    <a:pt x="1217582" y="2798392"/>
+                  </a:lnTo>
+                  <a:lnTo>
+                    <a:pt x="1145960" y="2802884"/>
+                  </a:lnTo>
+                  <a:lnTo>
+                    <a:pt x="1074337" y="2807346"/>
+                  </a:lnTo>
+                  <a:lnTo>
+                    <a:pt x="1002715" y="2811779"/>
+                  </a:lnTo>
+                  <a:lnTo>
+                    <a:pt x="931092" y="2816183"/>
+                  </a:lnTo>
+                  <a:lnTo>
+                    <a:pt x="859470" y="2820558"/>
+                  </a:lnTo>
+                  <a:lnTo>
+                    <a:pt x="787847" y="2824905"/>
+                  </a:lnTo>
+                  <a:lnTo>
+                    <a:pt x="716225" y="2829223"/>
+                  </a:lnTo>
+                  <a:lnTo>
+                    <a:pt x="644602" y="2833512"/>
+                  </a:lnTo>
+                  <a:lnTo>
+                    <a:pt x="572980" y="2837774"/>
+                  </a:lnTo>
+                  <a:lnTo>
+                    <a:pt x="501357" y="2842007"/>
+                  </a:lnTo>
+                  <a:lnTo>
+                    <a:pt x="429735" y="2846213"/>
+                  </a:lnTo>
+                  <a:lnTo>
+                    <a:pt x="358112" y="2850391"/>
+                  </a:lnTo>
+                  <a:lnTo>
+                    <a:pt x="286490" y="2854542"/>
+                  </a:lnTo>
+                  <a:lnTo>
+                    <a:pt x="214867" y="2858666"/>
+                  </a:lnTo>
+                  <a:lnTo>
+                    <a:pt x="143245" y="2862763"/>
+                  </a:lnTo>
+                  <a:lnTo>
+                    <a:pt x="71622" y="2866833"/>
+                  </a:lnTo>
+                  <a:lnTo>
+                    <a:pt x="0" y="2870876"/>
                   </a:lnTo>
                   <a:close/>
                 </a:path>
@@ -3603,303 +3569,628 @@
         </p:sp>
         <p:sp>
           <p:nvSpPr>
+            <p:cNvPr id="21" name="pl21"/>
+            <p:cNvSpPr/>
+            <p:nvPr/>
+          </p:nvSpPr>
+          <p:spPr>
+            <a:xfrm>
+              <a:off x="1557009" y="2073503"/>
+              <a:ext cx="6705669" cy="2653587"/>
+            </a:xfrm>
+            <a:custGeom>
+              <a:avLst/>
+              <a:pathLst>
+                <a:path w="6705669" h="2653587">
+                  <a:moveTo>
+                    <a:pt x="0" y="0"/>
+                  </a:moveTo>
+                  <a:lnTo>
+                    <a:pt x="44774" y="76534"/>
+                  </a:lnTo>
+                  <a:lnTo>
+                    <a:pt x="116397" y="194713"/>
+                  </a:lnTo>
+                  <a:lnTo>
+                    <a:pt x="188019" y="308793"/>
+                  </a:lnTo>
+                  <a:lnTo>
+                    <a:pt x="259642" y="418916"/>
+                  </a:lnTo>
+                  <a:lnTo>
+                    <a:pt x="331264" y="525220"/>
+                  </a:lnTo>
+                  <a:lnTo>
+                    <a:pt x="402887" y="627836"/>
+                  </a:lnTo>
+                  <a:lnTo>
+                    <a:pt x="474509" y="726894"/>
+                  </a:lnTo>
+                  <a:lnTo>
+                    <a:pt x="546132" y="822515"/>
+                  </a:lnTo>
+                  <a:lnTo>
+                    <a:pt x="617754" y="914820"/>
+                  </a:lnTo>
+                  <a:lnTo>
+                    <a:pt x="689377" y="1003923"/>
+                  </a:lnTo>
+                  <a:lnTo>
+                    <a:pt x="760999" y="1089936"/>
+                  </a:lnTo>
+                  <a:lnTo>
+                    <a:pt x="832622" y="1172965"/>
+                  </a:lnTo>
+                  <a:lnTo>
+                    <a:pt x="904245" y="1253114"/>
+                  </a:lnTo>
+                  <a:lnTo>
+                    <a:pt x="975867" y="1330484"/>
+                  </a:lnTo>
+                  <a:lnTo>
+                    <a:pt x="1047490" y="1405170"/>
+                  </a:lnTo>
+                  <a:lnTo>
+                    <a:pt x="1119112" y="1477265"/>
+                  </a:lnTo>
+                  <a:lnTo>
+                    <a:pt x="1190735" y="1546860"/>
+                  </a:lnTo>
+                  <a:lnTo>
+                    <a:pt x="1262357" y="1614041"/>
+                  </a:lnTo>
+                  <a:lnTo>
+                    <a:pt x="1333980" y="1678892"/>
+                  </a:lnTo>
+                  <a:lnTo>
+                    <a:pt x="1405602" y="1741493"/>
+                  </a:lnTo>
+                  <a:lnTo>
+                    <a:pt x="1477225" y="1801923"/>
+                  </a:lnTo>
+                  <a:lnTo>
+                    <a:pt x="1548847" y="1860257"/>
+                  </a:lnTo>
+                  <a:lnTo>
+                    <a:pt x="1620470" y="1916568"/>
+                  </a:lnTo>
+                  <a:lnTo>
+                    <a:pt x="1692092" y="1970926"/>
+                  </a:lnTo>
+                  <a:lnTo>
+                    <a:pt x="1763715" y="2023398"/>
+                  </a:lnTo>
+                  <a:lnTo>
+                    <a:pt x="1835337" y="2074050"/>
+                  </a:lnTo>
+                  <a:lnTo>
+                    <a:pt x="1906960" y="2122945"/>
+                  </a:lnTo>
+                  <a:lnTo>
+                    <a:pt x="1978582" y="2170145"/>
+                  </a:lnTo>
+                  <a:lnTo>
+                    <a:pt x="2050205" y="2215707"/>
+                  </a:lnTo>
+                  <a:lnTo>
+                    <a:pt x="2121827" y="2259689"/>
+                  </a:lnTo>
+                  <a:lnTo>
+                    <a:pt x="2193450" y="2302145"/>
+                  </a:lnTo>
+                  <a:lnTo>
+                    <a:pt x="2265073" y="2343129"/>
+                  </a:lnTo>
+                  <a:lnTo>
+                    <a:pt x="2336695" y="2382691"/>
+                  </a:lnTo>
+                  <a:lnTo>
+                    <a:pt x="2408318" y="2420882"/>
+                  </a:lnTo>
+                  <a:lnTo>
+                    <a:pt x="2479940" y="2457747"/>
+                  </a:lnTo>
+                  <a:lnTo>
+                    <a:pt x="2551563" y="2493334"/>
+                  </a:lnTo>
+                  <a:lnTo>
+                    <a:pt x="2623185" y="2527686"/>
+                  </a:lnTo>
+                  <a:lnTo>
+                    <a:pt x="2694808" y="2560847"/>
+                  </a:lnTo>
+                  <a:lnTo>
+                    <a:pt x="2766430" y="2592858"/>
+                  </a:lnTo>
+                  <a:lnTo>
+                    <a:pt x="2838053" y="2623758"/>
+                  </a:lnTo>
+                  <a:lnTo>
+                    <a:pt x="2909675" y="2653587"/>
+                  </a:lnTo>
+                  <a:lnTo>
+                    <a:pt x="2981298" y="2648941"/>
+                  </a:lnTo>
+                  <a:lnTo>
+                    <a:pt x="3052920" y="2643434"/>
+                  </a:lnTo>
+                  <a:lnTo>
+                    <a:pt x="3124543" y="2637890"/>
+                  </a:lnTo>
+                  <a:lnTo>
+                    <a:pt x="3196165" y="2632310"/>
+                  </a:lnTo>
+                  <a:lnTo>
+                    <a:pt x="3267788" y="2626693"/>
+                  </a:lnTo>
+                  <a:lnTo>
+                    <a:pt x="3339410" y="2621039"/>
+                  </a:lnTo>
+                  <a:lnTo>
+                    <a:pt x="3411033" y="2615348"/>
+                  </a:lnTo>
+                  <a:lnTo>
+                    <a:pt x="3482655" y="2609619"/>
+                  </a:lnTo>
+                  <a:lnTo>
+                    <a:pt x="3554278" y="2603852"/>
+                  </a:lnTo>
+                  <a:lnTo>
+                    <a:pt x="3625901" y="2598047"/>
+                  </a:lnTo>
+                  <a:lnTo>
+                    <a:pt x="3697523" y="2592204"/>
+                  </a:lnTo>
+                  <a:lnTo>
+                    <a:pt x="3769146" y="2586323"/>
+                  </a:lnTo>
+                  <a:lnTo>
+                    <a:pt x="3840768" y="2580402"/>
+                  </a:lnTo>
+                  <a:lnTo>
+                    <a:pt x="3912391" y="2574443"/>
+                  </a:lnTo>
+                  <a:lnTo>
+                    <a:pt x="3984013" y="2568444"/>
+                  </a:lnTo>
+                  <a:lnTo>
+                    <a:pt x="4055636" y="2562406"/>
+                  </a:lnTo>
+                  <a:lnTo>
+                    <a:pt x="4127258" y="2556328"/>
+                  </a:lnTo>
+                  <a:lnTo>
+                    <a:pt x="4198881" y="2550210"/>
+                  </a:lnTo>
+                  <a:lnTo>
+                    <a:pt x="4270503" y="2544051"/>
+                  </a:lnTo>
+                  <a:lnTo>
+                    <a:pt x="4342126" y="2537852"/>
+                  </a:lnTo>
+                  <a:lnTo>
+                    <a:pt x="4413748" y="2531612"/>
+                  </a:lnTo>
+                  <a:lnTo>
+                    <a:pt x="4485371" y="2525330"/>
+                  </a:lnTo>
+                  <a:lnTo>
+                    <a:pt x="4556993" y="2519008"/>
+                  </a:lnTo>
+                  <a:lnTo>
+                    <a:pt x="4628616" y="2512643"/>
+                  </a:lnTo>
+                  <a:lnTo>
+                    <a:pt x="4700238" y="2506237"/>
+                  </a:lnTo>
+                  <a:lnTo>
+                    <a:pt x="4771861" y="2499788"/>
+                  </a:lnTo>
+                  <a:lnTo>
+                    <a:pt x="4843483" y="2493297"/>
+                  </a:lnTo>
+                  <a:lnTo>
+                    <a:pt x="4915106" y="2486763"/>
+                  </a:lnTo>
+                  <a:lnTo>
+                    <a:pt x="4986729" y="2480185"/>
+                  </a:lnTo>
+                  <a:lnTo>
+                    <a:pt x="5058351" y="2473565"/>
+                  </a:lnTo>
+                  <a:lnTo>
+                    <a:pt x="5129974" y="2466901"/>
+                  </a:lnTo>
+                  <a:lnTo>
+                    <a:pt x="5201596" y="2460192"/>
+                  </a:lnTo>
+                  <a:lnTo>
+                    <a:pt x="5273219" y="2453440"/>
+                  </a:lnTo>
+                  <a:lnTo>
+                    <a:pt x="5344841" y="2446643"/>
+                  </a:lnTo>
+                  <a:lnTo>
+                    <a:pt x="5416464" y="2439801"/>
+                  </a:lnTo>
+                  <a:lnTo>
+                    <a:pt x="5488086" y="2432914"/>
+                  </a:lnTo>
+                  <a:lnTo>
+                    <a:pt x="5559709" y="2425982"/>
+                  </a:lnTo>
+                  <a:lnTo>
+                    <a:pt x="5631331" y="2419003"/>
+                  </a:lnTo>
+                  <a:lnTo>
+                    <a:pt x="5702954" y="2411979"/>
+                  </a:lnTo>
+                  <a:lnTo>
+                    <a:pt x="5774576" y="2404909"/>
+                  </a:lnTo>
+                  <a:lnTo>
+                    <a:pt x="5846199" y="2397792"/>
+                  </a:lnTo>
+                  <a:lnTo>
+                    <a:pt x="5917821" y="2390627"/>
+                  </a:lnTo>
+                  <a:lnTo>
+                    <a:pt x="5989444" y="2383416"/>
+                  </a:lnTo>
+                  <a:lnTo>
+                    <a:pt x="6061066" y="2376157"/>
+                  </a:lnTo>
+                  <a:lnTo>
+                    <a:pt x="6132689" y="2368850"/>
+                  </a:lnTo>
+                  <a:lnTo>
+                    <a:pt x="6204311" y="2361495"/>
+                  </a:lnTo>
+                  <a:lnTo>
+                    <a:pt x="6275934" y="2354092"/>
+                  </a:lnTo>
+                  <a:lnTo>
+                    <a:pt x="6347557" y="2346639"/>
+                  </a:lnTo>
+                  <a:lnTo>
+                    <a:pt x="6419179" y="2339138"/>
+                  </a:lnTo>
+                  <a:lnTo>
+                    <a:pt x="6490802" y="2331586"/>
+                  </a:lnTo>
+                  <a:lnTo>
+                    <a:pt x="6562424" y="2323986"/>
+                  </a:lnTo>
+                  <a:lnTo>
+                    <a:pt x="6634047" y="2316335"/>
+                  </a:lnTo>
+                  <a:lnTo>
+                    <a:pt x="6705669" y="2308633"/>
+                  </a:lnTo>
+                </a:path>
+              </a:pathLst>
+            </a:custGeom>
+          </p:spPr>
+          <p:txBody>
+            <a:bodyPr/>
+            <a:lstStyle/>
+            <a:p/>
+          </p:txBody>
+        </p:sp>
+        <p:sp>
+          <p:nvSpPr>
             <p:cNvPr id="22" name="pl22"/>
             <p:cNvSpPr/>
             <p:nvPr/>
           </p:nvSpPr>
           <p:spPr>
             <a:xfrm>
-              <a:off x="977618" y="2073503"/>
-              <a:ext cx="7231940" cy="2653587"/>
+              <a:off x="1172049" y="4727915"/>
+              <a:ext cx="7090630" cy="701507"/>
             </a:xfrm>
             <a:custGeom>
               <a:avLst/>
               <a:pathLst>
-                <a:path w="7231940" h="2653587">
+                <a:path w="7090630" h="701507">
                   <a:moveTo>
-                    <a:pt x="0" y="0"/>
+                    <a:pt x="7090630" y="701507"/>
                   </a:moveTo>
                   <a:lnTo>
-                    <a:pt x="48288" y="76534"/>
-                  </a:lnTo>
-                  <a:lnTo>
-                    <a:pt x="125532" y="194713"/>
-                  </a:lnTo>
-                  <a:lnTo>
-                    <a:pt x="202775" y="308793"/>
-                  </a:lnTo>
-                  <a:lnTo>
-                    <a:pt x="280019" y="418916"/>
-                  </a:lnTo>
-                  <a:lnTo>
-                    <a:pt x="357263" y="525220"/>
-                  </a:lnTo>
-                  <a:lnTo>
-                    <a:pt x="434506" y="627836"/>
-                  </a:lnTo>
-                  <a:lnTo>
-                    <a:pt x="511750" y="726894"/>
-                  </a:lnTo>
-                  <a:lnTo>
-                    <a:pt x="588993" y="822515"/>
-                  </a:lnTo>
-                  <a:lnTo>
-                    <a:pt x="666237" y="914820"/>
-                  </a:lnTo>
-                  <a:lnTo>
-                    <a:pt x="743480" y="1003923"/>
-                  </a:lnTo>
-                  <a:lnTo>
-                    <a:pt x="820724" y="1089936"/>
-                  </a:lnTo>
-                  <a:lnTo>
-                    <a:pt x="897968" y="1172965"/>
-                  </a:lnTo>
-                  <a:lnTo>
-                    <a:pt x="975211" y="1253114"/>
-                  </a:lnTo>
-                  <a:lnTo>
-                    <a:pt x="1052455" y="1330484"/>
-                  </a:lnTo>
-                  <a:lnTo>
-                    <a:pt x="1129698" y="1405170"/>
-                  </a:lnTo>
-                  <a:lnTo>
-                    <a:pt x="1206942" y="1477265"/>
-                  </a:lnTo>
-                  <a:lnTo>
-                    <a:pt x="1284185" y="1546860"/>
-                  </a:lnTo>
-                  <a:lnTo>
-                    <a:pt x="1361429" y="1614041"/>
-                  </a:lnTo>
-                  <a:lnTo>
-                    <a:pt x="1438673" y="1678892"/>
-                  </a:lnTo>
-                  <a:lnTo>
-                    <a:pt x="1515916" y="1741493"/>
-                  </a:lnTo>
-                  <a:lnTo>
-                    <a:pt x="1593160" y="1801923"/>
-                  </a:lnTo>
-                  <a:lnTo>
-                    <a:pt x="1670403" y="1860257"/>
-                  </a:lnTo>
-                  <a:lnTo>
-                    <a:pt x="1747647" y="1916568"/>
-                  </a:lnTo>
-                  <a:lnTo>
-                    <a:pt x="1824890" y="1970926"/>
-                  </a:lnTo>
-                  <a:lnTo>
-                    <a:pt x="1902134" y="2023398"/>
-                  </a:lnTo>
-                  <a:lnTo>
-                    <a:pt x="1979378" y="2074050"/>
-                  </a:lnTo>
-                  <a:lnTo>
-                    <a:pt x="2056621" y="2122945"/>
-                  </a:lnTo>
-                  <a:lnTo>
-                    <a:pt x="2133865" y="2170145"/>
-                  </a:lnTo>
-                  <a:lnTo>
-                    <a:pt x="2211108" y="2215707"/>
-                  </a:lnTo>
-                  <a:lnTo>
-                    <a:pt x="2288352" y="2259689"/>
-                  </a:lnTo>
-                  <a:lnTo>
-                    <a:pt x="2365595" y="2302145"/>
-                  </a:lnTo>
-                  <a:lnTo>
-                    <a:pt x="2442839" y="2343129"/>
-                  </a:lnTo>
-                  <a:lnTo>
-                    <a:pt x="2520083" y="2382691"/>
-                  </a:lnTo>
-                  <a:lnTo>
-                    <a:pt x="2597326" y="2420882"/>
-                  </a:lnTo>
-                  <a:lnTo>
-                    <a:pt x="2674570" y="2457747"/>
-                  </a:lnTo>
-                  <a:lnTo>
-                    <a:pt x="2751813" y="2493334"/>
-                  </a:lnTo>
-                  <a:lnTo>
-                    <a:pt x="2829057" y="2527686"/>
-                  </a:lnTo>
-                  <a:lnTo>
-                    <a:pt x="2906300" y="2560847"/>
-                  </a:lnTo>
-                  <a:lnTo>
-                    <a:pt x="2983544" y="2592858"/>
-                  </a:lnTo>
-                  <a:lnTo>
-                    <a:pt x="3060788" y="2623758"/>
-                  </a:lnTo>
-                  <a:lnTo>
-                    <a:pt x="3138031" y="2653587"/>
-                  </a:lnTo>
-                  <a:lnTo>
-                    <a:pt x="3215275" y="2648941"/>
-                  </a:lnTo>
-                  <a:lnTo>
-                    <a:pt x="3292518" y="2643434"/>
-                  </a:lnTo>
-                  <a:lnTo>
-                    <a:pt x="3369762" y="2637890"/>
-                  </a:lnTo>
-                  <a:lnTo>
-                    <a:pt x="3447005" y="2632310"/>
-                  </a:lnTo>
-                  <a:lnTo>
-                    <a:pt x="3524249" y="2626693"/>
-                  </a:lnTo>
-                  <a:lnTo>
-                    <a:pt x="3601493" y="2621039"/>
-                  </a:lnTo>
-                  <a:lnTo>
-                    <a:pt x="3678736" y="2615348"/>
-                  </a:lnTo>
-                  <a:lnTo>
-                    <a:pt x="3755980" y="2609619"/>
-                  </a:lnTo>
-                  <a:lnTo>
-                    <a:pt x="3833223" y="2603852"/>
-                  </a:lnTo>
-                  <a:lnTo>
-                    <a:pt x="3910467" y="2598047"/>
-                  </a:lnTo>
-                  <a:lnTo>
-                    <a:pt x="3987710" y="2592204"/>
-                  </a:lnTo>
-                  <a:lnTo>
-                    <a:pt x="4064954" y="2586323"/>
-                  </a:lnTo>
-                  <a:lnTo>
-                    <a:pt x="4142198" y="2580402"/>
-                  </a:lnTo>
-                  <a:lnTo>
-                    <a:pt x="4219441" y="2574443"/>
-                  </a:lnTo>
-                  <a:lnTo>
-                    <a:pt x="4296685" y="2568444"/>
-                  </a:lnTo>
-                  <a:lnTo>
-                    <a:pt x="4373928" y="2562406"/>
-                  </a:lnTo>
-                  <a:lnTo>
-                    <a:pt x="4451172" y="2556328"/>
-                  </a:lnTo>
-                  <a:lnTo>
-                    <a:pt x="4528415" y="2550210"/>
-                  </a:lnTo>
-                  <a:lnTo>
-                    <a:pt x="4605659" y="2544051"/>
-                  </a:lnTo>
-                  <a:lnTo>
-                    <a:pt x="4682903" y="2537852"/>
-                  </a:lnTo>
-                  <a:lnTo>
-                    <a:pt x="4760146" y="2531612"/>
-                  </a:lnTo>
-                  <a:lnTo>
-                    <a:pt x="4837390" y="2525330"/>
-                  </a:lnTo>
-                  <a:lnTo>
-                    <a:pt x="4914633" y="2519008"/>
-                  </a:lnTo>
-                  <a:lnTo>
-                    <a:pt x="4991877" y="2512643"/>
-                  </a:lnTo>
-                  <a:lnTo>
-                    <a:pt x="5069120" y="2506237"/>
-                  </a:lnTo>
-                  <a:lnTo>
-                    <a:pt x="5146364" y="2499788"/>
-                  </a:lnTo>
-                  <a:lnTo>
-                    <a:pt x="5223608" y="2493297"/>
-                  </a:lnTo>
-                  <a:lnTo>
-                    <a:pt x="5300851" y="2486763"/>
-                  </a:lnTo>
-                  <a:lnTo>
-                    <a:pt x="5378095" y="2480185"/>
-                  </a:lnTo>
-                  <a:lnTo>
-                    <a:pt x="5455338" y="2473565"/>
-                  </a:lnTo>
-                  <a:lnTo>
-                    <a:pt x="5532582" y="2466901"/>
-                  </a:lnTo>
-                  <a:lnTo>
-                    <a:pt x="5609825" y="2460192"/>
-                  </a:lnTo>
-                  <a:lnTo>
-                    <a:pt x="5687069" y="2453440"/>
-                  </a:lnTo>
-                  <a:lnTo>
-                    <a:pt x="5764313" y="2446643"/>
-                  </a:lnTo>
-                  <a:lnTo>
-                    <a:pt x="5841556" y="2439801"/>
-                  </a:lnTo>
-                  <a:lnTo>
-                    <a:pt x="5918800" y="2432914"/>
-                  </a:lnTo>
-                  <a:lnTo>
-                    <a:pt x="5996043" y="2425982"/>
-                  </a:lnTo>
-                  <a:lnTo>
-                    <a:pt x="6073287" y="2419003"/>
-                  </a:lnTo>
-                  <a:lnTo>
-                    <a:pt x="6150530" y="2411979"/>
-                  </a:lnTo>
-                  <a:lnTo>
-                    <a:pt x="6227774" y="2404909"/>
-                  </a:lnTo>
-                  <a:lnTo>
-                    <a:pt x="6305018" y="2397792"/>
-                  </a:lnTo>
-                  <a:lnTo>
-                    <a:pt x="6382261" y="2390627"/>
-                  </a:lnTo>
-                  <a:lnTo>
-                    <a:pt x="6459505" y="2383416"/>
-                  </a:lnTo>
-                  <a:lnTo>
-                    <a:pt x="6536748" y="2376157"/>
-                  </a:lnTo>
-                  <a:lnTo>
-                    <a:pt x="6613992" y="2368850"/>
-                  </a:lnTo>
-                  <a:lnTo>
-                    <a:pt x="6691235" y="2361495"/>
-                  </a:lnTo>
-                  <a:lnTo>
-                    <a:pt x="6768479" y="2354092"/>
-                  </a:lnTo>
-                  <a:lnTo>
-                    <a:pt x="6845723" y="2346639"/>
-                  </a:lnTo>
-                  <a:lnTo>
-                    <a:pt x="6922966" y="2339138"/>
-                  </a:lnTo>
-                  <a:lnTo>
-                    <a:pt x="7000210" y="2331586"/>
-                  </a:lnTo>
-                  <a:lnTo>
-                    <a:pt x="7077453" y="2323986"/>
-                  </a:lnTo>
-                  <a:lnTo>
-                    <a:pt x="7154697" y="2316335"/>
-                  </a:lnTo>
-                  <a:lnTo>
-                    <a:pt x="7231940" y="2308633"/>
+                    <a:pt x="7019007" y="696914"/>
+                  </a:lnTo>
+                  <a:lnTo>
+                    <a:pt x="6947385" y="692156"/>
+                  </a:lnTo>
+                  <a:lnTo>
+                    <a:pt x="6875762" y="687227"/>
+                  </a:lnTo>
+                  <a:lnTo>
+                    <a:pt x="6804139" y="682121"/>
+                  </a:lnTo>
+                  <a:lnTo>
+                    <a:pt x="6732517" y="676831"/>
+                  </a:lnTo>
+                  <a:lnTo>
+                    <a:pt x="6660894" y="671352"/>
+                  </a:lnTo>
+                  <a:lnTo>
+                    <a:pt x="6589272" y="665675"/>
+                  </a:lnTo>
+                  <a:lnTo>
+                    <a:pt x="6517649" y="659795"/>
+                  </a:lnTo>
+                  <a:lnTo>
+                    <a:pt x="6446027" y="653703"/>
+                  </a:lnTo>
+                  <a:lnTo>
+                    <a:pt x="6374404" y="647392"/>
+                  </a:lnTo>
+                  <a:lnTo>
+                    <a:pt x="6302782" y="640855"/>
+                  </a:lnTo>
+                  <a:lnTo>
+                    <a:pt x="6231159" y="634083"/>
+                  </a:lnTo>
+                  <a:lnTo>
+                    <a:pt x="6159537" y="627067"/>
+                  </a:lnTo>
+                  <a:lnTo>
+                    <a:pt x="6087914" y="619799"/>
+                  </a:lnTo>
+                  <a:lnTo>
+                    <a:pt x="6016292" y="612271"/>
+                  </a:lnTo>
+                  <a:lnTo>
+                    <a:pt x="5944669" y="604471"/>
+                  </a:lnTo>
+                  <a:lnTo>
+                    <a:pt x="5873047" y="596392"/>
+                  </a:lnTo>
+                  <a:lnTo>
+                    <a:pt x="5801424" y="588022"/>
+                  </a:lnTo>
+                  <a:lnTo>
+                    <a:pt x="5729802" y="579351"/>
+                  </a:lnTo>
+                  <a:lnTo>
+                    <a:pt x="5658179" y="570369"/>
+                  </a:lnTo>
+                  <a:lnTo>
+                    <a:pt x="5586557" y="561064"/>
+                  </a:lnTo>
+                  <a:lnTo>
+                    <a:pt x="5514934" y="551425"/>
+                  </a:lnTo>
+                  <a:lnTo>
+                    <a:pt x="5443311" y="541439"/>
+                  </a:lnTo>
+                  <a:lnTo>
+                    <a:pt x="5371689" y="531095"/>
+                  </a:lnTo>
+                  <a:lnTo>
+                    <a:pt x="5300066" y="520379"/>
+                  </a:lnTo>
+                  <a:lnTo>
+                    <a:pt x="5228444" y="509278"/>
+                  </a:lnTo>
+                  <a:lnTo>
+                    <a:pt x="5156821" y="497778"/>
+                  </a:lnTo>
+                  <a:lnTo>
+                    <a:pt x="5085199" y="485864"/>
+                  </a:lnTo>
+                  <a:lnTo>
+                    <a:pt x="5013576" y="473523"/>
+                  </a:lnTo>
+                  <a:lnTo>
+                    <a:pt x="4941954" y="460738"/>
+                  </a:lnTo>
+                  <a:lnTo>
+                    <a:pt x="4870331" y="447494"/>
+                  </a:lnTo>
+                  <a:lnTo>
+                    <a:pt x="4798709" y="433774"/>
+                  </a:lnTo>
+                  <a:lnTo>
+                    <a:pt x="4727086" y="419561"/>
+                  </a:lnTo>
+                  <a:lnTo>
+                    <a:pt x="4655464" y="404838"/>
+                  </a:lnTo>
+                  <a:lnTo>
+                    <a:pt x="4583841" y="389585"/>
+                  </a:lnTo>
+                  <a:lnTo>
+                    <a:pt x="4512219" y="373784"/>
+                  </a:lnTo>
+                  <a:lnTo>
+                    <a:pt x="4440596" y="357416"/>
+                  </a:lnTo>
+                  <a:lnTo>
+                    <a:pt x="4368974" y="340459"/>
+                  </a:lnTo>
+                  <a:lnTo>
+                    <a:pt x="4297351" y="322893"/>
+                  </a:lnTo>
+                  <a:lnTo>
+                    <a:pt x="4225729" y="304696"/>
+                  </a:lnTo>
+                  <a:lnTo>
+                    <a:pt x="4154106" y="285845"/>
+                  </a:lnTo>
+                  <a:lnTo>
+                    <a:pt x="4082483" y="266317"/>
+                  </a:lnTo>
+                  <a:lnTo>
+                    <a:pt x="4010861" y="246087"/>
+                  </a:lnTo>
+                  <a:lnTo>
+                    <a:pt x="3939238" y="225130"/>
+                  </a:lnTo>
+                  <a:lnTo>
+                    <a:pt x="3867616" y="203421"/>
+                  </a:lnTo>
+                  <a:lnTo>
+                    <a:pt x="3795993" y="180931"/>
+                  </a:lnTo>
+                  <a:lnTo>
+                    <a:pt x="3724371" y="157633"/>
+                  </a:lnTo>
+                  <a:lnTo>
+                    <a:pt x="3652748" y="133498"/>
+                  </a:lnTo>
+                  <a:lnTo>
+                    <a:pt x="3581126" y="108496"/>
+                  </a:lnTo>
+                  <a:lnTo>
+                    <a:pt x="3509503" y="82595"/>
+                  </a:lnTo>
+                  <a:lnTo>
+                    <a:pt x="3437881" y="55764"/>
+                  </a:lnTo>
+                  <a:lnTo>
+                    <a:pt x="3366258" y="27968"/>
+                  </a:lnTo>
+                  <a:lnTo>
+                    <a:pt x="3294636" y="0"/>
+                  </a:lnTo>
+                  <a:lnTo>
+                    <a:pt x="3223013" y="5435"/>
+                  </a:lnTo>
+                  <a:lnTo>
+                    <a:pt x="3151391" y="10835"/>
+                  </a:lnTo>
+                  <a:lnTo>
+                    <a:pt x="3079768" y="16199"/>
+                  </a:lnTo>
+                  <a:lnTo>
+                    <a:pt x="3008146" y="21528"/>
+                  </a:lnTo>
+                  <a:lnTo>
+                    <a:pt x="2936523" y="26822"/>
+                  </a:lnTo>
+                  <a:lnTo>
+                    <a:pt x="2864901" y="32082"/>
+                  </a:lnTo>
+                  <a:lnTo>
+                    <a:pt x="2793278" y="37307"/>
+                  </a:lnTo>
+                  <a:lnTo>
+                    <a:pt x="2721655" y="42498"/>
+                  </a:lnTo>
+                  <a:lnTo>
+                    <a:pt x="2650033" y="47654"/>
+                  </a:lnTo>
+                  <a:lnTo>
+                    <a:pt x="2578410" y="52777"/>
+                  </a:lnTo>
+                  <a:lnTo>
+                    <a:pt x="2506788" y="57867"/>
+                  </a:lnTo>
+                  <a:lnTo>
+                    <a:pt x="2435165" y="62923"/>
+                  </a:lnTo>
+                  <a:lnTo>
+                    <a:pt x="2363543" y="67946"/>
+                  </a:lnTo>
+                  <a:lnTo>
+                    <a:pt x="2291920" y="72936"/>
+                  </a:lnTo>
+                  <a:lnTo>
+                    <a:pt x="2220298" y="77893"/>
+                  </a:lnTo>
+                  <a:lnTo>
+                    <a:pt x="2148675" y="82818"/>
+                  </a:lnTo>
+                  <a:lnTo>
+                    <a:pt x="2077053" y="87711"/>
+                  </a:lnTo>
+                  <a:lnTo>
+                    <a:pt x="2005430" y="92571"/>
+                  </a:lnTo>
+                  <a:lnTo>
+                    <a:pt x="1933808" y="97400"/>
+                  </a:lnTo>
+                  <a:lnTo>
+                    <a:pt x="1862185" y="102197"/>
+                  </a:lnTo>
+                  <a:lnTo>
+                    <a:pt x="1790563" y="106962"/>
+                  </a:lnTo>
+                  <a:lnTo>
+                    <a:pt x="1718940" y="111697"/>
+                  </a:lnTo>
+                  <a:lnTo>
+                    <a:pt x="1647318" y="116400"/>
+                  </a:lnTo>
+                  <a:lnTo>
+                    <a:pt x="1575695" y="121072"/>
+                  </a:lnTo>
+                  <a:lnTo>
+                    <a:pt x="1504073" y="125714"/>
+                  </a:lnTo>
+                  <a:lnTo>
+                    <a:pt x="1432450" y="130325"/>
+                  </a:lnTo>
+                  <a:lnTo>
+                    <a:pt x="1360827" y="134907"/>
+                  </a:lnTo>
+                  <a:lnTo>
+                    <a:pt x="1289205" y="139458"/>
+                  </a:lnTo>
+                  <a:lnTo>
+                    <a:pt x="1217582" y="143979"/>
+                  </a:lnTo>
+                  <a:lnTo>
+                    <a:pt x="1145960" y="148471"/>
+                  </a:lnTo>
+                  <a:lnTo>
+                    <a:pt x="1074337" y="152933"/>
+                  </a:lnTo>
+                  <a:lnTo>
+                    <a:pt x="1002715" y="157366"/>
+                  </a:lnTo>
+                  <a:lnTo>
+                    <a:pt x="931092" y="161770"/>
+                  </a:lnTo>
+                  <a:lnTo>
+                    <a:pt x="859470" y="166145"/>
+                  </a:lnTo>
+                  <a:lnTo>
+                    <a:pt x="787847" y="170492"/>
+                  </a:lnTo>
+                  <a:lnTo>
+                    <a:pt x="716225" y="174810"/>
+                  </a:lnTo>
+                  <a:lnTo>
+                    <a:pt x="644602" y="179099"/>
+                  </a:lnTo>
+                  <a:lnTo>
+                    <a:pt x="572980" y="183361"/>
+                  </a:lnTo>
+                  <a:lnTo>
+                    <a:pt x="501357" y="187594"/>
+                  </a:lnTo>
+                  <a:lnTo>
+                    <a:pt x="429735" y="191800"/>
+                  </a:lnTo>
+                  <a:lnTo>
+                    <a:pt x="358112" y="195979"/>
+                  </a:lnTo>
+                  <a:lnTo>
+                    <a:pt x="286490" y="200129"/>
+                  </a:lnTo>
+                  <a:lnTo>
+                    <a:pt x="214867" y="204253"/>
+                  </a:lnTo>
+                  <a:lnTo>
+                    <a:pt x="143245" y="208350"/>
+                  </a:lnTo>
+                  <a:lnTo>
+                    <a:pt x="71622" y="212420"/>
+                  </a:lnTo>
+                  <a:lnTo>
+                    <a:pt x="0" y="216463"/>
                   </a:lnTo>
                 </a:path>
               </a:pathLst>
@@ -3919,619 +4210,312 @@
           </p:nvSpPr>
           <p:spPr>
             <a:xfrm>
-              <a:off x="817517" y="4727915"/>
-              <a:ext cx="7392041" cy="701507"/>
+              <a:off x="1172049" y="3950764"/>
+              <a:ext cx="7090630" cy="1218915"/>
             </a:xfrm>
             <a:custGeom>
               <a:avLst/>
               <a:pathLst>
-                <a:path w="7392041" h="701507">
-                  <a:moveTo>
-                    <a:pt x="7392041" y="701507"/>
-                  </a:moveTo>
-                  <a:lnTo>
-                    <a:pt x="7314797" y="696914"/>
-                  </a:lnTo>
-                  <a:lnTo>
-                    <a:pt x="7237554" y="692156"/>
-                  </a:lnTo>
-                  <a:lnTo>
-                    <a:pt x="7160310" y="687227"/>
-                  </a:lnTo>
-                  <a:lnTo>
-                    <a:pt x="7083066" y="682121"/>
-                  </a:lnTo>
-                  <a:lnTo>
-                    <a:pt x="7005823" y="676831"/>
-                  </a:lnTo>
-                  <a:lnTo>
-                    <a:pt x="6928579" y="671352"/>
-                  </a:lnTo>
-                  <a:lnTo>
-                    <a:pt x="6851336" y="665675"/>
-                  </a:lnTo>
-                  <a:lnTo>
-                    <a:pt x="6774092" y="659795"/>
-                  </a:lnTo>
-                  <a:lnTo>
-                    <a:pt x="6696849" y="653703"/>
-                  </a:lnTo>
-                  <a:lnTo>
-                    <a:pt x="6619605" y="647392"/>
-                  </a:lnTo>
-                  <a:lnTo>
-                    <a:pt x="6542361" y="640855"/>
-                  </a:lnTo>
-                  <a:lnTo>
-                    <a:pt x="6465118" y="634083"/>
-                  </a:lnTo>
-                  <a:lnTo>
-                    <a:pt x="6387874" y="627067"/>
-                  </a:lnTo>
-                  <a:lnTo>
-                    <a:pt x="6310631" y="619799"/>
-                  </a:lnTo>
-                  <a:lnTo>
-                    <a:pt x="6233387" y="612271"/>
-                  </a:lnTo>
-                  <a:lnTo>
-                    <a:pt x="6156144" y="604471"/>
-                  </a:lnTo>
-                  <a:lnTo>
-                    <a:pt x="6078900" y="596392"/>
-                  </a:lnTo>
-                  <a:lnTo>
-                    <a:pt x="6001656" y="588022"/>
-                  </a:lnTo>
-                  <a:lnTo>
-                    <a:pt x="5924413" y="579351"/>
-                  </a:lnTo>
-                  <a:lnTo>
-                    <a:pt x="5847169" y="570369"/>
-                  </a:lnTo>
-                  <a:lnTo>
-                    <a:pt x="5769926" y="561064"/>
-                  </a:lnTo>
-                  <a:lnTo>
-                    <a:pt x="5692682" y="551425"/>
-                  </a:lnTo>
-                  <a:lnTo>
-                    <a:pt x="5615439" y="541439"/>
-                  </a:lnTo>
-                  <a:lnTo>
-                    <a:pt x="5538195" y="531095"/>
-                  </a:lnTo>
-                  <a:lnTo>
-                    <a:pt x="5460951" y="520379"/>
-                  </a:lnTo>
-                  <a:lnTo>
-                    <a:pt x="5383708" y="509278"/>
-                  </a:lnTo>
-                  <a:lnTo>
-                    <a:pt x="5306464" y="497778"/>
-                  </a:lnTo>
-                  <a:lnTo>
-                    <a:pt x="5229221" y="485864"/>
-                  </a:lnTo>
-                  <a:lnTo>
-                    <a:pt x="5151977" y="473523"/>
-                  </a:lnTo>
-                  <a:lnTo>
-                    <a:pt x="5074734" y="460738"/>
-                  </a:lnTo>
-                  <a:lnTo>
-                    <a:pt x="4997490" y="447494"/>
-                  </a:lnTo>
-                  <a:lnTo>
-                    <a:pt x="4920246" y="433774"/>
-                  </a:lnTo>
-                  <a:lnTo>
-                    <a:pt x="4843003" y="419561"/>
-                  </a:lnTo>
-                  <a:lnTo>
-                    <a:pt x="4765759" y="404838"/>
-                  </a:lnTo>
-                  <a:lnTo>
-                    <a:pt x="4688516" y="389585"/>
-                  </a:lnTo>
-                  <a:lnTo>
-                    <a:pt x="4611272" y="373784"/>
-                  </a:lnTo>
-                  <a:lnTo>
-                    <a:pt x="4534029" y="357416"/>
-                  </a:lnTo>
-                  <a:lnTo>
-                    <a:pt x="4456785" y="340459"/>
-                  </a:lnTo>
-                  <a:lnTo>
-                    <a:pt x="4379541" y="322893"/>
-                  </a:lnTo>
-                  <a:lnTo>
-                    <a:pt x="4302298" y="304696"/>
-                  </a:lnTo>
-                  <a:lnTo>
-                    <a:pt x="4225054" y="285845"/>
-                  </a:lnTo>
-                  <a:lnTo>
-                    <a:pt x="4147811" y="266317"/>
-                  </a:lnTo>
-                  <a:lnTo>
-                    <a:pt x="4070567" y="246087"/>
-                  </a:lnTo>
-                  <a:lnTo>
-                    <a:pt x="3993324" y="225130"/>
-                  </a:lnTo>
-                  <a:lnTo>
-                    <a:pt x="3916080" y="203421"/>
-                  </a:lnTo>
-                  <a:lnTo>
-                    <a:pt x="3838836" y="180931"/>
-                  </a:lnTo>
-                  <a:lnTo>
-                    <a:pt x="3761593" y="157633"/>
-                  </a:lnTo>
-                  <a:lnTo>
-                    <a:pt x="3684349" y="133498"/>
-                  </a:lnTo>
-                  <a:lnTo>
-                    <a:pt x="3607106" y="108496"/>
-                  </a:lnTo>
-                  <a:lnTo>
-                    <a:pt x="3529862" y="82595"/>
-                  </a:lnTo>
-                  <a:lnTo>
-                    <a:pt x="3452619" y="55764"/>
-                  </a:lnTo>
-                  <a:lnTo>
-                    <a:pt x="3375375" y="27968"/>
-                  </a:lnTo>
-                  <a:lnTo>
-                    <a:pt x="3298131" y="0"/>
-                  </a:lnTo>
-                  <a:lnTo>
-                    <a:pt x="3220888" y="5435"/>
-                  </a:lnTo>
-                  <a:lnTo>
-                    <a:pt x="3143644" y="10835"/>
-                  </a:lnTo>
-                  <a:lnTo>
-                    <a:pt x="3066401" y="16199"/>
-                  </a:lnTo>
-                  <a:lnTo>
-                    <a:pt x="2989157" y="21528"/>
-                  </a:lnTo>
-                  <a:lnTo>
-                    <a:pt x="2911914" y="26822"/>
-                  </a:lnTo>
-                  <a:lnTo>
-                    <a:pt x="2834670" y="32082"/>
-                  </a:lnTo>
-                  <a:lnTo>
-                    <a:pt x="2757426" y="37307"/>
-                  </a:lnTo>
-                  <a:lnTo>
-                    <a:pt x="2680183" y="42498"/>
-                  </a:lnTo>
-                  <a:lnTo>
-                    <a:pt x="2602939" y="47654"/>
-                  </a:lnTo>
-                  <a:lnTo>
-                    <a:pt x="2525696" y="52777"/>
-                  </a:lnTo>
-                  <a:lnTo>
-                    <a:pt x="2448452" y="57867"/>
-                  </a:lnTo>
-                  <a:lnTo>
-                    <a:pt x="2371209" y="62923"/>
-                  </a:lnTo>
-                  <a:lnTo>
-                    <a:pt x="2293965" y="67946"/>
-                  </a:lnTo>
-                  <a:lnTo>
-                    <a:pt x="2216721" y="72936"/>
-                  </a:lnTo>
-                  <a:lnTo>
-                    <a:pt x="2139478" y="77893"/>
-                  </a:lnTo>
-                  <a:lnTo>
-                    <a:pt x="2062234" y="82818"/>
-                  </a:lnTo>
-                  <a:lnTo>
-                    <a:pt x="1984991" y="87711"/>
-                  </a:lnTo>
-                  <a:lnTo>
-                    <a:pt x="1907747" y="92571"/>
-                  </a:lnTo>
-                  <a:lnTo>
-                    <a:pt x="1830504" y="97400"/>
-                  </a:lnTo>
-                  <a:lnTo>
-                    <a:pt x="1753260" y="102197"/>
-                  </a:lnTo>
-                  <a:lnTo>
-                    <a:pt x="1676016" y="106962"/>
-                  </a:lnTo>
-                  <a:lnTo>
-                    <a:pt x="1598773" y="111697"/>
-                  </a:lnTo>
-                  <a:lnTo>
-                    <a:pt x="1521529" y="116400"/>
-                  </a:lnTo>
-                  <a:lnTo>
-                    <a:pt x="1444286" y="121072"/>
-                  </a:lnTo>
-                  <a:lnTo>
-                    <a:pt x="1367042" y="125714"/>
-                  </a:lnTo>
-                  <a:lnTo>
-                    <a:pt x="1289799" y="130325"/>
-                  </a:lnTo>
-                  <a:lnTo>
-                    <a:pt x="1212555" y="134907"/>
-                  </a:lnTo>
-                  <a:lnTo>
-                    <a:pt x="1135311" y="139458"/>
-                  </a:lnTo>
-                  <a:lnTo>
-                    <a:pt x="1058068" y="143979"/>
-                  </a:lnTo>
-                  <a:lnTo>
-                    <a:pt x="980824" y="148471"/>
-                  </a:lnTo>
-                  <a:lnTo>
-                    <a:pt x="903581" y="152933"/>
-                  </a:lnTo>
-                  <a:lnTo>
-                    <a:pt x="826337" y="157366"/>
-                  </a:lnTo>
-                  <a:lnTo>
-                    <a:pt x="749094" y="161770"/>
-                  </a:lnTo>
-                  <a:lnTo>
-                    <a:pt x="671850" y="166145"/>
-                  </a:lnTo>
-                  <a:lnTo>
-                    <a:pt x="594606" y="170492"/>
-                  </a:lnTo>
-                  <a:lnTo>
-                    <a:pt x="517363" y="174810"/>
-                  </a:lnTo>
-                  <a:lnTo>
-                    <a:pt x="440119" y="179099"/>
-                  </a:lnTo>
-                  <a:lnTo>
-                    <a:pt x="362876" y="183361"/>
-                  </a:lnTo>
-                  <a:lnTo>
-                    <a:pt x="285632" y="187594"/>
-                  </a:lnTo>
-                  <a:lnTo>
-                    <a:pt x="208389" y="191800"/>
-                  </a:lnTo>
-                  <a:lnTo>
-                    <a:pt x="131145" y="195979"/>
-                  </a:lnTo>
-                  <a:lnTo>
-                    <a:pt x="53901" y="200129"/>
-                  </a:lnTo>
-                  <a:lnTo>
-                    <a:pt x="0" y="203007"/>
-                  </a:lnTo>
-                </a:path>
-              </a:pathLst>
-            </a:custGeom>
-          </p:spPr>
-          <p:txBody>
-            <a:bodyPr/>
-            <a:lstStyle/>
-            <a:p/>
-          </p:txBody>
-        </p:sp>
-        <p:sp>
-          <p:nvSpPr>
-            <p:cNvPr id="24" name="pl24"/>
-            <p:cNvSpPr/>
-            <p:nvPr/>
-          </p:nvSpPr>
-          <p:spPr>
-            <a:xfrm>
-              <a:off x="817517" y="4025145"/>
-              <a:ext cx="7392041" cy="1144534"/>
-            </a:xfrm>
-            <a:custGeom>
-              <a:avLst/>
-              <a:pathLst>
-                <a:path w="7392041" h="1144534">
+                <a:path w="7090630" h="1218915">
                   <a:moveTo>
                     <a:pt x="0" y="0"/>
                   </a:moveTo>
                   <a:lnTo>
-                    <a:pt x="53901" y="15311"/>
-                  </a:lnTo>
-                  <a:lnTo>
-                    <a:pt x="131145" y="36941"/>
-                  </a:lnTo>
-                  <a:lnTo>
-                    <a:pt x="208389" y="58262"/>
-                  </a:lnTo>
-                  <a:lnTo>
-                    <a:pt x="285632" y="79279"/>
-                  </a:lnTo>
-                  <a:lnTo>
-                    <a:pt x="362876" y="99996"/>
-                  </a:lnTo>
-                  <a:lnTo>
-                    <a:pt x="440119" y="120418"/>
-                  </a:lnTo>
-                  <a:lnTo>
-                    <a:pt x="517363" y="140549"/>
-                  </a:lnTo>
-                  <a:lnTo>
-                    <a:pt x="594606" y="160393"/>
-                  </a:lnTo>
-                  <a:lnTo>
-                    <a:pt x="671850" y="179953"/>
-                  </a:lnTo>
-                  <a:lnTo>
-                    <a:pt x="749094" y="199235"/>
-                  </a:lnTo>
-                  <a:lnTo>
-                    <a:pt x="826337" y="218242"/>
-                  </a:lnTo>
-                  <a:lnTo>
-                    <a:pt x="903581" y="236978"/>
-                  </a:lnTo>
-                  <a:lnTo>
-                    <a:pt x="980824" y="255446"/>
-                  </a:lnTo>
-                  <a:lnTo>
-                    <a:pt x="1058068" y="273651"/>
-                  </a:lnTo>
-                  <a:lnTo>
-                    <a:pt x="1135311" y="291597"/>
-                  </a:lnTo>
-                  <a:lnTo>
-                    <a:pt x="1212555" y="309287"/>
-                  </a:lnTo>
-                  <a:lnTo>
-                    <a:pt x="1289799" y="326724"/>
-                  </a:lnTo>
-                  <a:lnTo>
-                    <a:pt x="1367042" y="343913"/>
-                  </a:lnTo>
-                  <a:lnTo>
-                    <a:pt x="1444286" y="360856"/>
-                  </a:lnTo>
-                  <a:lnTo>
-                    <a:pt x="1521529" y="377559"/>
-                  </a:lnTo>
-                  <a:lnTo>
-                    <a:pt x="1598773" y="394022"/>
-                  </a:lnTo>
-                  <a:lnTo>
-                    <a:pt x="1676016" y="410252"/>
-                  </a:lnTo>
-                  <a:lnTo>
-                    <a:pt x="1753260" y="426249"/>
-                  </a:lnTo>
-                  <a:lnTo>
-                    <a:pt x="1830504" y="442019"/>
-                  </a:lnTo>
-                  <a:lnTo>
-                    <a:pt x="1907747" y="457563"/>
-                  </a:lnTo>
-                  <a:lnTo>
-                    <a:pt x="1984991" y="472886"/>
-                  </a:lnTo>
-                  <a:lnTo>
-                    <a:pt x="2062234" y="487991"/>
-                  </a:lnTo>
-                  <a:lnTo>
-                    <a:pt x="2139478" y="502880"/>
-                  </a:lnTo>
-                  <a:lnTo>
-                    <a:pt x="2216721" y="517557"/>
-                  </a:lnTo>
-                  <a:lnTo>
-                    <a:pt x="2293965" y="532024"/>
-                  </a:lnTo>
-                  <a:lnTo>
-                    <a:pt x="2371209" y="546285"/>
-                  </a:lnTo>
-                  <a:lnTo>
-                    <a:pt x="2448452" y="560343"/>
-                  </a:lnTo>
-                  <a:lnTo>
-                    <a:pt x="2525696" y="574201"/>
-                  </a:lnTo>
-                  <a:lnTo>
-                    <a:pt x="2602939" y="587860"/>
-                  </a:lnTo>
-                  <a:lnTo>
-                    <a:pt x="2680183" y="601325"/>
-                  </a:lnTo>
-                  <a:lnTo>
-                    <a:pt x="2757426" y="614598"/>
-                  </a:lnTo>
-                  <a:lnTo>
-                    <a:pt x="2834670" y="627682"/>
-                  </a:lnTo>
-                  <a:lnTo>
-                    <a:pt x="2911914" y="640579"/>
-                  </a:lnTo>
-                  <a:lnTo>
-                    <a:pt x="2989157" y="653292"/>
-                  </a:lnTo>
-                  <a:lnTo>
-                    <a:pt x="3066401" y="665824"/>
-                  </a:lnTo>
-                  <a:lnTo>
-                    <a:pt x="3143644" y="678177"/>
-                  </a:lnTo>
-                  <a:lnTo>
-                    <a:pt x="3220888" y="690354"/>
-                  </a:lnTo>
-                  <a:lnTo>
-                    <a:pt x="3298131" y="702358"/>
-                  </a:lnTo>
-                  <a:lnTo>
-                    <a:pt x="3375375" y="714190"/>
-                  </a:lnTo>
-                  <a:lnTo>
-                    <a:pt x="3452619" y="725854"/>
-                  </a:lnTo>
-                  <a:lnTo>
-                    <a:pt x="3529862" y="737351"/>
-                  </a:lnTo>
-                  <a:lnTo>
-                    <a:pt x="3607106" y="748684"/>
-                  </a:lnTo>
-                  <a:lnTo>
-                    <a:pt x="3684349" y="759856"/>
-                  </a:lnTo>
-                  <a:lnTo>
-                    <a:pt x="3761593" y="770868"/>
-                  </a:lnTo>
-                  <a:lnTo>
-                    <a:pt x="3838836" y="781723"/>
-                  </a:lnTo>
-                  <a:lnTo>
-                    <a:pt x="3916080" y="792424"/>
-                  </a:lnTo>
-                  <a:lnTo>
-                    <a:pt x="3993324" y="802971"/>
-                  </a:lnTo>
-                  <a:lnTo>
-                    <a:pt x="4070567" y="813369"/>
-                  </a:lnTo>
-                  <a:lnTo>
-                    <a:pt x="4147811" y="823618"/>
-                  </a:lnTo>
-                  <a:lnTo>
-                    <a:pt x="4225054" y="833721"/>
-                  </a:lnTo>
-                  <a:lnTo>
-                    <a:pt x="4302298" y="843680"/>
-                  </a:lnTo>
-                  <a:lnTo>
-                    <a:pt x="4379541" y="853497"/>
-                  </a:lnTo>
-                  <a:lnTo>
-                    <a:pt x="4456785" y="863174"/>
-                  </a:lnTo>
-                  <a:lnTo>
-                    <a:pt x="4534029" y="872713"/>
-                  </a:lnTo>
-                  <a:lnTo>
-                    <a:pt x="4611272" y="882116"/>
-                  </a:lnTo>
-                  <a:lnTo>
-                    <a:pt x="4688516" y="891385"/>
-                  </a:lnTo>
-                  <a:lnTo>
-                    <a:pt x="4765759" y="900522"/>
-                  </a:lnTo>
-                  <a:lnTo>
-                    <a:pt x="4843003" y="909528"/>
-                  </a:lnTo>
-                  <a:lnTo>
-                    <a:pt x="4920246" y="918406"/>
-                  </a:lnTo>
-                  <a:lnTo>
-                    <a:pt x="4997490" y="927157"/>
-                  </a:lnTo>
-                  <a:lnTo>
-                    <a:pt x="5074734" y="935784"/>
-                  </a:lnTo>
-                  <a:lnTo>
-                    <a:pt x="5151977" y="944287"/>
-                  </a:lnTo>
-                  <a:lnTo>
-                    <a:pt x="5229221" y="952670"/>
-                  </a:lnTo>
-                  <a:lnTo>
-                    <a:pt x="5306464" y="960932"/>
-                  </a:lnTo>
-                  <a:lnTo>
-                    <a:pt x="5383708" y="969077"/>
-                  </a:lnTo>
-                  <a:lnTo>
-                    <a:pt x="5460951" y="977106"/>
-                  </a:lnTo>
-                  <a:lnTo>
-                    <a:pt x="5538195" y="985020"/>
-                  </a:lnTo>
-                  <a:lnTo>
-                    <a:pt x="5615439" y="992822"/>
-                  </a:lnTo>
-                  <a:lnTo>
-                    <a:pt x="5692682" y="1000512"/>
-                  </a:lnTo>
-                  <a:lnTo>
-                    <a:pt x="5769926" y="1008093"/>
-                  </a:lnTo>
-                  <a:lnTo>
-                    <a:pt x="5847169" y="1015565"/>
-                  </a:lnTo>
-                  <a:lnTo>
-                    <a:pt x="5924413" y="1022931"/>
-                  </a:lnTo>
-                  <a:lnTo>
-                    <a:pt x="6001656" y="1030192"/>
-                  </a:lnTo>
-                  <a:lnTo>
-                    <a:pt x="6078900" y="1037349"/>
-                  </a:lnTo>
-                  <a:lnTo>
-                    <a:pt x="6156144" y="1044404"/>
-                  </a:lnTo>
-                  <a:lnTo>
-                    <a:pt x="6233387" y="1051359"/>
-                  </a:lnTo>
-                  <a:lnTo>
-                    <a:pt x="6310631" y="1058214"/>
-                  </a:lnTo>
-                  <a:lnTo>
-                    <a:pt x="6387874" y="1064972"/>
-                  </a:lnTo>
-                  <a:lnTo>
-                    <a:pt x="6465118" y="1071633"/>
-                  </a:lnTo>
-                  <a:lnTo>
-                    <a:pt x="6542361" y="1078200"/>
-                  </a:lnTo>
-                  <a:lnTo>
-                    <a:pt x="6619605" y="1084672"/>
-                  </a:lnTo>
-                  <a:lnTo>
-                    <a:pt x="6696849" y="1091053"/>
-                  </a:lnTo>
-                  <a:lnTo>
-                    <a:pt x="6774092" y="1097342"/>
-                  </a:lnTo>
-                  <a:lnTo>
-                    <a:pt x="6851336" y="1103542"/>
-                  </a:lnTo>
-                  <a:lnTo>
-                    <a:pt x="6928579" y="1109653"/>
-                  </a:lnTo>
-                  <a:lnTo>
-                    <a:pt x="7005823" y="1115677"/>
-                  </a:lnTo>
-                  <a:lnTo>
-                    <a:pt x="7083066" y="1121616"/>
-                  </a:lnTo>
-                  <a:lnTo>
-                    <a:pt x="7160310" y="1127469"/>
-                  </a:lnTo>
-                  <a:lnTo>
-                    <a:pt x="7237554" y="1133239"/>
-                  </a:lnTo>
-                  <a:lnTo>
-                    <a:pt x="7314797" y="1138927"/>
-                  </a:lnTo>
-                  <a:lnTo>
-                    <a:pt x="7392041" y="1144534"/>
+                    <a:pt x="71622" y="22908"/>
+                  </a:lnTo>
+                  <a:lnTo>
+                    <a:pt x="143245" y="45490"/>
+                  </a:lnTo>
+                  <a:lnTo>
+                    <a:pt x="214867" y="67750"/>
+                  </a:lnTo>
+                  <a:lnTo>
+                    <a:pt x="286490" y="89692"/>
+                  </a:lnTo>
+                  <a:lnTo>
+                    <a:pt x="358112" y="111322"/>
+                  </a:lnTo>
+                  <a:lnTo>
+                    <a:pt x="429735" y="132643"/>
+                  </a:lnTo>
+                  <a:lnTo>
+                    <a:pt x="501357" y="153660"/>
+                  </a:lnTo>
+                  <a:lnTo>
+                    <a:pt x="572980" y="174377"/>
+                  </a:lnTo>
+                  <a:lnTo>
+                    <a:pt x="644602" y="194799"/>
+                  </a:lnTo>
+                  <a:lnTo>
+                    <a:pt x="716225" y="214930"/>
+                  </a:lnTo>
+                  <a:lnTo>
+                    <a:pt x="787847" y="234774"/>
+                  </a:lnTo>
+                  <a:lnTo>
+                    <a:pt x="859470" y="254334"/>
+                  </a:lnTo>
+                  <a:lnTo>
+                    <a:pt x="931092" y="273616"/>
+                  </a:lnTo>
+                  <a:lnTo>
+                    <a:pt x="1002715" y="292623"/>
+                  </a:lnTo>
+                  <a:lnTo>
+                    <a:pt x="1074337" y="311358"/>
+                  </a:lnTo>
+                  <a:lnTo>
+                    <a:pt x="1145960" y="329827"/>
+                  </a:lnTo>
+                  <a:lnTo>
+                    <a:pt x="1217582" y="348032"/>
+                  </a:lnTo>
+                  <a:lnTo>
+                    <a:pt x="1289205" y="365978"/>
+                  </a:lnTo>
+                  <a:lnTo>
+                    <a:pt x="1360827" y="383668"/>
+                  </a:lnTo>
+                  <a:lnTo>
+                    <a:pt x="1432450" y="401105"/>
+                  </a:lnTo>
+                  <a:lnTo>
+                    <a:pt x="1504073" y="418294"/>
+                  </a:lnTo>
+                  <a:lnTo>
+                    <a:pt x="1575695" y="435237"/>
+                  </a:lnTo>
+                  <a:lnTo>
+                    <a:pt x="1647318" y="451939"/>
+                  </a:lnTo>
+                  <a:lnTo>
+                    <a:pt x="1718940" y="468403"/>
+                  </a:lnTo>
+                  <a:lnTo>
+                    <a:pt x="1790563" y="484632"/>
+                  </a:lnTo>
+                  <a:lnTo>
+                    <a:pt x="1862185" y="500630"/>
+                  </a:lnTo>
+                  <a:lnTo>
+                    <a:pt x="1933808" y="516400"/>
+                  </a:lnTo>
+                  <a:lnTo>
+                    <a:pt x="2005430" y="531944"/>
+                  </a:lnTo>
+                  <a:lnTo>
+                    <a:pt x="2077053" y="547267"/>
+                  </a:lnTo>
+                  <a:lnTo>
+                    <a:pt x="2148675" y="562372"/>
+                  </a:lnTo>
+                  <a:lnTo>
+                    <a:pt x="2220298" y="577261"/>
+                  </a:lnTo>
+                  <a:lnTo>
+                    <a:pt x="2291920" y="591938"/>
+                  </a:lnTo>
+                  <a:lnTo>
+                    <a:pt x="2363543" y="606405"/>
+                  </a:lnTo>
+                  <a:lnTo>
+                    <a:pt x="2435165" y="620666"/>
+                  </a:lnTo>
+                  <a:lnTo>
+                    <a:pt x="2506788" y="634724"/>
+                  </a:lnTo>
+                  <a:lnTo>
+                    <a:pt x="2578410" y="648582"/>
+                  </a:lnTo>
+                  <a:lnTo>
+                    <a:pt x="2650033" y="662241"/>
+                  </a:lnTo>
+                  <a:lnTo>
+                    <a:pt x="2721655" y="675706"/>
+                  </a:lnTo>
+                  <a:lnTo>
+                    <a:pt x="2793278" y="688979"/>
+                  </a:lnTo>
+                  <a:lnTo>
+                    <a:pt x="2864901" y="702063"/>
+                  </a:lnTo>
+                  <a:lnTo>
+                    <a:pt x="2936523" y="714960"/>
+                  </a:lnTo>
+                  <a:lnTo>
+                    <a:pt x="3008146" y="727673"/>
+                  </a:lnTo>
+                  <a:lnTo>
+                    <a:pt x="3079768" y="740205"/>
+                  </a:lnTo>
+                  <a:lnTo>
+                    <a:pt x="3151391" y="752558"/>
+                  </a:lnTo>
+                  <a:lnTo>
+                    <a:pt x="3223013" y="764735"/>
+                  </a:lnTo>
+                  <a:lnTo>
+                    <a:pt x="3294636" y="776739"/>
+                  </a:lnTo>
+                  <a:lnTo>
+                    <a:pt x="3366258" y="788571"/>
+                  </a:lnTo>
+                  <a:lnTo>
+                    <a:pt x="3437881" y="800234"/>
+                  </a:lnTo>
+                  <a:lnTo>
+                    <a:pt x="3509503" y="811732"/>
+                  </a:lnTo>
+                  <a:lnTo>
+                    <a:pt x="3581126" y="823065"/>
+                  </a:lnTo>
+                  <a:lnTo>
+                    <a:pt x="3652748" y="834236"/>
+                  </a:lnTo>
+                  <a:lnTo>
+                    <a:pt x="3724371" y="845249"/>
+                  </a:lnTo>
+                  <a:lnTo>
+                    <a:pt x="3795993" y="856104"/>
+                  </a:lnTo>
+                  <a:lnTo>
+                    <a:pt x="3867616" y="866804"/>
+                  </a:lnTo>
+                  <a:lnTo>
+                    <a:pt x="3939238" y="877352"/>
+                  </a:lnTo>
+                  <a:lnTo>
+                    <a:pt x="4010861" y="887750"/>
+                  </a:lnTo>
+                  <a:lnTo>
+                    <a:pt x="4082483" y="897999"/>
+                  </a:lnTo>
+                  <a:lnTo>
+                    <a:pt x="4154106" y="908102"/>
+                  </a:lnTo>
+                  <a:lnTo>
+                    <a:pt x="4225729" y="918061"/>
+                  </a:lnTo>
+                  <a:lnTo>
+                    <a:pt x="4297351" y="927878"/>
+                  </a:lnTo>
+                  <a:lnTo>
+                    <a:pt x="4368974" y="937555"/>
+                  </a:lnTo>
+                  <a:lnTo>
+                    <a:pt x="4440596" y="947094"/>
+                  </a:lnTo>
+                  <a:lnTo>
+                    <a:pt x="4512219" y="956497"/>
+                  </a:lnTo>
+                  <a:lnTo>
+                    <a:pt x="4583841" y="965766"/>
+                  </a:lnTo>
+                  <a:lnTo>
+                    <a:pt x="4655464" y="974902"/>
+                  </a:lnTo>
+                  <a:lnTo>
+                    <a:pt x="4727086" y="983909"/>
+                  </a:lnTo>
+                  <a:lnTo>
+                    <a:pt x="4798709" y="992787"/>
+                  </a:lnTo>
+                  <a:lnTo>
+                    <a:pt x="4870331" y="1001538"/>
+                  </a:lnTo>
+                  <a:lnTo>
+                    <a:pt x="4941954" y="1010165"/>
+                  </a:lnTo>
+                  <a:lnTo>
+                    <a:pt x="5013576" y="1018668"/>
+                  </a:lnTo>
+                  <a:lnTo>
+                    <a:pt x="5085199" y="1027051"/>
+                  </a:lnTo>
+                  <a:lnTo>
+                    <a:pt x="5156821" y="1035313"/>
+                  </a:lnTo>
+                  <a:lnTo>
+                    <a:pt x="5228444" y="1043458"/>
+                  </a:lnTo>
+                  <a:lnTo>
+                    <a:pt x="5300066" y="1051487"/>
+                  </a:lnTo>
+                  <a:lnTo>
+                    <a:pt x="5371689" y="1059401"/>
+                  </a:lnTo>
+                  <a:lnTo>
+                    <a:pt x="5443311" y="1067203"/>
+                  </a:lnTo>
+                  <a:lnTo>
+                    <a:pt x="5514934" y="1074893"/>
+                  </a:lnTo>
+                  <a:lnTo>
+                    <a:pt x="5586557" y="1082474"/>
+                  </a:lnTo>
+                  <a:lnTo>
+                    <a:pt x="5658179" y="1089946"/>
+                  </a:lnTo>
+                  <a:lnTo>
+                    <a:pt x="5729802" y="1097312"/>
+                  </a:lnTo>
+                  <a:lnTo>
+                    <a:pt x="5801424" y="1104573"/>
+                  </a:lnTo>
+                  <a:lnTo>
+                    <a:pt x="5873047" y="1111730"/>
+                  </a:lnTo>
+                  <a:lnTo>
+                    <a:pt x="5944669" y="1118785"/>
+                  </a:lnTo>
+                  <a:lnTo>
+                    <a:pt x="6016292" y="1125740"/>
+                  </a:lnTo>
+                  <a:lnTo>
+                    <a:pt x="6087914" y="1132595"/>
+                  </a:lnTo>
+                  <a:lnTo>
+                    <a:pt x="6159537" y="1139353"/>
+                  </a:lnTo>
+                  <a:lnTo>
+                    <a:pt x="6231159" y="1146014"/>
+                  </a:lnTo>
+                  <a:lnTo>
+                    <a:pt x="6302782" y="1152581"/>
+                  </a:lnTo>
+                  <a:lnTo>
+                    <a:pt x="6374404" y="1159053"/>
+                  </a:lnTo>
+                  <a:lnTo>
+                    <a:pt x="6446027" y="1165434"/>
+                  </a:lnTo>
+                  <a:lnTo>
+                    <a:pt x="6517649" y="1171723"/>
+                  </a:lnTo>
+                  <a:lnTo>
+                    <a:pt x="6589272" y="1177923"/>
+                  </a:lnTo>
+                  <a:lnTo>
+                    <a:pt x="6660894" y="1184034"/>
+                  </a:lnTo>
+                  <a:lnTo>
+                    <a:pt x="6732517" y="1190058"/>
+                  </a:lnTo>
+                  <a:lnTo>
+                    <a:pt x="6804139" y="1195997"/>
+                  </a:lnTo>
+                  <a:lnTo>
+                    <a:pt x="6875762" y="1201850"/>
+                  </a:lnTo>
+                  <a:lnTo>
+                    <a:pt x="6947385" y="1207620"/>
+                  </a:lnTo>
+                  <a:lnTo>
+                    <a:pt x="7019007" y="1213308"/>
+                  </a:lnTo>
+                  <a:lnTo>
+                    <a:pt x="7090630" y="1218915"/>
                   </a:lnTo>
                 </a:path>
               </a:pathLst>
@@ -4554,7 +4538,7 @@
         </p:sp>
         <p:sp>
           <p:nvSpPr>
-            <p:cNvPr id="25" name="pl25"/>
+            <p:cNvPr id="24" name="pl24"/>
             <p:cNvSpPr/>
             <p:nvPr/>
           </p:nvSpPr>
@@ -4597,13 +4581,13 @@
         </p:sp>
         <p:sp>
           <p:nvSpPr>
-            <p:cNvPr id="26" name="pl26"/>
+            <p:cNvPr id="25" name="pl25"/>
             <p:cNvSpPr/>
             <p:nvPr/>
           </p:nvSpPr>
           <p:spPr>
             <a:xfrm>
-              <a:off x="4117484" y="2073503"/>
+              <a:off x="4468386" y="2073503"/>
               <a:ext cx="0" cy="3649639"/>
             </a:xfrm>
             <a:custGeom>
@@ -4640,7 +4624,7 @@
         </p:sp>
         <p:sp>
           <p:nvSpPr>
-            <p:cNvPr id="27" name="tx27"/>
+            <p:cNvPr id="26" name="tx26"/>
             <p:cNvSpPr/>
             <p:nvPr/>
           </p:nvSpPr>
@@ -4686,7 +4670,7 @@
         </p:sp>
         <p:sp>
           <p:nvSpPr>
-            <p:cNvPr id="28" name="tx28"/>
+            <p:cNvPr id="27" name="tx27"/>
             <p:cNvSpPr/>
             <p:nvPr/>
           </p:nvSpPr>
@@ -4732,7 +4716,7 @@
         </p:sp>
         <p:sp>
           <p:nvSpPr>
-            <p:cNvPr id="29" name="tx29"/>
+            <p:cNvPr id="28" name="tx28"/>
             <p:cNvSpPr/>
             <p:nvPr/>
           </p:nvSpPr>
@@ -4778,7 +4762,7 @@
         </p:sp>
         <p:sp>
           <p:nvSpPr>
-            <p:cNvPr id="30" name="tx30"/>
+            <p:cNvPr id="29" name="tx29"/>
             <p:cNvSpPr/>
             <p:nvPr/>
           </p:nvSpPr>
@@ -4824,7 +4808,7 @@
         </p:sp>
         <p:sp>
           <p:nvSpPr>
-            <p:cNvPr id="31" name="tx31"/>
+            <p:cNvPr id="30" name="tx30"/>
             <p:cNvSpPr/>
             <p:nvPr/>
           </p:nvSpPr>
@@ -4870,14 +4854,14 @@
         </p:sp>
         <p:sp>
           <p:nvSpPr>
-            <p:cNvPr id="32" name="tx32"/>
+            <p:cNvPr id="31" name="tx31"/>
             <p:cNvSpPr/>
             <p:nvPr/>
           </p:nvSpPr>
           <p:spPr>
             <a:xfrm>
-              <a:off x="2423864" y="5785772"/>
-              <a:ext cx="155356" cy="80101"/>
+              <a:off x="2478335" y="5785772"/>
+              <a:ext cx="161574" cy="80101"/>
             </a:xfrm>
             <a:prstGeom prst="rect">
               <a:avLst/>
@@ -4909,21 +4893,21 @@
                   <a:latin typeface="Helvetica"/>
                   <a:cs typeface="Helvetica"/>
                 </a:rPr>
-                <a:t>0.8</a:t>
+                <a:t>-25</a:t>
               </a:r>
             </a:p>
           </p:txBody>
         </p:sp>
         <p:sp>
           <p:nvSpPr>
-            <p:cNvPr id="33" name="tx33"/>
+            <p:cNvPr id="32" name="tx32"/>
             <p:cNvSpPr/>
             <p:nvPr/>
           </p:nvSpPr>
           <p:spPr>
             <a:xfrm>
-              <a:off x="4196521" y="5785772"/>
-              <a:ext cx="155356" cy="80101"/>
+              <a:off x="4582608" y="5785772"/>
+              <a:ext cx="62179" cy="80101"/>
             </a:xfrm>
             <a:prstGeom prst="rect">
               <a:avLst/>
@@ -4955,21 +4939,21 @@
                   <a:latin typeface="Helvetica"/>
                   <a:cs typeface="Helvetica"/>
                 </a:rPr>
-                <a:t>1.0</a:t>
+                <a:t>0</a:t>
               </a:r>
             </a:p>
           </p:txBody>
         </p:sp>
         <p:sp>
           <p:nvSpPr>
-            <p:cNvPr id="34" name="tx34"/>
+            <p:cNvPr id="33" name="tx33"/>
             <p:cNvSpPr/>
             <p:nvPr/>
           </p:nvSpPr>
           <p:spPr>
             <a:xfrm>
-              <a:off x="5969179" y="5785772"/>
-              <a:ext cx="155356" cy="80101"/>
+              <a:off x="6606094" y="5785772"/>
+              <a:ext cx="124358" cy="80101"/>
             </a:xfrm>
             <a:prstGeom prst="rect">
               <a:avLst/>
@@ -5001,67 +4985,21 @@
                   <a:latin typeface="Helvetica"/>
                   <a:cs typeface="Helvetica"/>
                 </a:rPr>
-                <a:t>1.2</a:t>
+                <a:t>25</a:t>
               </a:r>
             </a:p>
           </p:txBody>
         </p:sp>
         <p:sp>
           <p:nvSpPr>
-            <p:cNvPr id="35" name="tx35"/>
+            <p:cNvPr id="34" name="tx34"/>
             <p:cNvSpPr/>
             <p:nvPr/>
           </p:nvSpPr>
           <p:spPr>
             <a:xfrm>
-              <a:off x="7741836" y="5785772"/>
-              <a:ext cx="155356" cy="80101"/>
-            </a:xfrm>
-            <a:prstGeom prst="rect">
-              <a:avLst/>
-            </a:prstGeom>
-            <a:noFill/>
-          </p:spPr>
-          <p:txBody>
-            <a:bodyPr lIns="0" rIns="0" tIns="0" bIns="0" anchorCtr="1" anchor="ctr" wrap="none"/>
-            <a:lstStyle/>
-            <a:p>
-              <a:pPr algn="l" marL="0" marR="0" indent="0">
-                <a:lnSpc>
-                  <a:spcPts val="880"/>
-                </a:lnSpc>
-                <a:spcBef>
-                  <a:spcPts val="0"/>
-                </a:spcBef>
-                <a:spcAft>
-                  <a:spcPts val="0"/>
-                </a:spcAft>
-              </a:pPr>
-              <a:r>
-                <a:rPr sz="880">
-                  <a:solidFill>
-                    <a:srgbClr val="4D4D4D">
-                      <a:alpha val="100000"/>
-                    </a:srgbClr>
-                  </a:solidFill>
-                  <a:latin typeface="Helvetica"/>
-                  <a:cs typeface="Helvetica"/>
-                </a:rPr>
-                <a:t>1.4</a:t>
-              </a:r>
-            </a:p>
-          </p:txBody>
-        </p:sp>
-        <p:sp>
-          <p:nvSpPr>
-            <p:cNvPr id="36" name="tx36"/>
-            <p:cNvSpPr/>
-            <p:nvPr/>
-          </p:nvSpPr>
-          <p:spPr>
-            <a:xfrm>
-              <a:off x="3879271" y="5925448"/>
-              <a:ext cx="1676186" cy="100218"/>
+              <a:off x="2928340" y="5925448"/>
+              <a:ext cx="3578047" cy="100218"/>
             </a:xfrm>
             <a:prstGeom prst="rect">
               <a:avLst/>
@@ -5093,14 +5031,14 @@
                   <a:latin typeface="Helvetica"/>
                   <a:cs typeface="Helvetica"/>
                 </a:rPr>
-                <a:t>CKD-EPI Cr-Cys / CG ratio</a:t>
+                <a:t>eGFR difference (%): 100 × (CKD-EPI Cr-Cys − CG) / CG</a:t>
               </a:r>
             </a:p>
           </p:txBody>
         </p:sp>
         <p:sp>
           <p:nvSpPr>
-            <p:cNvPr id="37" name="tx37"/>
+            <p:cNvPr id="35" name="tx35"/>
             <p:cNvSpPr/>
             <p:nvPr/>
           </p:nvSpPr>
@@ -5146,14 +5084,14 @@
         </p:sp>
         <p:sp>
           <p:nvSpPr>
-            <p:cNvPr id="38" name="tx38"/>
+            <p:cNvPr id="36" name="tx36"/>
             <p:cNvSpPr/>
             <p:nvPr/>
           </p:nvSpPr>
           <p:spPr>
             <a:xfrm>
               <a:off x="817517" y="1896563"/>
-              <a:ext cx="6833128" cy="82021"/>
+              <a:ext cx="6985375" cy="82021"/>
             </a:xfrm>
             <a:prstGeom prst="rect">
               <a:avLst/>
@@ -5185,14 +5123,14 @@
                   <a:latin typeface="Helvetica"/>
                   <a:cs typeface="Helvetica"/>
                 </a:rPr>
-                <a:t>subHR per 0.1 ratio decline: 1.18 (0.93-1.50), p_Bonf = 1.000 (n = 6)  |  per IQR decline (Δ = 0.30): 1.63 (0.80-3.31)  |  IQR: [0.84, 1.14]</a:t>
+                <a:t>subHR per 10 % decline: 1.18 (0.93-1.50), p_Bonf = 1.000 (n = 6)  |  per IQR decline (Δ = 29.5 %): 1.63 (0.80-3.31)  |  IQR: [-15.6, 13.9] %</a:t>
               </a:r>
             </a:p>
           </p:txBody>
         </p:sp>
         <p:sp>
           <p:nvSpPr>
-            <p:cNvPr id="39" name="tx39"/>
+            <p:cNvPr id="37" name="tx37"/>
             <p:cNvSpPr/>
             <p:nvPr/>
           </p:nvSpPr>

--- a/docs/pptx/auc3/jx-auc3-linsubhr-ratio-aki2.pptx
+++ b/docs/pptx/auc3/jx-auc3-linsubhr-ratio-aki2.pptx
@@ -2265,34 +2265,26 @@
         </p:sp>
         <p:sp>
           <p:nvSpPr>
-            <p:cNvPr id="4" name="pl4"/>
+            <p:cNvPr id="4" name="rc4"/>
             <p:cNvSpPr/>
             <p:nvPr/>
           </p:nvSpPr>
           <p:spPr>
             <a:xfrm>
-              <a:off x="817517" y="5142518"/>
-              <a:ext cx="7799693" cy="0"/>
+              <a:off x="457200" y="1600200"/>
+              <a:ext cx="8229600" cy="4525962"/>
             </a:xfrm>
-            <a:custGeom>
+            <a:prstGeom prst="rect">
               <a:avLst/>
-              <a:pathLst>
-                <a:path w="7799693" h="0">
-                  <a:moveTo>
-                    <a:pt x="0" y="0"/>
-                  </a:moveTo>
-                  <a:lnTo>
-                    <a:pt x="7799693" y="0"/>
-                  </a:lnTo>
-                  <a:lnTo>
-                    <a:pt x="7799693" y="0"/>
-                  </a:lnTo>
-                </a:path>
-              </a:pathLst>
-            </a:custGeom>
-            <a:ln w="6775" cap="flat">
+            </a:prstGeom>
+            <a:solidFill>
+              <a:srgbClr val="FFFFFF">
+                <a:alpha val="100000"/>
+              </a:srgbClr>
+            </a:solidFill>
+            <a:ln w="13550" cap="rnd">
               <a:solidFill>
-                <a:srgbClr val="EBEBEB">
+                <a:srgbClr val="FFFFFF">
                   <a:alpha val="100000"/>
                 </a:srgbClr>
               </a:solidFill>
@@ -2314,21 +2306,21 @@
           </p:nvSpPr>
           <p:spPr>
             <a:xfrm>
-              <a:off x="817517" y="4313054"/>
-              <a:ext cx="7799693" cy="0"/>
+              <a:off x="887106" y="3250627"/>
+              <a:ext cx="7660515" cy="0"/>
             </a:xfrm>
             <a:custGeom>
               <a:avLst/>
               <a:pathLst>
-                <a:path w="7799693" h="0">
+                <a:path w="7660515" h="0">
                   <a:moveTo>
                     <a:pt x="0" y="0"/>
                   </a:moveTo>
                   <a:lnTo>
-                    <a:pt x="7799693" y="0"/>
-                  </a:lnTo>
-                  <a:lnTo>
-                    <a:pt x="7799693" y="0"/>
+                    <a:pt x="7660515" y="0"/>
+                  </a:lnTo>
+                  <a:lnTo>
+                    <a:pt x="7660515" y="0"/>
                   </a:lnTo>
                 </a:path>
               </a:pathLst>
@@ -2357,21 +2349,21 @@
           </p:nvSpPr>
           <p:spPr>
             <a:xfrm>
-              <a:off x="817517" y="3483591"/>
-              <a:ext cx="7799693" cy="0"/>
+              <a:off x="887106" y="2951293"/>
+              <a:ext cx="7660515" cy="0"/>
             </a:xfrm>
             <a:custGeom>
               <a:avLst/>
               <a:pathLst>
-                <a:path w="7799693" h="0">
+                <a:path w="7660515" h="0">
                   <a:moveTo>
                     <a:pt x="0" y="0"/>
                   </a:moveTo>
                   <a:lnTo>
-                    <a:pt x="7799693" y="0"/>
-                  </a:lnTo>
-                  <a:lnTo>
-                    <a:pt x="7799693" y="0"/>
+                    <a:pt x="7660515" y="0"/>
+                  </a:lnTo>
+                  <a:lnTo>
+                    <a:pt x="7660515" y="0"/>
                   </a:lnTo>
                 </a:path>
               </a:pathLst>
@@ -2400,21 +2392,21 @@
           </p:nvSpPr>
           <p:spPr>
             <a:xfrm>
-              <a:off x="817517" y="2654127"/>
-              <a:ext cx="7799693" cy="0"/>
+              <a:off x="887106" y="2651959"/>
+              <a:ext cx="7660515" cy="0"/>
             </a:xfrm>
             <a:custGeom>
               <a:avLst/>
               <a:pathLst>
-                <a:path w="7799693" h="0">
+                <a:path w="7660515" h="0">
                   <a:moveTo>
                     <a:pt x="0" y="0"/>
                   </a:moveTo>
                   <a:lnTo>
-                    <a:pt x="7799693" y="0"/>
-                  </a:lnTo>
-                  <a:lnTo>
-                    <a:pt x="7799693" y="0"/>
+                    <a:pt x="7660515" y="0"/>
+                  </a:lnTo>
+                  <a:lnTo>
+                    <a:pt x="7660515" y="0"/>
                   </a:lnTo>
                 </a:path>
               </a:pathLst>
@@ -2443,21 +2435,21 @@
           </p:nvSpPr>
           <p:spPr>
             <a:xfrm>
-              <a:off x="1531834" y="2073503"/>
-              <a:ext cx="0" cy="3649639"/>
+              <a:off x="887106" y="2352625"/>
+              <a:ext cx="7660515" cy="0"/>
             </a:xfrm>
             <a:custGeom>
               <a:avLst/>
               <a:pathLst>
-                <a:path w="0" h="3649639">
+                <a:path w="7660515" h="0">
                   <a:moveTo>
-                    <a:pt x="0" y="3649639"/>
+                    <a:pt x="0" y="0"/>
                   </a:moveTo>
                   <a:lnTo>
-                    <a:pt x="0" y="0"/>
-                  </a:lnTo>
-                  <a:lnTo>
-                    <a:pt x="0" y="0"/>
+                    <a:pt x="7660515" y="0"/>
+                  </a:lnTo>
+                  <a:lnTo>
+                    <a:pt x="7660515" y="0"/>
                   </a:lnTo>
                 </a:path>
               </a:pathLst>
@@ -2486,15 +2478,15 @@
           </p:nvSpPr>
           <p:spPr>
             <a:xfrm>
-              <a:off x="3586410" y="2073503"/>
-              <a:ext cx="0" cy="3649639"/>
+              <a:off x="1588677" y="2143092"/>
+              <a:ext cx="0" cy="1317069"/>
             </a:xfrm>
             <a:custGeom>
               <a:avLst/>
               <a:pathLst>
-                <a:path w="0" h="3649639">
+                <a:path w="0" h="1317069">
                   <a:moveTo>
-                    <a:pt x="0" y="3649639"/>
+                    <a:pt x="0" y="1317069"/>
                   </a:moveTo>
                   <a:lnTo>
                     <a:pt x="0" y="0"/>
@@ -2529,15 +2521,15 @@
           </p:nvSpPr>
           <p:spPr>
             <a:xfrm>
-              <a:off x="5640985" y="2073503"/>
-              <a:ext cx="0" cy="3649639"/>
+              <a:off x="3606590" y="2143092"/>
+              <a:ext cx="0" cy="1317069"/>
             </a:xfrm>
             <a:custGeom>
               <a:avLst/>
               <a:pathLst>
-                <a:path w="0" h="3649639">
+                <a:path w="0" h="1317069">
                   <a:moveTo>
-                    <a:pt x="0" y="3649639"/>
+                    <a:pt x="0" y="1317069"/>
                   </a:moveTo>
                   <a:lnTo>
                     <a:pt x="0" y="0"/>
@@ -2572,15 +2564,15 @@
           </p:nvSpPr>
           <p:spPr>
             <a:xfrm>
-              <a:off x="7695561" y="2073503"/>
-              <a:ext cx="0" cy="3649639"/>
+              <a:off x="5624504" y="2143092"/>
+              <a:ext cx="0" cy="1317069"/>
             </a:xfrm>
             <a:custGeom>
               <a:avLst/>
               <a:pathLst>
-                <a:path w="0" h="3649639">
+                <a:path w="0" h="1317069">
                   <a:moveTo>
-                    <a:pt x="0" y="3649639"/>
+                    <a:pt x="0" y="1317069"/>
                   </a:moveTo>
                   <a:lnTo>
                     <a:pt x="0" y="0"/>
@@ -2615,26 +2607,26 @@
           </p:nvSpPr>
           <p:spPr>
             <a:xfrm>
-              <a:off x="817517" y="5557249"/>
-              <a:ext cx="7799693" cy="0"/>
+              <a:off x="7642418" y="2143092"/>
+              <a:ext cx="0" cy="1317069"/>
             </a:xfrm>
             <a:custGeom>
               <a:avLst/>
               <a:pathLst>
-                <a:path w="7799693" h="0">
+                <a:path w="0" h="1317069">
                   <a:moveTo>
+                    <a:pt x="0" y="1317069"/>
+                  </a:moveTo>
+                  <a:lnTo>
                     <a:pt x="0" y="0"/>
-                  </a:moveTo>
-                  <a:lnTo>
-                    <a:pt x="7799693" y="0"/>
-                  </a:lnTo>
-                  <a:lnTo>
-                    <a:pt x="7799693" y="0"/>
+                  </a:lnTo>
+                  <a:lnTo>
+                    <a:pt x="0" y="0"/>
                   </a:lnTo>
                 </a:path>
               </a:pathLst>
             </a:custGeom>
-            <a:ln w="13550" cap="flat">
+            <a:ln w="6775" cap="flat">
               <a:solidFill>
                 <a:srgbClr val="EBEBEB">
                   <a:alpha val="100000"/>
@@ -2658,21 +2650,21 @@
           </p:nvSpPr>
           <p:spPr>
             <a:xfrm>
-              <a:off x="817517" y="4727786"/>
-              <a:ext cx="7799693" cy="0"/>
+              <a:off x="887106" y="3400294"/>
+              <a:ext cx="7660515" cy="0"/>
             </a:xfrm>
             <a:custGeom>
               <a:avLst/>
               <a:pathLst>
-                <a:path w="7799693" h="0">
+                <a:path w="7660515" h="0">
                   <a:moveTo>
                     <a:pt x="0" y="0"/>
                   </a:moveTo>
                   <a:lnTo>
-                    <a:pt x="7799693" y="0"/>
-                  </a:lnTo>
-                  <a:lnTo>
-                    <a:pt x="7799693" y="0"/>
+                    <a:pt x="7660515" y="0"/>
+                  </a:lnTo>
+                  <a:lnTo>
+                    <a:pt x="7660515" y="0"/>
                   </a:lnTo>
                 </a:path>
               </a:pathLst>
@@ -2701,21 +2693,21 @@
           </p:nvSpPr>
           <p:spPr>
             <a:xfrm>
-              <a:off x="817517" y="3898322"/>
-              <a:ext cx="7799693" cy="0"/>
+              <a:off x="887106" y="3100960"/>
+              <a:ext cx="7660515" cy="0"/>
             </a:xfrm>
             <a:custGeom>
               <a:avLst/>
               <a:pathLst>
-                <a:path w="7799693" h="0">
+                <a:path w="7660515" h="0">
                   <a:moveTo>
                     <a:pt x="0" y="0"/>
                   </a:moveTo>
                   <a:lnTo>
-                    <a:pt x="7799693" y="0"/>
-                  </a:lnTo>
-                  <a:lnTo>
-                    <a:pt x="7799693" y="0"/>
+                    <a:pt x="7660515" y="0"/>
+                  </a:lnTo>
+                  <a:lnTo>
+                    <a:pt x="7660515" y="0"/>
                   </a:lnTo>
                 </a:path>
               </a:pathLst>
@@ -2744,21 +2736,21 @@
           </p:nvSpPr>
           <p:spPr>
             <a:xfrm>
-              <a:off x="817517" y="3068859"/>
-              <a:ext cx="7799693" cy="0"/>
+              <a:off x="887106" y="2801626"/>
+              <a:ext cx="7660515" cy="0"/>
             </a:xfrm>
             <a:custGeom>
               <a:avLst/>
               <a:pathLst>
-                <a:path w="7799693" h="0">
+                <a:path w="7660515" h="0">
                   <a:moveTo>
                     <a:pt x="0" y="0"/>
                   </a:moveTo>
                   <a:lnTo>
-                    <a:pt x="7799693" y="0"/>
-                  </a:lnTo>
-                  <a:lnTo>
-                    <a:pt x="7799693" y="0"/>
+                    <a:pt x="7660515" y="0"/>
+                  </a:lnTo>
+                  <a:lnTo>
+                    <a:pt x="7660515" y="0"/>
                   </a:lnTo>
                 </a:path>
               </a:pathLst>
@@ -2787,21 +2779,21 @@
           </p:nvSpPr>
           <p:spPr>
             <a:xfrm>
-              <a:off x="817517" y="2239395"/>
-              <a:ext cx="7799693" cy="0"/>
+              <a:off x="887106" y="2502292"/>
+              <a:ext cx="7660515" cy="0"/>
             </a:xfrm>
             <a:custGeom>
               <a:avLst/>
               <a:pathLst>
-                <a:path w="7799693" h="0">
+                <a:path w="7660515" h="0">
                   <a:moveTo>
                     <a:pt x="0" y="0"/>
                   </a:moveTo>
                   <a:lnTo>
-                    <a:pt x="7799693" y="0"/>
-                  </a:lnTo>
-                  <a:lnTo>
-                    <a:pt x="7799693" y="0"/>
+                    <a:pt x="7660515" y="0"/>
+                  </a:lnTo>
+                  <a:lnTo>
+                    <a:pt x="7660515" y="0"/>
                   </a:lnTo>
                 </a:path>
               </a:pathLst>
@@ -2830,21 +2822,21 @@
           </p:nvSpPr>
           <p:spPr>
             <a:xfrm>
-              <a:off x="2559122" y="2073503"/>
-              <a:ext cx="0" cy="3649639"/>
+              <a:off x="887106" y="2202958"/>
+              <a:ext cx="7660515" cy="0"/>
             </a:xfrm>
             <a:custGeom>
               <a:avLst/>
               <a:pathLst>
-                <a:path w="0" h="3649639">
+                <a:path w="7660515" h="0">
                   <a:moveTo>
-                    <a:pt x="0" y="3649639"/>
+                    <a:pt x="0" y="0"/>
                   </a:moveTo>
                   <a:lnTo>
-                    <a:pt x="0" y="0"/>
-                  </a:lnTo>
-                  <a:lnTo>
-                    <a:pt x="0" y="0"/>
+                    <a:pt x="7660515" y="0"/>
+                  </a:lnTo>
+                  <a:lnTo>
+                    <a:pt x="7660515" y="0"/>
                   </a:lnTo>
                 </a:path>
               </a:pathLst>
@@ -2873,15 +2865,15 @@
           </p:nvSpPr>
           <p:spPr>
             <a:xfrm>
-              <a:off x="4613698" y="2073503"/>
-              <a:ext cx="0" cy="3649639"/>
+              <a:off x="2597634" y="2143092"/>
+              <a:ext cx="0" cy="1317069"/>
             </a:xfrm>
             <a:custGeom>
               <a:avLst/>
               <a:pathLst>
-                <a:path w="0" h="3649639">
+                <a:path w="0" h="1317069">
                   <a:moveTo>
-                    <a:pt x="0" y="3649639"/>
+                    <a:pt x="0" y="1317069"/>
                   </a:moveTo>
                   <a:lnTo>
                     <a:pt x="0" y="0"/>
@@ -2916,15 +2908,15 @@
           </p:nvSpPr>
           <p:spPr>
             <a:xfrm>
-              <a:off x="6668273" y="2073503"/>
-              <a:ext cx="0" cy="3649639"/>
+              <a:off x="4615547" y="2143092"/>
+              <a:ext cx="0" cy="1317069"/>
             </a:xfrm>
             <a:custGeom>
               <a:avLst/>
               <a:pathLst>
-                <a:path w="0" h="3649639">
+                <a:path w="0" h="1317069">
                   <a:moveTo>
-                    <a:pt x="0" y="3649639"/>
+                    <a:pt x="0" y="1317069"/>
                   </a:moveTo>
                   <a:lnTo>
                     <a:pt x="0" y="0"/>
@@ -2953,603 +2945,646 @@
         </p:sp>
         <p:sp>
           <p:nvSpPr>
-            <p:cNvPr id="20" name="pg20"/>
+            <p:cNvPr id="20" name="pl20"/>
             <p:cNvSpPr/>
             <p:nvPr/>
           </p:nvSpPr>
           <p:spPr>
             <a:xfrm>
-              <a:off x="1172049" y="2073503"/>
-              <a:ext cx="7090630" cy="3355920"/>
+              <a:off x="6633461" y="2143092"/>
+              <a:ext cx="0" cy="1317069"/>
             </a:xfrm>
             <a:custGeom>
               <a:avLst/>
               <a:pathLst>
-                <a:path w="7090630" h="3355920">
+                <a:path w="0" h="1317069">
                   <a:moveTo>
-                    <a:pt x="384960" y="0"/>
+                    <a:pt x="0" y="1317069"/>
                   </a:moveTo>
                   <a:lnTo>
-                    <a:pt x="429735" y="76534"/>
-                  </a:lnTo>
-                  <a:lnTo>
-                    <a:pt x="501357" y="194713"/>
-                  </a:lnTo>
-                  <a:lnTo>
-                    <a:pt x="572980" y="308793"/>
-                  </a:lnTo>
-                  <a:lnTo>
-                    <a:pt x="644602" y="418916"/>
-                  </a:lnTo>
-                  <a:lnTo>
-                    <a:pt x="716225" y="525220"/>
-                  </a:lnTo>
-                  <a:lnTo>
-                    <a:pt x="787847" y="627836"/>
-                  </a:lnTo>
-                  <a:lnTo>
-                    <a:pt x="859470" y="726894"/>
-                  </a:lnTo>
-                  <a:lnTo>
-                    <a:pt x="931092" y="822515"/>
-                  </a:lnTo>
-                  <a:lnTo>
-                    <a:pt x="1002715" y="914820"/>
-                  </a:lnTo>
-                  <a:lnTo>
-                    <a:pt x="1074337" y="1003923"/>
-                  </a:lnTo>
-                  <a:lnTo>
-                    <a:pt x="1145960" y="1089936"/>
-                  </a:lnTo>
-                  <a:lnTo>
-                    <a:pt x="1217582" y="1172965"/>
-                  </a:lnTo>
-                  <a:lnTo>
-                    <a:pt x="1289205" y="1253114"/>
-                  </a:lnTo>
-                  <a:lnTo>
-                    <a:pt x="1360827" y="1330484"/>
-                  </a:lnTo>
-                  <a:lnTo>
-                    <a:pt x="1432450" y="1405170"/>
-                  </a:lnTo>
-                  <a:lnTo>
-                    <a:pt x="1504073" y="1477265"/>
-                  </a:lnTo>
-                  <a:lnTo>
-                    <a:pt x="1575695" y="1546860"/>
-                  </a:lnTo>
-                  <a:lnTo>
-                    <a:pt x="1647318" y="1614041"/>
-                  </a:lnTo>
-                  <a:lnTo>
-                    <a:pt x="1718940" y="1678892"/>
-                  </a:lnTo>
-                  <a:lnTo>
-                    <a:pt x="1790563" y="1741493"/>
-                  </a:lnTo>
-                  <a:lnTo>
-                    <a:pt x="1862185" y="1801923"/>
-                  </a:lnTo>
-                  <a:lnTo>
-                    <a:pt x="1933808" y="1860257"/>
-                  </a:lnTo>
-                  <a:lnTo>
-                    <a:pt x="2005430" y="1916568"/>
-                  </a:lnTo>
-                  <a:lnTo>
-                    <a:pt x="2077053" y="1970926"/>
-                  </a:lnTo>
-                  <a:lnTo>
-                    <a:pt x="2148675" y="2023398"/>
-                  </a:lnTo>
-                  <a:lnTo>
-                    <a:pt x="2220298" y="2074050"/>
-                  </a:lnTo>
-                  <a:lnTo>
-                    <a:pt x="2291920" y="2122945"/>
-                  </a:lnTo>
-                  <a:lnTo>
-                    <a:pt x="2363543" y="2170145"/>
-                  </a:lnTo>
-                  <a:lnTo>
-                    <a:pt x="2435165" y="2215707"/>
-                  </a:lnTo>
-                  <a:lnTo>
-                    <a:pt x="2506788" y="2259689"/>
-                  </a:lnTo>
-                  <a:lnTo>
-                    <a:pt x="2578410" y="2302145"/>
-                  </a:lnTo>
-                  <a:lnTo>
-                    <a:pt x="2650033" y="2343129"/>
-                  </a:lnTo>
-                  <a:lnTo>
-                    <a:pt x="2721655" y="2382691"/>
-                  </a:lnTo>
-                  <a:lnTo>
-                    <a:pt x="2793278" y="2420882"/>
-                  </a:lnTo>
-                  <a:lnTo>
-                    <a:pt x="2864901" y="2457747"/>
-                  </a:lnTo>
-                  <a:lnTo>
-                    <a:pt x="2936523" y="2493334"/>
-                  </a:lnTo>
-                  <a:lnTo>
-                    <a:pt x="3008146" y="2527686"/>
-                  </a:lnTo>
-                  <a:lnTo>
-                    <a:pt x="3079768" y="2560847"/>
-                  </a:lnTo>
-                  <a:lnTo>
-                    <a:pt x="3151391" y="2592858"/>
-                  </a:lnTo>
-                  <a:lnTo>
-                    <a:pt x="3223013" y="2623758"/>
-                  </a:lnTo>
-                  <a:lnTo>
-                    <a:pt x="3294636" y="2653587"/>
-                  </a:lnTo>
-                  <a:lnTo>
-                    <a:pt x="3366258" y="2648941"/>
-                  </a:lnTo>
-                  <a:lnTo>
-                    <a:pt x="3437881" y="2643434"/>
-                  </a:lnTo>
-                  <a:lnTo>
-                    <a:pt x="3509503" y="2637890"/>
-                  </a:lnTo>
-                  <a:lnTo>
-                    <a:pt x="3581126" y="2632310"/>
-                  </a:lnTo>
-                  <a:lnTo>
-                    <a:pt x="3652748" y="2626693"/>
-                  </a:lnTo>
-                  <a:lnTo>
-                    <a:pt x="3724371" y="2621039"/>
-                  </a:lnTo>
-                  <a:lnTo>
-                    <a:pt x="3795993" y="2615348"/>
-                  </a:lnTo>
-                  <a:lnTo>
-                    <a:pt x="3867616" y="2609619"/>
-                  </a:lnTo>
-                  <a:lnTo>
-                    <a:pt x="3939238" y="2603852"/>
-                  </a:lnTo>
-                  <a:lnTo>
-                    <a:pt x="4010861" y="2598047"/>
-                  </a:lnTo>
-                  <a:lnTo>
-                    <a:pt x="4082483" y="2592204"/>
-                  </a:lnTo>
-                  <a:lnTo>
-                    <a:pt x="4154106" y="2586323"/>
-                  </a:lnTo>
-                  <a:lnTo>
-                    <a:pt x="4225729" y="2580402"/>
-                  </a:lnTo>
-                  <a:lnTo>
-                    <a:pt x="4297351" y="2574443"/>
-                  </a:lnTo>
-                  <a:lnTo>
-                    <a:pt x="4368974" y="2568444"/>
-                  </a:lnTo>
-                  <a:lnTo>
-                    <a:pt x="4440596" y="2562406"/>
-                  </a:lnTo>
-                  <a:lnTo>
-                    <a:pt x="4512219" y="2556328"/>
-                  </a:lnTo>
-                  <a:lnTo>
-                    <a:pt x="4583841" y="2550210"/>
-                  </a:lnTo>
-                  <a:lnTo>
-                    <a:pt x="4655464" y="2544051"/>
-                  </a:lnTo>
-                  <a:lnTo>
-                    <a:pt x="4727086" y="2537852"/>
-                  </a:lnTo>
-                  <a:lnTo>
-                    <a:pt x="4798709" y="2531612"/>
-                  </a:lnTo>
-                  <a:lnTo>
-                    <a:pt x="4870331" y="2525330"/>
-                  </a:lnTo>
-                  <a:lnTo>
-                    <a:pt x="4941954" y="2519008"/>
-                  </a:lnTo>
-                  <a:lnTo>
-                    <a:pt x="5013576" y="2512643"/>
-                  </a:lnTo>
-                  <a:lnTo>
-                    <a:pt x="5085199" y="2506237"/>
-                  </a:lnTo>
-                  <a:lnTo>
-                    <a:pt x="5156821" y="2499788"/>
-                  </a:lnTo>
-                  <a:lnTo>
-                    <a:pt x="5228444" y="2493297"/>
-                  </a:lnTo>
-                  <a:lnTo>
-                    <a:pt x="5300066" y="2486763"/>
-                  </a:lnTo>
-                  <a:lnTo>
-                    <a:pt x="5371689" y="2480185"/>
-                  </a:lnTo>
-                  <a:lnTo>
-                    <a:pt x="5443311" y="2473565"/>
-                  </a:lnTo>
-                  <a:lnTo>
-                    <a:pt x="5514934" y="2466901"/>
-                  </a:lnTo>
-                  <a:lnTo>
-                    <a:pt x="5586557" y="2460192"/>
-                  </a:lnTo>
-                  <a:lnTo>
-                    <a:pt x="5658179" y="2453440"/>
-                  </a:lnTo>
-                  <a:lnTo>
-                    <a:pt x="5729802" y="2446643"/>
-                  </a:lnTo>
-                  <a:lnTo>
-                    <a:pt x="5801424" y="2439801"/>
-                  </a:lnTo>
-                  <a:lnTo>
-                    <a:pt x="5873047" y="2432914"/>
-                  </a:lnTo>
-                  <a:lnTo>
-                    <a:pt x="5944669" y="2425982"/>
-                  </a:lnTo>
-                  <a:lnTo>
-                    <a:pt x="6016292" y="2419003"/>
-                  </a:lnTo>
-                  <a:lnTo>
-                    <a:pt x="6087914" y="2411979"/>
-                  </a:lnTo>
-                  <a:lnTo>
-                    <a:pt x="6159537" y="2404909"/>
-                  </a:lnTo>
-                  <a:lnTo>
-                    <a:pt x="6231159" y="2397792"/>
-                  </a:lnTo>
-                  <a:lnTo>
-                    <a:pt x="6302782" y="2390627"/>
-                  </a:lnTo>
-                  <a:lnTo>
-                    <a:pt x="6374404" y="2383416"/>
-                  </a:lnTo>
-                  <a:lnTo>
-                    <a:pt x="6446027" y="2376157"/>
-                  </a:lnTo>
-                  <a:lnTo>
-                    <a:pt x="6517649" y="2368850"/>
-                  </a:lnTo>
-                  <a:lnTo>
-                    <a:pt x="6589272" y="2361495"/>
-                  </a:lnTo>
-                  <a:lnTo>
-                    <a:pt x="6660894" y="2354092"/>
-                  </a:lnTo>
-                  <a:lnTo>
-                    <a:pt x="6732517" y="2346639"/>
-                  </a:lnTo>
-                  <a:lnTo>
-                    <a:pt x="6804139" y="2339138"/>
-                  </a:lnTo>
-                  <a:lnTo>
-                    <a:pt x="6875762" y="2331586"/>
-                  </a:lnTo>
-                  <a:lnTo>
-                    <a:pt x="6947385" y="2323986"/>
-                  </a:lnTo>
-                  <a:lnTo>
-                    <a:pt x="7019007" y="2316335"/>
-                  </a:lnTo>
-                  <a:lnTo>
-                    <a:pt x="7090630" y="2308633"/>
-                  </a:lnTo>
-                  <a:lnTo>
-                    <a:pt x="7090630" y="3355920"/>
-                  </a:lnTo>
-                  <a:lnTo>
-                    <a:pt x="7019007" y="3351327"/>
-                  </a:lnTo>
-                  <a:lnTo>
-                    <a:pt x="6947385" y="3346569"/>
-                  </a:lnTo>
-                  <a:lnTo>
-                    <a:pt x="6875762" y="3341640"/>
-                  </a:lnTo>
-                  <a:lnTo>
-                    <a:pt x="6804139" y="3336534"/>
-                  </a:lnTo>
-                  <a:lnTo>
-                    <a:pt x="6732517" y="3331244"/>
-                  </a:lnTo>
-                  <a:lnTo>
-                    <a:pt x="6660894" y="3325765"/>
-                  </a:lnTo>
-                  <a:lnTo>
-                    <a:pt x="6589272" y="3320088"/>
-                  </a:lnTo>
-                  <a:lnTo>
-                    <a:pt x="6517649" y="3314208"/>
-                  </a:lnTo>
-                  <a:lnTo>
-                    <a:pt x="6446027" y="3308116"/>
-                  </a:lnTo>
-                  <a:lnTo>
-                    <a:pt x="6374404" y="3301805"/>
-                  </a:lnTo>
-                  <a:lnTo>
-                    <a:pt x="6302782" y="3295268"/>
-                  </a:lnTo>
-                  <a:lnTo>
-                    <a:pt x="6231159" y="3288496"/>
-                  </a:lnTo>
-                  <a:lnTo>
-                    <a:pt x="6159537" y="3281480"/>
-                  </a:lnTo>
-                  <a:lnTo>
-                    <a:pt x="6087914" y="3274212"/>
-                  </a:lnTo>
-                  <a:lnTo>
-                    <a:pt x="6016292" y="3266684"/>
-                  </a:lnTo>
-                  <a:lnTo>
-                    <a:pt x="5944669" y="3258884"/>
-                  </a:lnTo>
-                  <a:lnTo>
-                    <a:pt x="5873047" y="3250805"/>
-                  </a:lnTo>
-                  <a:lnTo>
-                    <a:pt x="5801424" y="3242435"/>
-                  </a:lnTo>
-                  <a:lnTo>
-                    <a:pt x="5729802" y="3233764"/>
-                  </a:lnTo>
-                  <a:lnTo>
-                    <a:pt x="5658179" y="3224782"/>
-                  </a:lnTo>
-                  <a:lnTo>
-                    <a:pt x="5586557" y="3215477"/>
-                  </a:lnTo>
-                  <a:lnTo>
-                    <a:pt x="5514934" y="3205838"/>
-                  </a:lnTo>
-                  <a:lnTo>
-                    <a:pt x="5443311" y="3195852"/>
-                  </a:lnTo>
-                  <a:lnTo>
-                    <a:pt x="5371689" y="3185508"/>
-                  </a:lnTo>
-                  <a:lnTo>
-                    <a:pt x="5300066" y="3174792"/>
-                  </a:lnTo>
-                  <a:lnTo>
-                    <a:pt x="5228444" y="3163690"/>
-                  </a:lnTo>
-                  <a:lnTo>
-                    <a:pt x="5156821" y="3152190"/>
-                  </a:lnTo>
-                  <a:lnTo>
-                    <a:pt x="5085199" y="3140277"/>
-                  </a:lnTo>
-                  <a:lnTo>
-                    <a:pt x="5013576" y="3127936"/>
-                  </a:lnTo>
-                  <a:lnTo>
-                    <a:pt x="4941954" y="3115151"/>
-                  </a:lnTo>
-                  <a:lnTo>
-                    <a:pt x="4870331" y="3101907"/>
-                  </a:lnTo>
-                  <a:lnTo>
-                    <a:pt x="4798709" y="3088187"/>
-                  </a:lnTo>
-                  <a:lnTo>
-                    <a:pt x="4727086" y="3073974"/>
-                  </a:lnTo>
-                  <a:lnTo>
-                    <a:pt x="4655464" y="3059251"/>
-                  </a:lnTo>
-                  <a:lnTo>
-                    <a:pt x="4583841" y="3043998"/>
-                  </a:lnTo>
-                  <a:lnTo>
-                    <a:pt x="4512219" y="3028197"/>
-                  </a:lnTo>
-                  <a:lnTo>
-                    <a:pt x="4440596" y="3011829"/>
-                  </a:lnTo>
-                  <a:lnTo>
-                    <a:pt x="4368974" y="2994872"/>
-                  </a:lnTo>
-                  <a:lnTo>
-                    <a:pt x="4297351" y="2977306"/>
-                  </a:lnTo>
-                  <a:lnTo>
-                    <a:pt x="4225729" y="2959109"/>
-                  </a:lnTo>
-                  <a:lnTo>
-                    <a:pt x="4154106" y="2940258"/>
-                  </a:lnTo>
-                  <a:lnTo>
-                    <a:pt x="4082483" y="2920730"/>
-                  </a:lnTo>
-                  <a:lnTo>
-                    <a:pt x="4010861" y="2900500"/>
-                  </a:lnTo>
-                  <a:lnTo>
-                    <a:pt x="3939238" y="2879543"/>
-                  </a:lnTo>
-                  <a:lnTo>
-                    <a:pt x="3867616" y="2857834"/>
-                  </a:lnTo>
-                  <a:lnTo>
-                    <a:pt x="3795993" y="2835344"/>
-                  </a:lnTo>
-                  <a:lnTo>
-                    <a:pt x="3724371" y="2812046"/>
-                  </a:lnTo>
-                  <a:lnTo>
-                    <a:pt x="3652748" y="2787911"/>
-                  </a:lnTo>
-                  <a:lnTo>
-                    <a:pt x="3581126" y="2762908"/>
-                  </a:lnTo>
-                  <a:lnTo>
-                    <a:pt x="3509503" y="2737008"/>
-                  </a:lnTo>
-                  <a:lnTo>
-                    <a:pt x="3437881" y="2710177"/>
-                  </a:lnTo>
-                  <a:lnTo>
-                    <a:pt x="3366258" y="2682381"/>
-                  </a:lnTo>
-                  <a:lnTo>
-                    <a:pt x="3294636" y="2654412"/>
-                  </a:lnTo>
-                  <a:lnTo>
-                    <a:pt x="3223013" y="2659848"/>
-                  </a:lnTo>
-                  <a:lnTo>
-                    <a:pt x="3151391" y="2665247"/>
-                  </a:lnTo>
-                  <a:lnTo>
-                    <a:pt x="3079768" y="2670612"/>
-                  </a:lnTo>
-                  <a:lnTo>
-                    <a:pt x="3008146" y="2675941"/>
-                  </a:lnTo>
-                  <a:lnTo>
-                    <a:pt x="2936523" y="2681235"/>
-                  </a:lnTo>
-                  <a:lnTo>
-                    <a:pt x="2864901" y="2686495"/>
-                  </a:lnTo>
-                  <a:lnTo>
-                    <a:pt x="2793278" y="2691720"/>
-                  </a:lnTo>
-                  <a:lnTo>
-                    <a:pt x="2721655" y="2696911"/>
-                  </a:lnTo>
-                  <a:lnTo>
-                    <a:pt x="2650033" y="2702067"/>
-                  </a:lnTo>
-                  <a:lnTo>
-                    <a:pt x="2578410" y="2707190"/>
-                  </a:lnTo>
-                  <a:lnTo>
-                    <a:pt x="2506788" y="2712280"/>
-                  </a:lnTo>
-                  <a:lnTo>
-                    <a:pt x="2435165" y="2717336"/>
-                  </a:lnTo>
-                  <a:lnTo>
-                    <a:pt x="2363543" y="2722359"/>
-                  </a:lnTo>
-                  <a:lnTo>
-                    <a:pt x="2291920" y="2727349"/>
-                  </a:lnTo>
-                  <a:lnTo>
-                    <a:pt x="2220298" y="2732306"/>
-                  </a:lnTo>
-                  <a:lnTo>
-                    <a:pt x="2148675" y="2737231"/>
-                  </a:lnTo>
-                  <a:lnTo>
-                    <a:pt x="2077053" y="2742123"/>
-                  </a:lnTo>
-                  <a:lnTo>
-                    <a:pt x="2005430" y="2746984"/>
-                  </a:lnTo>
-                  <a:lnTo>
-                    <a:pt x="1933808" y="2751813"/>
-                  </a:lnTo>
-                  <a:lnTo>
-                    <a:pt x="1862185" y="2756610"/>
-                  </a:lnTo>
-                  <a:lnTo>
-                    <a:pt x="1790563" y="2761375"/>
-                  </a:lnTo>
-                  <a:lnTo>
-                    <a:pt x="1718940" y="2766109"/>
-                  </a:lnTo>
-                  <a:lnTo>
-                    <a:pt x="1647318" y="2770813"/>
-                  </a:lnTo>
-                  <a:lnTo>
-                    <a:pt x="1575695" y="2775485"/>
-                  </a:lnTo>
-                  <a:lnTo>
-                    <a:pt x="1504073" y="2780127"/>
-                  </a:lnTo>
-                  <a:lnTo>
-                    <a:pt x="1432450" y="2784738"/>
-                  </a:lnTo>
-                  <a:lnTo>
-                    <a:pt x="1360827" y="2789320"/>
-                  </a:lnTo>
-                  <a:lnTo>
-                    <a:pt x="1289205" y="2793871"/>
-                  </a:lnTo>
-                  <a:lnTo>
-                    <a:pt x="1217582" y="2798392"/>
-                  </a:lnTo>
-                  <a:lnTo>
-                    <a:pt x="1145960" y="2802884"/>
-                  </a:lnTo>
-                  <a:lnTo>
-                    <a:pt x="1074337" y="2807346"/>
-                  </a:lnTo>
-                  <a:lnTo>
-                    <a:pt x="1002715" y="2811779"/>
-                  </a:lnTo>
-                  <a:lnTo>
-                    <a:pt x="931092" y="2816183"/>
-                  </a:lnTo>
-                  <a:lnTo>
-                    <a:pt x="859470" y="2820558"/>
-                  </a:lnTo>
-                  <a:lnTo>
-                    <a:pt x="787847" y="2824905"/>
-                  </a:lnTo>
-                  <a:lnTo>
-                    <a:pt x="716225" y="2829223"/>
-                  </a:lnTo>
-                  <a:lnTo>
-                    <a:pt x="644602" y="2833512"/>
-                  </a:lnTo>
-                  <a:lnTo>
-                    <a:pt x="572980" y="2837774"/>
-                  </a:lnTo>
-                  <a:lnTo>
-                    <a:pt x="501357" y="2842007"/>
-                  </a:lnTo>
-                  <a:lnTo>
-                    <a:pt x="429735" y="2846213"/>
-                  </a:lnTo>
-                  <a:lnTo>
-                    <a:pt x="358112" y="2850391"/>
-                  </a:lnTo>
-                  <a:lnTo>
-                    <a:pt x="286490" y="2854542"/>
-                  </a:lnTo>
-                  <a:lnTo>
-                    <a:pt x="214867" y="2858666"/>
-                  </a:lnTo>
-                  <a:lnTo>
-                    <a:pt x="143245" y="2862763"/>
-                  </a:lnTo>
-                  <a:lnTo>
-                    <a:pt x="71622" y="2866833"/>
-                  </a:lnTo>
-                  <a:lnTo>
-                    <a:pt x="0" y="2870876"/>
+                    <a:pt x="0" y="0"/>
+                  </a:lnTo>
+                  <a:lnTo>
+                    <a:pt x="0" y="0"/>
+                  </a:lnTo>
+                </a:path>
+              </a:pathLst>
+            </a:custGeom>
+            <a:ln w="13550" cap="flat">
+              <a:solidFill>
+                <a:srgbClr val="EBEBEB">
+                  <a:alpha val="100000"/>
+                </a:srgbClr>
+              </a:solidFill>
+              <a:prstDash val="solid"/>
+              <a:round/>
+            </a:ln>
+          </p:spPr>
+          <p:txBody>
+            <a:bodyPr/>
+            <a:lstStyle/>
+            <a:p/>
+          </p:txBody>
+        </p:sp>
+        <p:sp>
+          <p:nvSpPr>
+            <p:cNvPr id="21" name="pg21"/>
+            <p:cNvSpPr/>
+            <p:nvPr/>
+          </p:nvSpPr>
+          <p:spPr>
+            <a:xfrm>
+              <a:off x="1235312" y="2143092"/>
+              <a:ext cx="6964104" cy="1211072"/>
+            </a:xfrm>
+            <a:custGeom>
+              <a:avLst/>
+              <a:pathLst>
+                <a:path w="6964104" h="1211072">
+                  <a:moveTo>
+                    <a:pt x="378091" y="0"/>
+                  </a:moveTo>
+                  <a:lnTo>
+                    <a:pt x="422066" y="27619"/>
+                  </a:lnTo>
+                  <a:lnTo>
+                    <a:pt x="492411" y="70267"/>
+                  </a:lnTo>
+                  <a:lnTo>
+                    <a:pt x="562755" y="111436"/>
+                  </a:lnTo>
+                  <a:lnTo>
+                    <a:pt x="633100" y="151177"/>
+                  </a:lnTo>
+                  <a:lnTo>
+                    <a:pt x="703444" y="189539"/>
+                  </a:lnTo>
+                  <a:lnTo>
+                    <a:pt x="773789" y="226571"/>
+                  </a:lnTo>
+                  <a:lnTo>
+                    <a:pt x="844133" y="262318"/>
+                  </a:lnTo>
+                  <a:lnTo>
+                    <a:pt x="914478" y="296826"/>
+                  </a:lnTo>
+                  <a:lnTo>
+                    <a:pt x="984822" y="330137"/>
+                  </a:lnTo>
+                  <a:lnTo>
+                    <a:pt x="1055167" y="362292"/>
+                  </a:lnTo>
+                  <a:lnTo>
+                    <a:pt x="1125511" y="393332"/>
+                  </a:lnTo>
+                  <a:lnTo>
+                    <a:pt x="1195856" y="423295"/>
+                  </a:lnTo>
+                  <a:lnTo>
+                    <a:pt x="1266200" y="452219"/>
+                  </a:lnTo>
+                  <a:lnTo>
+                    <a:pt x="1336545" y="480140"/>
+                  </a:lnTo>
+                  <a:lnTo>
+                    <a:pt x="1406889" y="507092"/>
+                  </a:lnTo>
+                  <a:lnTo>
+                    <a:pt x="1477234" y="533110"/>
+                  </a:lnTo>
+                  <a:lnTo>
+                    <a:pt x="1547578" y="558225"/>
+                  </a:lnTo>
+                  <a:lnTo>
+                    <a:pt x="1617923" y="582469"/>
+                  </a:lnTo>
+                  <a:lnTo>
+                    <a:pt x="1688267" y="605872"/>
+                  </a:lnTo>
+                  <a:lnTo>
+                    <a:pt x="1758612" y="628464"/>
+                  </a:lnTo>
+                  <a:lnTo>
+                    <a:pt x="1828956" y="650271"/>
+                  </a:lnTo>
+                  <a:lnTo>
+                    <a:pt x="1899301" y="671323"/>
+                  </a:lnTo>
+                  <a:lnTo>
+                    <a:pt x="1969645" y="691644"/>
+                  </a:lnTo>
+                  <a:lnTo>
+                    <a:pt x="2039990" y="711260"/>
+                  </a:lnTo>
+                  <a:lnTo>
+                    <a:pt x="2110334" y="730196"/>
+                  </a:lnTo>
+                  <a:lnTo>
+                    <a:pt x="2180679" y="748475"/>
+                  </a:lnTo>
+                  <a:lnTo>
+                    <a:pt x="2251023" y="766121"/>
+                  </a:lnTo>
+                  <a:lnTo>
+                    <a:pt x="2321368" y="783154"/>
+                  </a:lnTo>
+                  <a:lnTo>
+                    <a:pt x="2391712" y="799596"/>
+                  </a:lnTo>
+                  <a:lnTo>
+                    <a:pt x="2462057" y="815468"/>
+                  </a:lnTo>
+                  <a:lnTo>
+                    <a:pt x="2532401" y="830790"/>
+                  </a:lnTo>
+                  <a:lnTo>
+                    <a:pt x="2602746" y="845580"/>
+                  </a:lnTo>
+                  <a:lnTo>
+                    <a:pt x="2673090" y="859857"/>
+                  </a:lnTo>
+                  <a:lnTo>
+                    <a:pt x="2743435" y="873639"/>
+                  </a:lnTo>
+                  <a:lnTo>
+                    <a:pt x="2813779" y="886943"/>
+                  </a:lnTo>
+                  <a:lnTo>
+                    <a:pt x="2884124" y="899785"/>
+                  </a:lnTo>
+                  <a:lnTo>
+                    <a:pt x="2954468" y="912182"/>
+                  </a:lnTo>
+                  <a:lnTo>
+                    <a:pt x="3024813" y="924149"/>
+                  </a:lnTo>
+                  <a:lnTo>
+                    <a:pt x="3095157" y="935701"/>
+                  </a:lnTo>
+                  <a:lnTo>
+                    <a:pt x="3165502" y="946852"/>
+                  </a:lnTo>
+                  <a:lnTo>
+                    <a:pt x="3235846" y="957617"/>
+                  </a:lnTo>
+                  <a:lnTo>
+                    <a:pt x="3306191" y="955940"/>
+                  </a:lnTo>
+                  <a:lnTo>
+                    <a:pt x="3376535" y="953953"/>
+                  </a:lnTo>
+                  <a:lnTo>
+                    <a:pt x="3446880" y="951952"/>
+                  </a:lnTo>
+                  <a:lnTo>
+                    <a:pt x="3517224" y="949938"/>
+                  </a:lnTo>
+                  <a:lnTo>
+                    <a:pt x="3587569" y="947911"/>
+                  </a:lnTo>
+                  <a:lnTo>
+                    <a:pt x="3657913" y="945871"/>
+                  </a:lnTo>
+                  <a:lnTo>
+                    <a:pt x="3728257" y="943817"/>
+                  </a:lnTo>
+                  <a:lnTo>
+                    <a:pt x="3798602" y="941750"/>
+                  </a:lnTo>
+                  <a:lnTo>
+                    <a:pt x="3868946" y="939669"/>
+                  </a:lnTo>
+                  <a:lnTo>
+                    <a:pt x="3939291" y="937574"/>
+                  </a:lnTo>
+                  <a:lnTo>
+                    <a:pt x="4009635" y="935465"/>
+                  </a:lnTo>
+                  <a:lnTo>
+                    <a:pt x="4079980" y="933343"/>
+                  </a:lnTo>
+                  <a:lnTo>
+                    <a:pt x="4150324" y="931206"/>
+                  </a:lnTo>
+                  <a:lnTo>
+                    <a:pt x="4220669" y="929056"/>
+                  </a:lnTo>
+                  <a:lnTo>
+                    <a:pt x="4291013" y="926891"/>
+                  </a:lnTo>
+                  <a:lnTo>
+                    <a:pt x="4361358" y="924712"/>
+                  </a:lnTo>
+                  <a:lnTo>
+                    <a:pt x="4431702" y="922518"/>
+                  </a:lnTo>
+                  <a:lnTo>
+                    <a:pt x="4502047" y="920310"/>
+                  </a:lnTo>
+                  <a:lnTo>
+                    <a:pt x="4572391" y="918088"/>
+                  </a:lnTo>
+                  <a:lnTo>
+                    <a:pt x="4642736" y="915851"/>
+                  </a:lnTo>
+                  <a:lnTo>
+                    <a:pt x="4713080" y="913599"/>
+                  </a:lnTo>
+                  <a:lnTo>
+                    <a:pt x="4783425" y="911332"/>
+                  </a:lnTo>
+                  <a:lnTo>
+                    <a:pt x="4853769" y="909050"/>
+                  </a:lnTo>
+                  <a:lnTo>
+                    <a:pt x="4924114" y="906753"/>
+                  </a:lnTo>
+                  <a:lnTo>
+                    <a:pt x="4994458" y="904442"/>
+                  </a:lnTo>
+                  <a:lnTo>
+                    <a:pt x="5064803" y="902114"/>
+                  </a:lnTo>
+                  <a:lnTo>
+                    <a:pt x="5135147" y="899772"/>
+                  </a:lnTo>
+                  <a:lnTo>
+                    <a:pt x="5205492" y="897414"/>
+                  </a:lnTo>
+                  <a:lnTo>
+                    <a:pt x="5275836" y="895040"/>
+                  </a:lnTo>
+                  <a:lnTo>
+                    <a:pt x="5346181" y="892651"/>
+                  </a:lnTo>
+                  <a:lnTo>
+                    <a:pt x="5416525" y="890246"/>
+                  </a:lnTo>
+                  <a:lnTo>
+                    <a:pt x="5486870" y="887825"/>
+                  </a:lnTo>
+                  <a:lnTo>
+                    <a:pt x="5557214" y="885388"/>
+                  </a:lnTo>
+                  <a:lnTo>
+                    <a:pt x="5627559" y="882936"/>
+                  </a:lnTo>
+                  <a:lnTo>
+                    <a:pt x="5697903" y="880466"/>
+                  </a:lnTo>
+                  <a:lnTo>
+                    <a:pt x="5768248" y="877981"/>
+                  </a:lnTo>
+                  <a:lnTo>
+                    <a:pt x="5838592" y="875479"/>
+                  </a:lnTo>
+                  <a:lnTo>
+                    <a:pt x="5908937" y="872961"/>
+                  </a:lnTo>
+                  <a:lnTo>
+                    <a:pt x="5979281" y="870426"/>
+                  </a:lnTo>
+                  <a:lnTo>
+                    <a:pt x="6049626" y="867875"/>
+                  </a:lnTo>
+                  <a:lnTo>
+                    <a:pt x="6119970" y="865306"/>
+                  </a:lnTo>
+                  <a:lnTo>
+                    <a:pt x="6190315" y="862721"/>
+                  </a:lnTo>
+                  <a:lnTo>
+                    <a:pt x="6260659" y="860118"/>
+                  </a:lnTo>
+                  <a:lnTo>
+                    <a:pt x="6331004" y="857499"/>
+                  </a:lnTo>
+                  <a:lnTo>
+                    <a:pt x="6401348" y="854862"/>
+                  </a:lnTo>
+                  <a:lnTo>
+                    <a:pt x="6471693" y="852208"/>
+                  </a:lnTo>
+                  <a:lnTo>
+                    <a:pt x="6542037" y="849536"/>
+                  </a:lnTo>
+                  <a:lnTo>
+                    <a:pt x="6612382" y="846847"/>
+                  </a:lnTo>
+                  <a:lnTo>
+                    <a:pt x="6682726" y="844139"/>
+                  </a:lnTo>
+                  <a:lnTo>
+                    <a:pt x="6753071" y="841414"/>
+                  </a:lnTo>
+                  <a:lnTo>
+                    <a:pt x="6823415" y="838671"/>
+                  </a:lnTo>
+                  <a:lnTo>
+                    <a:pt x="6893760" y="835910"/>
+                  </a:lnTo>
+                  <a:lnTo>
+                    <a:pt x="6964104" y="833131"/>
+                  </a:lnTo>
+                  <a:lnTo>
+                    <a:pt x="6964104" y="1211072"/>
+                  </a:lnTo>
+                  <a:lnTo>
+                    <a:pt x="6893760" y="1209415"/>
+                  </a:lnTo>
+                  <a:lnTo>
+                    <a:pt x="6823415" y="1207698"/>
+                  </a:lnTo>
+                  <a:lnTo>
+                    <a:pt x="6753071" y="1205919"/>
+                  </a:lnTo>
+                  <a:lnTo>
+                    <a:pt x="6682726" y="1204076"/>
+                  </a:lnTo>
+                  <a:lnTo>
+                    <a:pt x="6612382" y="1202167"/>
+                  </a:lnTo>
+                  <a:lnTo>
+                    <a:pt x="6542037" y="1200190"/>
+                  </a:lnTo>
+                  <a:lnTo>
+                    <a:pt x="6471693" y="1198141"/>
+                  </a:lnTo>
+                  <a:lnTo>
+                    <a:pt x="6401348" y="1196019"/>
+                  </a:lnTo>
+                  <a:lnTo>
+                    <a:pt x="6331004" y="1193821"/>
+                  </a:lnTo>
+                  <a:lnTo>
+                    <a:pt x="6260659" y="1191544"/>
+                  </a:lnTo>
+                  <a:lnTo>
+                    <a:pt x="6190315" y="1189184"/>
+                  </a:lnTo>
+                  <a:lnTo>
+                    <a:pt x="6119970" y="1186740"/>
+                  </a:lnTo>
+                  <a:lnTo>
+                    <a:pt x="6049626" y="1184209"/>
+                  </a:lnTo>
+                  <a:lnTo>
+                    <a:pt x="5979281" y="1181586"/>
+                  </a:lnTo>
+                  <a:lnTo>
+                    <a:pt x="5908937" y="1178869"/>
+                  </a:lnTo>
+                  <a:lnTo>
+                    <a:pt x="5838592" y="1176054"/>
+                  </a:lnTo>
+                  <a:lnTo>
+                    <a:pt x="5768248" y="1173139"/>
+                  </a:lnTo>
+                  <a:lnTo>
+                    <a:pt x="5697903" y="1170118"/>
+                  </a:lnTo>
+                  <a:lnTo>
+                    <a:pt x="5627559" y="1166989"/>
+                  </a:lnTo>
+                  <a:lnTo>
+                    <a:pt x="5557214" y="1163748"/>
+                  </a:lnTo>
+                  <a:lnTo>
+                    <a:pt x="5486870" y="1160390"/>
+                  </a:lnTo>
+                  <a:lnTo>
+                    <a:pt x="5416525" y="1156911"/>
+                  </a:lnTo>
+                  <a:lnTo>
+                    <a:pt x="5346181" y="1153308"/>
+                  </a:lnTo>
+                  <a:lnTo>
+                    <a:pt x="5275836" y="1149574"/>
+                  </a:lnTo>
+                  <a:lnTo>
+                    <a:pt x="5205492" y="1145707"/>
+                  </a:lnTo>
+                  <a:lnTo>
+                    <a:pt x="5135147" y="1141701"/>
+                  </a:lnTo>
+                  <a:lnTo>
+                    <a:pt x="5064803" y="1137551"/>
+                  </a:lnTo>
+                  <a:lnTo>
+                    <a:pt x="4994458" y="1133252"/>
+                  </a:lnTo>
+                  <a:lnTo>
+                    <a:pt x="4924114" y="1128798"/>
+                  </a:lnTo>
+                  <a:lnTo>
+                    <a:pt x="4853769" y="1124184"/>
+                  </a:lnTo>
+                  <a:lnTo>
+                    <a:pt x="4783425" y="1119405"/>
+                  </a:lnTo>
+                  <a:lnTo>
+                    <a:pt x="4713080" y="1114454"/>
+                  </a:lnTo>
+                  <a:lnTo>
+                    <a:pt x="4642736" y="1109325"/>
+                  </a:lnTo>
+                  <a:lnTo>
+                    <a:pt x="4572391" y="1104011"/>
+                  </a:lnTo>
+                  <a:lnTo>
+                    <a:pt x="4502047" y="1098507"/>
+                  </a:lnTo>
+                  <a:lnTo>
+                    <a:pt x="4431702" y="1092805"/>
+                  </a:lnTo>
+                  <a:lnTo>
+                    <a:pt x="4361358" y="1086898"/>
+                  </a:lnTo>
+                  <a:lnTo>
+                    <a:pt x="4291013" y="1080779"/>
+                  </a:lnTo>
+                  <a:lnTo>
+                    <a:pt x="4220669" y="1074439"/>
+                  </a:lnTo>
+                  <a:lnTo>
+                    <a:pt x="4150324" y="1067873"/>
+                  </a:lnTo>
+                  <a:lnTo>
+                    <a:pt x="4079980" y="1061070"/>
+                  </a:lnTo>
+                  <a:lnTo>
+                    <a:pt x="4009635" y="1054022"/>
+                  </a:lnTo>
+                  <a:lnTo>
+                    <a:pt x="3939291" y="1046722"/>
+                  </a:lnTo>
+                  <a:lnTo>
+                    <a:pt x="3868946" y="1039159"/>
+                  </a:lnTo>
+                  <a:lnTo>
+                    <a:pt x="3798602" y="1031325"/>
+                  </a:lnTo>
+                  <a:lnTo>
+                    <a:pt x="3728257" y="1023209"/>
+                  </a:lnTo>
+                  <a:lnTo>
+                    <a:pt x="3657913" y="1014801"/>
+                  </a:lnTo>
+                  <a:lnTo>
+                    <a:pt x="3587569" y="1006091"/>
+                  </a:lnTo>
+                  <a:lnTo>
+                    <a:pt x="3517224" y="997068"/>
+                  </a:lnTo>
+                  <a:lnTo>
+                    <a:pt x="3446880" y="987721"/>
+                  </a:lnTo>
+                  <a:lnTo>
+                    <a:pt x="3376535" y="978039"/>
+                  </a:lnTo>
+                  <a:lnTo>
+                    <a:pt x="3306191" y="968008"/>
+                  </a:lnTo>
+                  <a:lnTo>
+                    <a:pt x="3235846" y="957915"/>
+                  </a:lnTo>
+                  <a:lnTo>
+                    <a:pt x="3165502" y="959876"/>
+                  </a:lnTo>
+                  <a:lnTo>
+                    <a:pt x="3095157" y="961825"/>
+                  </a:lnTo>
+                  <a:lnTo>
+                    <a:pt x="3024813" y="963761"/>
+                  </a:lnTo>
+                  <a:lnTo>
+                    <a:pt x="2954468" y="965684"/>
+                  </a:lnTo>
+                  <a:lnTo>
+                    <a:pt x="2884124" y="967594"/>
+                  </a:lnTo>
+                  <a:lnTo>
+                    <a:pt x="2813779" y="969492"/>
+                  </a:lnTo>
+                  <a:lnTo>
+                    <a:pt x="2743435" y="971378"/>
+                  </a:lnTo>
+                  <a:lnTo>
+                    <a:pt x="2673090" y="973251"/>
+                  </a:lnTo>
+                  <a:lnTo>
+                    <a:pt x="2602746" y="975112"/>
+                  </a:lnTo>
+                  <a:lnTo>
+                    <a:pt x="2532401" y="976961"/>
+                  </a:lnTo>
+                  <a:lnTo>
+                    <a:pt x="2462057" y="978798"/>
+                  </a:lnTo>
+                  <a:lnTo>
+                    <a:pt x="2391712" y="980622"/>
+                  </a:lnTo>
+                  <a:lnTo>
+                    <a:pt x="2321368" y="982435"/>
+                  </a:lnTo>
+                  <a:lnTo>
+                    <a:pt x="2251023" y="984236"/>
+                  </a:lnTo>
+                  <a:lnTo>
+                    <a:pt x="2180679" y="986025"/>
+                  </a:lnTo>
+                  <a:lnTo>
+                    <a:pt x="2110334" y="987802"/>
+                  </a:lnTo>
+                  <a:lnTo>
+                    <a:pt x="2039990" y="989568"/>
+                  </a:lnTo>
+                  <a:lnTo>
+                    <a:pt x="1969645" y="991322"/>
+                  </a:lnTo>
+                  <a:lnTo>
+                    <a:pt x="1899301" y="993064"/>
+                  </a:lnTo>
+                  <a:lnTo>
+                    <a:pt x="1828956" y="994795"/>
+                  </a:lnTo>
+                  <a:lnTo>
+                    <a:pt x="1758612" y="996515"/>
+                  </a:lnTo>
+                  <a:lnTo>
+                    <a:pt x="1688267" y="998223"/>
+                  </a:lnTo>
+                  <a:lnTo>
+                    <a:pt x="1617923" y="999921"/>
+                  </a:lnTo>
+                  <a:lnTo>
+                    <a:pt x="1547578" y="1001607"/>
+                  </a:lnTo>
+                  <a:lnTo>
+                    <a:pt x="1477234" y="1003282"/>
+                  </a:lnTo>
+                  <a:lnTo>
+                    <a:pt x="1406889" y="1004946"/>
+                  </a:lnTo>
+                  <a:lnTo>
+                    <a:pt x="1336545" y="1006599"/>
+                  </a:lnTo>
+                  <a:lnTo>
+                    <a:pt x="1266200" y="1008242"/>
+                  </a:lnTo>
+                  <a:lnTo>
+                    <a:pt x="1195856" y="1009874"/>
+                  </a:lnTo>
+                  <a:lnTo>
+                    <a:pt x="1125511" y="1011494"/>
+                  </a:lnTo>
+                  <a:lnTo>
+                    <a:pt x="1055167" y="1013105"/>
+                  </a:lnTo>
+                  <a:lnTo>
+                    <a:pt x="984822" y="1014705"/>
+                  </a:lnTo>
+                  <a:lnTo>
+                    <a:pt x="914478" y="1016294"/>
+                  </a:lnTo>
+                  <a:lnTo>
+                    <a:pt x="844133" y="1017873"/>
+                  </a:lnTo>
+                  <a:lnTo>
+                    <a:pt x="773789" y="1019441"/>
+                  </a:lnTo>
+                  <a:lnTo>
+                    <a:pt x="703444" y="1021000"/>
+                  </a:lnTo>
+                  <a:lnTo>
+                    <a:pt x="633100" y="1022548"/>
+                  </a:lnTo>
+                  <a:lnTo>
+                    <a:pt x="562755" y="1024085"/>
+                  </a:lnTo>
+                  <a:lnTo>
+                    <a:pt x="492411" y="1025613"/>
+                  </a:lnTo>
+                  <a:lnTo>
+                    <a:pt x="422066" y="1027131"/>
+                  </a:lnTo>
+                  <a:lnTo>
+                    <a:pt x="351722" y="1028639"/>
+                  </a:lnTo>
+                  <a:lnTo>
+                    <a:pt x="281377" y="1030137"/>
+                  </a:lnTo>
+                  <a:lnTo>
+                    <a:pt x="211033" y="1031625"/>
+                  </a:lnTo>
+                  <a:lnTo>
+                    <a:pt x="140688" y="1033103"/>
+                  </a:lnTo>
+                  <a:lnTo>
+                    <a:pt x="70344" y="1034572"/>
+                  </a:lnTo>
+                  <a:lnTo>
+                    <a:pt x="0" y="1036031"/>
                   </a:lnTo>
                   <a:close/>
                 </a:path>
@@ -3569,628 +3604,303 @@
         </p:sp>
         <p:sp>
           <p:nvSpPr>
-            <p:cNvPr id="21" name="pl21"/>
-            <p:cNvSpPr/>
-            <p:nvPr/>
-          </p:nvSpPr>
-          <p:spPr>
-            <a:xfrm>
-              <a:off x="1557009" y="2073503"/>
-              <a:ext cx="6705669" cy="2653587"/>
-            </a:xfrm>
-            <a:custGeom>
-              <a:avLst/>
-              <a:pathLst>
-                <a:path w="6705669" h="2653587">
-                  <a:moveTo>
-                    <a:pt x="0" y="0"/>
-                  </a:moveTo>
-                  <a:lnTo>
-                    <a:pt x="44774" y="76534"/>
-                  </a:lnTo>
-                  <a:lnTo>
-                    <a:pt x="116397" y="194713"/>
-                  </a:lnTo>
-                  <a:lnTo>
-                    <a:pt x="188019" y="308793"/>
-                  </a:lnTo>
-                  <a:lnTo>
-                    <a:pt x="259642" y="418916"/>
-                  </a:lnTo>
-                  <a:lnTo>
-                    <a:pt x="331264" y="525220"/>
-                  </a:lnTo>
-                  <a:lnTo>
-                    <a:pt x="402887" y="627836"/>
-                  </a:lnTo>
-                  <a:lnTo>
-                    <a:pt x="474509" y="726894"/>
-                  </a:lnTo>
-                  <a:lnTo>
-                    <a:pt x="546132" y="822515"/>
-                  </a:lnTo>
-                  <a:lnTo>
-                    <a:pt x="617754" y="914820"/>
-                  </a:lnTo>
-                  <a:lnTo>
-                    <a:pt x="689377" y="1003923"/>
-                  </a:lnTo>
-                  <a:lnTo>
-                    <a:pt x="760999" y="1089936"/>
-                  </a:lnTo>
-                  <a:lnTo>
-                    <a:pt x="832622" y="1172965"/>
-                  </a:lnTo>
-                  <a:lnTo>
-                    <a:pt x="904245" y="1253114"/>
-                  </a:lnTo>
-                  <a:lnTo>
-                    <a:pt x="975867" y="1330484"/>
-                  </a:lnTo>
-                  <a:lnTo>
-                    <a:pt x="1047490" y="1405170"/>
-                  </a:lnTo>
-                  <a:lnTo>
-                    <a:pt x="1119112" y="1477265"/>
-                  </a:lnTo>
-                  <a:lnTo>
-                    <a:pt x="1190735" y="1546860"/>
-                  </a:lnTo>
-                  <a:lnTo>
-                    <a:pt x="1262357" y="1614041"/>
-                  </a:lnTo>
-                  <a:lnTo>
-                    <a:pt x="1333980" y="1678892"/>
-                  </a:lnTo>
-                  <a:lnTo>
-                    <a:pt x="1405602" y="1741493"/>
-                  </a:lnTo>
-                  <a:lnTo>
-                    <a:pt x="1477225" y="1801923"/>
-                  </a:lnTo>
-                  <a:lnTo>
-                    <a:pt x="1548847" y="1860257"/>
-                  </a:lnTo>
-                  <a:lnTo>
-                    <a:pt x="1620470" y="1916568"/>
-                  </a:lnTo>
-                  <a:lnTo>
-                    <a:pt x="1692092" y="1970926"/>
-                  </a:lnTo>
-                  <a:lnTo>
-                    <a:pt x="1763715" y="2023398"/>
-                  </a:lnTo>
-                  <a:lnTo>
-                    <a:pt x="1835337" y="2074050"/>
-                  </a:lnTo>
-                  <a:lnTo>
-                    <a:pt x="1906960" y="2122945"/>
-                  </a:lnTo>
-                  <a:lnTo>
-                    <a:pt x="1978582" y="2170145"/>
-                  </a:lnTo>
-                  <a:lnTo>
-                    <a:pt x="2050205" y="2215707"/>
-                  </a:lnTo>
-                  <a:lnTo>
-                    <a:pt x="2121827" y="2259689"/>
-                  </a:lnTo>
-                  <a:lnTo>
-                    <a:pt x="2193450" y="2302145"/>
-                  </a:lnTo>
-                  <a:lnTo>
-                    <a:pt x="2265073" y="2343129"/>
-                  </a:lnTo>
-                  <a:lnTo>
-                    <a:pt x="2336695" y="2382691"/>
-                  </a:lnTo>
-                  <a:lnTo>
-                    <a:pt x="2408318" y="2420882"/>
-                  </a:lnTo>
-                  <a:lnTo>
-                    <a:pt x="2479940" y="2457747"/>
-                  </a:lnTo>
-                  <a:lnTo>
-                    <a:pt x="2551563" y="2493334"/>
-                  </a:lnTo>
-                  <a:lnTo>
-                    <a:pt x="2623185" y="2527686"/>
-                  </a:lnTo>
-                  <a:lnTo>
-                    <a:pt x="2694808" y="2560847"/>
-                  </a:lnTo>
-                  <a:lnTo>
-                    <a:pt x="2766430" y="2592858"/>
-                  </a:lnTo>
-                  <a:lnTo>
-                    <a:pt x="2838053" y="2623758"/>
-                  </a:lnTo>
-                  <a:lnTo>
-                    <a:pt x="2909675" y="2653587"/>
-                  </a:lnTo>
-                  <a:lnTo>
-                    <a:pt x="2981298" y="2648941"/>
-                  </a:lnTo>
-                  <a:lnTo>
-                    <a:pt x="3052920" y="2643434"/>
-                  </a:lnTo>
-                  <a:lnTo>
-                    <a:pt x="3124543" y="2637890"/>
-                  </a:lnTo>
-                  <a:lnTo>
-                    <a:pt x="3196165" y="2632310"/>
-                  </a:lnTo>
-                  <a:lnTo>
-                    <a:pt x="3267788" y="2626693"/>
-                  </a:lnTo>
-                  <a:lnTo>
-                    <a:pt x="3339410" y="2621039"/>
-                  </a:lnTo>
-                  <a:lnTo>
-                    <a:pt x="3411033" y="2615348"/>
-                  </a:lnTo>
-                  <a:lnTo>
-                    <a:pt x="3482655" y="2609619"/>
-                  </a:lnTo>
-                  <a:lnTo>
-                    <a:pt x="3554278" y="2603852"/>
-                  </a:lnTo>
-                  <a:lnTo>
-                    <a:pt x="3625901" y="2598047"/>
-                  </a:lnTo>
-                  <a:lnTo>
-                    <a:pt x="3697523" y="2592204"/>
-                  </a:lnTo>
-                  <a:lnTo>
-                    <a:pt x="3769146" y="2586323"/>
-                  </a:lnTo>
-                  <a:lnTo>
-                    <a:pt x="3840768" y="2580402"/>
-                  </a:lnTo>
-                  <a:lnTo>
-                    <a:pt x="3912391" y="2574443"/>
-                  </a:lnTo>
-                  <a:lnTo>
-                    <a:pt x="3984013" y="2568444"/>
-                  </a:lnTo>
-                  <a:lnTo>
-                    <a:pt x="4055636" y="2562406"/>
-                  </a:lnTo>
-                  <a:lnTo>
-                    <a:pt x="4127258" y="2556328"/>
-                  </a:lnTo>
-                  <a:lnTo>
-                    <a:pt x="4198881" y="2550210"/>
-                  </a:lnTo>
-                  <a:lnTo>
-                    <a:pt x="4270503" y="2544051"/>
-                  </a:lnTo>
-                  <a:lnTo>
-                    <a:pt x="4342126" y="2537852"/>
-                  </a:lnTo>
-                  <a:lnTo>
-                    <a:pt x="4413748" y="2531612"/>
-                  </a:lnTo>
-                  <a:lnTo>
-                    <a:pt x="4485371" y="2525330"/>
-                  </a:lnTo>
-                  <a:lnTo>
-                    <a:pt x="4556993" y="2519008"/>
-                  </a:lnTo>
-                  <a:lnTo>
-                    <a:pt x="4628616" y="2512643"/>
-                  </a:lnTo>
-                  <a:lnTo>
-                    <a:pt x="4700238" y="2506237"/>
-                  </a:lnTo>
-                  <a:lnTo>
-                    <a:pt x="4771861" y="2499788"/>
-                  </a:lnTo>
-                  <a:lnTo>
-                    <a:pt x="4843483" y="2493297"/>
-                  </a:lnTo>
-                  <a:lnTo>
-                    <a:pt x="4915106" y="2486763"/>
-                  </a:lnTo>
-                  <a:lnTo>
-                    <a:pt x="4986729" y="2480185"/>
-                  </a:lnTo>
-                  <a:lnTo>
-                    <a:pt x="5058351" y="2473565"/>
-                  </a:lnTo>
-                  <a:lnTo>
-                    <a:pt x="5129974" y="2466901"/>
-                  </a:lnTo>
-                  <a:lnTo>
-                    <a:pt x="5201596" y="2460192"/>
-                  </a:lnTo>
-                  <a:lnTo>
-                    <a:pt x="5273219" y="2453440"/>
-                  </a:lnTo>
-                  <a:lnTo>
-                    <a:pt x="5344841" y="2446643"/>
-                  </a:lnTo>
-                  <a:lnTo>
-                    <a:pt x="5416464" y="2439801"/>
-                  </a:lnTo>
-                  <a:lnTo>
-                    <a:pt x="5488086" y="2432914"/>
-                  </a:lnTo>
-                  <a:lnTo>
-                    <a:pt x="5559709" y="2425982"/>
-                  </a:lnTo>
-                  <a:lnTo>
-                    <a:pt x="5631331" y="2419003"/>
-                  </a:lnTo>
-                  <a:lnTo>
-                    <a:pt x="5702954" y="2411979"/>
-                  </a:lnTo>
-                  <a:lnTo>
-                    <a:pt x="5774576" y="2404909"/>
-                  </a:lnTo>
-                  <a:lnTo>
-                    <a:pt x="5846199" y="2397792"/>
-                  </a:lnTo>
-                  <a:lnTo>
-                    <a:pt x="5917821" y="2390627"/>
-                  </a:lnTo>
-                  <a:lnTo>
-                    <a:pt x="5989444" y="2383416"/>
-                  </a:lnTo>
-                  <a:lnTo>
-                    <a:pt x="6061066" y="2376157"/>
-                  </a:lnTo>
-                  <a:lnTo>
-                    <a:pt x="6132689" y="2368850"/>
-                  </a:lnTo>
-                  <a:lnTo>
-                    <a:pt x="6204311" y="2361495"/>
-                  </a:lnTo>
-                  <a:lnTo>
-                    <a:pt x="6275934" y="2354092"/>
-                  </a:lnTo>
-                  <a:lnTo>
-                    <a:pt x="6347557" y="2346639"/>
-                  </a:lnTo>
-                  <a:lnTo>
-                    <a:pt x="6419179" y="2339138"/>
-                  </a:lnTo>
-                  <a:lnTo>
-                    <a:pt x="6490802" y="2331586"/>
-                  </a:lnTo>
-                  <a:lnTo>
-                    <a:pt x="6562424" y="2323986"/>
-                  </a:lnTo>
-                  <a:lnTo>
-                    <a:pt x="6634047" y="2316335"/>
-                  </a:lnTo>
-                  <a:lnTo>
-                    <a:pt x="6705669" y="2308633"/>
-                  </a:lnTo>
-                </a:path>
-              </a:pathLst>
-            </a:custGeom>
-          </p:spPr>
-          <p:txBody>
-            <a:bodyPr/>
-            <a:lstStyle/>
-            <a:p/>
-          </p:txBody>
-        </p:sp>
-        <p:sp>
-          <p:nvSpPr>
             <p:cNvPr id="22" name="pl22"/>
             <p:cNvSpPr/>
             <p:nvPr/>
           </p:nvSpPr>
           <p:spPr>
             <a:xfrm>
-              <a:off x="1172049" y="4727915"/>
-              <a:ext cx="7090630" cy="701507"/>
+              <a:off x="1613403" y="2143092"/>
+              <a:ext cx="6586013" cy="957617"/>
             </a:xfrm>
             <a:custGeom>
               <a:avLst/>
               <a:pathLst>
-                <a:path w="7090630" h="701507">
+                <a:path w="6586013" h="957617">
                   <a:moveTo>
-                    <a:pt x="7090630" y="701507"/>
+                    <a:pt x="0" y="0"/>
                   </a:moveTo>
                   <a:lnTo>
-                    <a:pt x="7019007" y="696914"/>
-                  </a:lnTo>
-                  <a:lnTo>
-                    <a:pt x="6947385" y="692156"/>
-                  </a:lnTo>
-                  <a:lnTo>
-                    <a:pt x="6875762" y="687227"/>
-                  </a:lnTo>
-                  <a:lnTo>
-                    <a:pt x="6804139" y="682121"/>
-                  </a:lnTo>
-                  <a:lnTo>
-                    <a:pt x="6732517" y="676831"/>
-                  </a:lnTo>
-                  <a:lnTo>
-                    <a:pt x="6660894" y="671352"/>
-                  </a:lnTo>
-                  <a:lnTo>
-                    <a:pt x="6589272" y="665675"/>
-                  </a:lnTo>
-                  <a:lnTo>
-                    <a:pt x="6517649" y="659795"/>
-                  </a:lnTo>
-                  <a:lnTo>
-                    <a:pt x="6446027" y="653703"/>
-                  </a:lnTo>
-                  <a:lnTo>
-                    <a:pt x="6374404" y="647392"/>
-                  </a:lnTo>
-                  <a:lnTo>
-                    <a:pt x="6302782" y="640855"/>
-                  </a:lnTo>
-                  <a:lnTo>
-                    <a:pt x="6231159" y="634083"/>
-                  </a:lnTo>
-                  <a:lnTo>
-                    <a:pt x="6159537" y="627067"/>
-                  </a:lnTo>
-                  <a:lnTo>
-                    <a:pt x="6087914" y="619799"/>
-                  </a:lnTo>
-                  <a:lnTo>
-                    <a:pt x="6016292" y="612271"/>
-                  </a:lnTo>
-                  <a:lnTo>
-                    <a:pt x="5944669" y="604471"/>
-                  </a:lnTo>
-                  <a:lnTo>
-                    <a:pt x="5873047" y="596392"/>
-                  </a:lnTo>
-                  <a:lnTo>
-                    <a:pt x="5801424" y="588022"/>
-                  </a:lnTo>
-                  <a:lnTo>
-                    <a:pt x="5729802" y="579351"/>
-                  </a:lnTo>
-                  <a:lnTo>
-                    <a:pt x="5658179" y="570369"/>
-                  </a:lnTo>
-                  <a:lnTo>
-                    <a:pt x="5586557" y="561064"/>
-                  </a:lnTo>
-                  <a:lnTo>
-                    <a:pt x="5514934" y="551425"/>
-                  </a:lnTo>
-                  <a:lnTo>
-                    <a:pt x="5443311" y="541439"/>
-                  </a:lnTo>
-                  <a:lnTo>
-                    <a:pt x="5371689" y="531095"/>
-                  </a:lnTo>
-                  <a:lnTo>
-                    <a:pt x="5300066" y="520379"/>
-                  </a:lnTo>
-                  <a:lnTo>
-                    <a:pt x="5228444" y="509278"/>
-                  </a:lnTo>
-                  <a:lnTo>
-                    <a:pt x="5156821" y="497778"/>
-                  </a:lnTo>
-                  <a:lnTo>
-                    <a:pt x="5085199" y="485864"/>
-                  </a:lnTo>
-                  <a:lnTo>
-                    <a:pt x="5013576" y="473523"/>
-                  </a:lnTo>
-                  <a:lnTo>
-                    <a:pt x="4941954" y="460738"/>
-                  </a:lnTo>
-                  <a:lnTo>
-                    <a:pt x="4870331" y="447494"/>
-                  </a:lnTo>
-                  <a:lnTo>
-                    <a:pt x="4798709" y="433774"/>
-                  </a:lnTo>
-                  <a:lnTo>
-                    <a:pt x="4727086" y="419561"/>
-                  </a:lnTo>
-                  <a:lnTo>
-                    <a:pt x="4655464" y="404838"/>
-                  </a:lnTo>
-                  <a:lnTo>
-                    <a:pt x="4583841" y="389585"/>
-                  </a:lnTo>
-                  <a:lnTo>
-                    <a:pt x="4512219" y="373784"/>
-                  </a:lnTo>
-                  <a:lnTo>
-                    <a:pt x="4440596" y="357416"/>
-                  </a:lnTo>
-                  <a:lnTo>
-                    <a:pt x="4368974" y="340459"/>
-                  </a:lnTo>
-                  <a:lnTo>
-                    <a:pt x="4297351" y="322893"/>
-                  </a:lnTo>
-                  <a:lnTo>
-                    <a:pt x="4225729" y="304696"/>
-                  </a:lnTo>
-                  <a:lnTo>
-                    <a:pt x="4154106" y="285845"/>
-                  </a:lnTo>
-                  <a:lnTo>
-                    <a:pt x="4082483" y="266317"/>
-                  </a:lnTo>
-                  <a:lnTo>
-                    <a:pt x="4010861" y="246087"/>
-                  </a:lnTo>
-                  <a:lnTo>
-                    <a:pt x="3939238" y="225130"/>
-                  </a:lnTo>
-                  <a:lnTo>
-                    <a:pt x="3867616" y="203421"/>
-                  </a:lnTo>
-                  <a:lnTo>
-                    <a:pt x="3795993" y="180931"/>
-                  </a:lnTo>
-                  <a:lnTo>
-                    <a:pt x="3724371" y="157633"/>
-                  </a:lnTo>
-                  <a:lnTo>
-                    <a:pt x="3652748" y="133498"/>
-                  </a:lnTo>
-                  <a:lnTo>
-                    <a:pt x="3581126" y="108496"/>
-                  </a:lnTo>
-                  <a:lnTo>
-                    <a:pt x="3509503" y="82595"/>
-                  </a:lnTo>
-                  <a:lnTo>
-                    <a:pt x="3437881" y="55764"/>
-                  </a:lnTo>
-                  <a:lnTo>
-                    <a:pt x="3366258" y="27968"/>
-                  </a:lnTo>
-                  <a:lnTo>
-                    <a:pt x="3294636" y="0"/>
-                  </a:lnTo>
-                  <a:lnTo>
-                    <a:pt x="3223013" y="5435"/>
-                  </a:lnTo>
-                  <a:lnTo>
-                    <a:pt x="3151391" y="10835"/>
-                  </a:lnTo>
-                  <a:lnTo>
-                    <a:pt x="3079768" y="16199"/>
-                  </a:lnTo>
-                  <a:lnTo>
-                    <a:pt x="3008146" y="21528"/>
-                  </a:lnTo>
-                  <a:lnTo>
-                    <a:pt x="2936523" y="26822"/>
-                  </a:lnTo>
-                  <a:lnTo>
-                    <a:pt x="2864901" y="32082"/>
-                  </a:lnTo>
-                  <a:lnTo>
-                    <a:pt x="2793278" y="37307"/>
-                  </a:lnTo>
-                  <a:lnTo>
-                    <a:pt x="2721655" y="42498"/>
-                  </a:lnTo>
-                  <a:lnTo>
-                    <a:pt x="2650033" y="47654"/>
-                  </a:lnTo>
-                  <a:lnTo>
-                    <a:pt x="2578410" y="52777"/>
-                  </a:lnTo>
-                  <a:lnTo>
-                    <a:pt x="2506788" y="57867"/>
-                  </a:lnTo>
-                  <a:lnTo>
-                    <a:pt x="2435165" y="62923"/>
-                  </a:lnTo>
-                  <a:lnTo>
-                    <a:pt x="2363543" y="67946"/>
-                  </a:lnTo>
-                  <a:lnTo>
-                    <a:pt x="2291920" y="72936"/>
-                  </a:lnTo>
-                  <a:lnTo>
-                    <a:pt x="2220298" y="77893"/>
-                  </a:lnTo>
-                  <a:lnTo>
-                    <a:pt x="2148675" y="82818"/>
-                  </a:lnTo>
-                  <a:lnTo>
-                    <a:pt x="2077053" y="87711"/>
-                  </a:lnTo>
-                  <a:lnTo>
-                    <a:pt x="2005430" y="92571"/>
-                  </a:lnTo>
-                  <a:lnTo>
-                    <a:pt x="1933808" y="97400"/>
-                  </a:lnTo>
-                  <a:lnTo>
-                    <a:pt x="1862185" y="102197"/>
-                  </a:lnTo>
-                  <a:lnTo>
-                    <a:pt x="1790563" y="106962"/>
-                  </a:lnTo>
-                  <a:lnTo>
-                    <a:pt x="1718940" y="111697"/>
-                  </a:lnTo>
-                  <a:lnTo>
-                    <a:pt x="1647318" y="116400"/>
-                  </a:lnTo>
-                  <a:lnTo>
-                    <a:pt x="1575695" y="121072"/>
-                  </a:lnTo>
-                  <a:lnTo>
-                    <a:pt x="1504073" y="125714"/>
-                  </a:lnTo>
-                  <a:lnTo>
-                    <a:pt x="1432450" y="130325"/>
-                  </a:lnTo>
-                  <a:lnTo>
-                    <a:pt x="1360827" y="134907"/>
-                  </a:lnTo>
-                  <a:lnTo>
-                    <a:pt x="1289205" y="139458"/>
-                  </a:lnTo>
-                  <a:lnTo>
-                    <a:pt x="1217582" y="143979"/>
-                  </a:lnTo>
-                  <a:lnTo>
-                    <a:pt x="1145960" y="148471"/>
-                  </a:lnTo>
-                  <a:lnTo>
-                    <a:pt x="1074337" y="152933"/>
-                  </a:lnTo>
-                  <a:lnTo>
-                    <a:pt x="1002715" y="157366"/>
-                  </a:lnTo>
-                  <a:lnTo>
-                    <a:pt x="931092" y="161770"/>
-                  </a:lnTo>
-                  <a:lnTo>
-                    <a:pt x="859470" y="166145"/>
-                  </a:lnTo>
-                  <a:lnTo>
-                    <a:pt x="787847" y="170492"/>
-                  </a:lnTo>
-                  <a:lnTo>
-                    <a:pt x="716225" y="174810"/>
-                  </a:lnTo>
-                  <a:lnTo>
-                    <a:pt x="644602" y="179099"/>
-                  </a:lnTo>
-                  <a:lnTo>
-                    <a:pt x="572980" y="183361"/>
-                  </a:lnTo>
-                  <a:lnTo>
-                    <a:pt x="501357" y="187594"/>
-                  </a:lnTo>
-                  <a:lnTo>
-                    <a:pt x="429735" y="191800"/>
-                  </a:lnTo>
-                  <a:lnTo>
-                    <a:pt x="358112" y="195979"/>
-                  </a:lnTo>
-                  <a:lnTo>
-                    <a:pt x="286490" y="200129"/>
-                  </a:lnTo>
-                  <a:lnTo>
-                    <a:pt x="214867" y="204253"/>
-                  </a:lnTo>
-                  <a:lnTo>
-                    <a:pt x="143245" y="208350"/>
-                  </a:lnTo>
-                  <a:lnTo>
-                    <a:pt x="71622" y="212420"/>
-                  </a:lnTo>
-                  <a:lnTo>
-                    <a:pt x="0" y="216463"/>
+                    <a:pt x="43975" y="27619"/>
+                  </a:lnTo>
+                  <a:lnTo>
+                    <a:pt x="114320" y="70267"/>
+                  </a:lnTo>
+                  <a:lnTo>
+                    <a:pt x="184664" y="111436"/>
+                  </a:lnTo>
+                  <a:lnTo>
+                    <a:pt x="255009" y="151177"/>
+                  </a:lnTo>
+                  <a:lnTo>
+                    <a:pt x="325353" y="189539"/>
+                  </a:lnTo>
+                  <a:lnTo>
+                    <a:pt x="395698" y="226571"/>
+                  </a:lnTo>
+                  <a:lnTo>
+                    <a:pt x="466042" y="262318"/>
+                  </a:lnTo>
+                  <a:lnTo>
+                    <a:pt x="536387" y="296826"/>
+                  </a:lnTo>
+                  <a:lnTo>
+                    <a:pt x="606731" y="330137"/>
+                  </a:lnTo>
+                  <a:lnTo>
+                    <a:pt x="677076" y="362292"/>
+                  </a:lnTo>
+                  <a:lnTo>
+                    <a:pt x="747420" y="393332"/>
+                  </a:lnTo>
+                  <a:lnTo>
+                    <a:pt x="817765" y="423295"/>
+                  </a:lnTo>
+                  <a:lnTo>
+                    <a:pt x="888109" y="452219"/>
+                  </a:lnTo>
+                  <a:lnTo>
+                    <a:pt x="958454" y="480140"/>
+                  </a:lnTo>
+                  <a:lnTo>
+                    <a:pt x="1028798" y="507092"/>
+                  </a:lnTo>
+                  <a:lnTo>
+                    <a:pt x="1099143" y="533110"/>
+                  </a:lnTo>
+                  <a:lnTo>
+                    <a:pt x="1169487" y="558225"/>
+                  </a:lnTo>
+                  <a:lnTo>
+                    <a:pt x="1239832" y="582469"/>
+                  </a:lnTo>
+                  <a:lnTo>
+                    <a:pt x="1310176" y="605872"/>
+                  </a:lnTo>
+                  <a:lnTo>
+                    <a:pt x="1380521" y="628464"/>
+                  </a:lnTo>
+                  <a:lnTo>
+                    <a:pt x="1450865" y="650271"/>
+                  </a:lnTo>
+                  <a:lnTo>
+                    <a:pt x="1521210" y="671323"/>
+                  </a:lnTo>
+                  <a:lnTo>
+                    <a:pt x="1591554" y="691644"/>
+                  </a:lnTo>
+                  <a:lnTo>
+                    <a:pt x="1661899" y="711260"/>
+                  </a:lnTo>
+                  <a:lnTo>
+                    <a:pt x="1732243" y="730196"/>
+                  </a:lnTo>
+                  <a:lnTo>
+                    <a:pt x="1802588" y="748475"/>
+                  </a:lnTo>
+                  <a:lnTo>
+                    <a:pt x="1872932" y="766121"/>
+                  </a:lnTo>
+                  <a:lnTo>
+                    <a:pt x="1943277" y="783154"/>
+                  </a:lnTo>
+                  <a:lnTo>
+                    <a:pt x="2013621" y="799596"/>
+                  </a:lnTo>
+                  <a:lnTo>
+                    <a:pt x="2083965" y="815468"/>
+                  </a:lnTo>
+                  <a:lnTo>
+                    <a:pt x="2154310" y="830790"/>
+                  </a:lnTo>
+                  <a:lnTo>
+                    <a:pt x="2224654" y="845580"/>
+                  </a:lnTo>
+                  <a:lnTo>
+                    <a:pt x="2294999" y="859857"/>
+                  </a:lnTo>
+                  <a:lnTo>
+                    <a:pt x="2365343" y="873639"/>
+                  </a:lnTo>
+                  <a:lnTo>
+                    <a:pt x="2435688" y="886943"/>
+                  </a:lnTo>
+                  <a:lnTo>
+                    <a:pt x="2506032" y="899785"/>
+                  </a:lnTo>
+                  <a:lnTo>
+                    <a:pt x="2576377" y="912182"/>
+                  </a:lnTo>
+                  <a:lnTo>
+                    <a:pt x="2646721" y="924149"/>
+                  </a:lnTo>
+                  <a:lnTo>
+                    <a:pt x="2717066" y="935701"/>
+                  </a:lnTo>
+                  <a:lnTo>
+                    <a:pt x="2787410" y="946852"/>
+                  </a:lnTo>
+                  <a:lnTo>
+                    <a:pt x="2857755" y="957617"/>
+                  </a:lnTo>
+                  <a:lnTo>
+                    <a:pt x="2928099" y="955940"/>
+                  </a:lnTo>
+                  <a:lnTo>
+                    <a:pt x="2998444" y="953953"/>
+                  </a:lnTo>
+                  <a:lnTo>
+                    <a:pt x="3068788" y="951952"/>
+                  </a:lnTo>
+                  <a:lnTo>
+                    <a:pt x="3139133" y="949938"/>
+                  </a:lnTo>
+                  <a:lnTo>
+                    <a:pt x="3209477" y="947911"/>
+                  </a:lnTo>
+                  <a:lnTo>
+                    <a:pt x="3279822" y="945871"/>
+                  </a:lnTo>
+                  <a:lnTo>
+                    <a:pt x="3350166" y="943817"/>
+                  </a:lnTo>
+                  <a:lnTo>
+                    <a:pt x="3420511" y="941750"/>
+                  </a:lnTo>
+                  <a:lnTo>
+                    <a:pt x="3490855" y="939669"/>
+                  </a:lnTo>
+                  <a:lnTo>
+                    <a:pt x="3561200" y="937574"/>
+                  </a:lnTo>
+                  <a:lnTo>
+                    <a:pt x="3631544" y="935465"/>
+                  </a:lnTo>
+                  <a:lnTo>
+                    <a:pt x="3701889" y="933343"/>
+                  </a:lnTo>
+                  <a:lnTo>
+                    <a:pt x="3772233" y="931206"/>
+                  </a:lnTo>
+                  <a:lnTo>
+                    <a:pt x="3842578" y="929056"/>
+                  </a:lnTo>
+                  <a:lnTo>
+                    <a:pt x="3912922" y="926891"/>
+                  </a:lnTo>
+                  <a:lnTo>
+                    <a:pt x="3983267" y="924712"/>
+                  </a:lnTo>
+                  <a:lnTo>
+                    <a:pt x="4053611" y="922518"/>
+                  </a:lnTo>
+                  <a:lnTo>
+                    <a:pt x="4123956" y="920310"/>
+                  </a:lnTo>
+                  <a:lnTo>
+                    <a:pt x="4194300" y="918088"/>
+                  </a:lnTo>
+                  <a:lnTo>
+                    <a:pt x="4264645" y="915851"/>
+                  </a:lnTo>
+                  <a:lnTo>
+                    <a:pt x="4334989" y="913599"/>
+                  </a:lnTo>
+                  <a:lnTo>
+                    <a:pt x="4405334" y="911332"/>
+                  </a:lnTo>
+                  <a:lnTo>
+                    <a:pt x="4475678" y="909050"/>
+                  </a:lnTo>
+                  <a:lnTo>
+                    <a:pt x="4546023" y="906753"/>
+                  </a:lnTo>
+                  <a:lnTo>
+                    <a:pt x="4616367" y="904442"/>
+                  </a:lnTo>
+                  <a:lnTo>
+                    <a:pt x="4686712" y="902114"/>
+                  </a:lnTo>
+                  <a:lnTo>
+                    <a:pt x="4757056" y="899772"/>
+                  </a:lnTo>
+                  <a:lnTo>
+                    <a:pt x="4827401" y="897414"/>
+                  </a:lnTo>
+                  <a:lnTo>
+                    <a:pt x="4897745" y="895040"/>
+                  </a:lnTo>
+                  <a:lnTo>
+                    <a:pt x="4968090" y="892651"/>
+                  </a:lnTo>
+                  <a:lnTo>
+                    <a:pt x="5038434" y="890246"/>
+                  </a:lnTo>
+                  <a:lnTo>
+                    <a:pt x="5108779" y="887825"/>
+                  </a:lnTo>
+                  <a:lnTo>
+                    <a:pt x="5179123" y="885388"/>
+                  </a:lnTo>
+                  <a:lnTo>
+                    <a:pt x="5249468" y="882936"/>
+                  </a:lnTo>
+                  <a:lnTo>
+                    <a:pt x="5319812" y="880466"/>
+                  </a:lnTo>
+                  <a:lnTo>
+                    <a:pt x="5390157" y="877981"/>
+                  </a:lnTo>
+                  <a:lnTo>
+                    <a:pt x="5460501" y="875479"/>
+                  </a:lnTo>
+                  <a:lnTo>
+                    <a:pt x="5530846" y="872961"/>
+                  </a:lnTo>
+                  <a:lnTo>
+                    <a:pt x="5601190" y="870426"/>
+                  </a:lnTo>
+                  <a:lnTo>
+                    <a:pt x="5671535" y="867875"/>
+                  </a:lnTo>
+                  <a:lnTo>
+                    <a:pt x="5741879" y="865306"/>
+                  </a:lnTo>
+                  <a:lnTo>
+                    <a:pt x="5812223" y="862721"/>
+                  </a:lnTo>
+                  <a:lnTo>
+                    <a:pt x="5882568" y="860118"/>
+                  </a:lnTo>
+                  <a:lnTo>
+                    <a:pt x="5952912" y="857499"/>
+                  </a:lnTo>
+                  <a:lnTo>
+                    <a:pt x="6023257" y="854862"/>
+                  </a:lnTo>
+                  <a:lnTo>
+                    <a:pt x="6093601" y="852208"/>
+                  </a:lnTo>
+                  <a:lnTo>
+                    <a:pt x="6163946" y="849536"/>
+                  </a:lnTo>
+                  <a:lnTo>
+                    <a:pt x="6234290" y="846847"/>
+                  </a:lnTo>
+                  <a:lnTo>
+                    <a:pt x="6304635" y="844139"/>
+                  </a:lnTo>
+                  <a:lnTo>
+                    <a:pt x="6374979" y="841414"/>
+                  </a:lnTo>
+                  <a:lnTo>
+                    <a:pt x="6445324" y="838671"/>
+                  </a:lnTo>
+                  <a:lnTo>
+                    <a:pt x="6515668" y="835910"/>
+                  </a:lnTo>
+                  <a:lnTo>
+                    <a:pt x="6586013" y="833131"/>
                   </a:lnTo>
                 </a:path>
               </a:pathLst>
@@ -4210,312 +3920,637 @@
           </p:nvSpPr>
           <p:spPr>
             <a:xfrm>
-              <a:off x="1172049" y="3950764"/>
-              <a:ext cx="7090630" cy="1218915"/>
+              <a:off x="1235312" y="3101007"/>
+              <a:ext cx="6964104" cy="253157"/>
             </a:xfrm>
             <a:custGeom>
               <a:avLst/>
               <a:pathLst>
-                <a:path w="7090630" h="1218915">
+                <a:path w="6964104" h="253157">
+                  <a:moveTo>
+                    <a:pt x="6964104" y="253157"/>
+                  </a:moveTo>
+                  <a:lnTo>
+                    <a:pt x="6893760" y="251500"/>
+                  </a:lnTo>
+                  <a:lnTo>
+                    <a:pt x="6823415" y="249782"/>
+                  </a:lnTo>
+                  <a:lnTo>
+                    <a:pt x="6753071" y="248004"/>
+                  </a:lnTo>
+                  <a:lnTo>
+                    <a:pt x="6682726" y="246161"/>
+                  </a:lnTo>
+                  <a:lnTo>
+                    <a:pt x="6612382" y="244252"/>
+                  </a:lnTo>
+                  <a:lnTo>
+                    <a:pt x="6542037" y="242275"/>
+                  </a:lnTo>
+                  <a:lnTo>
+                    <a:pt x="6471693" y="240226"/>
+                  </a:lnTo>
+                  <a:lnTo>
+                    <a:pt x="6401348" y="238104"/>
+                  </a:lnTo>
+                  <a:lnTo>
+                    <a:pt x="6331004" y="235906"/>
+                  </a:lnTo>
+                  <a:lnTo>
+                    <a:pt x="6260659" y="233628"/>
+                  </a:lnTo>
+                  <a:lnTo>
+                    <a:pt x="6190315" y="231269"/>
+                  </a:lnTo>
+                  <a:lnTo>
+                    <a:pt x="6119970" y="228825"/>
+                  </a:lnTo>
+                  <a:lnTo>
+                    <a:pt x="6049626" y="226293"/>
+                  </a:lnTo>
+                  <a:lnTo>
+                    <a:pt x="5979281" y="223671"/>
+                  </a:lnTo>
+                  <a:lnTo>
+                    <a:pt x="5908937" y="220954"/>
+                  </a:lnTo>
+                  <a:lnTo>
+                    <a:pt x="5838592" y="218139"/>
+                  </a:lnTo>
+                  <a:lnTo>
+                    <a:pt x="5768248" y="215223"/>
+                  </a:lnTo>
+                  <a:lnTo>
+                    <a:pt x="5697903" y="212203"/>
+                  </a:lnTo>
+                  <a:lnTo>
+                    <a:pt x="5627559" y="209074"/>
+                  </a:lnTo>
+                  <a:lnTo>
+                    <a:pt x="5557214" y="205832"/>
+                  </a:lnTo>
+                  <a:lnTo>
+                    <a:pt x="5486870" y="202475"/>
+                  </a:lnTo>
+                  <a:lnTo>
+                    <a:pt x="5416525" y="198996"/>
+                  </a:lnTo>
+                  <a:lnTo>
+                    <a:pt x="5346181" y="195392"/>
+                  </a:lnTo>
+                  <a:lnTo>
+                    <a:pt x="5275836" y="191659"/>
+                  </a:lnTo>
+                  <a:lnTo>
+                    <a:pt x="5205492" y="187792"/>
+                  </a:lnTo>
+                  <a:lnTo>
+                    <a:pt x="5135147" y="183786"/>
+                  </a:lnTo>
+                  <a:lnTo>
+                    <a:pt x="5064803" y="179636"/>
+                  </a:lnTo>
+                  <a:lnTo>
+                    <a:pt x="4994458" y="175337"/>
+                  </a:lnTo>
+                  <a:lnTo>
+                    <a:pt x="4924114" y="170883"/>
+                  </a:lnTo>
+                  <a:lnTo>
+                    <a:pt x="4853769" y="166269"/>
+                  </a:lnTo>
+                  <a:lnTo>
+                    <a:pt x="4783425" y="161490"/>
+                  </a:lnTo>
+                  <a:lnTo>
+                    <a:pt x="4713080" y="156539"/>
+                  </a:lnTo>
+                  <a:lnTo>
+                    <a:pt x="4642736" y="151409"/>
+                  </a:lnTo>
+                  <a:lnTo>
+                    <a:pt x="4572391" y="146096"/>
+                  </a:lnTo>
+                  <a:lnTo>
+                    <a:pt x="4502047" y="140592"/>
+                  </a:lnTo>
+                  <a:lnTo>
+                    <a:pt x="4431702" y="134890"/>
+                  </a:lnTo>
+                  <a:lnTo>
+                    <a:pt x="4361358" y="128983"/>
+                  </a:lnTo>
+                  <a:lnTo>
+                    <a:pt x="4291013" y="122863"/>
+                  </a:lnTo>
+                  <a:lnTo>
+                    <a:pt x="4220669" y="116524"/>
+                  </a:lnTo>
+                  <a:lnTo>
+                    <a:pt x="4150324" y="109957"/>
+                  </a:lnTo>
+                  <a:lnTo>
+                    <a:pt x="4079980" y="103155"/>
+                  </a:lnTo>
+                  <a:lnTo>
+                    <a:pt x="4009635" y="96107"/>
+                  </a:lnTo>
+                  <a:lnTo>
+                    <a:pt x="3939291" y="88807"/>
+                  </a:lnTo>
+                  <a:lnTo>
+                    <a:pt x="3868946" y="81244"/>
+                  </a:lnTo>
+                  <a:lnTo>
+                    <a:pt x="3798602" y="73409"/>
+                  </a:lnTo>
+                  <a:lnTo>
+                    <a:pt x="3728257" y="65293"/>
+                  </a:lnTo>
+                  <a:lnTo>
+                    <a:pt x="3657913" y="56886"/>
+                  </a:lnTo>
+                  <a:lnTo>
+                    <a:pt x="3587569" y="48176"/>
+                  </a:lnTo>
+                  <a:lnTo>
+                    <a:pt x="3517224" y="39153"/>
+                  </a:lnTo>
+                  <a:lnTo>
+                    <a:pt x="3446880" y="29806"/>
+                  </a:lnTo>
+                  <a:lnTo>
+                    <a:pt x="3376535" y="20123"/>
+                  </a:lnTo>
+                  <a:lnTo>
+                    <a:pt x="3306191" y="10093"/>
+                  </a:lnTo>
+                  <a:lnTo>
+                    <a:pt x="3235846" y="0"/>
+                  </a:lnTo>
+                  <a:lnTo>
+                    <a:pt x="3165502" y="1961"/>
+                  </a:lnTo>
+                  <a:lnTo>
+                    <a:pt x="3095157" y="3910"/>
+                  </a:lnTo>
+                  <a:lnTo>
+                    <a:pt x="3024813" y="5845"/>
+                  </a:lnTo>
+                  <a:lnTo>
+                    <a:pt x="2954468" y="7769"/>
+                  </a:lnTo>
+                  <a:lnTo>
+                    <a:pt x="2884124" y="9679"/>
+                  </a:lnTo>
+                  <a:lnTo>
+                    <a:pt x="2813779" y="11577"/>
+                  </a:lnTo>
+                  <a:lnTo>
+                    <a:pt x="2743435" y="13463"/>
+                  </a:lnTo>
+                  <a:lnTo>
+                    <a:pt x="2673090" y="15336"/>
+                  </a:lnTo>
+                  <a:lnTo>
+                    <a:pt x="2602746" y="17197"/>
+                  </a:lnTo>
+                  <a:lnTo>
+                    <a:pt x="2532401" y="19046"/>
+                  </a:lnTo>
+                  <a:lnTo>
+                    <a:pt x="2462057" y="20882"/>
+                  </a:lnTo>
+                  <a:lnTo>
+                    <a:pt x="2391712" y="22707"/>
+                  </a:lnTo>
+                  <a:lnTo>
+                    <a:pt x="2321368" y="24520"/>
+                  </a:lnTo>
+                  <a:lnTo>
+                    <a:pt x="2251023" y="26321"/>
+                  </a:lnTo>
+                  <a:lnTo>
+                    <a:pt x="2180679" y="28110"/>
+                  </a:lnTo>
+                  <a:lnTo>
+                    <a:pt x="2110334" y="29887"/>
+                  </a:lnTo>
+                  <a:lnTo>
+                    <a:pt x="2039990" y="31652"/>
+                  </a:lnTo>
+                  <a:lnTo>
+                    <a:pt x="1969645" y="33406"/>
+                  </a:lnTo>
+                  <a:lnTo>
+                    <a:pt x="1899301" y="35149"/>
+                  </a:lnTo>
+                  <a:lnTo>
+                    <a:pt x="1828956" y="36880"/>
+                  </a:lnTo>
+                  <a:lnTo>
+                    <a:pt x="1758612" y="38600"/>
+                  </a:lnTo>
+                  <a:lnTo>
+                    <a:pt x="1688267" y="40308"/>
+                  </a:lnTo>
+                  <a:lnTo>
+                    <a:pt x="1617923" y="42006"/>
+                  </a:lnTo>
+                  <a:lnTo>
+                    <a:pt x="1547578" y="43692"/>
+                  </a:lnTo>
+                  <a:lnTo>
+                    <a:pt x="1477234" y="45367"/>
+                  </a:lnTo>
+                  <a:lnTo>
+                    <a:pt x="1406889" y="47031"/>
+                  </a:lnTo>
+                  <a:lnTo>
+                    <a:pt x="1336545" y="48684"/>
+                  </a:lnTo>
+                  <a:lnTo>
+                    <a:pt x="1266200" y="50327"/>
+                  </a:lnTo>
+                  <a:lnTo>
+                    <a:pt x="1195856" y="51958"/>
+                  </a:lnTo>
+                  <a:lnTo>
+                    <a:pt x="1125511" y="53579"/>
+                  </a:lnTo>
+                  <a:lnTo>
+                    <a:pt x="1055167" y="55190"/>
+                  </a:lnTo>
+                  <a:lnTo>
+                    <a:pt x="984822" y="56789"/>
+                  </a:lnTo>
+                  <a:lnTo>
+                    <a:pt x="914478" y="58379"/>
+                  </a:lnTo>
+                  <a:lnTo>
+                    <a:pt x="844133" y="59958"/>
+                  </a:lnTo>
+                  <a:lnTo>
+                    <a:pt x="773789" y="61526"/>
+                  </a:lnTo>
+                  <a:lnTo>
+                    <a:pt x="703444" y="63084"/>
+                  </a:lnTo>
+                  <a:lnTo>
+                    <a:pt x="633100" y="64632"/>
+                  </a:lnTo>
+                  <a:lnTo>
+                    <a:pt x="562755" y="66170"/>
+                  </a:lnTo>
+                  <a:lnTo>
+                    <a:pt x="492411" y="67698"/>
+                  </a:lnTo>
+                  <a:lnTo>
+                    <a:pt x="422066" y="69216"/>
+                  </a:lnTo>
+                  <a:lnTo>
+                    <a:pt x="351722" y="70724"/>
+                  </a:lnTo>
+                  <a:lnTo>
+                    <a:pt x="281377" y="72222"/>
+                  </a:lnTo>
+                  <a:lnTo>
+                    <a:pt x="211033" y="73710"/>
+                  </a:lnTo>
+                  <a:lnTo>
+                    <a:pt x="140688" y="75188"/>
+                  </a:lnTo>
+                  <a:lnTo>
+                    <a:pt x="70344" y="76657"/>
+                  </a:lnTo>
+                  <a:lnTo>
+                    <a:pt x="0" y="78116"/>
+                  </a:lnTo>
+                </a:path>
+              </a:pathLst>
+            </a:custGeom>
+          </p:spPr>
+          <p:txBody>
+            <a:bodyPr/>
+            <a:lstStyle/>
+            <a:p/>
+          </p:txBody>
+        </p:sp>
+        <p:sp>
+          <p:nvSpPr>
+            <p:cNvPr id="24" name="pl24"/>
+            <p:cNvSpPr/>
+            <p:nvPr/>
+          </p:nvSpPr>
+          <p:spPr>
+            <a:xfrm>
+              <a:off x="1235312" y="2820551"/>
+              <a:ext cx="6964104" cy="439877"/>
+            </a:xfrm>
+            <a:custGeom>
+              <a:avLst/>
+              <a:pathLst>
+                <a:path w="6964104" h="439877">
                   <a:moveTo>
                     <a:pt x="0" y="0"/>
                   </a:moveTo>
                   <a:lnTo>
-                    <a:pt x="71622" y="22908"/>
-                  </a:lnTo>
-                  <a:lnTo>
-                    <a:pt x="143245" y="45490"/>
-                  </a:lnTo>
-                  <a:lnTo>
-                    <a:pt x="214867" y="67750"/>
-                  </a:lnTo>
-                  <a:lnTo>
-                    <a:pt x="286490" y="89692"/>
-                  </a:lnTo>
-                  <a:lnTo>
-                    <a:pt x="358112" y="111322"/>
-                  </a:lnTo>
-                  <a:lnTo>
-                    <a:pt x="429735" y="132643"/>
-                  </a:lnTo>
-                  <a:lnTo>
-                    <a:pt x="501357" y="153660"/>
-                  </a:lnTo>
-                  <a:lnTo>
-                    <a:pt x="572980" y="174377"/>
-                  </a:lnTo>
-                  <a:lnTo>
-                    <a:pt x="644602" y="194799"/>
-                  </a:lnTo>
-                  <a:lnTo>
-                    <a:pt x="716225" y="214930"/>
-                  </a:lnTo>
-                  <a:lnTo>
-                    <a:pt x="787847" y="234774"/>
-                  </a:lnTo>
-                  <a:lnTo>
-                    <a:pt x="859470" y="254334"/>
-                  </a:lnTo>
-                  <a:lnTo>
-                    <a:pt x="931092" y="273616"/>
-                  </a:lnTo>
-                  <a:lnTo>
-                    <a:pt x="1002715" y="292623"/>
-                  </a:lnTo>
-                  <a:lnTo>
-                    <a:pt x="1074337" y="311358"/>
-                  </a:lnTo>
-                  <a:lnTo>
-                    <a:pt x="1145960" y="329827"/>
-                  </a:lnTo>
-                  <a:lnTo>
-                    <a:pt x="1217582" y="348032"/>
-                  </a:lnTo>
-                  <a:lnTo>
-                    <a:pt x="1289205" y="365978"/>
-                  </a:lnTo>
-                  <a:lnTo>
-                    <a:pt x="1360827" y="383668"/>
-                  </a:lnTo>
-                  <a:lnTo>
-                    <a:pt x="1432450" y="401105"/>
-                  </a:lnTo>
-                  <a:lnTo>
-                    <a:pt x="1504073" y="418294"/>
-                  </a:lnTo>
-                  <a:lnTo>
-                    <a:pt x="1575695" y="435237"/>
-                  </a:lnTo>
-                  <a:lnTo>
-                    <a:pt x="1647318" y="451939"/>
-                  </a:lnTo>
-                  <a:lnTo>
-                    <a:pt x="1718940" y="468403"/>
-                  </a:lnTo>
-                  <a:lnTo>
-                    <a:pt x="1790563" y="484632"/>
-                  </a:lnTo>
-                  <a:lnTo>
-                    <a:pt x="1862185" y="500630"/>
-                  </a:lnTo>
-                  <a:lnTo>
-                    <a:pt x="1933808" y="516400"/>
-                  </a:lnTo>
-                  <a:lnTo>
-                    <a:pt x="2005430" y="531944"/>
-                  </a:lnTo>
-                  <a:lnTo>
-                    <a:pt x="2077053" y="547267"/>
-                  </a:lnTo>
-                  <a:lnTo>
-                    <a:pt x="2148675" y="562372"/>
-                  </a:lnTo>
-                  <a:lnTo>
-                    <a:pt x="2220298" y="577261"/>
-                  </a:lnTo>
-                  <a:lnTo>
-                    <a:pt x="2291920" y="591938"/>
-                  </a:lnTo>
-                  <a:lnTo>
-                    <a:pt x="2363543" y="606405"/>
-                  </a:lnTo>
-                  <a:lnTo>
-                    <a:pt x="2435165" y="620666"/>
-                  </a:lnTo>
-                  <a:lnTo>
-                    <a:pt x="2506788" y="634724"/>
-                  </a:lnTo>
-                  <a:lnTo>
-                    <a:pt x="2578410" y="648582"/>
-                  </a:lnTo>
-                  <a:lnTo>
-                    <a:pt x="2650033" y="662241"/>
-                  </a:lnTo>
-                  <a:lnTo>
-                    <a:pt x="2721655" y="675706"/>
-                  </a:lnTo>
-                  <a:lnTo>
-                    <a:pt x="2793278" y="688979"/>
-                  </a:lnTo>
-                  <a:lnTo>
-                    <a:pt x="2864901" y="702063"/>
-                  </a:lnTo>
-                  <a:lnTo>
-                    <a:pt x="2936523" y="714960"/>
-                  </a:lnTo>
-                  <a:lnTo>
-                    <a:pt x="3008146" y="727673"/>
-                  </a:lnTo>
-                  <a:lnTo>
-                    <a:pt x="3079768" y="740205"/>
-                  </a:lnTo>
-                  <a:lnTo>
-                    <a:pt x="3151391" y="752558"/>
-                  </a:lnTo>
-                  <a:lnTo>
-                    <a:pt x="3223013" y="764735"/>
-                  </a:lnTo>
-                  <a:lnTo>
-                    <a:pt x="3294636" y="776739"/>
-                  </a:lnTo>
-                  <a:lnTo>
-                    <a:pt x="3366258" y="788571"/>
-                  </a:lnTo>
-                  <a:lnTo>
-                    <a:pt x="3437881" y="800234"/>
-                  </a:lnTo>
-                  <a:lnTo>
-                    <a:pt x="3509503" y="811732"/>
-                  </a:lnTo>
-                  <a:lnTo>
-                    <a:pt x="3581126" y="823065"/>
-                  </a:lnTo>
-                  <a:lnTo>
-                    <a:pt x="3652748" y="834236"/>
-                  </a:lnTo>
-                  <a:lnTo>
-                    <a:pt x="3724371" y="845249"/>
-                  </a:lnTo>
-                  <a:lnTo>
-                    <a:pt x="3795993" y="856104"/>
-                  </a:lnTo>
-                  <a:lnTo>
-                    <a:pt x="3867616" y="866804"/>
-                  </a:lnTo>
-                  <a:lnTo>
-                    <a:pt x="3939238" y="877352"/>
-                  </a:lnTo>
-                  <a:lnTo>
-                    <a:pt x="4010861" y="887750"/>
-                  </a:lnTo>
-                  <a:lnTo>
-                    <a:pt x="4082483" y="897999"/>
-                  </a:lnTo>
-                  <a:lnTo>
-                    <a:pt x="4154106" y="908102"/>
-                  </a:lnTo>
-                  <a:lnTo>
-                    <a:pt x="4225729" y="918061"/>
-                  </a:lnTo>
-                  <a:lnTo>
-                    <a:pt x="4297351" y="927878"/>
-                  </a:lnTo>
-                  <a:lnTo>
-                    <a:pt x="4368974" y="937555"/>
-                  </a:lnTo>
-                  <a:lnTo>
-                    <a:pt x="4440596" y="947094"/>
-                  </a:lnTo>
-                  <a:lnTo>
-                    <a:pt x="4512219" y="956497"/>
-                  </a:lnTo>
-                  <a:lnTo>
-                    <a:pt x="4583841" y="965766"/>
-                  </a:lnTo>
-                  <a:lnTo>
-                    <a:pt x="4655464" y="974902"/>
-                  </a:lnTo>
-                  <a:lnTo>
-                    <a:pt x="4727086" y="983909"/>
-                  </a:lnTo>
-                  <a:lnTo>
-                    <a:pt x="4798709" y="992787"/>
-                  </a:lnTo>
-                  <a:lnTo>
-                    <a:pt x="4870331" y="1001538"/>
-                  </a:lnTo>
-                  <a:lnTo>
-                    <a:pt x="4941954" y="1010165"/>
-                  </a:lnTo>
-                  <a:lnTo>
-                    <a:pt x="5013576" y="1018668"/>
-                  </a:lnTo>
-                  <a:lnTo>
-                    <a:pt x="5085199" y="1027051"/>
-                  </a:lnTo>
-                  <a:lnTo>
-                    <a:pt x="5156821" y="1035313"/>
-                  </a:lnTo>
-                  <a:lnTo>
-                    <a:pt x="5228444" y="1043458"/>
-                  </a:lnTo>
-                  <a:lnTo>
-                    <a:pt x="5300066" y="1051487"/>
-                  </a:lnTo>
-                  <a:lnTo>
-                    <a:pt x="5371689" y="1059401"/>
-                  </a:lnTo>
-                  <a:lnTo>
-                    <a:pt x="5443311" y="1067203"/>
-                  </a:lnTo>
-                  <a:lnTo>
-                    <a:pt x="5514934" y="1074893"/>
-                  </a:lnTo>
-                  <a:lnTo>
-                    <a:pt x="5586557" y="1082474"/>
-                  </a:lnTo>
-                  <a:lnTo>
-                    <a:pt x="5658179" y="1089946"/>
-                  </a:lnTo>
-                  <a:lnTo>
-                    <a:pt x="5729802" y="1097312"/>
-                  </a:lnTo>
-                  <a:lnTo>
-                    <a:pt x="5801424" y="1104573"/>
-                  </a:lnTo>
-                  <a:lnTo>
-                    <a:pt x="5873047" y="1111730"/>
-                  </a:lnTo>
-                  <a:lnTo>
-                    <a:pt x="5944669" y="1118785"/>
-                  </a:lnTo>
-                  <a:lnTo>
-                    <a:pt x="6016292" y="1125740"/>
-                  </a:lnTo>
-                  <a:lnTo>
-                    <a:pt x="6087914" y="1132595"/>
-                  </a:lnTo>
-                  <a:lnTo>
-                    <a:pt x="6159537" y="1139353"/>
-                  </a:lnTo>
-                  <a:lnTo>
-                    <a:pt x="6231159" y="1146014"/>
-                  </a:lnTo>
-                  <a:lnTo>
-                    <a:pt x="6302782" y="1152581"/>
-                  </a:lnTo>
-                  <a:lnTo>
-                    <a:pt x="6374404" y="1159053"/>
-                  </a:lnTo>
-                  <a:lnTo>
-                    <a:pt x="6446027" y="1165434"/>
-                  </a:lnTo>
-                  <a:lnTo>
-                    <a:pt x="6517649" y="1171723"/>
-                  </a:lnTo>
-                  <a:lnTo>
-                    <a:pt x="6589272" y="1177923"/>
-                  </a:lnTo>
-                  <a:lnTo>
-                    <a:pt x="6660894" y="1184034"/>
-                  </a:lnTo>
-                  <a:lnTo>
-                    <a:pt x="6732517" y="1190058"/>
-                  </a:lnTo>
-                  <a:lnTo>
-                    <a:pt x="6804139" y="1195997"/>
-                  </a:lnTo>
-                  <a:lnTo>
-                    <a:pt x="6875762" y="1201850"/>
-                  </a:lnTo>
-                  <a:lnTo>
-                    <a:pt x="6947385" y="1207620"/>
-                  </a:lnTo>
-                  <a:lnTo>
-                    <a:pt x="7019007" y="1213308"/>
-                  </a:lnTo>
-                  <a:lnTo>
-                    <a:pt x="7090630" y="1218915"/>
+                    <a:pt x="70344" y="8267"/>
+                  </a:lnTo>
+                  <a:lnTo>
+                    <a:pt x="140688" y="16416"/>
+                  </a:lnTo>
+                  <a:lnTo>
+                    <a:pt x="211033" y="24449"/>
+                  </a:lnTo>
+                  <a:lnTo>
+                    <a:pt x="281377" y="32367"/>
+                  </a:lnTo>
+                  <a:lnTo>
+                    <a:pt x="351722" y="40173"/>
+                  </a:lnTo>
+                  <a:lnTo>
+                    <a:pt x="422066" y="47867"/>
+                  </a:lnTo>
+                  <a:lnTo>
+                    <a:pt x="492411" y="55452"/>
+                  </a:lnTo>
+                  <a:lnTo>
+                    <a:pt x="562755" y="62928"/>
+                  </a:lnTo>
+                  <a:lnTo>
+                    <a:pt x="633100" y="70298"/>
+                  </a:lnTo>
+                  <a:lnTo>
+                    <a:pt x="703444" y="77563"/>
+                  </a:lnTo>
+                  <a:lnTo>
+                    <a:pt x="773789" y="84724"/>
+                  </a:lnTo>
+                  <a:lnTo>
+                    <a:pt x="844133" y="91783"/>
+                  </a:lnTo>
+                  <a:lnTo>
+                    <a:pt x="914478" y="98741"/>
+                  </a:lnTo>
+                  <a:lnTo>
+                    <a:pt x="984822" y="105600"/>
+                  </a:lnTo>
+                  <a:lnTo>
+                    <a:pt x="1055167" y="112362"/>
+                  </a:lnTo>
+                  <a:lnTo>
+                    <a:pt x="1125511" y="119027"/>
+                  </a:lnTo>
+                  <a:lnTo>
+                    <a:pt x="1195856" y="125596"/>
+                  </a:lnTo>
+                  <a:lnTo>
+                    <a:pt x="1266200" y="132072"/>
+                  </a:lnTo>
+                  <a:lnTo>
+                    <a:pt x="1336545" y="138456"/>
+                  </a:lnTo>
+                  <a:lnTo>
+                    <a:pt x="1406889" y="144749"/>
+                  </a:lnTo>
+                  <a:lnTo>
+                    <a:pt x="1477234" y="150952"/>
+                  </a:lnTo>
+                  <a:lnTo>
+                    <a:pt x="1547578" y="157067"/>
+                  </a:lnTo>
+                  <a:lnTo>
+                    <a:pt x="1617923" y="163094"/>
+                  </a:lnTo>
+                  <a:lnTo>
+                    <a:pt x="1688267" y="169035"/>
+                  </a:lnTo>
+                  <a:lnTo>
+                    <a:pt x="1758612" y="174892"/>
+                  </a:lnTo>
+                  <a:lnTo>
+                    <a:pt x="1828956" y="180665"/>
+                  </a:lnTo>
+                  <a:lnTo>
+                    <a:pt x="1899301" y="186356"/>
+                  </a:lnTo>
+                  <a:lnTo>
+                    <a:pt x="1969645" y="191966"/>
+                  </a:lnTo>
+                  <a:lnTo>
+                    <a:pt x="2039990" y="197496"/>
+                  </a:lnTo>
+                  <a:lnTo>
+                    <a:pt x="2110334" y="202946"/>
+                  </a:lnTo>
+                  <a:lnTo>
+                    <a:pt x="2180679" y="208320"/>
+                  </a:lnTo>
+                  <a:lnTo>
+                    <a:pt x="2251023" y="213616"/>
+                  </a:lnTo>
+                  <a:lnTo>
+                    <a:pt x="2321368" y="218837"/>
+                  </a:lnTo>
+                  <a:lnTo>
+                    <a:pt x="2391712" y="223984"/>
+                  </a:lnTo>
+                  <a:lnTo>
+                    <a:pt x="2462057" y="229057"/>
+                  </a:lnTo>
+                  <a:lnTo>
+                    <a:pt x="2532401" y="234058"/>
+                  </a:lnTo>
+                  <a:lnTo>
+                    <a:pt x="2602746" y="238987"/>
+                  </a:lnTo>
+                  <a:lnTo>
+                    <a:pt x="2673090" y="243846"/>
+                  </a:lnTo>
+                  <a:lnTo>
+                    <a:pt x="2743435" y="248636"/>
+                  </a:lnTo>
+                  <a:lnTo>
+                    <a:pt x="2813779" y="253358"/>
+                  </a:lnTo>
+                  <a:lnTo>
+                    <a:pt x="2884124" y="258012"/>
+                  </a:lnTo>
+                  <a:lnTo>
+                    <a:pt x="2954468" y="262600"/>
+                  </a:lnTo>
+                  <a:lnTo>
+                    <a:pt x="3024813" y="267122"/>
+                  </a:lnTo>
+                  <a:lnTo>
+                    <a:pt x="3095157" y="271580"/>
+                  </a:lnTo>
+                  <a:lnTo>
+                    <a:pt x="3165502" y="275975"/>
+                  </a:lnTo>
+                  <a:lnTo>
+                    <a:pt x="3235846" y="280306"/>
+                  </a:lnTo>
+                  <a:lnTo>
+                    <a:pt x="3306191" y="284576"/>
+                  </a:lnTo>
+                  <a:lnTo>
+                    <a:pt x="3376535" y="288785"/>
+                  </a:lnTo>
+                  <a:lnTo>
+                    <a:pt x="3446880" y="292935"/>
+                  </a:lnTo>
+                  <a:lnTo>
+                    <a:pt x="3517224" y="297024"/>
+                  </a:lnTo>
+                  <a:lnTo>
+                    <a:pt x="3587569" y="301056"/>
+                  </a:lnTo>
+                  <a:lnTo>
+                    <a:pt x="3657913" y="305030"/>
+                  </a:lnTo>
+                  <a:lnTo>
+                    <a:pt x="3728257" y="308947"/>
+                  </a:lnTo>
+                  <a:lnTo>
+                    <a:pt x="3798602" y="312809"/>
+                  </a:lnTo>
+                  <a:lnTo>
+                    <a:pt x="3868946" y="316616"/>
+                  </a:lnTo>
+                  <a:lnTo>
+                    <a:pt x="3939291" y="320368"/>
+                  </a:lnTo>
+                  <a:lnTo>
+                    <a:pt x="4009635" y="324066"/>
+                  </a:lnTo>
+                  <a:lnTo>
+                    <a:pt x="4079980" y="327712"/>
+                  </a:lnTo>
+                  <a:lnTo>
+                    <a:pt x="4150324" y="331306"/>
+                  </a:lnTo>
+                  <a:lnTo>
+                    <a:pt x="4220669" y="334849"/>
+                  </a:lnTo>
+                  <a:lnTo>
+                    <a:pt x="4291013" y="338341"/>
+                  </a:lnTo>
+                  <a:lnTo>
+                    <a:pt x="4361358" y="341784"/>
+                  </a:lnTo>
+                  <a:lnTo>
+                    <a:pt x="4431702" y="345177"/>
+                  </a:lnTo>
+                  <a:lnTo>
+                    <a:pt x="4502047" y="348522"/>
+                  </a:lnTo>
+                  <a:lnTo>
+                    <a:pt x="4572391" y="351819"/>
+                  </a:lnTo>
+                  <a:lnTo>
+                    <a:pt x="4642736" y="355069"/>
+                  </a:lnTo>
+                  <a:lnTo>
+                    <a:pt x="4713080" y="358273"/>
+                  </a:lnTo>
+                  <a:lnTo>
+                    <a:pt x="4783425" y="361431"/>
+                  </a:lnTo>
+                  <a:lnTo>
+                    <a:pt x="4853769" y="364544"/>
+                  </a:lnTo>
+                  <a:lnTo>
+                    <a:pt x="4924114" y="367613"/>
+                  </a:lnTo>
+                  <a:lnTo>
+                    <a:pt x="4994458" y="370638"/>
+                  </a:lnTo>
+                  <a:lnTo>
+                    <a:pt x="5064803" y="373620"/>
+                  </a:lnTo>
+                  <a:lnTo>
+                    <a:pt x="5135147" y="376559"/>
+                  </a:lnTo>
+                  <a:lnTo>
+                    <a:pt x="5205492" y="379457"/>
+                  </a:lnTo>
+                  <a:lnTo>
+                    <a:pt x="5275836" y="382313"/>
+                  </a:lnTo>
+                  <a:lnTo>
+                    <a:pt x="5346181" y="385128"/>
+                  </a:lnTo>
+                  <a:lnTo>
+                    <a:pt x="5416525" y="387903"/>
+                  </a:lnTo>
+                  <a:lnTo>
+                    <a:pt x="5486870" y="390639"/>
+                  </a:lnTo>
+                  <a:lnTo>
+                    <a:pt x="5557214" y="393336"/>
+                  </a:lnTo>
+                  <a:lnTo>
+                    <a:pt x="5627559" y="395994"/>
+                  </a:lnTo>
+                  <a:lnTo>
+                    <a:pt x="5697903" y="398614"/>
+                  </a:lnTo>
+                  <a:lnTo>
+                    <a:pt x="5768248" y="401197"/>
+                  </a:lnTo>
+                  <a:lnTo>
+                    <a:pt x="5838592" y="403743"/>
+                  </a:lnTo>
+                  <a:lnTo>
+                    <a:pt x="5908937" y="406253"/>
+                  </a:lnTo>
+                  <a:lnTo>
+                    <a:pt x="5979281" y="408727"/>
+                  </a:lnTo>
+                  <a:lnTo>
+                    <a:pt x="6049626" y="411165"/>
+                  </a:lnTo>
+                  <a:lnTo>
+                    <a:pt x="6119970" y="413569"/>
+                  </a:lnTo>
+                  <a:lnTo>
+                    <a:pt x="6190315" y="415939"/>
+                  </a:lnTo>
+                  <a:lnTo>
+                    <a:pt x="6260659" y="418275"/>
+                  </a:lnTo>
+                  <a:lnTo>
+                    <a:pt x="6331004" y="420577"/>
+                  </a:lnTo>
+                  <a:lnTo>
+                    <a:pt x="6401348" y="422847"/>
+                  </a:lnTo>
+                  <a:lnTo>
+                    <a:pt x="6471693" y="425084"/>
+                  </a:lnTo>
+                  <a:lnTo>
+                    <a:pt x="6542037" y="427290"/>
+                  </a:lnTo>
+                  <a:lnTo>
+                    <a:pt x="6612382" y="429464"/>
+                  </a:lnTo>
+                  <a:lnTo>
+                    <a:pt x="6682726" y="431607"/>
+                  </a:lnTo>
+                  <a:lnTo>
+                    <a:pt x="6753071" y="433719"/>
+                  </a:lnTo>
+                  <a:lnTo>
+                    <a:pt x="6823415" y="435801"/>
+                  </a:lnTo>
+                  <a:lnTo>
+                    <a:pt x="6893760" y="437854"/>
+                  </a:lnTo>
+                  <a:lnTo>
+                    <a:pt x="6964104" y="439877"/>
                   </a:lnTo>
                 </a:path>
               </a:pathLst>
@@ -4538,27 +4573,27 @@
         </p:sp>
         <p:sp>
           <p:nvSpPr>
-            <p:cNvPr id="24" name="pl24"/>
+            <p:cNvPr id="25" name="pl25"/>
             <p:cNvSpPr/>
             <p:nvPr/>
           </p:nvSpPr>
           <p:spPr>
             <a:xfrm>
-              <a:off x="817517" y="4727786"/>
-              <a:ext cx="7799693" cy="0"/>
+              <a:off x="887106" y="3100960"/>
+              <a:ext cx="7660515" cy="0"/>
             </a:xfrm>
             <a:custGeom>
               <a:avLst/>
               <a:pathLst>
-                <a:path w="7799693" h="0">
+                <a:path w="7660515" h="0">
                   <a:moveTo>
                     <a:pt x="0" y="0"/>
                   </a:moveTo>
                   <a:lnTo>
-                    <a:pt x="7799693" y="0"/>
-                  </a:lnTo>
-                  <a:lnTo>
-                    <a:pt x="7799693" y="0"/>
+                    <a:pt x="7660515" y="0"/>
+                  </a:lnTo>
+                  <a:lnTo>
+                    <a:pt x="7660515" y="0"/>
                   </a:lnTo>
                 </a:path>
               </a:pathLst>
@@ -4581,21 +4616,21 @@
         </p:sp>
         <p:sp>
           <p:nvSpPr>
-            <p:cNvPr id="25" name="pl25"/>
+            <p:cNvPr id="26" name="pl26"/>
             <p:cNvSpPr/>
             <p:nvPr/>
           </p:nvSpPr>
           <p:spPr>
             <a:xfrm>
-              <a:off x="4468386" y="2073503"/>
-              <a:ext cx="0" cy="3649639"/>
+              <a:off x="4472829" y="2143092"/>
+              <a:ext cx="0" cy="1317069"/>
             </a:xfrm>
             <a:custGeom>
               <a:avLst/>
               <a:pathLst>
-                <a:path w="0" h="3649639">
+                <a:path w="0" h="1317069">
                   <a:moveTo>
-                    <a:pt x="0" y="3649639"/>
+                    <a:pt x="0" y="1317069"/>
                   </a:moveTo>
                   <a:lnTo>
                     <a:pt x="0" y="0"/>
@@ -4624,13 +4659,13 @@
         </p:sp>
         <p:sp>
           <p:nvSpPr>
-            <p:cNvPr id="26" name="tx26"/>
+            <p:cNvPr id="27" name="tx27"/>
             <p:cNvSpPr/>
             <p:nvPr/>
           </p:nvSpPr>
           <p:spPr>
             <a:xfrm>
-              <a:off x="692708" y="5517199"/>
+              <a:off x="762297" y="3360243"/>
               <a:ext cx="62179" cy="80101"/>
             </a:xfrm>
             <a:prstGeom prst="rect">
@@ -4670,13 +4705,13 @@
         </p:sp>
         <p:sp>
           <p:nvSpPr>
-            <p:cNvPr id="27" name="tx27"/>
+            <p:cNvPr id="28" name="tx28"/>
             <p:cNvSpPr/>
             <p:nvPr/>
           </p:nvSpPr>
           <p:spPr>
             <a:xfrm>
-              <a:off x="692708" y="4687735"/>
+              <a:off x="762297" y="3060909"/>
               <a:ext cx="62179" cy="80101"/>
             </a:xfrm>
             <a:prstGeom prst="rect">
@@ -4716,13 +4751,13 @@
         </p:sp>
         <p:sp>
           <p:nvSpPr>
-            <p:cNvPr id="28" name="tx28"/>
+            <p:cNvPr id="29" name="tx29"/>
             <p:cNvSpPr/>
             <p:nvPr/>
           </p:nvSpPr>
           <p:spPr>
             <a:xfrm>
-              <a:off x="692708" y="3858272"/>
+              <a:off x="762297" y="2761575"/>
               <a:ext cx="62179" cy="80101"/>
             </a:xfrm>
             <a:prstGeom prst="rect">
@@ -4762,13 +4797,13 @@
         </p:sp>
         <p:sp>
           <p:nvSpPr>
-            <p:cNvPr id="29" name="tx29"/>
+            <p:cNvPr id="30" name="tx30"/>
             <p:cNvSpPr/>
             <p:nvPr/>
           </p:nvSpPr>
           <p:spPr>
             <a:xfrm>
-              <a:off x="692708" y="3028808"/>
+              <a:off x="762297" y="2462242"/>
               <a:ext cx="62179" cy="80101"/>
             </a:xfrm>
             <a:prstGeom prst="rect">
@@ -4808,13 +4843,13 @@
         </p:sp>
         <p:sp>
           <p:nvSpPr>
-            <p:cNvPr id="30" name="tx30"/>
+            <p:cNvPr id="31" name="tx31"/>
             <p:cNvSpPr/>
             <p:nvPr/>
           </p:nvSpPr>
           <p:spPr>
             <a:xfrm>
-              <a:off x="692708" y="2199345"/>
+              <a:off x="762297" y="2162908"/>
               <a:ext cx="62179" cy="80101"/>
             </a:xfrm>
             <a:prstGeom prst="rect">
@@ -4854,13 +4889,13 @@
         </p:sp>
         <p:sp>
           <p:nvSpPr>
-            <p:cNvPr id="31" name="tx31"/>
+            <p:cNvPr id="32" name="tx32"/>
             <p:cNvSpPr/>
             <p:nvPr/>
           </p:nvSpPr>
           <p:spPr>
             <a:xfrm>
-              <a:off x="2478335" y="5785772"/>
+              <a:off x="2516846" y="3522791"/>
               <a:ext cx="161574" cy="80101"/>
             </a:xfrm>
             <a:prstGeom prst="rect">
@@ -4900,13 +4935,13 @@
         </p:sp>
         <p:sp>
           <p:nvSpPr>
-            <p:cNvPr id="32" name="tx32"/>
+            <p:cNvPr id="33" name="tx33"/>
             <p:cNvSpPr/>
             <p:nvPr/>
           </p:nvSpPr>
           <p:spPr>
             <a:xfrm>
-              <a:off x="4582608" y="5785772"/>
+              <a:off x="4584458" y="3522791"/>
               <a:ext cx="62179" cy="80101"/>
             </a:xfrm>
             <a:prstGeom prst="rect">
@@ -4946,13 +4981,13 @@
         </p:sp>
         <p:sp>
           <p:nvSpPr>
-            <p:cNvPr id="33" name="tx33"/>
+            <p:cNvPr id="34" name="tx34"/>
             <p:cNvSpPr/>
             <p:nvPr/>
           </p:nvSpPr>
           <p:spPr>
             <a:xfrm>
-              <a:off x="6606094" y="5785772"/>
+              <a:off x="6571282" y="3522791"/>
               <a:ext cx="124358" cy="80101"/>
             </a:xfrm>
             <a:prstGeom prst="rect">
@@ -4992,13 +5027,13 @@
         </p:sp>
         <p:sp>
           <p:nvSpPr>
-            <p:cNvPr id="34" name="tx34"/>
+            <p:cNvPr id="35" name="tx35"/>
             <p:cNvSpPr/>
             <p:nvPr/>
           </p:nvSpPr>
           <p:spPr>
             <a:xfrm>
-              <a:off x="2928340" y="5925448"/>
+              <a:off x="2928340" y="3662467"/>
               <a:ext cx="3578047" cy="100218"/>
             </a:xfrm>
             <a:prstGeom prst="rect">
@@ -5038,13 +5073,13 @@
         </p:sp>
         <p:sp>
           <p:nvSpPr>
-            <p:cNvPr id="35" name="tx35"/>
+            <p:cNvPr id="36" name="tx36"/>
             <p:cNvSpPr/>
             <p:nvPr/>
           </p:nvSpPr>
           <p:spPr>
             <a:xfrm rot="-5400000">
-              <a:off x="68446" y="3848213"/>
+              <a:off x="138035" y="2751517"/>
               <a:ext cx="1016904" cy="100218"/>
             </a:xfrm>
             <a:prstGeom prst="rect">
@@ -5084,13 +5119,13 @@
         </p:sp>
         <p:sp>
           <p:nvSpPr>
-            <p:cNvPr id="36" name="tx36"/>
+            <p:cNvPr id="37" name="tx37"/>
             <p:cNvSpPr/>
             <p:nvPr/>
           </p:nvSpPr>
           <p:spPr>
             <a:xfrm>
-              <a:off x="817517" y="1896563"/>
+              <a:off x="887106" y="1966152"/>
               <a:ext cx="6985375" cy="82021"/>
             </a:xfrm>
             <a:prstGeom prst="rect">
@@ -5130,13 +5165,3716 @@
         </p:sp>
         <p:sp>
           <p:nvSpPr>
-            <p:cNvPr id="37" name="tx37"/>
+            <p:cNvPr id="38" name="tx38"/>
             <p:cNvSpPr/>
             <p:nvPr/>
           </p:nvSpPr>
           <p:spPr>
             <a:xfrm>
-              <a:off x="817517" y="1669789"/>
+              <a:off x="887106" y="1739378"/>
+              <a:ext cx="2615184" cy="120152"/>
+            </a:xfrm>
+            <a:prstGeom prst="rect">
+              <a:avLst/>
+            </a:prstGeom>
+            <a:noFill/>
+          </p:spPr>
+          <p:txBody>
+            <a:bodyPr lIns="0" rIns="0" tIns="0" bIns="0" anchorCtr="1" anchor="ctr" wrap="none"/>
+            <a:lstStyle/>
+            <a:p>
+              <a:pPr algn="l" marL="0" marR="0" indent="0">
+                <a:lnSpc>
+                  <a:spcPts val="1320"/>
+                </a:lnSpc>
+                <a:spcBef>
+                  <a:spcPts val="0"/>
+                </a:spcBef>
+                <a:spcAft>
+                  <a:spcPts val="0"/>
+                </a:spcAft>
+              </a:pPr>
+              <a:r>
+                <a:rPr sz="1320">
+                  <a:solidFill>
+                    <a:srgbClr val="000000">
+                      <a:alpha val="100000"/>
+                    </a:srgbClr>
+                  </a:solidFill>
+                  <a:latin typeface="Helvetica"/>
+                  <a:cs typeface="Helvetica"/>
+                </a:rPr>
+                <a:t>AKI Grade 2 (Carboplatin AUC ≥ 3)</a:t>
+              </a:r>
+            </a:p>
+          </p:txBody>
+        </p:sp>
+        <p:sp>
+          <p:nvSpPr>
+            <p:cNvPr id="39" name="pl39"/>
+            <p:cNvSpPr/>
+            <p:nvPr/>
+          </p:nvSpPr>
+          <p:spPr>
+            <a:xfrm>
+              <a:off x="887106" y="5444019"/>
+              <a:ext cx="7660515" cy="0"/>
+            </a:xfrm>
+            <a:custGeom>
+              <a:avLst/>
+              <a:pathLst>
+                <a:path w="7660515" h="0">
+                  <a:moveTo>
+                    <a:pt x="0" y="0"/>
+                  </a:moveTo>
+                  <a:lnTo>
+                    <a:pt x="7660515" y="0"/>
+                  </a:lnTo>
+                  <a:lnTo>
+                    <a:pt x="7660515" y="0"/>
+                  </a:lnTo>
+                </a:path>
+              </a:pathLst>
+            </a:custGeom>
+            <a:ln w="6775" cap="flat">
+              <a:solidFill>
+                <a:srgbClr val="EBEBEB">
+                  <a:alpha val="100000"/>
+                </a:srgbClr>
+              </a:solidFill>
+              <a:prstDash val="solid"/>
+              <a:round/>
+            </a:ln>
+          </p:spPr>
+          <p:txBody>
+            <a:bodyPr/>
+            <a:lstStyle/>
+            <a:p/>
+          </p:txBody>
+        </p:sp>
+        <p:sp>
+          <p:nvSpPr>
+            <p:cNvPr id="40" name="pl40"/>
+            <p:cNvSpPr/>
+            <p:nvPr/>
+          </p:nvSpPr>
+          <p:spPr>
+            <a:xfrm>
+              <a:off x="887106" y="5144686"/>
+              <a:ext cx="7660515" cy="0"/>
+            </a:xfrm>
+            <a:custGeom>
+              <a:avLst/>
+              <a:pathLst>
+                <a:path w="7660515" h="0">
+                  <a:moveTo>
+                    <a:pt x="0" y="0"/>
+                  </a:moveTo>
+                  <a:lnTo>
+                    <a:pt x="7660515" y="0"/>
+                  </a:lnTo>
+                  <a:lnTo>
+                    <a:pt x="7660515" y="0"/>
+                  </a:lnTo>
+                </a:path>
+              </a:pathLst>
+            </a:custGeom>
+            <a:ln w="6775" cap="flat">
+              <a:solidFill>
+                <a:srgbClr val="EBEBEB">
+                  <a:alpha val="100000"/>
+                </a:srgbClr>
+              </a:solidFill>
+              <a:prstDash val="solid"/>
+              <a:round/>
+            </a:ln>
+          </p:spPr>
+          <p:txBody>
+            <a:bodyPr/>
+            <a:lstStyle/>
+            <a:p/>
+          </p:txBody>
+        </p:sp>
+        <p:sp>
+          <p:nvSpPr>
+            <p:cNvPr id="41" name="pl41"/>
+            <p:cNvSpPr/>
+            <p:nvPr/>
+          </p:nvSpPr>
+          <p:spPr>
+            <a:xfrm>
+              <a:off x="887106" y="4845352"/>
+              <a:ext cx="7660515" cy="0"/>
+            </a:xfrm>
+            <a:custGeom>
+              <a:avLst/>
+              <a:pathLst>
+                <a:path w="7660515" h="0">
+                  <a:moveTo>
+                    <a:pt x="0" y="0"/>
+                  </a:moveTo>
+                  <a:lnTo>
+                    <a:pt x="7660515" y="0"/>
+                  </a:lnTo>
+                  <a:lnTo>
+                    <a:pt x="7660515" y="0"/>
+                  </a:lnTo>
+                </a:path>
+              </a:pathLst>
+            </a:custGeom>
+            <a:ln w="6775" cap="flat">
+              <a:solidFill>
+                <a:srgbClr val="EBEBEB">
+                  <a:alpha val="100000"/>
+                </a:srgbClr>
+              </a:solidFill>
+              <a:prstDash val="solid"/>
+              <a:round/>
+            </a:ln>
+          </p:spPr>
+          <p:txBody>
+            <a:bodyPr/>
+            <a:lstStyle/>
+            <a:p/>
+          </p:txBody>
+        </p:sp>
+        <p:sp>
+          <p:nvSpPr>
+            <p:cNvPr id="42" name="pl42"/>
+            <p:cNvSpPr/>
+            <p:nvPr/>
+          </p:nvSpPr>
+          <p:spPr>
+            <a:xfrm>
+              <a:off x="887106" y="4546018"/>
+              <a:ext cx="7660515" cy="0"/>
+            </a:xfrm>
+            <a:custGeom>
+              <a:avLst/>
+              <a:pathLst>
+                <a:path w="7660515" h="0">
+                  <a:moveTo>
+                    <a:pt x="0" y="0"/>
+                  </a:moveTo>
+                  <a:lnTo>
+                    <a:pt x="7660515" y="0"/>
+                  </a:lnTo>
+                  <a:lnTo>
+                    <a:pt x="7660515" y="0"/>
+                  </a:lnTo>
+                </a:path>
+              </a:pathLst>
+            </a:custGeom>
+            <a:ln w="6775" cap="flat">
+              <a:solidFill>
+                <a:srgbClr val="EBEBEB">
+                  <a:alpha val="100000"/>
+                </a:srgbClr>
+              </a:solidFill>
+              <a:prstDash val="solid"/>
+              <a:round/>
+            </a:ln>
+          </p:spPr>
+          <p:txBody>
+            <a:bodyPr/>
+            <a:lstStyle/>
+            <a:p/>
+          </p:txBody>
+        </p:sp>
+        <p:sp>
+          <p:nvSpPr>
+            <p:cNvPr id="43" name="pl43"/>
+            <p:cNvSpPr/>
+            <p:nvPr/>
+          </p:nvSpPr>
+          <p:spPr>
+            <a:xfrm>
+              <a:off x="983303" y="4336484"/>
+              <a:ext cx="0" cy="1317069"/>
+            </a:xfrm>
+            <a:custGeom>
+              <a:avLst/>
+              <a:pathLst>
+                <a:path w="0" h="1317069">
+                  <a:moveTo>
+                    <a:pt x="0" y="1317069"/>
+                  </a:moveTo>
+                  <a:lnTo>
+                    <a:pt x="0" y="0"/>
+                  </a:lnTo>
+                  <a:lnTo>
+                    <a:pt x="0" y="0"/>
+                  </a:lnTo>
+                </a:path>
+              </a:pathLst>
+            </a:custGeom>
+            <a:ln w="6775" cap="flat">
+              <a:solidFill>
+                <a:srgbClr val="EBEBEB">
+                  <a:alpha val="100000"/>
+                </a:srgbClr>
+              </a:solidFill>
+              <a:prstDash val="solid"/>
+              <a:round/>
+            </a:ln>
+          </p:spPr>
+          <p:txBody>
+            <a:bodyPr/>
+            <a:lstStyle/>
+            <a:p/>
+          </p:txBody>
+        </p:sp>
+        <p:sp>
+          <p:nvSpPr>
+            <p:cNvPr id="44" name="pl44"/>
+            <p:cNvSpPr/>
+            <p:nvPr/>
+          </p:nvSpPr>
+          <p:spPr>
+            <a:xfrm>
+              <a:off x="1790468" y="4336484"/>
+              <a:ext cx="0" cy="1317069"/>
+            </a:xfrm>
+            <a:custGeom>
+              <a:avLst/>
+              <a:pathLst>
+                <a:path w="0" h="1317069">
+                  <a:moveTo>
+                    <a:pt x="0" y="1317069"/>
+                  </a:moveTo>
+                  <a:lnTo>
+                    <a:pt x="0" y="0"/>
+                  </a:lnTo>
+                  <a:lnTo>
+                    <a:pt x="0" y="0"/>
+                  </a:lnTo>
+                </a:path>
+              </a:pathLst>
+            </a:custGeom>
+            <a:ln w="6775" cap="flat">
+              <a:solidFill>
+                <a:srgbClr val="EBEBEB">
+                  <a:alpha val="100000"/>
+                </a:srgbClr>
+              </a:solidFill>
+              <a:prstDash val="solid"/>
+              <a:round/>
+            </a:ln>
+          </p:spPr>
+          <p:txBody>
+            <a:bodyPr/>
+            <a:lstStyle/>
+            <a:p/>
+          </p:txBody>
+        </p:sp>
+        <p:sp>
+          <p:nvSpPr>
+            <p:cNvPr id="45" name="pl45"/>
+            <p:cNvSpPr/>
+            <p:nvPr/>
+          </p:nvSpPr>
+          <p:spPr>
+            <a:xfrm>
+              <a:off x="2597634" y="4336484"/>
+              <a:ext cx="0" cy="1317069"/>
+            </a:xfrm>
+            <a:custGeom>
+              <a:avLst/>
+              <a:pathLst>
+                <a:path w="0" h="1317069">
+                  <a:moveTo>
+                    <a:pt x="0" y="1317069"/>
+                  </a:moveTo>
+                  <a:lnTo>
+                    <a:pt x="0" y="0"/>
+                  </a:lnTo>
+                  <a:lnTo>
+                    <a:pt x="0" y="0"/>
+                  </a:lnTo>
+                </a:path>
+              </a:pathLst>
+            </a:custGeom>
+            <a:ln w="6775" cap="flat">
+              <a:solidFill>
+                <a:srgbClr val="EBEBEB">
+                  <a:alpha val="100000"/>
+                </a:srgbClr>
+              </a:solidFill>
+              <a:prstDash val="solid"/>
+              <a:round/>
+            </a:ln>
+          </p:spPr>
+          <p:txBody>
+            <a:bodyPr/>
+            <a:lstStyle/>
+            <a:p/>
+          </p:txBody>
+        </p:sp>
+        <p:sp>
+          <p:nvSpPr>
+            <p:cNvPr id="46" name="pl46"/>
+            <p:cNvSpPr/>
+            <p:nvPr/>
+          </p:nvSpPr>
+          <p:spPr>
+            <a:xfrm>
+              <a:off x="3404799" y="4336484"/>
+              <a:ext cx="0" cy="1317069"/>
+            </a:xfrm>
+            <a:custGeom>
+              <a:avLst/>
+              <a:pathLst>
+                <a:path w="0" h="1317069">
+                  <a:moveTo>
+                    <a:pt x="0" y="1317069"/>
+                  </a:moveTo>
+                  <a:lnTo>
+                    <a:pt x="0" y="0"/>
+                  </a:lnTo>
+                  <a:lnTo>
+                    <a:pt x="0" y="0"/>
+                  </a:lnTo>
+                </a:path>
+              </a:pathLst>
+            </a:custGeom>
+            <a:ln w="6775" cap="flat">
+              <a:solidFill>
+                <a:srgbClr val="EBEBEB">
+                  <a:alpha val="100000"/>
+                </a:srgbClr>
+              </a:solidFill>
+              <a:prstDash val="solid"/>
+              <a:round/>
+            </a:ln>
+          </p:spPr>
+          <p:txBody>
+            <a:bodyPr/>
+            <a:lstStyle/>
+            <a:p/>
+          </p:txBody>
+        </p:sp>
+        <p:sp>
+          <p:nvSpPr>
+            <p:cNvPr id="47" name="pl47"/>
+            <p:cNvSpPr/>
+            <p:nvPr/>
+          </p:nvSpPr>
+          <p:spPr>
+            <a:xfrm>
+              <a:off x="4211965" y="4336484"/>
+              <a:ext cx="0" cy="1317069"/>
+            </a:xfrm>
+            <a:custGeom>
+              <a:avLst/>
+              <a:pathLst>
+                <a:path w="0" h="1317069">
+                  <a:moveTo>
+                    <a:pt x="0" y="1317069"/>
+                  </a:moveTo>
+                  <a:lnTo>
+                    <a:pt x="0" y="0"/>
+                  </a:lnTo>
+                  <a:lnTo>
+                    <a:pt x="0" y="0"/>
+                  </a:lnTo>
+                </a:path>
+              </a:pathLst>
+            </a:custGeom>
+            <a:ln w="6775" cap="flat">
+              <a:solidFill>
+                <a:srgbClr val="EBEBEB">
+                  <a:alpha val="100000"/>
+                </a:srgbClr>
+              </a:solidFill>
+              <a:prstDash val="solid"/>
+              <a:round/>
+            </a:ln>
+          </p:spPr>
+          <p:txBody>
+            <a:bodyPr/>
+            <a:lstStyle/>
+            <a:p/>
+          </p:txBody>
+        </p:sp>
+        <p:sp>
+          <p:nvSpPr>
+            <p:cNvPr id="48" name="pl48"/>
+            <p:cNvSpPr/>
+            <p:nvPr/>
+          </p:nvSpPr>
+          <p:spPr>
+            <a:xfrm>
+              <a:off x="5019130" y="4336484"/>
+              <a:ext cx="0" cy="1317069"/>
+            </a:xfrm>
+            <a:custGeom>
+              <a:avLst/>
+              <a:pathLst>
+                <a:path w="0" h="1317069">
+                  <a:moveTo>
+                    <a:pt x="0" y="1317069"/>
+                  </a:moveTo>
+                  <a:lnTo>
+                    <a:pt x="0" y="0"/>
+                  </a:lnTo>
+                  <a:lnTo>
+                    <a:pt x="0" y="0"/>
+                  </a:lnTo>
+                </a:path>
+              </a:pathLst>
+            </a:custGeom>
+            <a:ln w="6775" cap="flat">
+              <a:solidFill>
+                <a:srgbClr val="EBEBEB">
+                  <a:alpha val="100000"/>
+                </a:srgbClr>
+              </a:solidFill>
+              <a:prstDash val="solid"/>
+              <a:round/>
+            </a:ln>
+          </p:spPr>
+          <p:txBody>
+            <a:bodyPr/>
+            <a:lstStyle/>
+            <a:p/>
+          </p:txBody>
+        </p:sp>
+        <p:sp>
+          <p:nvSpPr>
+            <p:cNvPr id="49" name="pl49"/>
+            <p:cNvSpPr/>
+            <p:nvPr/>
+          </p:nvSpPr>
+          <p:spPr>
+            <a:xfrm>
+              <a:off x="5826296" y="4336484"/>
+              <a:ext cx="0" cy="1317069"/>
+            </a:xfrm>
+            <a:custGeom>
+              <a:avLst/>
+              <a:pathLst>
+                <a:path w="0" h="1317069">
+                  <a:moveTo>
+                    <a:pt x="0" y="1317069"/>
+                  </a:moveTo>
+                  <a:lnTo>
+                    <a:pt x="0" y="0"/>
+                  </a:lnTo>
+                  <a:lnTo>
+                    <a:pt x="0" y="0"/>
+                  </a:lnTo>
+                </a:path>
+              </a:pathLst>
+            </a:custGeom>
+            <a:ln w="6775" cap="flat">
+              <a:solidFill>
+                <a:srgbClr val="EBEBEB">
+                  <a:alpha val="100000"/>
+                </a:srgbClr>
+              </a:solidFill>
+              <a:prstDash val="solid"/>
+              <a:round/>
+            </a:ln>
+          </p:spPr>
+          <p:txBody>
+            <a:bodyPr/>
+            <a:lstStyle/>
+            <a:p/>
+          </p:txBody>
+        </p:sp>
+        <p:sp>
+          <p:nvSpPr>
+            <p:cNvPr id="50" name="pl50"/>
+            <p:cNvSpPr/>
+            <p:nvPr/>
+          </p:nvSpPr>
+          <p:spPr>
+            <a:xfrm>
+              <a:off x="6633461" y="4336484"/>
+              <a:ext cx="0" cy="1317069"/>
+            </a:xfrm>
+            <a:custGeom>
+              <a:avLst/>
+              <a:pathLst>
+                <a:path w="0" h="1317069">
+                  <a:moveTo>
+                    <a:pt x="0" y="1317069"/>
+                  </a:moveTo>
+                  <a:lnTo>
+                    <a:pt x="0" y="0"/>
+                  </a:lnTo>
+                  <a:lnTo>
+                    <a:pt x="0" y="0"/>
+                  </a:lnTo>
+                </a:path>
+              </a:pathLst>
+            </a:custGeom>
+            <a:ln w="6775" cap="flat">
+              <a:solidFill>
+                <a:srgbClr val="EBEBEB">
+                  <a:alpha val="100000"/>
+                </a:srgbClr>
+              </a:solidFill>
+              <a:prstDash val="solid"/>
+              <a:round/>
+            </a:ln>
+          </p:spPr>
+          <p:txBody>
+            <a:bodyPr/>
+            <a:lstStyle/>
+            <a:p/>
+          </p:txBody>
+        </p:sp>
+        <p:sp>
+          <p:nvSpPr>
+            <p:cNvPr id="51" name="pl51"/>
+            <p:cNvSpPr/>
+            <p:nvPr/>
+          </p:nvSpPr>
+          <p:spPr>
+            <a:xfrm>
+              <a:off x="7440627" y="4336484"/>
+              <a:ext cx="0" cy="1317069"/>
+            </a:xfrm>
+            <a:custGeom>
+              <a:avLst/>
+              <a:pathLst>
+                <a:path w="0" h="1317069">
+                  <a:moveTo>
+                    <a:pt x="0" y="1317069"/>
+                  </a:moveTo>
+                  <a:lnTo>
+                    <a:pt x="0" y="0"/>
+                  </a:lnTo>
+                  <a:lnTo>
+                    <a:pt x="0" y="0"/>
+                  </a:lnTo>
+                </a:path>
+              </a:pathLst>
+            </a:custGeom>
+            <a:ln w="6775" cap="flat">
+              <a:solidFill>
+                <a:srgbClr val="EBEBEB">
+                  <a:alpha val="100000"/>
+                </a:srgbClr>
+              </a:solidFill>
+              <a:prstDash val="solid"/>
+              <a:round/>
+            </a:ln>
+          </p:spPr>
+          <p:txBody>
+            <a:bodyPr/>
+            <a:lstStyle/>
+            <a:p/>
+          </p:txBody>
+        </p:sp>
+        <p:sp>
+          <p:nvSpPr>
+            <p:cNvPr id="52" name="pl52"/>
+            <p:cNvSpPr/>
+            <p:nvPr/>
+          </p:nvSpPr>
+          <p:spPr>
+            <a:xfrm>
+              <a:off x="8247792" y="4336484"/>
+              <a:ext cx="0" cy="1317069"/>
+            </a:xfrm>
+            <a:custGeom>
+              <a:avLst/>
+              <a:pathLst>
+                <a:path w="0" h="1317069">
+                  <a:moveTo>
+                    <a:pt x="0" y="1317069"/>
+                  </a:moveTo>
+                  <a:lnTo>
+                    <a:pt x="0" y="0"/>
+                  </a:lnTo>
+                  <a:lnTo>
+                    <a:pt x="0" y="0"/>
+                  </a:lnTo>
+                </a:path>
+              </a:pathLst>
+            </a:custGeom>
+            <a:ln w="6775" cap="flat">
+              <a:solidFill>
+                <a:srgbClr val="EBEBEB">
+                  <a:alpha val="100000"/>
+                </a:srgbClr>
+              </a:solidFill>
+              <a:prstDash val="solid"/>
+              <a:round/>
+            </a:ln>
+          </p:spPr>
+          <p:txBody>
+            <a:bodyPr/>
+            <a:lstStyle/>
+            <a:p/>
+          </p:txBody>
+        </p:sp>
+        <p:sp>
+          <p:nvSpPr>
+            <p:cNvPr id="53" name="pl53"/>
+            <p:cNvSpPr/>
+            <p:nvPr/>
+          </p:nvSpPr>
+          <p:spPr>
+            <a:xfrm>
+              <a:off x="887106" y="5593686"/>
+              <a:ext cx="7660515" cy="0"/>
+            </a:xfrm>
+            <a:custGeom>
+              <a:avLst/>
+              <a:pathLst>
+                <a:path w="7660515" h="0">
+                  <a:moveTo>
+                    <a:pt x="0" y="0"/>
+                  </a:moveTo>
+                  <a:lnTo>
+                    <a:pt x="7660515" y="0"/>
+                  </a:lnTo>
+                  <a:lnTo>
+                    <a:pt x="7660515" y="0"/>
+                  </a:lnTo>
+                </a:path>
+              </a:pathLst>
+            </a:custGeom>
+            <a:ln w="13550" cap="flat">
+              <a:solidFill>
+                <a:srgbClr val="EBEBEB">
+                  <a:alpha val="100000"/>
+                </a:srgbClr>
+              </a:solidFill>
+              <a:prstDash val="solid"/>
+              <a:round/>
+            </a:ln>
+          </p:spPr>
+          <p:txBody>
+            <a:bodyPr/>
+            <a:lstStyle/>
+            <a:p/>
+          </p:txBody>
+        </p:sp>
+        <p:sp>
+          <p:nvSpPr>
+            <p:cNvPr id="54" name="pl54"/>
+            <p:cNvSpPr/>
+            <p:nvPr/>
+          </p:nvSpPr>
+          <p:spPr>
+            <a:xfrm>
+              <a:off x="887106" y="5294352"/>
+              <a:ext cx="7660515" cy="0"/>
+            </a:xfrm>
+            <a:custGeom>
+              <a:avLst/>
+              <a:pathLst>
+                <a:path w="7660515" h="0">
+                  <a:moveTo>
+                    <a:pt x="0" y="0"/>
+                  </a:moveTo>
+                  <a:lnTo>
+                    <a:pt x="7660515" y="0"/>
+                  </a:lnTo>
+                  <a:lnTo>
+                    <a:pt x="7660515" y="0"/>
+                  </a:lnTo>
+                </a:path>
+              </a:pathLst>
+            </a:custGeom>
+            <a:ln w="13550" cap="flat">
+              <a:solidFill>
+                <a:srgbClr val="EBEBEB">
+                  <a:alpha val="100000"/>
+                </a:srgbClr>
+              </a:solidFill>
+              <a:prstDash val="solid"/>
+              <a:round/>
+            </a:ln>
+          </p:spPr>
+          <p:txBody>
+            <a:bodyPr/>
+            <a:lstStyle/>
+            <a:p/>
+          </p:txBody>
+        </p:sp>
+        <p:sp>
+          <p:nvSpPr>
+            <p:cNvPr id="55" name="pl55"/>
+            <p:cNvSpPr/>
+            <p:nvPr/>
+          </p:nvSpPr>
+          <p:spPr>
+            <a:xfrm>
+              <a:off x="887106" y="4995019"/>
+              <a:ext cx="7660515" cy="0"/>
+            </a:xfrm>
+            <a:custGeom>
+              <a:avLst/>
+              <a:pathLst>
+                <a:path w="7660515" h="0">
+                  <a:moveTo>
+                    <a:pt x="0" y="0"/>
+                  </a:moveTo>
+                  <a:lnTo>
+                    <a:pt x="7660515" y="0"/>
+                  </a:lnTo>
+                  <a:lnTo>
+                    <a:pt x="7660515" y="0"/>
+                  </a:lnTo>
+                </a:path>
+              </a:pathLst>
+            </a:custGeom>
+            <a:ln w="13550" cap="flat">
+              <a:solidFill>
+                <a:srgbClr val="EBEBEB">
+                  <a:alpha val="100000"/>
+                </a:srgbClr>
+              </a:solidFill>
+              <a:prstDash val="solid"/>
+              <a:round/>
+            </a:ln>
+          </p:spPr>
+          <p:txBody>
+            <a:bodyPr/>
+            <a:lstStyle/>
+            <a:p/>
+          </p:txBody>
+        </p:sp>
+        <p:sp>
+          <p:nvSpPr>
+            <p:cNvPr id="56" name="pl56"/>
+            <p:cNvSpPr/>
+            <p:nvPr/>
+          </p:nvSpPr>
+          <p:spPr>
+            <a:xfrm>
+              <a:off x="887106" y="4695685"/>
+              <a:ext cx="7660515" cy="0"/>
+            </a:xfrm>
+            <a:custGeom>
+              <a:avLst/>
+              <a:pathLst>
+                <a:path w="7660515" h="0">
+                  <a:moveTo>
+                    <a:pt x="0" y="0"/>
+                  </a:moveTo>
+                  <a:lnTo>
+                    <a:pt x="7660515" y="0"/>
+                  </a:lnTo>
+                  <a:lnTo>
+                    <a:pt x="7660515" y="0"/>
+                  </a:lnTo>
+                </a:path>
+              </a:pathLst>
+            </a:custGeom>
+            <a:ln w="13550" cap="flat">
+              <a:solidFill>
+                <a:srgbClr val="EBEBEB">
+                  <a:alpha val="100000"/>
+                </a:srgbClr>
+              </a:solidFill>
+              <a:prstDash val="solid"/>
+              <a:round/>
+            </a:ln>
+          </p:spPr>
+          <p:txBody>
+            <a:bodyPr/>
+            <a:lstStyle/>
+            <a:p/>
+          </p:txBody>
+        </p:sp>
+        <p:sp>
+          <p:nvSpPr>
+            <p:cNvPr id="57" name="pl57"/>
+            <p:cNvSpPr/>
+            <p:nvPr/>
+          </p:nvSpPr>
+          <p:spPr>
+            <a:xfrm>
+              <a:off x="887106" y="4396351"/>
+              <a:ext cx="7660515" cy="0"/>
+            </a:xfrm>
+            <a:custGeom>
+              <a:avLst/>
+              <a:pathLst>
+                <a:path w="7660515" h="0">
+                  <a:moveTo>
+                    <a:pt x="0" y="0"/>
+                  </a:moveTo>
+                  <a:lnTo>
+                    <a:pt x="7660515" y="0"/>
+                  </a:lnTo>
+                  <a:lnTo>
+                    <a:pt x="7660515" y="0"/>
+                  </a:lnTo>
+                </a:path>
+              </a:pathLst>
+            </a:custGeom>
+            <a:ln w="13550" cap="flat">
+              <a:solidFill>
+                <a:srgbClr val="EBEBEB">
+                  <a:alpha val="100000"/>
+                </a:srgbClr>
+              </a:solidFill>
+              <a:prstDash val="solid"/>
+              <a:round/>
+            </a:ln>
+          </p:spPr>
+          <p:txBody>
+            <a:bodyPr/>
+            <a:lstStyle/>
+            <a:p/>
+          </p:txBody>
+        </p:sp>
+        <p:sp>
+          <p:nvSpPr>
+            <p:cNvPr id="58" name="pl58"/>
+            <p:cNvSpPr/>
+            <p:nvPr/>
+          </p:nvSpPr>
+          <p:spPr>
+            <a:xfrm>
+              <a:off x="1386885" y="4336484"/>
+              <a:ext cx="0" cy="1317069"/>
+            </a:xfrm>
+            <a:custGeom>
+              <a:avLst/>
+              <a:pathLst>
+                <a:path w="0" h="1317069">
+                  <a:moveTo>
+                    <a:pt x="0" y="1317069"/>
+                  </a:moveTo>
+                  <a:lnTo>
+                    <a:pt x="0" y="0"/>
+                  </a:lnTo>
+                  <a:lnTo>
+                    <a:pt x="0" y="0"/>
+                  </a:lnTo>
+                </a:path>
+              </a:pathLst>
+            </a:custGeom>
+            <a:ln w="13550" cap="flat">
+              <a:solidFill>
+                <a:srgbClr val="EBEBEB">
+                  <a:alpha val="100000"/>
+                </a:srgbClr>
+              </a:solidFill>
+              <a:prstDash val="solid"/>
+              <a:round/>
+            </a:ln>
+          </p:spPr>
+          <p:txBody>
+            <a:bodyPr/>
+            <a:lstStyle/>
+            <a:p/>
+          </p:txBody>
+        </p:sp>
+        <p:sp>
+          <p:nvSpPr>
+            <p:cNvPr id="59" name="pl59"/>
+            <p:cNvSpPr/>
+            <p:nvPr/>
+          </p:nvSpPr>
+          <p:spPr>
+            <a:xfrm>
+              <a:off x="2194051" y="4336484"/>
+              <a:ext cx="0" cy="1317069"/>
+            </a:xfrm>
+            <a:custGeom>
+              <a:avLst/>
+              <a:pathLst>
+                <a:path w="0" h="1317069">
+                  <a:moveTo>
+                    <a:pt x="0" y="1317069"/>
+                  </a:moveTo>
+                  <a:lnTo>
+                    <a:pt x="0" y="0"/>
+                  </a:lnTo>
+                  <a:lnTo>
+                    <a:pt x="0" y="0"/>
+                  </a:lnTo>
+                </a:path>
+              </a:pathLst>
+            </a:custGeom>
+            <a:ln w="13550" cap="flat">
+              <a:solidFill>
+                <a:srgbClr val="EBEBEB">
+                  <a:alpha val="100000"/>
+                </a:srgbClr>
+              </a:solidFill>
+              <a:prstDash val="solid"/>
+              <a:round/>
+            </a:ln>
+          </p:spPr>
+          <p:txBody>
+            <a:bodyPr/>
+            <a:lstStyle/>
+            <a:p/>
+          </p:txBody>
+        </p:sp>
+        <p:sp>
+          <p:nvSpPr>
+            <p:cNvPr id="60" name="pl60"/>
+            <p:cNvSpPr/>
+            <p:nvPr/>
+          </p:nvSpPr>
+          <p:spPr>
+            <a:xfrm>
+              <a:off x="3001216" y="4336484"/>
+              <a:ext cx="0" cy="1317069"/>
+            </a:xfrm>
+            <a:custGeom>
+              <a:avLst/>
+              <a:pathLst>
+                <a:path w="0" h="1317069">
+                  <a:moveTo>
+                    <a:pt x="0" y="1317069"/>
+                  </a:moveTo>
+                  <a:lnTo>
+                    <a:pt x="0" y="0"/>
+                  </a:lnTo>
+                  <a:lnTo>
+                    <a:pt x="0" y="0"/>
+                  </a:lnTo>
+                </a:path>
+              </a:pathLst>
+            </a:custGeom>
+            <a:ln w="13550" cap="flat">
+              <a:solidFill>
+                <a:srgbClr val="EBEBEB">
+                  <a:alpha val="100000"/>
+                </a:srgbClr>
+              </a:solidFill>
+              <a:prstDash val="solid"/>
+              <a:round/>
+            </a:ln>
+          </p:spPr>
+          <p:txBody>
+            <a:bodyPr/>
+            <a:lstStyle/>
+            <a:p/>
+          </p:txBody>
+        </p:sp>
+        <p:sp>
+          <p:nvSpPr>
+            <p:cNvPr id="61" name="pl61"/>
+            <p:cNvSpPr/>
+            <p:nvPr/>
+          </p:nvSpPr>
+          <p:spPr>
+            <a:xfrm>
+              <a:off x="3808382" y="4336484"/>
+              <a:ext cx="0" cy="1317069"/>
+            </a:xfrm>
+            <a:custGeom>
+              <a:avLst/>
+              <a:pathLst>
+                <a:path w="0" h="1317069">
+                  <a:moveTo>
+                    <a:pt x="0" y="1317069"/>
+                  </a:moveTo>
+                  <a:lnTo>
+                    <a:pt x="0" y="0"/>
+                  </a:lnTo>
+                  <a:lnTo>
+                    <a:pt x="0" y="0"/>
+                  </a:lnTo>
+                </a:path>
+              </a:pathLst>
+            </a:custGeom>
+            <a:ln w="13550" cap="flat">
+              <a:solidFill>
+                <a:srgbClr val="EBEBEB">
+                  <a:alpha val="100000"/>
+                </a:srgbClr>
+              </a:solidFill>
+              <a:prstDash val="solid"/>
+              <a:round/>
+            </a:ln>
+          </p:spPr>
+          <p:txBody>
+            <a:bodyPr/>
+            <a:lstStyle/>
+            <a:p/>
+          </p:txBody>
+        </p:sp>
+        <p:sp>
+          <p:nvSpPr>
+            <p:cNvPr id="62" name="pl62"/>
+            <p:cNvSpPr/>
+            <p:nvPr/>
+          </p:nvSpPr>
+          <p:spPr>
+            <a:xfrm>
+              <a:off x="4615547" y="4336484"/>
+              <a:ext cx="0" cy="1317069"/>
+            </a:xfrm>
+            <a:custGeom>
+              <a:avLst/>
+              <a:pathLst>
+                <a:path w="0" h="1317069">
+                  <a:moveTo>
+                    <a:pt x="0" y="1317069"/>
+                  </a:moveTo>
+                  <a:lnTo>
+                    <a:pt x="0" y="0"/>
+                  </a:lnTo>
+                  <a:lnTo>
+                    <a:pt x="0" y="0"/>
+                  </a:lnTo>
+                </a:path>
+              </a:pathLst>
+            </a:custGeom>
+            <a:ln w="13550" cap="flat">
+              <a:solidFill>
+                <a:srgbClr val="EBEBEB">
+                  <a:alpha val="100000"/>
+                </a:srgbClr>
+              </a:solidFill>
+              <a:prstDash val="solid"/>
+              <a:round/>
+            </a:ln>
+          </p:spPr>
+          <p:txBody>
+            <a:bodyPr/>
+            <a:lstStyle/>
+            <a:p/>
+          </p:txBody>
+        </p:sp>
+        <p:sp>
+          <p:nvSpPr>
+            <p:cNvPr id="63" name="pl63"/>
+            <p:cNvSpPr/>
+            <p:nvPr/>
+          </p:nvSpPr>
+          <p:spPr>
+            <a:xfrm>
+              <a:off x="5422713" y="4336484"/>
+              <a:ext cx="0" cy="1317069"/>
+            </a:xfrm>
+            <a:custGeom>
+              <a:avLst/>
+              <a:pathLst>
+                <a:path w="0" h="1317069">
+                  <a:moveTo>
+                    <a:pt x="0" y="1317069"/>
+                  </a:moveTo>
+                  <a:lnTo>
+                    <a:pt x="0" y="0"/>
+                  </a:lnTo>
+                  <a:lnTo>
+                    <a:pt x="0" y="0"/>
+                  </a:lnTo>
+                </a:path>
+              </a:pathLst>
+            </a:custGeom>
+            <a:ln w="13550" cap="flat">
+              <a:solidFill>
+                <a:srgbClr val="EBEBEB">
+                  <a:alpha val="100000"/>
+                </a:srgbClr>
+              </a:solidFill>
+              <a:prstDash val="solid"/>
+              <a:round/>
+            </a:ln>
+          </p:spPr>
+          <p:txBody>
+            <a:bodyPr/>
+            <a:lstStyle/>
+            <a:p/>
+          </p:txBody>
+        </p:sp>
+        <p:sp>
+          <p:nvSpPr>
+            <p:cNvPr id="64" name="pl64"/>
+            <p:cNvSpPr/>
+            <p:nvPr/>
+          </p:nvSpPr>
+          <p:spPr>
+            <a:xfrm>
+              <a:off x="6229878" y="4336484"/>
+              <a:ext cx="0" cy="1317069"/>
+            </a:xfrm>
+            <a:custGeom>
+              <a:avLst/>
+              <a:pathLst>
+                <a:path w="0" h="1317069">
+                  <a:moveTo>
+                    <a:pt x="0" y="1317069"/>
+                  </a:moveTo>
+                  <a:lnTo>
+                    <a:pt x="0" y="0"/>
+                  </a:lnTo>
+                  <a:lnTo>
+                    <a:pt x="0" y="0"/>
+                  </a:lnTo>
+                </a:path>
+              </a:pathLst>
+            </a:custGeom>
+            <a:ln w="13550" cap="flat">
+              <a:solidFill>
+                <a:srgbClr val="EBEBEB">
+                  <a:alpha val="100000"/>
+                </a:srgbClr>
+              </a:solidFill>
+              <a:prstDash val="solid"/>
+              <a:round/>
+            </a:ln>
+          </p:spPr>
+          <p:txBody>
+            <a:bodyPr/>
+            <a:lstStyle/>
+            <a:p/>
+          </p:txBody>
+        </p:sp>
+        <p:sp>
+          <p:nvSpPr>
+            <p:cNvPr id="65" name="pl65"/>
+            <p:cNvSpPr/>
+            <p:nvPr/>
+          </p:nvSpPr>
+          <p:spPr>
+            <a:xfrm>
+              <a:off x="7037044" y="4336484"/>
+              <a:ext cx="0" cy="1317069"/>
+            </a:xfrm>
+            <a:custGeom>
+              <a:avLst/>
+              <a:pathLst>
+                <a:path w="0" h="1317069">
+                  <a:moveTo>
+                    <a:pt x="0" y="1317069"/>
+                  </a:moveTo>
+                  <a:lnTo>
+                    <a:pt x="0" y="0"/>
+                  </a:lnTo>
+                  <a:lnTo>
+                    <a:pt x="0" y="0"/>
+                  </a:lnTo>
+                </a:path>
+              </a:pathLst>
+            </a:custGeom>
+            <a:ln w="13550" cap="flat">
+              <a:solidFill>
+                <a:srgbClr val="EBEBEB">
+                  <a:alpha val="100000"/>
+                </a:srgbClr>
+              </a:solidFill>
+              <a:prstDash val="solid"/>
+              <a:round/>
+            </a:ln>
+          </p:spPr>
+          <p:txBody>
+            <a:bodyPr/>
+            <a:lstStyle/>
+            <a:p/>
+          </p:txBody>
+        </p:sp>
+        <p:sp>
+          <p:nvSpPr>
+            <p:cNvPr id="66" name="pl66"/>
+            <p:cNvSpPr/>
+            <p:nvPr/>
+          </p:nvSpPr>
+          <p:spPr>
+            <a:xfrm>
+              <a:off x="7844209" y="4336484"/>
+              <a:ext cx="0" cy="1317069"/>
+            </a:xfrm>
+            <a:custGeom>
+              <a:avLst/>
+              <a:pathLst>
+                <a:path w="0" h="1317069">
+                  <a:moveTo>
+                    <a:pt x="0" y="1317069"/>
+                  </a:moveTo>
+                  <a:lnTo>
+                    <a:pt x="0" y="0"/>
+                  </a:lnTo>
+                  <a:lnTo>
+                    <a:pt x="0" y="0"/>
+                  </a:lnTo>
+                </a:path>
+              </a:pathLst>
+            </a:custGeom>
+            <a:ln w="13550" cap="flat">
+              <a:solidFill>
+                <a:srgbClr val="EBEBEB">
+                  <a:alpha val="100000"/>
+                </a:srgbClr>
+              </a:solidFill>
+              <a:prstDash val="solid"/>
+              <a:round/>
+            </a:ln>
+          </p:spPr>
+          <p:txBody>
+            <a:bodyPr/>
+            <a:lstStyle/>
+            <a:p/>
+          </p:txBody>
+        </p:sp>
+        <p:sp>
+          <p:nvSpPr>
+            <p:cNvPr id="67" name="pg67"/>
+            <p:cNvSpPr/>
+            <p:nvPr/>
+          </p:nvSpPr>
+          <p:spPr>
+            <a:xfrm>
+              <a:off x="1235312" y="4336484"/>
+              <a:ext cx="6964104" cy="1211072"/>
+            </a:xfrm>
+            <a:custGeom>
+              <a:avLst/>
+              <a:pathLst>
+                <a:path w="6964104" h="1211072">
+                  <a:moveTo>
+                    <a:pt x="378091" y="0"/>
+                  </a:moveTo>
+                  <a:lnTo>
+                    <a:pt x="422066" y="27619"/>
+                  </a:lnTo>
+                  <a:lnTo>
+                    <a:pt x="492411" y="70267"/>
+                  </a:lnTo>
+                  <a:lnTo>
+                    <a:pt x="562755" y="111436"/>
+                  </a:lnTo>
+                  <a:lnTo>
+                    <a:pt x="633100" y="151177"/>
+                  </a:lnTo>
+                  <a:lnTo>
+                    <a:pt x="703444" y="189539"/>
+                  </a:lnTo>
+                  <a:lnTo>
+                    <a:pt x="773789" y="226571"/>
+                  </a:lnTo>
+                  <a:lnTo>
+                    <a:pt x="844133" y="262318"/>
+                  </a:lnTo>
+                  <a:lnTo>
+                    <a:pt x="914478" y="296826"/>
+                  </a:lnTo>
+                  <a:lnTo>
+                    <a:pt x="984822" y="330137"/>
+                  </a:lnTo>
+                  <a:lnTo>
+                    <a:pt x="1055167" y="362292"/>
+                  </a:lnTo>
+                  <a:lnTo>
+                    <a:pt x="1125511" y="393332"/>
+                  </a:lnTo>
+                  <a:lnTo>
+                    <a:pt x="1195856" y="423295"/>
+                  </a:lnTo>
+                  <a:lnTo>
+                    <a:pt x="1266200" y="452219"/>
+                  </a:lnTo>
+                  <a:lnTo>
+                    <a:pt x="1336545" y="480140"/>
+                  </a:lnTo>
+                  <a:lnTo>
+                    <a:pt x="1406889" y="507092"/>
+                  </a:lnTo>
+                  <a:lnTo>
+                    <a:pt x="1477234" y="533110"/>
+                  </a:lnTo>
+                  <a:lnTo>
+                    <a:pt x="1547578" y="558225"/>
+                  </a:lnTo>
+                  <a:lnTo>
+                    <a:pt x="1617923" y="582469"/>
+                  </a:lnTo>
+                  <a:lnTo>
+                    <a:pt x="1688267" y="605872"/>
+                  </a:lnTo>
+                  <a:lnTo>
+                    <a:pt x="1758612" y="628464"/>
+                  </a:lnTo>
+                  <a:lnTo>
+                    <a:pt x="1828956" y="650271"/>
+                  </a:lnTo>
+                  <a:lnTo>
+                    <a:pt x="1899301" y="671323"/>
+                  </a:lnTo>
+                  <a:lnTo>
+                    <a:pt x="1969645" y="691644"/>
+                  </a:lnTo>
+                  <a:lnTo>
+                    <a:pt x="2039990" y="711260"/>
+                  </a:lnTo>
+                  <a:lnTo>
+                    <a:pt x="2110334" y="730196"/>
+                  </a:lnTo>
+                  <a:lnTo>
+                    <a:pt x="2180679" y="748475"/>
+                  </a:lnTo>
+                  <a:lnTo>
+                    <a:pt x="2251023" y="766121"/>
+                  </a:lnTo>
+                  <a:lnTo>
+                    <a:pt x="2321368" y="783154"/>
+                  </a:lnTo>
+                  <a:lnTo>
+                    <a:pt x="2391712" y="799596"/>
+                  </a:lnTo>
+                  <a:lnTo>
+                    <a:pt x="2462057" y="815468"/>
+                  </a:lnTo>
+                  <a:lnTo>
+                    <a:pt x="2532401" y="830790"/>
+                  </a:lnTo>
+                  <a:lnTo>
+                    <a:pt x="2602746" y="845580"/>
+                  </a:lnTo>
+                  <a:lnTo>
+                    <a:pt x="2673090" y="859857"/>
+                  </a:lnTo>
+                  <a:lnTo>
+                    <a:pt x="2743435" y="873639"/>
+                  </a:lnTo>
+                  <a:lnTo>
+                    <a:pt x="2813779" y="886943"/>
+                  </a:lnTo>
+                  <a:lnTo>
+                    <a:pt x="2884124" y="899785"/>
+                  </a:lnTo>
+                  <a:lnTo>
+                    <a:pt x="2954468" y="912182"/>
+                  </a:lnTo>
+                  <a:lnTo>
+                    <a:pt x="3024813" y="924149"/>
+                  </a:lnTo>
+                  <a:lnTo>
+                    <a:pt x="3095157" y="935701"/>
+                  </a:lnTo>
+                  <a:lnTo>
+                    <a:pt x="3165502" y="946852"/>
+                  </a:lnTo>
+                  <a:lnTo>
+                    <a:pt x="3235846" y="957617"/>
+                  </a:lnTo>
+                  <a:lnTo>
+                    <a:pt x="3306191" y="955940"/>
+                  </a:lnTo>
+                  <a:lnTo>
+                    <a:pt x="3376535" y="953953"/>
+                  </a:lnTo>
+                  <a:lnTo>
+                    <a:pt x="3446880" y="951952"/>
+                  </a:lnTo>
+                  <a:lnTo>
+                    <a:pt x="3517224" y="949938"/>
+                  </a:lnTo>
+                  <a:lnTo>
+                    <a:pt x="3587569" y="947911"/>
+                  </a:lnTo>
+                  <a:lnTo>
+                    <a:pt x="3657913" y="945871"/>
+                  </a:lnTo>
+                  <a:lnTo>
+                    <a:pt x="3728257" y="943817"/>
+                  </a:lnTo>
+                  <a:lnTo>
+                    <a:pt x="3798602" y="941750"/>
+                  </a:lnTo>
+                  <a:lnTo>
+                    <a:pt x="3868946" y="939669"/>
+                  </a:lnTo>
+                  <a:lnTo>
+                    <a:pt x="3939291" y="937574"/>
+                  </a:lnTo>
+                  <a:lnTo>
+                    <a:pt x="4009635" y="935465"/>
+                  </a:lnTo>
+                  <a:lnTo>
+                    <a:pt x="4079980" y="933343"/>
+                  </a:lnTo>
+                  <a:lnTo>
+                    <a:pt x="4150324" y="931206"/>
+                  </a:lnTo>
+                  <a:lnTo>
+                    <a:pt x="4220669" y="929056"/>
+                  </a:lnTo>
+                  <a:lnTo>
+                    <a:pt x="4291013" y="926891"/>
+                  </a:lnTo>
+                  <a:lnTo>
+                    <a:pt x="4361358" y="924712"/>
+                  </a:lnTo>
+                  <a:lnTo>
+                    <a:pt x="4431702" y="922518"/>
+                  </a:lnTo>
+                  <a:lnTo>
+                    <a:pt x="4502047" y="920310"/>
+                  </a:lnTo>
+                  <a:lnTo>
+                    <a:pt x="4572391" y="918088"/>
+                  </a:lnTo>
+                  <a:lnTo>
+                    <a:pt x="4642736" y="915851"/>
+                  </a:lnTo>
+                  <a:lnTo>
+                    <a:pt x="4713080" y="913599"/>
+                  </a:lnTo>
+                  <a:lnTo>
+                    <a:pt x="4783425" y="911332"/>
+                  </a:lnTo>
+                  <a:lnTo>
+                    <a:pt x="4853769" y="909050"/>
+                  </a:lnTo>
+                  <a:lnTo>
+                    <a:pt x="4924114" y="906753"/>
+                  </a:lnTo>
+                  <a:lnTo>
+                    <a:pt x="4994458" y="904442"/>
+                  </a:lnTo>
+                  <a:lnTo>
+                    <a:pt x="5064803" y="902114"/>
+                  </a:lnTo>
+                  <a:lnTo>
+                    <a:pt x="5135147" y="899772"/>
+                  </a:lnTo>
+                  <a:lnTo>
+                    <a:pt x="5205492" y="897414"/>
+                  </a:lnTo>
+                  <a:lnTo>
+                    <a:pt x="5275836" y="895040"/>
+                  </a:lnTo>
+                  <a:lnTo>
+                    <a:pt x="5346181" y="892651"/>
+                  </a:lnTo>
+                  <a:lnTo>
+                    <a:pt x="5416525" y="890246"/>
+                  </a:lnTo>
+                  <a:lnTo>
+                    <a:pt x="5486870" y="887825"/>
+                  </a:lnTo>
+                  <a:lnTo>
+                    <a:pt x="5557214" y="885388"/>
+                  </a:lnTo>
+                  <a:lnTo>
+                    <a:pt x="5627559" y="882936"/>
+                  </a:lnTo>
+                  <a:lnTo>
+                    <a:pt x="5697903" y="880466"/>
+                  </a:lnTo>
+                  <a:lnTo>
+                    <a:pt x="5768248" y="877981"/>
+                  </a:lnTo>
+                  <a:lnTo>
+                    <a:pt x="5838592" y="875479"/>
+                  </a:lnTo>
+                  <a:lnTo>
+                    <a:pt x="5908937" y="872961"/>
+                  </a:lnTo>
+                  <a:lnTo>
+                    <a:pt x="5979281" y="870426"/>
+                  </a:lnTo>
+                  <a:lnTo>
+                    <a:pt x="6049626" y="867875"/>
+                  </a:lnTo>
+                  <a:lnTo>
+                    <a:pt x="6119970" y="865306"/>
+                  </a:lnTo>
+                  <a:lnTo>
+                    <a:pt x="6190315" y="862721"/>
+                  </a:lnTo>
+                  <a:lnTo>
+                    <a:pt x="6260659" y="860118"/>
+                  </a:lnTo>
+                  <a:lnTo>
+                    <a:pt x="6331004" y="857499"/>
+                  </a:lnTo>
+                  <a:lnTo>
+                    <a:pt x="6401348" y="854862"/>
+                  </a:lnTo>
+                  <a:lnTo>
+                    <a:pt x="6471693" y="852208"/>
+                  </a:lnTo>
+                  <a:lnTo>
+                    <a:pt x="6542037" y="849536"/>
+                  </a:lnTo>
+                  <a:lnTo>
+                    <a:pt x="6612382" y="846847"/>
+                  </a:lnTo>
+                  <a:lnTo>
+                    <a:pt x="6682726" y="844139"/>
+                  </a:lnTo>
+                  <a:lnTo>
+                    <a:pt x="6753071" y="841414"/>
+                  </a:lnTo>
+                  <a:lnTo>
+                    <a:pt x="6823415" y="838671"/>
+                  </a:lnTo>
+                  <a:lnTo>
+                    <a:pt x="6893760" y="835910"/>
+                  </a:lnTo>
+                  <a:lnTo>
+                    <a:pt x="6964104" y="833131"/>
+                  </a:lnTo>
+                  <a:lnTo>
+                    <a:pt x="6964104" y="1211072"/>
+                  </a:lnTo>
+                  <a:lnTo>
+                    <a:pt x="6893760" y="1209415"/>
+                  </a:lnTo>
+                  <a:lnTo>
+                    <a:pt x="6823415" y="1207698"/>
+                  </a:lnTo>
+                  <a:lnTo>
+                    <a:pt x="6753071" y="1205919"/>
+                  </a:lnTo>
+                  <a:lnTo>
+                    <a:pt x="6682726" y="1204076"/>
+                  </a:lnTo>
+                  <a:lnTo>
+                    <a:pt x="6612382" y="1202167"/>
+                  </a:lnTo>
+                  <a:lnTo>
+                    <a:pt x="6542037" y="1200190"/>
+                  </a:lnTo>
+                  <a:lnTo>
+                    <a:pt x="6471693" y="1198141"/>
+                  </a:lnTo>
+                  <a:lnTo>
+                    <a:pt x="6401348" y="1196019"/>
+                  </a:lnTo>
+                  <a:lnTo>
+                    <a:pt x="6331004" y="1193821"/>
+                  </a:lnTo>
+                  <a:lnTo>
+                    <a:pt x="6260659" y="1191544"/>
+                  </a:lnTo>
+                  <a:lnTo>
+                    <a:pt x="6190315" y="1189184"/>
+                  </a:lnTo>
+                  <a:lnTo>
+                    <a:pt x="6119970" y="1186740"/>
+                  </a:lnTo>
+                  <a:lnTo>
+                    <a:pt x="6049626" y="1184209"/>
+                  </a:lnTo>
+                  <a:lnTo>
+                    <a:pt x="5979281" y="1181586"/>
+                  </a:lnTo>
+                  <a:lnTo>
+                    <a:pt x="5908937" y="1178869"/>
+                  </a:lnTo>
+                  <a:lnTo>
+                    <a:pt x="5838592" y="1176054"/>
+                  </a:lnTo>
+                  <a:lnTo>
+                    <a:pt x="5768248" y="1173139"/>
+                  </a:lnTo>
+                  <a:lnTo>
+                    <a:pt x="5697903" y="1170118"/>
+                  </a:lnTo>
+                  <a:lnTo>
+                    <a:pt x="5627559" y="1166989"/>
+                  </a:lnTo>
+                  <a:lnTo>
+                    <a:pt x="5557214" y="1163748"/>
+                  </a:lnTo>
+                  <a:lnTo>
+                    <a:pt x="5486870" y="1160390"/>
+                  </a:lnTo>
+                  <a:lnTo>
+                    <a:pt x="5416525" y="1156911"/>
+                  </a:lnTo>
+                  <a:lnTo>
+                    <a:pt x="5346181" y="1153308"/>
+                  </a:lnTo>
+                  <a:lnTo>
+                    <a:pt x="5275836" y="1149574"/>
+                  </a:lnTo>
+                  <a:lnTo>
+                    <a:pt x="5205492" y="1145707"/>
+                  </a:lnTo>
+                  <a:lnTo>
+                    <a:pt x="5135147" y="1141701"/>
+                  </a:lnTo>
+                  <a:lnTo>
+                    <a:pt x="5064803" y="1137551"/>
+                  </a:lnTo>
+                  <a:lnTo>
+                    <a:pt x="4994458" y="1133252"/>
+                  </a:lnTo>
+                  <a:lnTo>
+                    <a:pt x="4924114" y="1128798"/>
+                  </a:lnTo>
+                  <a:lnTo>
+                    <a:pt x="4853769" y="1124184"/>
+                  </a:lnTo>
+                  <a:lnTo>
+                    <a:pt x="4783425" y="1119405"/>
+                  </a:lnTo>
+                  <a:lnTo>
+                    <a:pt x="4713080" y="1114454"/>
+                  </a:lnTo>
+                  <a:lnTo>
+                    <a:pt x="4642736" y="1109325"/>
+                  </a:lnTo>
+                  <a:lnTo>
+                    <a:pt x="4572391" y="1104011"/>
+                  </a:lnTo>
+                  <a:lnTo>
+                    <a:pt x="4502047" y="1098507"/>
+                  </a:lnTo>
+                  <a:lnTo>
+                    <a:pt x="4431702" y="1092805"/>
+                  </a:lnTo>
+                  <a:lnTo>
+                    <a:pt x="4361358" y="1086898"/>
+                  </a:lnTo>
+                  <a:lnTo>
+                    <a:pt x="4291013" y="1080779"/>
+                  </a:lnTo>
+                  <a:lnTo>
+                    <a:pt x="4220669" y="1074439"/>
+                  </a:lnTo>
+                  <a:lnTo>
+                    <a:pt x="4150324" y="1067873"/>
+                  </a:lnTo>
+                  <a:lnTo>
+                    <a:pt x="4079980" y="1061070"/>
+                  </a:lnTo>
+                  <a:lnTo>
+                    <a:pt x="4009635" y="1054022"/>
+                  </a:lnTo>
+                  <a:lnTo>
+                    <a:pt x="3939291" y="1046722"/>
+                  </a:lnTo>
+                  <a:lnTo>
+                    <a:pt x="3868946" y="1039159"/>
+                  </a:lnTo>
+                  <a:lnTo>
+                    <a:pt x="3798602" y="1031325"/>
+                  </a:lnTo>
+                  <a:lnTo>
+                    <a:pt x="3728257" y="1023209"/>
+                  </a:lnTo>
+                  <a:lnTo>
+                    <a:pt x="3657913" y="1014801"/>
+                  </a:lnTo>
+                  <a:lnTo>
+                    <a:pt x="3587569" y="1006091"/>
+                  </a:lnTo>
+                  <a:lnTo>
+                    <a:pt x="3517224" y="997068"/>
+                  </a:lnTo>
+                  <a:lnTo>
+                    <a:pt x="3446880" y="987721"/>
+                  </a:lnTo>
+                  <a:lnTo>
+                    <a:pt x="3376535" y="978039"/>
+                  </a:lnTo>
+                  <a:lnTo>
+                    <a:pt x="3306191" y="968008"/>
+                  </a:lnTo>
+                  <a:lnTo>
+                    <a:pt x="3235846" y="957915"/>
+                  </a:lnTo>
+                  <a:lnTo>
+                    <a:pt x="3165502" y="959876"/>
+                  </a:lnTo>
+                  <a:lnTo>
+                    <a:pt x="3095157" y="961825"/>
+                  </a:lnTo>
+                  <a:lnTo>
+                    <a:pt x="3024813" y="963761"/>
+                  </a:lnTo>
+                  <a:lnTo>
+                    <a:pt x="2954468" y="965684"/>
+                  </a:lnTo>
+                  <a:lnTo>
+                    <a:pt x="2884124" y="967594"/>
+                  </a:lnTo>
+                  <a:lnTo>
+                    <a:pt x="2813779" y="969492"/>
+                  </a:lnTo>
+                  <a:lnTo>
+                    <a:pt x="2743435" y="971378"/>
+                  </a:lnTo>
+                  <a:lnTo>
+                    <a:pt x="2673090" y="973251"/>
+                  </a:lnTo>
+                  <a:lnTo>
+                    <a:pt x="2602746" y="975112"/>
+                  </a:lnTo>
+                  <a:lnTo>
+                    <a:pt x="2532401" y="976961"/>
+                  </a:lnTo>
+                  <a:lnTo>
+                    <a:pt x="2462057" y="978798"/>
+                  </a:lnTo>
+                  <a:lnTo>
+                    <a:pt x="2391712" y="980622"/>
+                  </a:lnTo>
+                  <a:lnTo>
+                    <a:pt x="2321368" y="982435"/>
+                  </a:lnTo>
+                  <a:lnTo>
+                    <a:pt x="2251023" y="984236"/>
+                  </a:lnTo>
+                  <a:lnTo>
+                    <a:pt x="2180679" y="986025"/>
+                  </a:lnTo>
+                  <a:lnTo>
+                    <a:pt x="2110334" y="987802"/>
+                  </a:lnTo>
+                  <a:lnTo>
+                    <a:pt x="2039990" y="989568"/>
+                  </a:lnTo>
+                  <a:lnTo>
+                    <a:pt x="1969645" y="991322"/>
+                  </a:lnTo>
+                  <a:lnTo>
+                    <a:pt x="1899301" y="993064"/>
+                  </a:lnTo>
+                  <a:lnTo>
+                    <a:pt x="1828956" y="994795"/>
+                  </a:lnTo>
+                  <a:lnTo>
+                    <a:pt x="1758612" y="996515"/>
+                  </a:lnTo>
+                  <a:lnTo>
+                    <a:pt x="1688267" y="998223"/>
+                  </a:lnTo>
+                  <a:lnTo>
+                    <a:pt x="1617923" y="999921"/>
+                  </a:lnTo>
+                  <a:lnTo>
+                    <a:pt x="1547578" y="1001607"/>
+                  </a:lnTo>
+                  <a:lnTo>
+                    <a:pt x="1477234" y="1003282"/>
+                  </a:lnTo>
+                  <a:lnTo>
+                    <a:pt x="1406889" y="1004946"/>
+                  </a:lnTo>
+                  <a:lnTo>
+                    <a:pt x="1336545" y="1006599"/>
+                  </a:lnTo>
+                  <a:lnTo>
+                    <a:pt x="1266200" y="1008242"/>
+                  </a:lnTo>
+                  <a:lnTo>
+                    <a:pt x="1195856" y="1009874"/>
+                  </a:lnTo>
+                  <a:lnTo>
+                    <a:pt x="1125511" y="1011494"/>
+                  </a:lnTo>
+                  <a:lnTo>
+                    <a:pt x="1055167" y="1013105"/>
+                  </a:lnTo>
+                  <a:lnTo>
+                    <a:pt x="984822" y="1014705"/>
+                  </a:lnTo>
+                  <a:lnTo>
+                    <a:pt x="914478" y="1016294"/>
+                  </a:lnTo>
+                  <a:lnTo>
+                    <a:pt x="844133" y="1017873"/>
+                  </a:lnTo>
+                  <a:lnTo>
+                    <a:pt x="773789" y="1019441"/>
+                  </a:lnTo>
+                  <a:lnTo>
+                    <a:pt x="703444" y="1021000"/>
+                  </a:lnTo>
+                  <a:lnTo>
+                    <a:pt x="633100" y="1022548"/>
+                  </a:lnTo>
+                  <a:lnTo>
+                    <a:pt x="562755" y="1024085"/>
+                  </a:lnTo>
+                  <a:lnTo>
+                    <a:pt x="492411" y="1025613"/>
+                  </a:lnTo>
+                  <a:lnTo>
+                    <a:pt x="422066" y="1027131"/>
+                  </a:lnTo>
+                  <a:lnTo>
+                    <a:pt x="351722" y="1028639"/>
+                  </a:lnTo>
+                  <a:lnTo>
+                    <a:pt x="281377" y="1030137"/>
+                  </a:lnTo>
+                  <a:lnTo>
+                    <a:pt x="211033" y="1031625"/>
+                  </a:lnTo>
+                  <a:lnTo>
+                    <a:pt x="140688" y="1033103"/>
+                  </a:lnTo>
+                  <a:lnTo>
+                    <a:pt x="70344" y="1034572"/>
+                  </a:lnTo>
+                  <a:lnTo>
+                    <a:pt x="0" y="1036031"/>
+                  </a:lnTo>
+                  <a:close/>
+                </a:path>
+              </a:pathLst>
+            </a:custGeom>
+            <a:solidFill>
+              <a:srgbClr val="FF8C00">
+                <a:alpha val="20000"/>
+              </a:srgbClr>
+            </a:solidFill>
+          </p:spPr>
+          <p:txBody>
+            <a:bodyPr/>
+            <a:lstStyle/>
+            <a:p/>
+          </p:txBody>
+        </p:sp>
+        <p:sp>
+          <p:nvSpPr>
+            <p:cNvPr id="68" name="pl68"/>
+            <p:cNvSpPr/>
+            <p:nvPr/>
+          </p:nvSpPr>
+          <p:spPr>
+            <a:xfrm>
+              <a:off x="1613403" y="4336484"/>
+              <a:ext cx="6586013" cy="957617"/>
+            </a:xfrm>
+            <a:custGeom>
+              <a:avLst/>
+              <a:pathLst>
+                <a:path w="6586013" h="957617">
+                  <a:moveTo>
+                    <a:pt x="0" y="0"/>
+                  </a:moveTo>
+                  <a:lnTo>
+                    <a:pt x="43975" y="27619"/>
+                  </a:lnTo>
+                  <a:lnTo>
+                    <a:pt x="114320" y="70267"/>
+                  </a:lnTo>
+                  <a:lnTo>
+                    <a:pt x="184664" y="111436"/>
+                  </a:lnTo>
+                  <a:lnTo>
+                    <a:pt x="255009" y="151177"/>
+                  </a:lnTo>
+                  <a:lnTo>
+                    <a:pt x="325353" y="189539"/>
+                  </a:lnTo>
+                  <a:lnTo>
+                    <a:pt x="395698" y="226571"/>
+                  </a:lnTo>
+                  <a:lnTo>
+                    <a:pt x="466042" y="262318"/>
+                  </a:lnTo>
+                  <a:lnTo>
+                    <a:pt x="536387" y="296826"/>
+                  </a:lnTo>
+                  <a:lnTo>
+                    <a:pt x="606731" y="330137"/>
+                  </a:lnTo>
+                  <a:lnTo>
+                    <a:pt x="677076" y="362292"/>
+                  </a:lnTo>
+                  <a:lnTo>
+                    <a:pt x="747420" y="393332"/>
+                  </a:lnTo>
+                  <a:lnTo>
+                    <a:pt x="817765" y="423295"/>
+                  </a:lnTo>
+                  <a:lnTo>
+                    <a:pt x="888109" y="452219"/>
+                  </a:lnTo>
+                  <a:lnTo>
+                    <a:pt x="958454" y="480140"/>
+                  </a:lnTo>
+                  <a:lnTo>
+                    <a:pt x="1028798" y="507092"/>
+                  </a:lnTo>
+                  <a:lnTo>
+                    <a:pt x="1099143" y="533110"/>
+                  </a:lnTo>
+                  <a:lnTo>
+                    <a:pt x="1169487" y="558225"/>
+                  </a:lnTo>
+                  <a:lnTo>
+                    <a:pt x="1239832" y="582469"/>
+                  </a:lnTo>
+                  <a:lnTo>
+                    <a:pt x="1310176" y="605872"/>
+                  </a:lnTo>
+                  <a:lnTo>
+                    <a:pt x="1380521" y="628464"/>
+                  </a:lnTo>
+                  <a:lnTo>
+                    <a:pt x="1450865" y="650271"/>
+                  </a:lnTo>
+                  <a:lnTo>
+                    <a:pt x="1521210" y="671323"/>
+                  </a:lnTo>
+                  <a:lnTo>
+                    <a:pt x="1591554" y="691644"/>
+                  </a:lnTo>
+                  <a:lnTo>
+                    <a:pt x="1661899" y="711260"/>
+                  </a:lnTo>
+                  <a:lnTo>
+                    <a:pt x="1732243" y="730196"/>
+                  </a:lnTo>
+                  <a:lnTo>
+                    <a:pt x="1802588" y="748475"/>
+                  </a:lnTo>
+                  <a:lnTo>
+                    <a:pt x="1872932" y="766121"/>
+                  </a:lnTo>
+                  <a:lnTo>
+                    <a:pt x="1943277" y="783154"/>
+                  </a:lnTo>
+                  <a:lnTo>
+                    <a:pt x="2013621" y="799596"/>
+                  </a:lnTo>
+                  <a:lnTo>
+                    <a:pt x="2083965" y="815468"/>
+                  </a:lnTo>
+                  <a:lnTo>
+                    <a:pt x="2154310" y="830790"/>
+                  </a:lnTo>
+                  <a:lnTo>
+                    <a:pt x="2224654" y="845580"/>
+                  </a:lnTo>
+                  <a:lnTo>
+                    <a:pt x="2294999" y="859857"/>
+                  </a:lnTo>
+                  <a:lnTo>
+                    <a:pt x="2365343" y="873639"/>
+                  </a:lnTo>
+                  <a:lnTo>
+                    <a:pt x="2435688" y="886943"/>
+                  </a:lnTo>
+                  <a:lnTo>
+                    <a:pt x="2506032" y="899785"/>
+                  </a:lnTo>
+                  <a:lnTo>
+                    <a:pt x="2576377" y="912182"/>
+                  </a:lnTo>
+                  <a:lnTo>
+                    <a:pt x="2646721" y="924149"/>
+                  </a:lnTo>
+                  <a:lnTo>
+                    <a:pt x="2717066" y="935701"/>
+                  </a:lnTo>
+                  <a:lnTo>
+                    <a:pt x="2787410" y="946852"/>
+                  </a:lnTo>
+                  <a:lnTo>
+                    <a:pt x="2857755" y="957617"/>
+                  </a:lnTo>
+                  <a:lnTo>
+                    <a:pt x="2928099" y="955940"/>
+                  </a:lnTo>
+                  <a:lnTo>
+                    <a:pt x="2998444" y="953953"/>
+                  </a:lnTo>
+                  <a:lnTo>
+                    <a:pt x="3068788" y="951952"/>
+                  </a:lnTo>
+                  <a:lnTo>
+                    <a:pt x="3139133" y="949938"/>
+                  </a:lnTo>
+                  <a:lnTo>
+                    <a:pt x="3209477" y="947911"/>
+                  </a:lnTo>
+                  <a:lnTo>
+                    <a:pt x="3279822" y="945871"/>
+                  </a:lnTo>
+                  <a:lnTo>
+                    <a:pt x="3350166" y="943817"/>
+                  </a:lnTo>
+                  <a:lnTo>
+                    <a:pt x="3420511" y="941750"/>
+                  </a:lnTo>
+                  <a:lnTo>
+                    <a:pt x="3490855" y="939669"/>
+                  </a:lnTo>
+                  <a:lnTo>
+                    <a:pt x="3561200" y="937574"/>
+                  </a:lnTo>
+                  <a:lnTo>
+                    <a:pt x="3631544" y="935465"/>
+                  </a:lnTo>
+                  <a:lnTo>
+                    <a:pt x="3701889" y="933343"/>
+                  </a:lnTo>
+                  <a:lnTo>
+                    <a:pt x="3772233" y="931206"/>
+                  </a:lnTo>
+                  <a:lnTo>
+                    <a:pt x="3842578" y="929056"/>
+                  </a:lnTo>
+                  <a:lnTo>
+                    <a:pt x="3912922" y="926891"/>
+                  </a:lnTo>
+                  <a:lnTo>
+                    <a:pt x="3983267" y="924712"/>
+                  </a:lnTo>
+                  <a:lnTo>
+                    <a:pt x="4053611" y="922518"/>
+                  </a:lnTo>
+                  <a:lnTo>
+                    <a:pt x="4123956" y="920310"/>
+                  </a:lnTo>
+                  <a:lnTo>
+                    <a:pt x="4194300" y="918088"/>
+                  </a:lnTo>
+                  <a:lnTo>
+                    <a:pt x="4264645" y="915851"/>
+                  </a:lnTo>
+                  <a:lnTo>
+                    <a:pt x="4334989" y="913599"/>
+                  </a:lnTo>
+                  <a:lnTo>
+                    <a:pt x="4405334" y="911332"/>
+                  </a:lnTo>
+                  <a:lnTo>
+                    <a:pt x="4475678" y="909050"/>
+                  </a:lnTo>
+                  <a:lnTo>
+                    <a:pt x="4546023" y="906753"/>
+                  </a:lnTo>
+                  <a:lnTo>
+                    <a:pt x="4616367" y="904442"/>
+                  </a:lnTo>
+                  <a:lnTo>
+                    <a:pt x="4686712" y="902114"/>
+                  </a:lnTo>
+                  <a:lnTo>
+                    <a:pt x="4757056" y="899772"/>
+                  </a:lnTo>
+                  <a:lnTo>
+                    <a:pt x="4827401" y="897414"/>
+                  </a:lnTo>
+                  <a:lnTo>
+                    <a:pt x="4897745" y="895040"/>
+                  </a:lnTo>
+                  <a:lnTo>
+                    <a:pt x="4968090" y="892651"/>
+                  </a:lnTo>
+                  <a:lnTo>
+                    <a:pt x="5038434" y="890246"/>
+                  </a:lnTo>
+                  <a:lnTo>
+                    <a:pt x="5108779" y="887825"/>
+                  </a:lnTo>
+                  <a:lnTo>
+                    <a:pt x="5179123" y="885388"/>
+                  </a:lnTo>
+                  <a:lnTo>
+                    <a:pt x="5249468" y="882936"/>
+                  </a:lnTo>
+                  <a:lnTo>
+                    <a:pt x="5319812" y="880466"/>
+                  </a:lnTo>
+                  <a:lnTo>
+                    <a:pt x="5390157" y="877981"/>
+                  </a:lnTo>
+                  <a:lnTo>
+                    <a:pt x="5460501" y="875479"/>
+                  </a:lnTo>
+                  <a:lnTo>
+                    <a:pt x="5530846" y="872961"/>
+                  </a:lnTo>
+                  <a:lnTo>
+                    <a:pt x="5601190" y="870426"/>
+                  </a:lnTo>
+                  <a:lnTo>
+                    <a:pt x="5671535" y="867875"/>
+                  </a:lnTo>
+                  <a:lnTo>
+                    <a:pt x="5741879" y="865306"/>
+                  </a:lnTo>
+                  <a:lnTo>
+                    <a:pt x="5812223" y="862721"/>
+                  </a:lnTo>
+                  <a:lnTo>
+                    <a:pt x="5882568" y="860118"/>
+                  </a:lnTo>
+                  <a:lnTo>
+                    <a:pt x="5952912" y="857499"/>
+                  </a:lnTo>
+                  <a:lnTo>
+                    <a:pt x="6023257" y="854862"/>
+                  </a:lnTo>
+                  <a:lnTo>
+                    <a:pt x="6093601" y="852208"/>
+                  </a:lnTo>
+                  <a:lnTo>
+                    <a:pt x="6163946" y="849536"/>
+                  </a:lnTo>
+                  <a:lnTo>
+                    <a:pt x="6234290" y="846847"/>
+                  </a:lnTo>
+                  <a:lnTo>
+                    <a:pt x="6304635" y="844139"/>
+                  </a:lnTo>
+                  <a:lnTo>
+                    <a:pt x="6374979" y="841414"/>
+                  </a:lnTo>
+                  <a:lnTo>
+                    <a:pt x="6445324" y="838671"/>
+                  </a:lnTo>
+                  <a:lnTo>
+                    <a:pt x="6515668" y="835910"/>
+                  </a:lnTo>
+                  <a:lnTo>
+                    <a:pt x="6586013" y="833131"/>
+                  </a:lnTo>
+                </a:path>
+              </a:pathLst>
+            </a:custGeom>
+          </p:spPr>
+          <p:txBody>
+            <a:bodyPr/>
+            <a:lstStyle/>
+            <a:p/>
+          </p:txBody>
+        </p:sp>
+        <p:sp>
+          <p:nvSpPr>
+            <p:cNvPr id="69" name="pl69"/>
+            <p:cNvSpPr/>
+            <p:nvPr/>
+          </p:nvSpPr>
+          <p:spPr>
+            <a:xfrm>
+              <a:off x="1235312" y="5294399"/>
+              <a:ext cx="6964104" cy="253157"/>
+            </a:xfrm>
+            <a:custGeom>
+              <a:avLst/>
+              <a:pathLst>
+                <a:path w="6964104" h="253157">
+                  <a:moveTo>
+                    <a:pt x="6964104" y="253157"/>
+                  </a:moveTo>
+                  <a:lnTo>
+                    <a:pt x="6893760" y="251500"/>
+                  </a:lnTo>
+                  <a:lnTo>
+                    <a:pt x="6823415" y="249782"/>
+                  </a:lnTo>
+                  <a:lnTo>
+                    <a:pt x="6753071" y="248004"/>
+                  </a:lnTo>
+                  <a:lnTo>
+                    <a:pt x="6682726" y="246161"/>
+                  </a:lnTo>
+                  <a:lnTo>
+                    <a:pt x="6612382" y="244252"/>
+                  </a:lnTo>
+                  <a:lnTo>
+                    <a:pt x="6542037" y="242275"/>
+                  </a:lnTo>
+                  <a:lnTo>
+                    <a:pt x="6471693" y="240226"/>
+                  </a:lnTo>
+                  <a:lnTo>
+                    <a:pt x="6401348" y="238104"/>
+                  </a:lnTo>
+                  <a:lnTo>
+                    <a:pt x="6331004" y="235906"/>
+                  </a:lnTo>
+                  <a:lnTo>
+                    <a:pt x="6260659" y="233628"/>
+                  </a:lnTo>
+                  <a:lnTo>
+                    <a:pt x="6190315" y="231269"/>
+                  </a:lnTo>
+                  <a:lnTo>
+                    <a:pt x="6119970" y="228825"/>
+                  </a:lnTo>
+                  <a:lnTo>
+                    <a:pt x="6049626" y="226293"/>
+                  </a:lnTo>
+                  <a:lnTo>
+                    <a:pt x="5979281" y="223671"/>
+                  </a:lnTo>
+                  <a:lnTo>
+                    <a:pt x="5908937" y="220954"/>
+                  </a:lnTo>
+                  <a:lnTo>
+                    <a:pt x="5838592" y="218139"/>
+                  </a:lnTo>
+                  <a:lnTo>
+                    <a:pt x="5768248" y="215223"/>
+                  </a:lnTo>
+                  <a:lnTo>
+                    <a:pt x="5697903" y="212203"/>
+                  </a:lnTo>
+                  <a:lnTo>
+                    <a:pt x="5627559" y="209074"/>
+                  </a:lnTo>
+                  <a:lnTo>
+                    <a:pt x="5557214" y="205832"/>
+                  </a:lnTo>
+                  <a:lnTo>
+                    <a:pt x="5486870" y="202475"/>
+                  </a:lnTo>
+                  <a:lnTo>
+                    <a:pt x="5416525" y="198996"/>
+                  </a:lnTo>
+                  <a:lnTo>
+                    <a:pt x="5346181" y="195392"/>
+                  </a:lnTo>
+                  <a:lnTo>
+                    <a:pt x="5275836" y="191659"/>
+                  </a:lnTo>
+                  <a:lnTo>
+                    <a:pt x="5205492" y="187792"/>
+                  </a:lnTo>
+                  <a:lnTo>
+                    <a:pt x="5135147" y="183786"/>
+                  </a:lnTo>
+                  <a:lnTo>
+                    <a:pt x="5064803" y="179636"/>
+                  </a:lnTo>
+                  <a:lnTo>
+                    <a:pt x="4994458" y="175337"/>
+                  </a:lnTo>
+                  <a:lnTo>
+                    <a:pt x="4924114" y="170883"/>
+                  </a:lnTo>
+                  <a:lnTo>
+                    <a:pt x="4853769" y="166269"/>
+                  </a:lnTo>
+                  <a:lnTo>
+                    <a:pt x="4783425" y="161490"/>
+                  </a:lnTo>
+                  <a:lnTo>
+                    <a:pt x="4713080" y="156539"/>
+                  </a:lnTo>
+                  <a:lnTo>
+                    <a:pt x="4642736" y="151409"/>
+                  </a:lnTo>
+                  <a:lnTo>
+                    <a:pt x="4572391" y="146096"/>
+                  </a:lnTo>
+                  <a:lnTo>
+                    <a:pt x="4502047" y="140592"/>
+                  </a:lnTo>
+                  <a:lnTo>
+                    <a:pt x="4431702" y="134890"/>
+                  </a:lnTo>
+                  <a:lnTo>
+                    <a:pt x="4361358" y="128983"/>
+                  </a:lnTo>
+                  <a:lnTo>
+                    <a:pt x="4291013" y="122863"/>
+                  </a:lnTo>
+                  <a:lnTo>
+                    <a:pt x="4220669" y="116524"/>
+                  </a:lnTo>
+                  <a:lnTo>
+                    <a:pt x="4150324" y="109957"/>
+                  </a:lnTo>
+                  <a:lnTo>
+                    <a:pt x="4079980" y="103155"/>
+                  </a:lnTo>
+                  <a:lnTo>
+                    <a:pt x="4009635" y="96107"/>
+                  </a:lnTo>
+                  <a:lnTo>
+                    <a:pt x="3939291" y="88807"/>
+                  </a:lnTo>
+                  <a:lnTo>
+                    <a:pt x="3868946" y="81244"/>
+                  </a:lnTo>
+                  <a:lnTo>
+                    <a:pt x="3798602" y="73409"/>
+                  </a:lnTo>
+                  <a:lnTo>
+                    <a:pt x="3728257" y="65293"/>
+                  </a:lnTo>
+                  <a:lnTo>
+                    <a:pt x="3657913" y="56886"/>
+                  </a:lnTo>
+                  <a:lnTo>
+                    <a:pt x="3587569" y="48176"/>
+                  </a:lnTo>
+                  <a:lnTo>
+                    <a:pt x="3517224" y="39153"/>
+                  </a:lnTo>
+                  <a:lnTo>
+                    <a:pt x="3446880" y="29806"/>
+                  </a:lnTo>
+                  <a:lnTo>
+                    <a:pt x="3376535" y="20123"/>
+                  </a:lnTo>
+                  <a:lnTo>
+                    <a:pt x="3306191" y="10093"/>
+                  </a:lnTo>
+                  <a:lnTo>
+                    <a:pt x="3235846" y="0"/>
+                  </a:lnTo>
+                  <a:lnTo>
+                    <a:pt x="3165502" y="1961"/>
+                  </a:lnTo>
+                  <a:lnTo>
+                    <a:pt x="3095157" y="3910"/>
+                  </a:lnTo>
+                  <a:lnTo>
+                    <a:pt x="3024813" y="5845"/>
+                  </a:lnTo>
+                  <a:lnTo>
+                    <a:pt x="2954468" y="7769"/>
+                  </a:lnTo>
+                  <a:lnTo>
+                    <a:pt x="2884124" y="9679"/>
+                  </a:lnTo>
+                  <a:lnTo>
+                    <a:pt x="2813779" y="11577"/>
+                  </a:lnTo>
+                  <a:lnTo>
+                    <a:pt x="2743435" y="13463"/>
+                  </a:lnTo>
+                  <a:lnTo>
+                    <a:pt x="2673090" y="15336"/>
+                  </a:lnTo>
+                  <a:lnTo>
+                    <a:pt x="2602746" y="17197"/>
+                  </a:lnTo>
+                  <a:lnTo>
+                    <a:pt x="2532401" y="19046"/>
+                  </a:lnTo>
+                  <a:lnTo>
+                    <a:pt x="2462057" y="20882"/>
+                  </a:lnTo>
+                  <a:lnTo>
+                    <a:pt x="2391712" y="22707"/>
+                  </a:lnTo>
+                  <a:lnTo>
+                    <a:pt x="2321368" y="24520"/>
+                  </a:lnTo>
+                  <a:lnTo>
+                    <a:pt x="2251023" y="26321"/>
+                  </a:lnTo>
+                  <a:lnTo>
+                    <a:pt x="2180679" y="28110"/>
+                  </a:lnTo>
+                  <a:lnTo>
+                    <a:pt x="2110334" y="29887"/>
+                  </a:lnTo>
+                  <a:lnTo>
+                    <a:pt x="2039990" y="31652"/>
+                  </a:lnTo>
+                  <a:lnTo>
+                    <a:pt x="1969645" y="33406"/>
+                  </a:lnTo>
+                  <a:lnTo>
+                    <a:pt x="1899301" y="35149"/>
+                  </a:lnTo>
+                  <a:lnTo>
+                    <a:pt x="1828956" y="36880"/>
+                  </a:lnTo>
+                  <a:lnTo>
+                    <a:pt x="1758612" y="38600"/>
+                  </a:lnTo>
+                  <a:lnTo>
+                    <a:pt x="1688267" y="40308"/>
+                  </a:lnTo>
+                  <a:lnTo>
+                    <a:pt x="1617923" y="42006"/>
+                  </a:lnTo>
+                  <a:lnTo>
+                    <a:pt x="1547578" y="43692"/>
+                  </a:lnTo>
+                  <a:lnTo>
+                    <a:pt x="1477234" y="45367"/>
+                  </a:lnTo>
+                  <a:lnTo>
+                    <a:pt x="1406889" y="47031"/>
+                  </a:lnTo>
+                  <a:lnTo>
+                    <a:pt x="1336545" y="48684"/>
+                  </a:lnTo>
+                  <a:lnTo>
+                    <a:pt x="1266200" y="50327"/>
+                  </a:lnTo>
+                  <a:lnTo>
+                    <a:pt x="1195856" y="51958"/>
+                  </a:lnTo>
+                  <a:lnTo>
+                    <a:pt x="1125511" y="53579"/>
+                  </a:lnTo>
+                  <a:lnTo>
+                    <a:pt x="1055167" y="55190"/>
+                  </a:lnTo>
+                  <a:lnTo>
+                    <a:pt x="984822" y="56789"/>
+                  </a:lnTo>
+                  <a:lnTo>
+                    <a:pt x="914478" y="58379"/>
+                  </a:lnTo>
+                  <a:lnTo>
+                    <a:pt x="844133" y="59958"/>
+                  </a:lnTo>
+                  <a:lnTo>
+                    <a:pt x="773789" y="61526"/>
+                  </a:lnTo>
+                  <a:lnTo>
+                    <a:pt x="703444" y="63084"/>
+                  </a:lnTo>
+                  <a:lnTo>
+                    <a:pt x="633100" y="64632"/>
+                  </a:lnTo>
+                  <a:lnTo>
+                    <a:pt x="562755" y="66170"/>
+                  </a:lnTo>
+                  <a:lnTo>
+                    <a:pt x="492411" y="67698"/>
+                  </a:lnTo>
+                  <a:lnTo>
+                    <a:pt x="422066" y="69216"/>
+                  </a:lnTo>
+                  <a:lnTo>
+                    <a:pt x="351722" y="70724"/>
+                  </a:lnTo>
+                  <a:lnTo>
+                    <a:pt x="281377" y="72222"/>
+                  </a:lnTo>
+                  <a:lnTo>
+                    <a:pt x="211033" y="73710"/>
+                  </a:lnTo>
+                  <a:lnTo>
+                    <a:pt x="140688" y="75188"/>
+                  </a:lnTo>
+                  <a:lnTo>
+                    <a:pt x="70344" y="76657"/>
+                  </a:lnTo>
+                  <a:lnTo>
+                    <a:pt x="0" y="78116"/>
+                  </a:lnTo>
+                </a:path>
+              </a:pathLst>
+            </a:custGeom>
+          </p:spPr>
+          <p:txBody>
+            <a:bodyPr/>
+            <a:lstStyle/>
+            <a:p/>
+          </p:txBody>
+        </p:sp>
+        <p:sp>
+          <p:nvSpPr>
+            <p:cNvPr id="70" name="pl70"/>
+            <p:cNvSpPr/>
+            <p:nvPr/>
+          </p:nvSpPr>
+          <p:spPr>
+            <a:xfrm>
+              <a:off x="1235312" y="5013943"/>
+              <a:ext cx="6964104" cy="439877"/>
+            </a:xfrm>
+            <a:custGeom>
+              <a:avLst/>
+              <a:pathLst>
+                <a:path w="6964104" h="439877">
+                  <a:moveTo>
+                    <a:pt x="0" y="0"/>
+                  </a:moveTo>
+                  <a:lnTo>
+                    <a:pt x="70344" y="8267"/>
+                  </a:lnTo>
+                  <a:lnTo>
+                    <a:pt x="140688" y="16416"/>
+                  </a:lnTo>
+                  <a:lnTo>
+                    <a:pt x="211033" y="24449"/>
+                  </a:lnTo>
+                  <a:lnTo>
+                    <a:pt x="281377" y="32367"/>
+                  </a:lnTo>
+                  <a:lnTo>
+                    <a:pt x="351722" y="40173"/>
+                  </a:lnTo>
+                  <a:lnTo>
+                    <a:pt x="422066" y="47867"/>
+                  </a:lnTo>
+                  <a:lnTo>
+                    <a:pt x="492411" y="55452"/>
+                  </a:lnTo>
+                  <a:lnTo>
+                    <a:pt x="562755" y="62928"/>
+                  </a:lnTo>
+                  <a:lnTo>
+                    <a:pt x="633100" y="70298"/>
+                  </a:lnTo>
+                  <a:lnTo>
+                    <a:pt x="703444" y="77563"/>
+                  </a:lnTo>
+                  <a:lnTo>
+                    <a:pt x="773789" y="84724"/>
+                  </a:lnTo>
+                  <a:lnTo>
+                    <a:pt x="844133" y="91783"/>
+                  </a:lnTo>
+                  <a:lnTo>
+                    <a:pt x="914478" y="98741"/>
+                  </a:lnTo>
+                  <a:lnTo>
+                    <a:pt x="984822" y="105600"/>
+                  </a:lnTo>
+                  <a:lnTo>
+                    <a:pt x="1055167" y="112362"/>
+                  </a:lnTo>
+                  <a:lnTo>
+                    <a:pt x="1125511" y="119027"/>
+                  </a:lnTo>
+                  <a:lnTo>
+                    <a:pt x="1195856" y="125596"/>
+                  </a:lnTo>
+                  <a:lnTo>
+                    <a:pt x="1266200" y="132072"/>
+                  </a:lnTo>
+                  <a:lnTo>
+                    <a:pt x="1336545" y="138456"/>
+                  </a:lnTo>
+                  <a:lnTo>
+                    <a:pt x="1406889" y="144749"/>
+                  </a:lnTo>
+                  <a:lnTo>
+                    <a:pt x="1477234" y="150952"/>
+                  </a:lnTo>
+                  <a:lnTo>
+                    <a:pt x="1547578" y="157067"/>
+                  </a:lnTo>
+                  <a:lnTo>
+                    <a:pt x="1617923" y="163094"/>
+                  </a:lnTo>
+                  <a:lnTo>
+                    <a:pt x="1688267" y="169035"/>
+                  </a:lnTo>
+                  <a:lnTo>
+                    <a:pt x="1758612" y="174892"/>
+                  </a:lnTo>
+                  <a:lnTo>
+                    <a:pt x="1828956" y="180665"/>
+                  </a:lnTo>
+                  <a:lnTo>
+                    <a:pt x="1899301" y="186356"/>
+                  </a:lnTo>
+                  <a:lnTo>
+                    <a:pt x="1969645" y="191966"/>
+                  </a:lnTo>
+                  <a:lnTo>
+                    <a:pt x="2039990" y="197496"/>
+                  </a:lnTo>
+                  <a:lnTo>
+                    <a:pt x="2110334" y="202946"/>
+                  </a:lnTo>
+                  <a:lnTo>
+                    <a:pt x="2180679" y="208320"/>
+                  </a:lnTo>
+                  <a:lnTo>
+                    <a:pt x="2251023" y="213616"/>
+                  </a:lnTo>
+                  <a:lnTo>
+                    <a:pt x="2321368" y="218837"/>
+                  </a:lnTo>
+                  <a:lnTo>
+                    <a:pt x="2391712" y="223984"/>
+                  </a:lnTo>
+                  <a:lnTo>
+                    <a:pt x="2462057" y="229057"/>
+                  </a:lnTo>
+                  <a:lnTo>
+                    <a:pt x="2532401" y="234058"/>
+                  </a:lnTo>
+                  <a:lnTo>
+                    <a:pt x="2602746" y="238987"/>
+                  </a:lnTo>
+                  <a:lnTo>
+                    <a:pt x="2673090" y="243846"/>
+                  </a:lnTo>
+                  <a:lnTo>
+                    <a:pt x="2743435" y="248636"/>
+                  </a:lnTo>
+                  <a:lnTo>
+                    <a:pt x="2813779" y="253358"/>
+                  </a:lnTo>
+                  <a:lnTo>
+                    <a:pt x="2884124" y="258012"/>
+                  </a:lnTo>
+                  <a:lnTo>
+                    <a:pt x="2954468" y="262600"/>
+                  </a:lnTo>
+                  <a:lnTo>
+                    <a:pt x="3024813" y="267122"/>
+                  </a:lnTo>
+                  <a:lnTo>
+                    <a:pt x="3095157" y="271580"/>
+                  </a:lnTo>
+                  <a:lnTo>
+                    <a:pt x="3165502" y="275975"/>
+                  </a:lnTo>
+                  <a:lnTo>
+                    <a:pt x="3235846" y="280306"/>
+                  </a:lnTo>
+                  <a:lnTo>
+                    <a:pt x="3306191" y="284576"/>
+                  </a:lnTo>
+                  <a:lnTo>
+                    <a:pt x="3376535" y="288785"/>
+                  </a:lnTo>
+                  <a:lnTo>
+                    <a:pt x="3446880" y="292935"/>
+                  </a:lnTo>
+                  <a:lnTo>
+                    <a:pt x="3517224" y="297024"/>
+                  </a:lnTo>
+                  <a:lnTo>
+                    <a:pt x="3587569" y="301056"/>
+                  </a:lnTo>
+                  <a:lnTo>
+                    <a:pt x="3657913" y="305030"/>
+                  </a:lnTo>
+                  <a:lnTo>
+                    <a:pt x="3728257" y="308947"/>
+                  </a:lnTo>
+                  <a:lnTo>
+                    <a:pt x="3798602" y="312809"/>
+                  </a:lnTo>
+                  <a:lnTo>
+                    <a:pt x="3868946" y="316616"/>
+                  </a:lnTo>
+                  <a:lnTo>
+                    <a:pt x="3939291" y="320368"/>
+                  </a:lnTo>
+                  <a:lnTo>
+                    <a:pt x="4009635" y="324066"/>
+                  </a:lnTo>
+                  <a:lnTo>
+                    <a:pt x="4079980" y="327712"/>
+                  </a:lnTo>
+                  <a:lnTo>
+                    <a:pt x="4150324" y="331306"/>
+                  </a:lnTo>
+                  <a:lnTo>
+                    <a:pt x="4220669" y="334849"/>
+                  </a:lnTo>
+                  <a:lnTo>
+                    <a:pt x="4291013" y="338341"/>
+                  </a:lnTo>
+                  <a:lnTo>
+                    <a:pt x="4361358" y="341784"/>
+                  </a:lnTo>
+                  <a:lnTo>
+                    <a:pt x="4431702" y="345177"/>
+                  </a:lnTo>
+                  <a:lnTo>
+                    <a:pt x="4502047" y="348522"/>
+                  </a:lnTo>
+                  <a:lnTo>
+                    <a:pt x="4572391" y="351819"/>
+                  </a:lnTo>
+                  <a:lnTo>
+                    <a:pt x="4642736" y="355069"/>
+                  </a:lnTo>
+                  <a:lnTo>
+                    <a:pt x="4713080" y="358273"/>
+                  </a:lnTo>
+                  <a:lnTo>
+                    <a:pt x="4783425" y="361431"/>
+                  </a:lnTo>
+                  <a:lnTo>
+                    <a:pt x="4853769" y="364544"/>
+                  </a:lnTo>
+                  <a:lnTo>
+                    <a:pt x="4924114" y="367613"/>
+                  </a:lnTo>
+                  <a:lnTo>
+                    <a:pt x="4994458" y="370638"/>
+                  </a:lnTo>
+                  <a:lnTo>
+                    <a:pt x="5064803" y="373620"/>
+                  </a:lnTo>
+                  <a:lnTo>
+                    <a:pt x="5135147" y="376559"/>
+                  </a:lnTo>
+                  <a:lnTo>
+                    <a:pt x="5205492" y="379457"/>
+                  </a:lnTo>
+                  <a:lnTo>
+                    <a:pt x="5275836" y="382313"/>
+                  </a:lnTo>
+                  <a:lnTo>
+                    <a:pt x="5346181" y="385128"/>
+                  </a:lnTo>
+                  <a:lnTo>
+                    <a:pt x="5416525" y="387903"/>
+                  </a:lnTo>
+                  <a:lnTo>
+                    <a:pt x="5486870" y="390639"/>
+                  </a:lnTo>
+                  <a:lnTo>
+                    <a:pt x="5557214" y="393336"/>
+                  </a:lnTo>
+                  <a:lnTo>
+                    <a:pt x="5627559" y="395994"/>
+                  </a:lnTo>
+                  <a:lnTo>
+                    <a:pt x="5697903" y="398614"/>
+                  </a:lnTo>
+                  <a:lnTo>
+                    <a:pt x="5768248" y="401197"/>
+                  </a:lnTo>
+                  <a:lnTo>
+                    <a:pt x="5838592" y="403743"/>
+                  </a:lnTo>
+                  <a:lnTo>
+                    <a:pt x="5908937" y="406253"/>
+                  </a:lnTo>
+                  <a:lnTo>
+                    <a:pt x="5979281" y="408727"/>
+                  </a:lnTo>
+                  <a:lnTo>
+                    <a:pt x="6049626" y="411165"/>
+                  </a:lnTo>
+                  <a:lnTo>
+                    <a:pt x="6119970" y="413569"/>
+                  </a:lnTo>
+                  <a:lnTo>
+                    <a:pt x="6190315" y="415939"/>
+                  </a:lnTo>
+                  <a:lnTo>
+                    <a:pt x="6260659" y="418275"/>
+                  </a:lnTo>
+                  <a:lnTo>
+                    <a:pt x="6331004" y="420577"/>
+                  </a:lnTo>
+                  <a:lnTo>
+                    <a:pt x="6401348" y="422847"/>
+                  </a:lnTo>
+                  <a:lnTo>
+                    <a:pt x="6471693" y="425084"/>
+                  </a:lnTo>
+                  <a:lnTo>
+                    <a:pt x="6542037" y="427290"/>
+                  </a:lnTo>
+                  <a:lnTo>
+                    <a:pt x="6612382" y="429464"/>
+                  </a:lnTo>
+                  <a:lnTo>
+                    <a:pt x="6682726" y="431607"/>
+                  </a:lnTo>
+                  <a:lnTo>
+                    <a:pt x="6753071" y="433719"/>
+                  </a:lnTo>
+                  <a:lnTo>
+                    <a:pt x="6823415" y="435801"/>
+                  </a:lnTo>
+                  <a:lnTo>
+                    <a:pt x="6893760" y="437854"/>
+                  </a:lnTo>
+                  <a:lnTo>
+                    <a:pt x="6964104" y="439877"/>
+                  </a:lnTo>
+                </a:path>
+              </a:pathLst>
+            </a:custGeom>
+            <a:ln w="27101" cap="flat">
+              <a:solidFill>
+                <a:srgbClr val="FF8C00">
+                  <a:alpha val="100000"/>
+                </a:srgbClr>
+              </a:solidFill>
+              <a:prstDash val="solid"/>
+              <a:round/>
+            </a:ln>
+          </p:spPr>
+          <p:txBody>
+            <a:bodyPr/>
+            <a:lstStyle/>
+            <a:p/>
+          </p:txBody>
+        </p:sp>
+        <p:sp>
+          <p:nvSpPr>
+            <p:cNvPr id="71" name="pl71"/>
+            <p:cNvSpPr/>
+            <p:nvPr/>
+          </p:nvSpPr>
+          <p:spPr>
+            <a:xfrm>
+              <a:off x="887106" y="5294352"/>
+              <a:ext cx="7660515" cy="0"/>
+            </a:xfrm>
+            <a:custGeom>
+              <a:avLst/>
+              <a:pathLst>
+                <a:path w="7660515" h="0">
+                  <a:moveTo>
+                    <a:pt x="0" y="0"/>
+                  </a:moveTo>
+                  <a:lnTo>
+                    <a:pt x="7660515" y="0"/>
+                  </a:lnTo>
+                  <a:lnTo>
+                    <a:pt x="7660515" y="0"/>
+                  </a:lnTo>
+                </a:path>
+              </a:pathLst>
+            </a:custGeom>
+            <a:ln w="13550" cap="flat">
+              <a:solidFill>
+                <a:srgbClr val="7F7F7F">
+                  <a:alpha val="100000"/>
+                </a:srgbClr>
+              </a:solidFill>
+              <a:prstDash val="dash"/>
+              <a:round/>
+            </a:ln>
+          </p:spPr>
+          <p:txBody>
+            <a:bodyPr/>
+            <a:lstStyle/>
+            <a:p/>
+          </p:txBody>
+        </p:sp>
+        <p:sp>
+          <p:nvSpPr>
+            <p:cNvPr id="72" name="pl72"/>
+            <p:cNvSpPr/>
+            <p:nvPr/>
+          </p:nvSpPr>
+          <p:spPr>
+            <a:xfrm>
+              <a:off x="4472829" y="4336484"/>
+              <a:ext cx="0" cy="1317069"/>
+            </a:xfrm>
+            <a:custGeom>
+              <a:avLst/>
+              <a:pathLst>
+                <a:path w="0" h="1317069">
+                  <a:moveTo>
+                    <a:pt x="0" y="1317069"/>
+                  </a:moveTo>
+                  <a:lnTo>
+                    <a:pt x="0" y="0"/>
+                  </a:lnTo>
+                  <a:lnTo>
+                    <a:pt x="0" y="0"/>
+                  </a:lnTo>
+                </a:path>
+              </a:pathLst>
+            </a:custGeom>
+            <a:ln w="13550" cap="flat">
+              <a:solidFill>
+                <a:srgbClr val="666666">
+                  <a:alpha val="100000"/>
+                </a:srgbClr>
+              </a:solidFill>
+              <a:prstDash val="dot"/>
+              <a:round/>
+            </a:ln>
+          </p:spPr>
+          <p:txBody>
+            <a:bodyPr/>
+            <a:lstStyle/>
+            <a:p/>
+          </p:txBody>
+        </p:sp>
+        <p:sp>
+          <p:nvSpPr>
+            <p:cNvPr id="73" name="tx73"/>
+            <p:cNvSpPr/>
+            <p:nvPr/>
+          </p:nvSpPr>
+          <p:spPr>
+            <a:xfrm>
+              <a:off x="762297" y="5553636"/>
+              <a:ext cx="62179" cy="80101"/>
+            </a:xfrm>
+            <a:prstGeom prst="rect">
+              <a:avLst/>
+            </a:prstGeom>
+            <a:noFill/>
+          </p:spPr>
+          <p:txBody>
+            <a:bodyPr lIns="0" rIns="0" tIns="0" bIns="0" anchorCtr="1" anchor="ctr" wrap="none"/>
+            <a:lstStyle/>
+            <a:p>
+              <a:pPr algn="l" marL="0" marR="0" indent="0">
+                <a:lnSpc>
+                  <a:spcPts val="880"/>
+                </a:lnSpc>
+                <a:spcBef>
+                  <a:spcPts val="0"/>
+                </a:spcBef>
+                <a:spcAft>
+                  <a:spcPts val="0"/>
+                </a:spcAft>
+              </a:pPr>
+              <a:r>
+                <a:rPr sz="880">
+                  <a:solidFill>
+                    <a:srgbClr val="4D4D4D">
+                      <a:alpha val="100000"/>
+                    </a:srgbClr>
+                  </a:solidFill>
+                  <a:latin typeface="Helvetica"/>
+                  <a:cs typeface="Helvetica"/>
+                </a:rPr>
+                <a:t>0</a:t>
+              </a:r>
+            </a:p>
+          </p:txBody>
+        </p:sp>
+        <p:sp>
+          <p:nvSpPr>
+            <p:cNvPr id="74" name="tx74"/>
+            <p:cNvSpPr/>
+            <p:nvPr/>
+          </p:nvSpPr>
+          <p:spPr>
+            <a:xfrm>
+              <a:off x="762297" y="5254302"/>
+              <a:ext cx="62179" cy="80101"/>
+            </a:xfrm>
+            <a:prstGeom prst="rect">
+              <a:avLst/>
+            </a:prstGeom>
+            <a:noFill/>
+          </p:spPr>
+          <p:txBody>
+            <a:bodyPr lIns="0" rIns="0" tIns="0" bIns="0" anchorCtr="1" anchor="ctr" wrap="none"/>
+            <a:lstStyle/>
+            <a:p>
+              <a:pPr algn="l" marL="0" marR="0" indent="0">
+                <a:lnSpc>
+                  <a:spcPts val="880"/>
+                </a:lnSpc>
+                <a:spcBef>
+                  <a:spcPts val="0"/>
+                </a:spcBef>
+                <a:spcAft>
+                  <a:spcPts val="0"/>
+                </a:spcAft>
+              </a:pPr>
+              <a:r>
+                <a:rPr sz="880">
+                  <a:solidFill>
+                    <a:srgbClr val="4D4D4D">
+                      <a:alpha val="100000"/>
+                    </a:srgbClr>
+                  </a:solidFill>
+                  <a:latin typeface="Helvetica"/>
+                  <a:cs typeface="Helvetica"/>
+                </a:rPr>
+                <a:t>1</a:t>
+              </a:r>
+            </a:p>
+          </p:txBody>
+        </p:sp>
+        <p:sp>
+          <p:nvSpPr>
+            <p:cNvPr id="75" name="tx75"/>
+            <p:cNvSpPr/>
+            <p:nvPr/>
+          </p:nvSpPr>
+          <p:spPr>
+            <a:xfrm>
+              <a:off x="762297" y="4954968"/>
+              <a:ext cx="62179" cy="80101"/>
+            </a:xfrm>
+            <a:prstGeom prst="rect">
+              <a:avLst/>
+            </a:prstGeom>
+            <a:noFill/>
+          </p:spPr>
+          <p:txBody>
+            <a:bodyPr lIns="0" rIns="0" tIns="0" bIns="0" anchorCtr="1" anchor="ctr" wrap="none"/>
+            <a:lstStyle/>
+            <a:p>
+              <a:pPr algn="l" marL="0" marR="0" indent="0">
+                <a:lnSpc>
+                  <a:spcPts val="880"/>
+                </a:lnSpc>
+                <a:spcBef>
+                  <a:spcPts val="0"/>
+                </a:spcBef>
+                <a:spcAft>
+                  <a:spcPts val="0"/>
+                </a:spcAft>
+              </a:pPr>
+              <a:r>
+                <a:rPr sz="880">
+                  <a:solidFill>
+                    <a:srgbClr val="4D4D4D">
+                      <a:alpha val="100000"/>
+                    </a:srgbClr>
+                  </a:solidFill>
+                  <a:latin typeface="Helvetica"/>
+                  <a:cs typeface="Helvetica"/>
+                </a:rPr>
+                <a:t>2</a:t>
+              </a:r>
+            </a:p>
+          </p:txBody>
+        </p:sp>
+        <p:sp>
+          <p:nvSpPr>
+            <p:cNvPr id="76" name="tx76"/>
+            <p:cNvSpPr/>
+            <p:nvPr/>
+          </p:nvSpPr>
+          <p:spPr>
+            <a:xfrm>
+              <a:off x="762297" y="4655634"/>
+              <a:ext cx="62179" cy="80101"/>
+            </a:xfrm>
+            <a:prstGeom prst="rect">
+              <a:avLst/>
+            </a:prstGeom>
+            <a:noFill/>
+          </p:spPr>
+          <p:txBody>
+            <a:bodyPr lIns="0" rIns="0" tIns="0" bIns="0" anchorCtr="1" anchor="ctr" wrap="none"/>
+            <a:lstStyle/>
+            <a:p>
+              <a:pPr algn="l" marL="0" marR="0" indent="0">
+                <a:lnSpc>
+                  <a:spcPts val="880"/>
+                </a:lnSpc>
+                <a:spcBef>
+                  <a:spcPts val="0"/>
+                </a:spcBef>
+                <a:spcAft>
+                  <a:spcPts val="0"/>
+                </a:spcAft>
+              </a:pPr>
+              <a:r>
+                <a:rPr sz="880">
+                  <a:solidFill>
+                    <a:srgbClr val="4D4D4D">
+                      <a:alpha val="100000"/>
+                    </a:srgbClr>
+                  </a:solidFill>
+                  <a:latin typeface="Helvetica"/>
+                  <a:cs typeface="Helvetica"/>
+                </a:rPr>
+                <a:t>3</a:t>
+              </a:r>
+            </a:p>
+          </p:txBody>
+        </p:sp>
+        <p:sp>
+          <p:nvSpPr>
+            <p:cNvPr id="77" name="tx77"/>
+            <p:cNvSpPr/>
+            <p:nvPr/>
+          </p:nvSpPr>
+          <p:spPr>
+            <a:xfrm>
+              <a:off x="762297" y="4356300"/>
+              <a:ext cx="62179" cy="80101"/>
+            </a:xfrm>
+            <a:prstGeom prst="rect">
+              <a:avLst/>
+            </a:prstGeom>
+            <a:noFill/>
+          </p:spPr>
+          <p:txBody>
+            <a:bodyPr lIns="0" rIns="0" tIns="0" bIns="0" anchorCtr="1" anchor="ctr" wrap="none"/>
+            <a:lstStyle/>
+            <a:p>
+              <a:pPr algn="l" marL="0" marR="0" indent="0">
+                <a:lnSpc>
+                  <a:spcPts val="880"/>
+                </a:lnSpc>
+                <a:spcBef>
+                  <a:spcPts val="0"/>
+                </a:spcBef>
+                <a:spcAft>
+                  <a:spcPts val="0"/>
+                </a:spcAft>
+              </a:pPr>
+              <a:r>
+                <a:rPr sz="880">
+                  <a:solidFill>
+                    <a:srgbClr val="4D4D4D">
+                      <a:alpha val="100000"/>
+                    </a:srgbClr>
+                  </a:solidFill>
+                  <a:latin typeface="Helvetica"/>
+                  <a:cs typeface="Helvetica"/>
+                </a:rPr>
+                <a:t>4</a:t>
+              </a:r>
+            </a:p>
+          </p:txBody>
+        </p:sp>
+        <p:sp>
+          <p:nvSpPr>
+            <p:cNvPr id="78" name="tx78"/>
+            <p:cNvSpPr/>
+            <p:nvPr/>
+          </p:nvSpPr>
+          <p:spPr>
+            <a:xfrm>
+              <a:off x="1306098" y="5716183"/>
+              <a:ext cx="161574" cy="80101"/>
+            </a:xfrm>
+            <a:prstGeom prst="rect">
+              <a:avLst/>
+            </a:prstGeom>
+            <a:noFill/>
+          </p:spPr>
+          <p:txBody>
+            <a:bodyPr lIns="0" rIns="0" tIns="0" bIns="0" anchorCtr="1" anchor="ctr" wrap="none"/>
+            <a:lstStyle/>
+            <a:p>
+              <a:pPr algn="l" marL="0" marR="0" indent="0">
+                <a:lnSpc>
+                  <a:spcPts val="880"/>
+                </a:lnSpc>
+                <a:spcBef>
+                  <a:spcPts val="0"/>
+                </a:spcBef>
+                <a:spcAft>
+                  <a:spcPts val="0"/>
+                </a:spcAft>
+              </a:pPr>
+              <a:r>
+                <a:rPr sz="880">
+                  <a:solidFill>
+                    <a:srgbClr val="4D4D4D">
+                      <a:alpha val="100000"/>
+                    </a:srgbClr>
+                  </a:solidFill>
+                  <a:latin typeface="Helvetica"/>
+                  <a:cs typeface="Helvetica"/>
+                </a:rPr>
+                <a:t>-40</a:t>
+              </a:r>
+            </a:p>
+          </p:txBody>
+        </p:sp>
+        <p:sp>
+          <p:nvSpPr>
+            <p:cNvPr id="79" name="tx79"/>
+            <p:cNvSpPr/>
+            <p:nvPr/>
+          </p:nvSpPr>
+          <p:spPr>
+            <a:xfrm>
+              <a:off x="2113264" y="5716183"/>
+              <a:ext cx="161574" cy="80101"/>
+            </a:xfrm>
+            <a:prstGeom prst="rect">
+              <a:avLst/>
+            </a:prstGeom>
+            <a:noFill/>
+          </p:spPr>
+          <p:txBody>
+            <a:bodyPr lIns="0" rIns="0" tIns="0" bIns="0" anchorCtr="1" anchor="ctr" wrap="none"/>
+            <a:lstStyle/>
+            <a:p>
+              <a:pPr algn="l" marL="0" marR="0" indent="0">
+                <a:lnSpc>
+                  <a:spcPts val="880"/>
+                </a:lnSpc>
+                <a:spcBef>
+                  <a:spcPts val="0"/>
+                </a:spcBef>
+                <a:spcAft>
+                  <a:spcPts val="0"/>
+                </a:spcAft>
+              </a:pPr>
+              <a:r>
+                <a:rPr sz="880">
+                  <a:solidFill>
+                    <a:srgbClr val="4D4D4D">
+                      <a:alpha val="100000"/>
+                    </a:srgbClr>
+                  </a:solidFill>
+                  <a:latin typeface="Helvetica"/>
+                  <a:cs typeface="Helvetica"/>
+                </a:rPr>
+                <a:t>-30</a:t>
+              </a:r>
+            </a:p>
+          </p:txBody>
+        </p:sp>
+        <p:sp>
+          <p:nvSpPr>
+            <p:cNvPr id="80" name="tx80"/>
+            <p:cNvSpPr/>
+            <p:nvPr/>
+          </p:nvSpPr>
+          <p:spPr>
+            <a:xfrm>
+              <a:off x="2920429" y="5716183"/>
+              <a:ext cx="161574" cy="80101"/>
+            </a:xfrm>
+            <a:prstGeom prst="rect">
+              <a:avLst/>
+            </a:prstGeom>
+            <a:noFill/>
+          </p:spPr>
+          <p:txBody>
+            <a:bodyPr lIns="0" rIns="0" tIns="0" bIns="0" anchorCtr="1" anchor="ctr" wrap="none"/>
+            <a:lstStyle/>
+            <a:p>
+              <a:pPr algn="l" marL="0" marR="0" indent="0">
+                <a:lnSpc>
+                  <a:spcPts val="880"/>
+                </a:lnSpc>
+                <a:spcBef>
+                  <a:spcPts val="0"/>
+                </a:spcBef>
+                <a:spcAft>
+                  <a:spcPts val="0"/>
+                </a:spcAft>
+              </a:pPr>
+              <a:r>
+                <a:rPr sz="880">
+                  <a:solidFill>
+                    <a:srgbClr val="4D4D4D">
+                      <a:alpha val="100000"/>
+                    </a:srgbClr>
+                  </a:solidFill>
+                  <a:latin typeface="Helvetica"/>
+                  <a:cs typeface="Helvetica"/>
+                </a:rPr>
+                <a:t>-20</a:t>
+              </a:r>
+            </a:p>
+          </p:txBody>
+        </p:sp>
+        <p:sp>
+          <p:nvSpPr>
+            <p:cNvPr id="81" name="tx81"/>
+            <p:cNvSpPr/>
+            <p:nvPr/>
+          </p:nvSpPr>
+          <p:spPr>
+            <a:xfrm>
+              <a:off x="3727595" y="5716183"/>
+              <a:ext cx="161574" cy="80101"/>
+            </a:xfrm>
+            <a:prstGeom prst="rect">
+              <a:avLst/>
+            </a:prstGeom>
+            <a:noFill/>
+          </p:spPr>
+          <p:txBody>
+            <a:bodyPr lIns="0" rIns="0" tIns="0" bIns="0" anchorCtr="1" anchor="ctr" wrap="none"/>
+            <a:lstStyle/>
+            <a:p>
+              <a:pPr algn="l" marL="0" marR="0" indent="0">
+                <a:lnSpc>
+                  <a:spcPts val="880"/>
+                </a:lnSpc>
+                <a:spcBef>
+                  <a:spcPts val="0"/>
+                </a:spcBef>
+                <a:spcAft>
+                  <a:spcPts val="0"/>
+                </a:spcAft>
+              </a:pPr>
+              <a:r>
+                <a:rPr sz="880">
+                  <a:solidFill>
+                    <a:srgbClr val="4D4D4D">
+                      <a:alpha val="100000"/>
+                    </a:srgbClr>
+                  </a:solidFill>
+                  <a:latin typeface="Helvetica"/>
+                  <a:cs typeface="Helvetica"/>
+                </a:rPr>
+                <a:t>-10</a:t>
+              </a:r>
+            </a:p>
+          </p:txBody>
+        </p:sp>
+        <p:sp>
+          <p:nvSpPr>
+            <p:cNvPr id="82" name="tx82"/>
+            <p:cNvSpPr/>
+            <p:nvPr/>
+          </p:nvSpPr>
+          <p:spPr>
+            <a:xfrm>
+              <a:off x="4584458" y="5716183"/>
+              <a:ext cx="62179" cy="80101"/>
+            </a:xfrm>
+            <a:prstGeom prst="rect">
+              <a:avLst/>
+            </a:prstGeom>
+            <a:noFill/>
+          </p:spPr>
+          <p:txBody>
+            <a:bodyPr lIns="0" rIns="0" tIns="0" bIns="0" anchorCtr="1" anchor="ctr" wrap="none"/>
+            <a:lstStyle/>
+            <a:p>
+              <a:pPr algn="l" marL="0" marR="0" indent="0">
+                <a:lnSpc>
+                  <a:spcPts val="880"/>
+                </a:lnSpc>
+                <a:spcBef>
+                  <a:spcPts val="0"/>
+                </a:spcBef>
+                <a:spcAft>
+                  <a:spcPts val="0"/>
+                </a:spcAft>
+              </a:pPr>
+              <a:r>
+                <a:rPr sz="880">
+                  <a:solidFill>
+                    <a:srgbClr val="4D4D4D">
+                      <a:alpha val="100000"/>
+                    </a:srgbClr>
+                  </a:solidFill>
+                  <a:latin typeface="Helvetica"/>
+                  <a:cs typeface="Helvetica"/>
+                </a:rPr>
+                <a:t>0</a:t>
+              </a:r>
+            </a:p>
+          </p:txBody>
+        </p:sp>
+        <p:sp>
+          <p:nvSpPr>
+            <p:cNvPr id="83" name="tx83"/>
+            <p:cNvSpPr/>
+            <p:nvPr/>
+          </p:nvSpPr>
+          <p:spPr>
+            <a:xfrm>
+              <a:off x="5360534" y="5716183"/>
+              <a:ext cx="124358" cy="80101"/>
+            </a:xfrm>
+            <a:prstGeom prst="rect">
+              <a:avLst/>
+            </a:prstGeom>
+            <a:noFill/>
+          </p:spPr>
+          <p:txBody>
+            <a:bodyPr lIns="0" rIns="0" tIns="0" bIns="0" anchorCtr="1" anchor="ctr" wrap="none"/>
+            <a:lstStyle/>
+            <a:p>
+              <a:pPr algn="l" marL="0" marR="0" indent="0">
+                <a:lnSpc>
+                  <a:spcPts val="880"/>
+                </a:lnSpc>
+                <a:spcBef>
+                  <a:spcPts val="0"/>
+                </a:spcBef>
+                <a:spcAft>
+                  <a:spcPts val="0"/>
+                </a:spcAft>
+              </a:pPr>
+              <a:r>
+                <a:rPr sz="880">
+                  <a:solidFill>
+                    <a:srgbClr val="4D4D4D">
+                      <a:alpha val="100000"/>
+                    </a:srgbClr>
+                  </a:solidFill>
+                  <a:latin typeface="Helvetica"/>
+                  <a:cs typeface="Helvetica"/>
+                </a:rPr>
+                <a:t>10</a:t>
+              </a:r>
+            </a:p>
+          </p:txBody>
+        </p:sp>
+        <p:sp>
+          <p:nvSpPr>
+            <p:cNvPr id="84" name="tx84"/>
+            <p:cNvSpPr/>
+            <p:nvPr/>
+          </p:nvSpPr>
+          <p:spPr>
+            <a:xfrm>
+              <a:off x="6167699" y="5716183"/>
+              <a:ext cx="124358" cy="80101"/>
+            </a:xfrm>
+            <a:prstGeom prst="rect">
+              <a:avLst/>
+            </a:prstGeom>
+            <a:noFill/>
+          </p:spPr>
+          <p:txBody>
+            <a:bodyPr lIns="0" rIns="0" tIns="0" bIns="0" anchorCtr="1" anchor="ctr" wrap="none"/>
+            <a:lstStyle/>
+            <a:p>
+              <a:pPr algn="l" marL="0" marR="0" indent="0">
+                <a:lnSpc>
+                  <a:spcPts val="880"/>
+                </a:lnSpc>
+                <a:spcBef>
+                  <a:spcPts val="0"/>
+                </a:spcBef>
+                <a:spcAft>
+                  <a:spcPts val="0"/>
+                </a:spcAft>
+              </a:pPr>
+              <a:r>
+                <a:rPr sz="880">
+                  <a:solidFill>
+                    <a:srgbClr val="4D4D4D">
+                      <a:alpha val="100000"/>
+                    </a:srgbClr>
+                  </a:solidFill>
+                  <a:latin typeface="Helvetica"/>
+                  <a:cs typeface="Helvetica"/>
+                </a:rPr>
+                <a:t>20</a:t>
+              </a:r>
+            </a:p>
+          </p:txBody>
+        </p:sp>
+        <p:sp>
+          <p:nvSpPr>
+            <p:cNvPr id="85" name="tx85"/>
+            <p:cNvSpPr/>
+            <p:nvPr/>
+          </p:nvSpPr>
+          <p:spPr>
+            <a:xfrm>
+              <a:off x="6974865" y="5716183"/>
+              <a:ext cx="124358" cy="80101"/>
+            </a:xfrm>
+            <a:prstGeom prst="rect">
+              <a:avLst/>
+            </a:prstGeom>
+            <a:noFill/>
+          </p:spPr>
+          <p:txBody>
+            <a:bodyPr lIns="0" rIns="0" tIns="0" bIns="0" anchorCtr="1" anchor="ctr" wrap="none"/>
+            <a:lstStyle/>
+            <a:p>
+              <a:pPr algn="l" marL="0" marR="0" indent="0">
+                <a:lnSpc>
+                  <a:spcPts val="880"/>
+                </a:lnSpc>
+                <a:spcBef>
+                  <a:spcPts val="0"/>
+                </a:spcBef>
+                <a:spcAft>
+                  <a:spcPts val="0"/>
+                </a:spcAft>
+              </a:pPr>
+              <a:r>
+                <a:rPr sz="880">
+                  <a:solidFill>
+                    <a:srgbClr val="4D4D4D">
+                      <a:alpha val="100000"/>
+                    </a:srgbClr>
+                  </a:solidFill>
+                  <a:latin typeface="Helvetica"/>
+                  <a:cs typeface="Helvetica"/>
+                </a:rPr>
+                <a:t>30</a:t>
+              </a:r>
+            </a:p>
+          </p:txBody>
+        </p:sp>
+        <p:sp>
+          <p:nvSpPr>
+            <p:cNvPr id="86" name="tx86"/>
+            <p:cNvSpPr/>
+            <p:nvPr/>
+          </p:nvSpPr>
+          <p:spPr>
+            <a:xfrm>
+              <a:off x="7782030" y="5716183"/>
+              <a:ext cx="124358" cy="80101"/>
+            </a:xfrm>
+            <a:prstGeom prst="rect">
+              <a:avLst/>
+            </a:prstGeom>
+            <a:noFill/>
+          </p:spPr>
+          <p:txBody>
+            <a:bodyPr lIns="0" rIns="0" tIns="0" bIns="0" anchorCtr="1" anchor="ctr" wrap="none"/>
+            <a:lstStyle/>
+            <a:p>
+              <a:pPr algn="l" marL="0" marR="0" indent="0">
+                <a:lnSpc>
+                  <a:spcPts val="880"/>
+                </a:lnSpc>
+                <a:spcBef>
+                  <a:spcPts val="0"/>
+                </a:spcBef>
+                <a:spcAft>
+                  <a:spcPts val="0"/>
+                </a:spcAft>
+              </a:pPr>
+              <a:r>
+                <a:rPr sz="880">
+                  <a:solidFill>
+                    <a:srgbClr val="4D4D4D">
+                      <a:alpha val="100000"/>
+                    </a:srgbClr>
+                  </a:solidFill>
+                  <a:latin typeface="Helvetica"/>
+                  <a:cs typeface="Helvetica"/>
+                </a:rPr>
+                <a:t>40</a:t>
+              </a:r>
+            </a:p>
+          </p:txBody>
+        </p:sp>
+        <p:sp>
+          <p:nvSpPr>
+            <p:cNvPr id="87" name="tx87"/>
+            <p:cNvSpPr/>
+            <p:nvPr/>
+          </p:nvSpPr>
+          <p:spPr>
+            <a:xfrm>
+              <a:off x="2928340" y="5855859"/>
+              <a:ext cx="3578047" cy="100218"/>
+            </a:xfrm>
+            <a:prstGeom prst="rect">
+              <a:avLst/>
+            </a:prstGeom>
+            <a:noFill/>
+          </p:spPr>
+          <p:txBody>
+            <a:bodyPr lIns="0" rIns="0" tIns="0" bIns="0" anchorCtr="1" anchor="ctr" wrap="none"/>
+            <a:lstStyle/>
+            <a:p>
+              <a:pPr algn="l" marL="0" marR="0" indent="0">
+                <a:lnSpc>
+                  <a:spcPts val="1100"/>
+                </a:lnSpc>
+                <a:spcBef>
+                  <a:spcPts val="0"/>
+                </a:spcBef>
+                <a:spcAft>
+                  <a:spcPts val="0"/>
+                </a:spcAft>
+              </a:pPr>
+              <a:r>
+                <a:rPr sz="1100">
+                  <a:solidFill>
+                    <a:srgbClr val="000000">
+                      <a:alpha val="100000"/>
+                    </a:srgbClr>
+                  </a:solidFill>
+                  <a:latin typeface="Helvetica"/>
+                  <a:cs typeface="Helvetica"/>
+                </a:rPr>
+                <a:t>eGFR difference (%): 100 × (CKD-EPI Cr-Cys − CG) / CG</a:t>
+              </a:r>
+            </a:p>
+          </p:txBody>
+        </p:sp>
+        <p:sp>
+          <p:nvSpPr>
+            <p:cNvPr id="88" name="tx88"/>
+            <p:cNvSpPr/>
+            <p:nvPr/>
+          </p:nvSpPr>
+          <p:spPr>
+            <a:xfrm rot="-5400000">
+              <a:off x="138035" y="4944909"/>
+              <a:ext cx="1016904" cy="100218"/>
+            </a:xfrm>
+            <a:prstGeom prst="rect">
+              <a:avLst/>
+            </a:prstGeom>
+            <a:noFill/>
+          </p:spPr>
+          <p:txBody>
+            <a:bodyPr lIns="0" rIns="0" tIns="0" bIns="0" anchorCtr="1" anchor="ctr" wrap="none"/>
+            <a:lstStyle/>
+            <a:p>
+              <a:pPr algn="l" marL="0" marR="0" indent="0">
+                <a:lnSpc>
+                  <a:spcPts val="1100"/>
+                </a:lnSpc>
+                <a:spcBef>
+                  <a:spcPts val="0"/>
+                </a:spcBef>
+                <a:spcAft>
+                  <a:spcPts val="0"/>
+                </a:spcAft>
+              </a:pPr>
+              <a:r>
+                <a:rPr sz="1100">
+                  <a:solidFill>
+                    <a:srgbClr val="000000">
+                      <a:alpha val="100000"/>
+                    </a:srgbClr>
+                  </a:solidFill>
+                  <a:latin typeface="Helvetica"/>
+                  <a:cs typeface="Helvetica"/>
+                </a:rPr>
+                <a:t>subHR (95% CI)</a:t>
+              </a:r>
+            </a:p>
+          </p:txBody>
+        </p:sp>
+        <p:sp>
+          <p:nvSpPr>
+            <p:cNvPr id="89" name="tx89"/>
+            <p:cNvSpPr/>
+            <p:nvPr/>
+          </p:nvSpPr>
+          <p:spPr>
+            <a:xfrm>
+              <a:off x="887106" y="4159544"/>
+              <a:ext cx="6985375" cy="82021"/>
+            </a:xfrm>
+            <a:prstGeom prst="rect">
+              <a:avLst/>
+            </a:prstGeom>
+            <a:noFill/>
+          </p:spPr>
+          <p:txBody>
+            <a:bodyPr lIns="0" rIns="0" tIns="0" bIns="0" anchorCtr="1" anchor="ctr" wrap="none"/>
+            <a:lstStyle/>
+            <a:p>
+              <a:pPr algn="l" marL="0" marR="0" indent="0">
+                <a:lnSpc>
+                  <a:spcPts val="900"/>
+                </a:lnSpc>
+                <a:spcBef>
+                  <a:spcPts val="0"/>
+                </a:spcBef>
+                <a:spcAft>
+                  <a:spcPts val="0"/>
+                </a:spcAft>
+              </a:pPr>
+              <a:r>
+                <a:rPr sz="900">
+                  <a:solidFill>
+                    <a:srgbClr val="404040">
+                      <a:alpha val="100000"/>
+                    </a:srgbClr>
+                  </a:solidFill>
+                  <a:latin typeface="Helvetica"/>
+                  <a:cs typeface="Helvetica"/>
+                </a:rPr>
+                <a:t>subHR per 10 % decline: 1.18 (0.93-1.50), p_Bonf = 1.000 (n = 6)  |  per IQR decline (Δ = 29.5 %): 1.63 (0.80-3.31)  |  IQR: [-15.6, 13.9] %</a:t>
+              </a:r>
+            </a:p>
+          </p:txBody>
+        </p:sp>
+        <p:sp>
+          <p:nvSpPr>
+            <p:cNvPr id="90" name="tx90"/>
+            <p:cNvSpPr/>
+            <p:nvPr/>
+          </p:nvSpPr>
+          <p:spPr>
+            <a:xfrm>
+              <a:off x="887106" y="3932770"/>
               <a:ext cx="2615184" cy="120152"/>
             </a:xfrm>
             <a:prstGeom prst="rect">
